--- a/納品レポート/ホテル別レポート/henn_na_haneda_口コミ分析レポート.pptx
+++ b/納品レポート/ホテル別レポート/henn_na_haneda_口コミ分析レポート.pptx
@@ -208,22 +208,22 @@
                 <c:formatCode>General</c:formatCode>
                 <c:ptCount val="6"/>
                 <c:pt idx="0">
-                  <c:v>9.37</c:v>
+                  <c:v>9.35</c:v>
                 </c:pt>
                 <c:pt idx="1">
-                  <c:v>8.59</c:v>
+                  <c:v>8.57</c:v>
                 </c:pt>
                 <c:pt idx="2">
                   <c:v>8.35</c:v>
                 </c:pt>
                 <c:pt idx="3">
-                  <c:v>8.1</c:v>
+                  <c:v>8.15</c:v>
                 </c:pt>
                 <c:pt idx="4">
-                  <c:v>8.1</c:v>
+                  <c:v>8.11</c:v>
                 </c:pt>
                 <c:pt idx="5">
-                  <c:v>8</c:v>
+                  <c:v>8.04</c:v>
                 </c:pt>
               </c:numCache>
             </c:numRef>
@@ -566,10 +566,10 @@
               <c:numCache>
                 <c:ptCount val="3"/>
                 <c:pt idx="0">
-                  <c:v>204</c:v>
+                  <c:v>212</c:v>
                 </c:pt>
                 <c:pt idx="1">
-                  <c:v>57</c:v>
+                  <c:v>59</c:v>
                 </c:pt>
                 <c:pt idx="2">
                   <c:v>9</c:v>
@@ -823,16 +823,16 @@
                 <c:formatCode>General</c:formatCode>
                 <c:ptCount val="9"/>
                 <c:pt idx="0">
-                  <c:v>90</c:v>
+                  <c:v>93</c:v>
                 </c:pt>
                 <c:pt idx="1">
-                  <c:v>32</c:v>
+                  <c:v>35</c:v>
                 </c:pt>
                 <c:pt idx="2">
-                  <c:v>82</c:v>
+                  <c:v>84</c:v>
                 </c:pt>
                 <c:pt idx="3">
-                  <c:v>25</c:v>
+                  <c:v>27</c:v>
                 </c:pt>
                 <c:pt idx="4">
                   <c:v>25</c:v>
@@ -2798,7 +2798,7 @@
                 <a:ea typeface="Arial" pitchFamily="34" charset="-122"/>
                 <a:cs typeface="Arial" pitchFamily="34" charset="-120"/>
               </a:rPr>
-              <a:t>レビュー総数：270件（6サイト）</a:t>
+              <a:t>レビュー総数：280件（6サイト）</a:t>
             </a:r>
             <a:endParaRPr lang="en-US" sz="1000" dirty="0"/>
           </a:p>
@@ -2818,7 +2818,7 @@
                 <a:ea typeface="Arial" pitchFamily="34" charset="-122"/>
                 <a:cs typeface="Arial" pitchFamily="34" charset="-120"/>
               </a:rPr>
-              <a:t>作成日：2026年3月17日</a:t>
+              <a:t>作成日：2026年3月18日</a:t>
             </a:r>
             <a:endParaRPr lang="en-US" sz="1000" dirty="0"/>
           </a:p>
@@ -3364,7 +3364,7 @@
                           <a:ea typeface="Arial" pitchFamily="34" charset="-122"/>
                           <a:cs typeface="Arial" pitchFamily="34" charset="-120"/>
                         </a:rPr>
-                        <a:t>8.25点</a:t>
+                        <a:t>8.27点</a:t>
                       </a:r>
                       <a:endParaRPr lang="en-US" sz="1000" dirty="0">
                         <a:latin typeface="Arial" charset="0"/>
@@ -3638,7 +3638,7 @@
                           <a:ea typeface="Arial" pitchFamily="34" charset="-122"/>
                           <a:cs typeface="Arial" pitchFamily="34" charset="-120"/>
                         </a:rPr>
-                        <a:t>75.6%</a:t>
+                        <a:t>75.7%</a:t>
                       </a:r>
                       <a:endParaRPr lang="en-US" sz="1000" dirty="0">
                         <a:latin typeface="Arial" charset="0"/>
@@ -3912,7 +3912,7 @@
                           <a:ea typeface="Arial" pitchFamily="34" charset="-122"/>
                           <a:cs typeface="Arial" pitchFamily="34" charset="-120"/>
                         </a:rPr>
-                        <a:t>3.3%</a:t>
+                        <a:t>3.2%</a:t>
                       </a:r>
                       <a:endParaRPr lang="en-US" sz="1000" dirty="0">
                         <a:latin typeface="Arial" charset="0"/>
@@ -4460,7 +4460,7 @@
                           <a:ea typeface="Arial" pitchFamily="34" charset="-122"/>
                           <a:cs typeface="Arial" pitchFamily="34" charset="-120"/>
                         </a:rPr>
-                        <a:t>約76件/期間</a:t>
+                        <a:t>約78件/期間</a:t>
                       </a:r>
                       <a:endParaRPr lang="en-US" sz="1000" dirty="0">
                         <a:latin typeface="Arial" charset="0"/>
@@ -4528,7 +4528,7 @@
                           <a:ea typeface="Arial" pitchFamily="34" charset="-122"/>
                           <a:cs typeface="Arial" pitchFamily="34" charset="-120"/>
                         </a:rPr>
-                        <a:t>38件以下</a:t>
+                        <a:t>39件以下</a:t>
                       </a:r>
                       <a:endParaRPr lang="en-US" sz="1000" dirty="0">
                         <a:latin typeface="Arial" charset="0"/>
@@ -5099,7 +5099,7 @@
                 <a:ea typeface="Arial" pitchFamily="34" charset="-122"/>
                 <a:cs typeface="Arial" pitchFamily="34" charset="-120"/>
               </a:rPr>
-              <a:t>8.25</a:t>
+              <a:t>8.27</a:t>
             </a:r>
             <a:endParaRPr lang="en-US" sz="3200" dirty="0"/>
           </a:p>
@@ -5224,7 +5224,7 @@
                 <a:ea typeface="Arial" pitchFamily="34" charset="-122"/>
                 <a:cs typeface="Arial" pitchFamily="34" charset="-120"/>
               </a:rPr>
-              <a:t>75.6%</a:t>
+              <a:t>75.7%</a:t>
             </a:r>
             <a:endParaRPr lang="en-US" sz="3200" dirty="0"/>
           </a:p>
@@ -5349,7 +5349,7 @@
                 <a:ea typeface="Arial" pitchFamily="34" charset="-122"/>
                 <a:cs typeface="Arial" pitchFamily="34" charset="-120"/>
               </a:rPr>
-              <a:t>3.3%</a:t>
+              <a:t>3.2%</a:t>
             </a:r>
             <a:endParaRPr lang="en-US" sz="3200" dirty="0"/>
           </a:p>
@@ -5474,7 +5474,7 @@
                 <a:ea typeface="Arial" pitchFamily="34" charset="-122"/>
                 <a:cs typeface="Arial" pitchFamily="34" charset="-120"/>
               </a:rPr>
-              <a:t>270件</a:t>
+              <a:t>280件</a:t>
             </a:r>
             <a:endParaRPr lang="en-US" sz="3200" dirty="0"/>
           </a:p>
@@ -5622,7 +5622,7 @@
                 <a:ea typeface="Arial" pitchFamily="34" charset="-122"/>
                 <a:cs typeface="Arial" pitchFamily="34" charset="-120"/>
               </a:rPr>
-              <a:t>  空港に近いという立地が決め手でした</a:t>
+              <a:t>  Я смотрела как автобусы из других отелей по третьему круг...</a:t>
             </a:r>
             <a:endParaRPr lang="en-US" sz="1100" dirty="0"/>
           </a:p>
@@ -5662,7 +5662,7 @@
                 <a:ea typeface="Arial" pitchFamily="34" charset="-122"/>
                 <a:cs typeface="Arial" pitchFamily="34" charset="-120"/>
               </a:rPr>
-              <a:t>  フロントでは恐竜がお出迎え❤️ 空港までの無料バスもあり、とても有難かったです</a:t>
+              <a:t>  他のホテルからのバスが3度も到着するのを見ましたが、このホテルは何の対応もしてくれませんでした</a:t>
             </a:r>
             <a:endParaRPr lang="en-US" sz="1100" dirty="0"/>
           </a:p>
@@ -5702,7 +5702,7 @@
                 <a:ea typeface="Arial" pitchFamily="34" charset="-122"/>
                 <a:cs typeface="Arial" pitchFamily="34" charset="-120"/>
               </a:rPr>
-              <a:t>  中は綺麗で、大変満足できました</a:t>
+              <a:t>  初めて宿泊させていただきました 話に聞いてた通り恐竜がお出迎えしてくれるフロントにはやっぱりビックリさせられました...</a:t>
             </a:r>
             <a:endParaRPr lang="en-US" sz="1100" dirty="0"/>
           </a:p>
@@ -5850,7 +5850,7 @@
                 <a:ea typeface="Arial" pitchFamily="34" charset="-122"/>
                 <a:cs typeface="Arial" pitchFamily="34" charset="-120"/>
               </a:rPr>
-              <a:t>  フロントでは恐竜がお出迎え❤️ 空港までの無料バスもあり、とても有難かったです</a:t>
+              <a:t>  Я смотрела как автобусы из других отелей по третьему круг...</a:t>
             </a:r>
             <a:endParaRPr lang="en-US" sz="1100" dirty="0"/>
           </a:p>
@@ -5890,7 +5890,7 @@
                 <a:ea typeface="Arial" pitchFamily="34" charset="-122"/>
                 <a:cs typeface="Arial" pitchFamily="34" charset="-120"/>
               </a:rPr>
-              <a:t>  Prima hotel als je dichtbij het vliegveld wil/moet overna...</a:t>
+              <a:t>  Proximité des moyens de transport pour accéder à L aéropo...</a:t>
             </a:r>
             <a:endParaRPr lang="en-US" sz="1100" dirty="0"/>
           </a:p>
@@ -6283,7 +6283,7 @@
                 <a:ea typeface="Arial" pitchFamily="34" charset="-122"/>
                 <a:cs typeface="Arial" pitchFamily="34" charset="-120"/>
               </a:rPr>
-              <a:t>8.25</a:t>
+              <a:t>8.27</a:t>
             </a:r>
             <a:endParaRPr lang="en-US" sz="3200" dirty="0"/>
           </a:p>
@@ -6408,7 +6408,7 @@
                 <a:ea typeface="Arial" pitchFamily="34" charset="-122"/>
                 <a:cs typeface="Arial" pitchFamily="34" charset="-120"/>
               </a:rPr>
-              <a:t>75.6%</a:t>
+              <a:t>75.7%</a:t>
             </a:r>
             <a:endParaRPr lang="en-US" sz="3200" dirty="0"/>
           </a:p>
@@ -6533,7 +6533,7 @@
                 <a:ea typeface="Arial" pitchFamily="34" charset="-122"/>
                 <a:cs typeface="Arial" pitchFamily="34" charset="-120"/>
               </a:rPr>
-              <a:t>3.3%</a:t>
+              <a:t>3.2%</a:t>
             </a:r>
             <a:endParaRPr lang="en-US" sz="3200" dirty="0"/>
           </a:p>
@@ -6658,7 +6658,7 @@
                 <a:ea typeface="Arial" pitchFamily="34" charset="-122"/>
                 <a:cs typeface="Arial" pitchFamily="34" charset="-120"/>
               </a:rPr>
-              <a:t>270件</a:t>
+              <a:t>280件</a:t>
             </a:r>
             <a:endParaRPr lang="en-US" sz="3200" dirty="0"/>
           </a:p>
@@ -7079,7 +7079,7 @@
                 <a:ea typeface="Arial" pitchFamily="34" charset="-122"/>
                 <a:cs typeface="Arial" pitchFamily="34" charset="-120"/>
               </a:rPr>
-              <a:t>Trip.com(9.37)が最高スコア。</a:t>
+              <a:t>Trip.com(9.35)が最高スコア。</a:t>
             </a:r>
             <a:endParaRPr lang="en-US" sz="1100" dirty="0"/>
           </a:p>
@@ -7588,7 +7588,7 @@
                           <a:ea typeface="Arial" pitchFamily="34" charset="-122"/>
                           <a:cs typeface="Arial" pitchFamily="34" charset="-120"/>
                         </a:rPr>
-                        <a:t>19</a:t>
+                        <a:t>20</a:t>
                       </a:r>
                       <a:endParaRPr lang="en-US" sz="900" dirty="0">
                         <a:latin typeface="Arial" charset="0"/>
@@ -7656,7 +7656,7 @@
                           <a:ea typeface="Arial" pitchFamily="34" charset="-122"/>
                           <a:cs typeface="Arial" pitchFamily="34" charset="-120"/>
                         </a:rPr>
-                        <a:t>9.37</a:t>
+                        <a:t>9.35</a:t>
                       </a:r>
                       <a:endParaRPr lang="en-US" sz="900" dirty="0">
                         <a:latin typeface="Arial" charset="0"/>
@@ -7792,7 +7792,7 @@
                           <a:ea typeface="Arial" pitchFamily="34" charset="-122"/>
                           <a:cs typeface="Arial" pitchFamily="34" charset="-120"/>
                         </a:rPr>
-                        <a:t>9.37</a:t>
+                        <a:t>9.35</a:t>
                       </a:r>
                       <a:endParaRPr lang="en-US" sz="900" dirty="0">
                         <a:latin typeface="Arial" charset="0"/>
@@ -7930,7 +7930,7 @@
                           <a:ea typeface="Arial" pitchFamily="34" charset="-122"/>
                           <a:cs typeface="Arial" pitchFamily="34" charset="-120"/>
                         </a:rPr>
-                        <a:t>34</a:t>
+                        <a:t>35</a:t>
                       </a:r>
                       <a:endParaRPr lang="en-US" sz="900" dirty="0">
                         <a:latin typeface="Arial" charset="0"/>
@@ -8134,7 +8134,7 @@
                           <a:ea typeface="Arial" pitchFamily="34" charset="-122"/>
                           <a:cs typeface="Arial" pitchFamily="34" charset="-120"/>
                         </a:rPr>
-                        <a:t>8.59</a:t>
+                        <a:t>8.57</a:t>
                       </a:r>
                       <a:endParaRPr lang="en-US" sz="900" dirty="0">
                         <a:latin typeface="Arial" charset="0"/>
@@ -8614,7 +8614,7 @@
                           <a:ea typeface="Arial" pitchFamily="34" charset="-122"/>
                           <a:cs typeface="Arial" pitchFamily="34" charset="-120"/>
                         </a:rPr>
-                        <a:t>30</a:t>
+                        <a:t>33</a:t>
                       </a:r>
                       <a:endParaRPr lang="en-US" sz="900" dirty="0">
                         <a:latin typeface="Arial" charset="0"/>
@@ -8682,7 +8682,7 @@
                           <a:ea typeface="Arial" pitchFamily="34" charset="-122"/>
                           <a:cs typeface="Arial" pitchFamily="34" charset="-120"/>
                         </a:rPr>
-                        <a:t>8.1</a:t>
+                        <a:t>8.15</a:t>
                       </a:r>
                       <a:endParaRPr lang="en-US" sz="900" dirty="0">
                         <a:latin typeface="Arial" charset="0"/>
@@ -8818,7 +8818,7 @@
                           <a:ea typeface="Arial" pitchFamily="34" charset="-122"/>
                           <a:cs typeface="Arial" pitchFamily="34" charset="-120"/>
                         </a:rPr>
-                        <a:t>8.1</a:t>
+                        <a:t>8.15</a:t>
                       </a:r>
                       <a:endParaRPr lang="en-US" sz="900" dirty="0">
                         <a:latin typeface="Arial" charset="0"/>
@@ -8956,7 +8956,7 @@
                           <a:ea typeface="Arial" pitchFamily="34" charset="-122"/>
                           <a:cs typeface="Arial" pitchFamily="34" charset="-120"/>
                         </a:rPr>
-                        <a:t>114</a:t>
+                        <a:t>118</a:t>
                       </a:r>
                       <a:endParaRPr lang="en-US" sz="900" dirty="0">
                         <a:latin typeface="Arial" charset="0"/>
@@ -9024,7 +9024,7 @@
                           <a:ea typeface="Arial" pitchFamily="34" charset="-122"/>
                           <a:cs typeface="Arial" pitchFamily="34" charset="-120"/>
                         </a:rPr>
-                        <a:t>8.1</a:t>
+                        <a:t>8.11</a:t>
                       </a:r>
                       <a:endParaRPr lang="en-US" sz="900" dirty="0">
                         <a:latin typeface="Arial" charset="0"/>
@@ -9160,7 +9160,7 @@
                           <a:ea typeface="Arial" pitchFamily="34" charset="-122"/>
                           <a:cs typeface="Arial" pitchFamily="34" charset="-120"/>
                         </a:rPr>
-                        <a:t>8.1</a:t>
+                        <a:t>8.11</a:t>
                       </a:r>
                       <a:endParaRPr lang="en-US" sz="900" dirty="0">
                         <a:latin typeface="Arial" charset="0"/>
@@ -9298,7 +9298,7 @@
                           <a:ea typeface="Arial" pitchFamily="34" charset="-122"/>
                           <a:cs typeface="Arial" pitchFamily="34" charset="-120"/>
                         </a:rPr>
-                        <a:t>50</a:t>
+                        <a:t>51</a:t>
                       </a:r>
                       <a:endParaRPr lang="en-US" sz="900" dirty="0">
                         <a:latin typeface="Arial" charset="0"/>
@@ -9366,7 +9366,7 @@
                           <a:ea typeface="Arial" pitchFamily="34" charset="-122"/>
                           <a:cs typeface="Arial" pitchFamily="34" charset="-120"/>
                         </a:rPr>
-                        <a:t>4</a:t>
+                        <a:t>4.02</a:t>
                       </a:r>
                       <a:endParaRPr lang="en-US" sz="900" dirty="0">
                         <a:latin typeface="Arial" charset="0"/>
@@ -9502,7 +9502,7 @@
                           <a:ea typeface="Arial" pitchFamily="34" charset="-122"/>
                           <a:cs typeface="Arial" pitchFamily="34" charset="-120"/>
                         </a:rPr>
-                        <a:t>8</a:t>
+                        <a:t>8.04</a:t>
                       </a:r>
                       <a:endParaRPr lang="en-US" sz="900" dirty="0">
                         <a:latin typeface="Arial" charset="0"/>
@@ -9910,7 +9910,7 @@
                 <a:ea typeface="Arial" pitchFamily="34" charset="-122"/>
                 <a:cs typeface="Arial" pitchFamily="34" charset="-120"/>
               </a:rPr>
-              <a:t>204件（75.6%）</a:t>
+              <a:t>212件（75.7%）</a:t>
             </a:r>
             <a:endParaRPr lang="en-US" sz="1100" dirty="0"/>
           </a:p>
@@ -10008,7 +10008,7 @@
                 <a:ea typeface="Arial" pitchFamily="34" charset="-122"/>
                 <a:cs typeface="Arial" pitchFamily="34" charset="-120"/>
               </a:rPr>
-              <a:t>57件（21.1%）</a:t>
+              <a:t>59件（21.1%）</a:t>
             </a:r>
             <a:endParaRPr lang="en-US" sz="1100" dirty="0"/>
           </a:p>
@@ -10106,7 +10106,7 @@
                 <a:ea typeface="Arial" pitchFamily="34" charset="-122"/>
                 <a:cs typeface="Arial" pitchFamily="34" charset="-120"/>
               </a:rPr>
-              <a:t>9件（3.3%）</a:t>
+              <a:t>9件（3.2%）</a:t>
             </a:r>
             <a:endParaRPr lang="en-US" sz="1100" dirty="0"/>
           </a:p>
@@ -10518,7 +10518,7 @@
                 <a:ea typeface="Arial" pitchFamily="34" charset="-122"/>
                 <a:cs typeface="Arial" pitchFamily="34" charset="-120"/>
               </a:rPr>
-              <a:t>空港に近いという立地が決め手でした</a:t>
+              <a:t>Я смотрела как автобусы из других отелей по третьему круг...</a:t>
             </a:r>
             <a:endParaRPr lang="en-US" sz="900" dirty="0"/>
           </a:p>
@@ -10557,7 +10557,7 @@
                 <a:ea typeface="Arial" pitchFamily="34" charset="-122"/>
                 <a:cs typeface="Arial" pitchFamily="34" charset="-120"/>
               </a:rPr>
-              <a:t>「Naar het vliegveld met of de Shuttle bus van het hotel, e...」</a:t>
+              <a:t>「初めて宿泊させていただきました 話に聞いてた通り恐竜がお出迎えしてくれるフロントにはやっぱりビックリさせられました...」</a:t>
             </a:r>
             <a:endParaRPr lang="en-US" sz="900" dirty="0"/>
           </a:p>
@@ -10741,7 +10741,7 @@
                 <a:ea typeface="Arial" pitchFamily="34" charset="-122"/>
                 <a:cs typeface="Arial" pitchFamily="34" charset="-120"/>
               </a:rPr>
-              <a:t>フロントでは恐竜がお出迎え❤️ 空港までの無料バスもあり、とても有難かったです</a:t>
+              <a:t>他のホテルからのバスが3度も到着するのを見ましたが、このホテルは何の対応もしてくれませんでした</a:t>
             </a:r>
             <a:endParaRPr lang="en-US" sz="900" dirty="0"/>
           </a:p>
@@ -10780,7 +10780,7 @@
                 <a:ea typeface="Arial" pitchFamily="34" charset="-122"/>
                 <a:cs typeface="Arial" pitchFamily="34" charset="-120"/>
               </a:rPr>
-              <a:t>「Staff were helpful when i requested for extra pillow」</a:t>
+              <a:t>「子どもたちがフロントの恐竜🦖🦕に驚き、お部屋のロボットを気に入り、物語をせがんでいました」</a:t>
             </a:r>
             <a:endParaRPr lang="en-US" sz="900" dirty="0"/>
           </a:p>
@@ -10862,6 +10862,229 @@
         <p:spPr>
           <a:xfrm>
             <a:off x="7955280" y="1124712"/>
+            <a:ext cx="658368" cy="228600"/>
+          </a:xfrm>
+          <a:prstGeom prst="rect">
+            <a:avLst/>
+          </a:prstGeom>
+          <a:noFill/>
+          <a:ln/>
+        </p:spPr>
+        <p:txBody>
+          <a:bodyPr wrap="square" lIns="0" tIns="0" rIns="0" bIns="0" rtlCol="0" anchor="ctr"/>
+          <a:lstStyle/>
+          <a:p>
+            <a:pPr algn="ctr" indent="0" marL="0">
+              <a:buNone/>
+            </a:pPr>
+            <a:r>
+              <a:rPr lang="en-US" sz="900" b="1" dirty="0">
+                <a:solidFill>
+                  <a:srgbClr val="16A34A"/>
+                </a:solidFill>
+                <a:latin typeface="Arial" pitchFamily="34" charset="0"/>
+                <a:ea typeface="Arial" pitchFamily="34" charset="-122"/>
+                <a:cs typeface="Arial" pitchFamily="34" charset="-120"/>
+              </a:rPr>
+              <a:t>50件+</a:t>
+            </a:r>
+            <a:endParaRPr lang="en-US" sz="900" dirty="0"/>
+          </a:p>
+        </p:txBody>
+      </p:sp>
+      <p:sp>
+        <p:nvSpPr>
+          <p:cNvPr id="23" name="Text 21"/>
+          <p:cNvSpPr/>
+          <p:nvPr/>
+        </p:nvSpPr>
+        <p:spPr>
+          <a:xfrm>
+            <a:off x="6263640" y="1124712"/>
+            <a:ext cx="1645920" cy="274320"/>
+          </a:xfrm>
+          <a:prstGeom prst="rect">
+            <a:avLst/>
+          </a:prstGeom>
+          <a:noFill/>
+          <a:ln/>
+        </p:spPr>
+        <p:txBody>
+          <a:bodyPr wrap="square" lIns="0" tIns="0" rIns="0" bIns="0" rtlCol="0" anchor="ctr"/>
+          <a:lstStyle/>
+          <a:p>
+            <a:pPr indent="0" marL="0">
+              <a:buNone/>
+            </a:pPr>
+            <a:r>
+              <a:rPr lang="en-US" sz="1300" b="1" dirty="0">
+                <a:solidFill>
+                  <a:srgbClr val="1A2744"/>
+                </a:solidFill>
+                <a:latin typeface="Arial" pitchFamily="34" charset="0"/>
+                <a:ea typeface="Arial" pitchFamily="34" charset="-122"/>
+                <a:cs typeface="Arial" pitchFamily="34" charset="-120"/>
+              </a:rPr>
+              <a:t>清潔さ・清掃</a:t>
+            </a:r>
+            <a:endParaRPr lang="en-US" sz="1300" dirty="0"/>
+          </a:p>
+        </p:txBody>
+      </p:sp>
+      <p:sp>
+        <p:nvSpPr>
+          <p:cNvPr id="24" name="Text 22"/>
+          <p:cNvSpPr/>
+          <p:nvPr/>
+        </p:nvSpPr>
+        <p:spPr>
+          <a:xfrm>
+            <a:off x="6263640" y="1417320"/>
+            <a:ext cx="2377440" cy="365760"/>
+          </a:xfrm>
+          <a:prstGeom prst="rect">
+            <a:avLst/>
+          </a:prstGeom>
+          <a:noFill/>
+          <a:ln/>
+        </p:spPr>
+        <p:txBody>
+          <a:bodyPr wrap="square" lIns="0" tIns="0" rIns="0" bIns="0" rtlCol="0" anchor="ctr"/>
+          <a:lstStyle/>
+          <a:p>
+            <a:pPr indent="0" marL="0">
+              <a:buNone/>
+            </a:pPr>
+            <a:r>
+              <a:rPr lang="en-US" sz="900" dirty="0">
+                <a:solidFill>
+                  <a:srgbClr val="64748B"/>
+                </a:solidFill>
+                <a:latin typeface="Arial" pitchFamily="34" charset="0"/>
+                <a:ea typeface="Arial" pitchFamily="34" charset="-122"/>
+                <a:cs typeface="Arial" pitchFamily="34" charset="-120"/>
+              </a:rPr>
+              <a:t>初めて宿泊させていただきました 話に聞いてた通り恐竜がお出迎えしてくれるフロントにはやっぱりビックリさせられました...</a:t>
+            </a:r>
+            <a:endParaRPr lang="en-US" sz="900" dirty="0"/>
+          </a:p>
+        </p:txBody>
+      </p:sp>
+      <p:sp>
+        <p:nvSpPr>
+          <p:cNvPr id="25" name="Text 23"/>
+          <p:cNvSpPr/>
+          <p:nvPr/>
+        </p:nvSpPr>
+        <p:spPr>
+          <a:xfrm>
+            <a:off x="6263640" y="1828800"/>
+            <a:ext cx="2377440" cy="640080"/>
+          </a:xfrm>
+          <a:prstGeom prst="rect">
+            <a:avLst/>
+          </a:prstGeom>
+          <a:noFill/>
+          <a:ln/>
+        </p:spPr>
+        <p:txBody>
+          <a:bodyPr wrap="square" lIns="0" tIns="0" rIns="0" bIns="0" rtlCol="0" anchor="ctr"/>
+          <a:lstStyle/>
+          <a:p>
+            <a:pPr indent="0" marL="0">
+              <a:buNone/>
+            </a:pPr>
+            <a:r>
+              <a:rPr lang="en-US" sz="900" i="1" dirty="0">
+                <a:solidFill>
+                  <a:srgbClr val="3B7DD8"/>
+                </a:solidFill>
+                <a:latin typeface="Arial" pitchFamily="34" charset="0"/>
+                <a:ea typeface="Arial" pitchFamily="34" charset="-122"/>
+                <a:cs typeface="Arial" pitchFamily="34" charset="-120"/>
+              </a:rPr>
+              <a:t>「部屋は広めで清潔、とても快適です」</a:t>
+            </a:r>
+            <a:endParaRPr lang="en-US" sz="900" dirty="0"/>
+          </a:p>
+        </p:txBody>
+      </p:sp>
+      <p:sp>
+        <p:nvSpPr>
+          <p:cNvPr id="26" name="Shape 24"/>
+          <p:cNvSpPr/>
+          <p:nvPr/>
+        </p:nvSpPr>
+        <p:spPr>
+          <a:xfrm>
+            <a:off x="457200" y="2880360"/>
+            <a:ext cx="2651760" cy="1600200"/>
+          </a:xfrm>
+          <a:prstGeom prst="rect">
+            <a:avLst/>
+          </a:prstGeom>
+          <a:solidFill>
+            <a:srgbClr val="FFFFFF"/>
+          </a:solidFill>
+          <a:ln/>
+          <a:effectLst>
+            <a:outerShdw sx="100000" sy="100000" kx="0" ky="0" algn="bl" rotWithShape="0" blurRad="50800" dist="25400" dir="8100000">
+              <a:srgbClr val="000000">
+                <a:alpha val="10000"/>
+              </a:srgbClr>
+            </a:outerShdw>
+          </a:effectLst>
+        </p:spPr>
+      </p:sp>
+      <p:sp>
+        <p:nvSpPr>
+          <p:cNvPr id="27" name="Shape 25"/>
+          <p:cNvSpPr/>
+          <p:nvPr/>
+        </p:nvSpPr>
+        <p:spPr>
+          <a:xfrm>
+            <a:off x="457200" y="2880360"/>
+            <a:ext cx="54864" cy="1600200"/>
+          </a:xfrm>
+          <a:prstGeom prst="rect">
+            <a:avLst/>
+          </a:prstGeom>
+          <a:solidFill>
+            <a:srgbClr val="16A34A"/>
+          </a:solidFill>
+          <a:ln/>
+        </p:spPr>
+      </p:sp>
+      <p:sp>
+        <p:nvSpPr>
+          <p:cNvPr id="28" name="Shape 26"/>
+          <p:cNvSpPr/>
+          <p:nvPr/>
+        </p:nvSpPr>
+        <p:spPr>
+          <a:xfrm>
+            <a:off x="2286000" y="2953512"/>
+            <a:ext cx="658368" cy="228600"/>
+          </a:xfrm>
+          <a:prstGeom prst="rect">
+            <a:avLst/>
+          </a:prstGeom>
+          <a:solidFill>
+            <a:srgbClr val="DCFCE7"/>
+          </a:solidFill>
+          <a:ln/>
+        </p:spPr>
+      </p:sp>
+      <p:sp>
+        <p:nvSpPr>
+          <p:cNvPr id="29" name="Text 27"/>
+          <p:cNvSpPr/>
+          <p:nvPr/>
+        </p:nvSpPr>
+        <p:spPr>
+          <a:xfrm>
+            <a:off x="2286000" y="2953512"/>
             <a:ext cx="658368" cy="228600"/>
           </a:xfrm>
           <a:prstGeom prst="rect">
@@ -10894,13 +11117,13 @@
       </p:sp>
       <p:sp>
         <p:nvSpPr>
-          <p:cNvPr id="23" name="Text 21"/>
-          <p:cNvSpPr/>
-          <p:nvPr/>
-        </p:nvSpPr>
-        <p:spPr>
-          <a:xfrm>
-            <a:off x="6263640" y="1124712"/>
+          <p:cNvPr id="30" name="Text 28"/>
+          <p:cNvSpPr/>
+          <p:nvPr/>
+        </p:nvSpPr>
+        <p:spPr>
+          <a:xfrm>
+            <a:off x="594360" y="2953512"/>
             <a:ext cx="1645920" cy="274320"/>
           </a:xfrm>
           <a:prstGeom prst="rect">
@@ -10925,7 +11148,7 @@
                 <a:ea typeface="Arial" pitchFamily="34" charset="-122"/>
                 <a:cs typeface="Arial" pitchFamily="34" charset="-120"/>
               </a:rPr>
-              <a:t>清潔さ・清掃</a:t>
+              <a:t>快適さ・設備</a:t>
             </a:r>
             <a:endParaRPr lang="en-US" sz="1300" dirty="0"/>
           </a:p>
@@ -10933,13 +11156,13 @@
       </p:sp>
       <p:sp>
         <p:nvSpPr>
-          <p:cNvPr id="24" name="Text 22"/>
-          <p:cNvSpPr/>
-          <p:nvPr/>
-        </p:nvSpPr>
-        <p:spPr>
-          <a:xfrm>
-            <a:off x="6263640" y="1417320"/>
+          <p:cNvPr id="31" name="Text 29"/>
+          <p:cNvSpPr/>
+          <p:nvPr/>
+        </p:nvSpPr>
+        <p:spPr>
+          <a:xfrm>
+            <a:off x="594360" y="3246120"/>
             <a:ext cx="2377440" cy="365760"/>
           </a:xfrm>
           <a:prstGeom prst="rect">
@@ -10964,7 +11187,7 @@
                 <a:ea typeface="Arial" pitchFamily="34" charset="-122"/>
                 <a:cs typeface="Arial" pitchFamily="34" charset="-120"/>
               </a:rPr>
-              <a:t>中は綺麗で、大変満足できました</a:t>
+              <a:t>部屋は広めで清潔、とても快適です</a:t>
             </a:r>
             <a:endParaRPr lang="en-US" sz="900" dirty="0"/>
           </a:p>
@@ -10972,13 +11195,13 @@
       </p:sp>
       <p:sp>
         <p:nvSpPr>
-          <p:cNvPr id="25" name="Text 23"/>
-          <p:cNvSpPr/>
-          <p:nvPr/>
-        </p:nvSpPr>
-        <p:spPr>
-          <a:xfrm>
-            <a:off x="6263640" y="1828800"/>
+          <p:cNvPr id="32" name="Text 30"/>
+          <p:cNvSpPr/>
+          <p:nvPr/>
+        </p:nvSpPr>
+        <p:spPr>
+          <a:xfrm>
+            <a:off x="594360" y="3657600"/>
             <a:ext cx="2377440" cy="640080"/>
           </a:xfrm>
           <a:prstGeom prst="rect">
@@ -11003,7 +11226,7 @@
                 <a:ea typeface="Arial" pitchFamily="34" charset="-122"/>
                 <a:cs typeface="Arial" pitchFamily="34" charset="-120"/>
               </a:rPr>
-              <a:t>「It did make me feel that more cleaning was necessary トイレと...」</a:t>
+              <a:t>「必要最低限​​の設備は整っているホテルですが、特筆すべき点はありません」</a:t>
             </a:r>
             <a:endParaRPr lang="en-US" sz="900" dirty="0"/>
           </a:p>
@@ -11011,13 +11234,13 @@
       </p:sp>
       <p:sp>
         <p:nvSpPr>
-          <p:cNvPr id="26" name="Shape 24"/>
-          <p:cNvSpPr/>
-          <p:nvPr/>
-        </p:nvSpPr>
-        <p:spPr>
-          <a:xfrm>
-            <a:off x="457200" y="2880360"/>
+          <p:cNvPr id="33" name="Shape 31"/>
+          <p:cNvSpPr/>
+          <p:nvPr/>
+        </p:nvSpPr>
+        <p:spPr>
+          <a:xfrm>
+            <a:off x="3291840" y="2880360"/>
             <a:ext cx="2651760" cy="1600200"/>
           </a:xfrm>
           <a:prstGeom prst="rect">
@@ -11038,13 +11261,13 @@
       </p:sp>
       <p:sp>
         <p:nvSpPr>
-          <p:cNvPr id="27" name="Shape 25"/>
-          <p:cNvSpPr/>
-          <p:nvPr/>
-        </p:nvSpPr>
-        <p:spPr>
-          <a:xfrm>
-            <a:off x="457200" y="2880360"/>
+          <p:cNvPr id="34" name="Shape 32"/>
+          <p:cNvSpPr/>
+          <p:nvPr/>
+        </p:nvSpPr>
+        <p:spPr>
+          <a:xfrm>
+            <a:off x="3291840" y="2880360"/>
             <a:ext cx="54864" cy="1600200"/>
           </a:xfrm>
           <a:prstGeom prst="rect">
@@ -11058,13 +11281,13 @@
       </p:sp>
       <p:sp>
         <p:nvSpPr>
-          <p:cNvPr id="28" name="Shape 26"/>
-          <p:cNvSpPr/>
-          <p:nvPr/>
-        </p:nvSpPr>
-        <p:spPr>
-          <a:xfrm>
-            <a:off x="2286000" y="2953512"/>
+          <p:cNvPr id="35" name="Shape 33"/>
+          <p:cNvSpPr/>
+          <p:nvPr/>
+        </p:nvSpPr>
+        <p:spPr>
+          <a:xfrm>
+            <a:off x="5120640" y="2953512"/>
             <a:ext cx="658368" cy="228600"/>
           </a:xfrm>
           <a:prstGeom prst="rect">
@@ -11078,13 +11301,13 @@
       </p:sp>
       <p:sp>
         <p:nvSpPr>
-          <p:cNvPr id="29" name="Text 27"/>
-          <p:cNvSpPr/>
-          <p:nvPr/>
-        </p:nvSpPr>
-        <p:spPr>
-          <a:xfrm>
-            <a:off x="2286000" y="2953512"/>
+          <p:cNvPr id="36" name="Text 34"/>
+          <p:cNvSpPr/>
+          <p:nvPr/>
+        </p:nvSpPr>
+        <p:spPr>
+          <a:xfrm>
+            <a:off x="5120640" y="2953512"/>
             <a:ext cx="658368" cy="228600"/>
           </a:xfrm>
           <a:prstGeom prst="rect">
@@ -11117,229 +11340,6 @@
       </p:sp>
       <p:sp>
         <p:nvSpPr>
-          <p:cNvPr id="30" name="Text 28"/>
-          <p:cNvSpPr/>
-          <p:nvPr/>
-        </p:nvSpPr>
-        <p:spPr>
-          <a:xfrm>
-            <a:off x="594360" y="2953512"/>
-            <a:ext cx="1645920" cy="274320"/>
-          </a:xfrm>
-          <a:prstGeom prst="rect">
-            <a:avLst/>
-          </a:prstGeom>
-          <a:noFill/>
-          <a:ln/>
-        </p:spPr>
-        <p:txBody>
-          <a:bodyPr wrap="square" lIns="0" tIns="0" rIns="0" bIns="0" rtlCol="0" anchor="ctr"/>
-          <a:lstStyle/>
-          <a:p>
-            <a:pPr indent="0" marL="0">
-              <a:buNone/>
-            </a:pPr>
-            <a:r>
-              <a:rPr lang="en-US" sz="1300" b="1" dirty="0">
-                <a:solidFill>
-                  <a:srgbClr val="1A2744"/>
-                </a:solidFill>
-                <a:latin typeface="Arial" pitchFamily="34" charset="0"/>
-                <a:ea typeface="Arial" pitchFamily="34" charset="-122"/>
-                <a:cs typeface="Arial" pitchFamily="34" charset="-120"/>
-              </a:rPr>
-              <a:t>快適さ・設備</a:t>
-            </a:r>
-            <a:endParaRPr lang="en-US" sz="1300" dirty="0"/>
-          </a:p>
-        </p:txBody>
-      </p:sp>
-      <p:sp>
-        <p:nvSpPr>
-          <p:cNvPr id="31" name="Text 29"/>
-          <p:cNvSpPr/>
-          <p:nvPr/>
-        </p:nvSpPr>
-        <p:spPr>
-          <a:xfrm>
-            <a:off x="594360" y="3246120"/>
-            <a:ext cx="2377440" cy="365760"/>
-          </a:xfrm>
-          <a:prstGeom prst="rect">
-            <a:avLst/>
-          </a:prstGeom>
-          <a:noFill/>
-          <a:ln/>
-        </p:spPr>
-        <p:txBody>
-          <a:bodyPr wrap="square" lIns="0" tIns="0" rIns="0" bIns="0" rtlCol="0" anchor="ctr"/>
-          <a:lstStyle/>
-          <a:p>
-            <a:pPr indent="0" marL="0">
-              <a:buNone/>
-            </a:pPr>
-            <a:r>
-              <a:rPr lang="en-US" sz="900" dirty="0">
-                <a:solidFill>
-                  <a:srgbClr val="64748B"/>
-                </a:solidFill>
-                <a:latin typeface="Arial" pitchFamily="34" charset="0"/>
-                <a:ea typeface="Arial" pitchFamily="34" charset="-122"/>
-                <a:cs typeface="Arial" pitchFamily="34" charset="-120"/>
-              </a:rPr>
-              <a:t>必要最低限​​の設備は整っているホテルですが、特筆すべき点はありません</a:t>
-            </a:r>
-            <a:endParaRPr lang="en-US" sz="900" dirty="0"/>
-          </a:p>
-        </p:txBody>
-      </p:sp>
-      <p:sp>
-        <p:nvSpPr>
-          <p:cNvPr id="32" name="Text 30"/>
-          <p:cNvSpPr/>
-          <p:nvPr/>
-        </p:nvSpPr>
-        <p:spPr>
-          <a:xfrm>
-            <a:off x="594360" y="3657600"/>
-            <a:ext cx="2377440" cy="640080"/>
-          </a:xfrm>
-          <a:prstGeom prst="rect">
-            <a:avLst/>
-          </a:prstGeom>
-          <a:noFill/>
-          <a:ln/>
-        </p:spPr>
-        <p:txBody>
-          <a:bodyPr wrap="square" lIns="0" tIns="0" rIns="0" bIns="0" rtlCol="0" anchor="ctr"/>
-          <a:lstStyle/>
-          <a:p>
-            <a:pPr indent="0" marL="0">
-              <a:buNone/>
-            </a:pPr>
-            <a:r>
-              <a:rPr lang="en-US" sz="900" i="1" dirty="0">
-                <a:solidFill>
-                  <a:srgbClr val="3B7DD8"/>
-                </a:solidFill>
-                <a:latin typeface="Arial" pitchFamily="34" charset="0"/>
-                <a:ea typeface="Arial" pitchFamily="34" charset="-122"/>
-                <a:cs typeface="Arial" pitchFamily="34" charset="-120"/>
-              </a:rPr>
-              <a:t>「部屋は静かで快適だった」</a:t>
-            </a:r>
-            <a:endParaRPr lang="en-US" sz="900" dirty="0"/>
-          </a:p>
-        </p:txBody>
-      </p:sp>
-      <p:sp>
-        <p:nvSpPr>
-          <p:cNvPr id="33" name="Shape 31"/>
-          <p:cNvSpPr/>
-          <p:nvPr/>
-        </p:nvSpPr>
-        <p:spPr>
-          <a:xfrm>
-            <a:off x="3291840" y="2880360"/>
-            <a:ext cx="2651760" cy="1600200"/>
-          </a:xfrm>
-          <a:prstGeom prst="rect">
-            <a:avLst/>
-          </a:prstGeom>
-          <a:solidFill>
-            <a:srgbClr val="FFFFFF"/>
-          </a:solidFill>
-          <a:ln/>
-          <a:effectLst>
-            <a:outerShdw sx="100000" sy="100000" kx="0" ky="0" algn="bl" rotWithShape="0" blurRad="50800" dist="25400" dir="8100000">
-              <a:srgbClr val="000000">
-                <a:alpha val="10000"/>
-              </a:srgbClr>
-            </a:outerShdw>
-          </a:effectLst>
-        </p:spPr>
-      </p:sp>
-      <p:sp>
-        <p:nvSpPr>
-          <p:cNvPr id="34" name="Shape 32"/>
-          <p:cNvSpPr/>
-          <p:nvPr/>
-        </p:nvSpPr>
-        <p:spPr>
-          <a:xfrm>
-            <a:off x="3291840" y="2880360"/>
-            <a:ext cx="54864" cy="1600200"/>
-          </a:xfrm>
-          <a:prstGeom prst="rect">
-            <a:avLst/>
-          </a:prstGeom>
-          <a:solidFill>
-            <a:srgbClr val="16A34A"/>
-          </a:solidFill>
-          <a:ln/>
-        </p:spPr>
-      </p:sp>
-      <p:sp>
-        <p:nvSpPr>
-          <p:cNvPr id="35" name="Shape 33"/>
-          <p:cNvSpPr/>
-          <p:nvPr/>
-        </p:nvSpPr>
-        <p:spPr>
-          <a:xfrm>
-            <a:off x="5120640" y="2953512"/>
-            <a:ext cx="658368" cy="228600"/>
-          </a:xfrm>
-          <a:prstGeom prst="rect">
-            <a:avLst/>
-          </a:prstGeom>
-          <a:solidFill>
-            <a:srgbClr val="DCFCE7"/>
-          </a:solidFill>
-          <a:ln/>
-        </p:spPr>
-      </p:sp>
-      <p:sp>
-        <p:nvSpPr>
-          <p:cNvPr id="36" name="Text 34"/>
-          <p:cNvSpPr/>
-          <p:nvPr/>
-        </p:nvSpPr>
-        <p:spPr>
-          <a:xfrm>
-            <a:off x="5120640" y="2953512"/>
-            <a:ext cx="658368" cy="228600"/>
-          </a:xfrm>
-          <a:prstGeom prst="rect">
-            <a:avLst/>
-          </a:prstGeom>
-          <a:noFill/>
-          <a:ln/>
-        </p:spPr>
-        <p:txBody>
-          <a:bodyPr wrap="square" lIns="0" tIns="0" rIns="0" bIns="0" rtlCol="0" anchor="ctr"/>
-          <a:lstStyle/>
-          <a:p>
-            <a:pPr algn="ctr" indent="0" marL="0">
-              <a:buNone/>
-            </a:pPr>
-            <a:r>
-              <a:rPr lang="en-US" sz="900" b="1" dirty="0">
-                <a:solidFill>
-                  <a:srgbClr val="16A34A"/>
-                </a:solidFill>
-                <a:latin typeface="Arial" pitchFamily="34" charset="0"/>
-                <a:ea typeface="Arial" pitchFamily="34" charset="-122"/>
-                <a:cs typeface="Arial" pitchFamily="34" charset="-120"/>
-              </a:rPr>
-              <a:t>20件+</a:t>
-            </a:r>
-            <a:endParaRPr lang="en-US" sz="900" dirty="0"/>
-          </a:p>
-        </p:txBody>
-      </p:sp>
-      <p:sp>
-        <p:nvSpPr>
           <p:cNvPr id="37" name="Text 35"/>
           <p:cNvSpPr/>
           <p:nvPr/>
@@ -11410,7 +11410,7 @@
                 <a:ea typeface="Arial" pitchFamily="34" charset="-122"/>
                 <a:cs typeface="Arial" pitchFamily="34" charset="-120"/>
               </a:rPr>
-              <a:t>良いとこ ・宿泊費がリーズナブル ・１Fに冷凍食品、アイス、生活用品、アルコール類の自販機があって買い物して行かな...</a:t>
+              <a:t>初めて宿泊させていただきました 話に聞いてた通り恐竜がお出迎えしてくれるフロントにはやっぱりビックリさせられました...</a:t>
             </a:r>
             <a:endParaRPr lang="en-US" sz="900" dirty="0"/>
           </a:p>
@@ -11449,7 +11449,7 @@
                 <a:ea typeface="Arial" pitchFamily="34" charset="-122"/>
                 <a:cs typeface="Arial" pitchFamily="34" charset="-120"/>
               </a:rPr>
-              <a:t>「駅からもそんなに遠くなく 途中にファミレスや居酒屋レストランなどもあり　スーパーもあり便利でした 冷蔵庫は小さかっ...」</a:t>
+              <a:t>「良いとこ ・宿泊費がリーズナブル ・１Fに冷凍食品、アイス、生活用品、アルコール類の自販機があって買い物して行かな...」</a:t>
             </a:r>
             <a:endParaRPr lang="en-US" sz="900" dirty="0"/>
           </a:p>
@@ -11633,7 +11633,7 @@
                 <a:ea typeface="Arial" pitchFamily="34" charset="-122"/>
                 <a:cs typeface="Arial" pitchFamily="34" charset="-120"/>
               </a:rPr>
-              <a:t>Breakfast was also very amazing, accommodating to everyon...</a:t>
+              <a:t>朝食も美味しくまた利用したいです</a:t>
             </a:r>
             <a:endParaRPr lang="en-US" sz="900" dirty="0"/>
           </a:p>
@@ -11672,7 +11672,7 @@
                 <a:ea typeface="Arial" pitchFamily="34" charset="-122"/>
                 <a:cs typeface="Arial" pitchFamily="34" charset="-120"/>
               </a:rPr>
-              <a:t>「Les chambres sont grandes et bien insonorisées  Un servic...」</a:t>
+              <a:t>「朝食も美味しい」</a:t>
             </a:r>
             <a:endParaRPr lang="en-US" sz="900" dirty="0"/>
           </a:p>
@@ -12362,7 +12362,7 @@
                           <a:ea typeface="Arial" pitchFamily="34" charset="-122"/>
                           <a:cs typeface="Arial" pitchFamily="34" charset="-120"/>
                         </a:rPr>
-                        <a:t>フロントでは恐竜がお出迎え❤️ 空港までの無料バスもあり、とても有難かったです</a:t>
+                        <a:t>Я смотрела как автобусы из других отелей по третьему круг...</a:t>
                       </a:r>
                       <a:endParaRPr lang="en-US" sz="900" dirty="0">
                         <a:latin typeface="Arial" charset="0"/>
@@ -12430,7 +12430,7 @@
                           <a:ea typeface="Arial" pitchFamily="34" charset="-122"/>
                           <a:cs typeface="Arial" pitchFamily="34" charset="-120"/>
                         </a:rPr>
-                        <a:t>76件</a:t>
+                        <a:t>78件</a:t>
                       </a:r>
                       <a:endParaRPr lang="en-US" sz="900" dirty="0">
                         <a:latin typeface="Arial" charset="0"/>
@@ -12636,7 +12636,7 @@
                           <a:ea typeface="Arial" pitchFamily="34" charset="-122"/>
                           <a:cs typeface="Arial" pitchFamily="34" charset="-120"/>
                         </a:rPr>
-                        <a:t>Prima hotel als je dichtbij het vliegveld wil/moet overna...</a:t>
+                        <a:t>Proximité des moyens de transport pour accéder à L aéropo...</a:t>
                       </a:r>
                       <a:endParaRPr lang="en-US" sz="900" dirty="0">
                         <a:latin typeface="Arial" charset="0"/>
@@ -12704,7 +12704,7 @@
                           <a:ea typeface="Arial" pitchFamily="34" charset="-122"/>
                           <a:cs typeface="Arial" pitchFamily="34" charset="-120"/>
                         </a:rPr>
-                        <a:t>25件</a:t>
+                        <a:t>26件</a:t>
                       </a:r>
                       <a:endParaRPr lang="en-US" sz="900" dirty="0">
                         <a:latin typeface="Arial" charset="0"/>
@@ -13458,7 +13458,7 @@
                           <a:ea typeface="Arial" pitchFamily="34" charset="-122"/>
                           <a:cs typeface="Arial" pitchFamily="34" charset="-120"/>
                         </a:rPr>
-                        <a:t>ヒューマノイドを使った実験としては、これは本当に残念なことです</a:t>
+                        <a:t>初めて宿泊させていただきました 話に聞いてた通り恐竜がお出迎えしてくれるフロントにはやっぱりビックリさせられました...</a:t>
                       </a:r>
                       <a:endParaRPr lang="en-US" sz="900" dirty="0">
                         <a:latin typeface="Arial" charset="0"/>
@@ -13526,7 +13526,7 @@
                           <a:ea typeface="Arial" pitchFamily="34" charset="-122"/>
                           <a:cs typeface="Arial" pitchFamily="34" charset="-120"/>
                         </a:rPr>
-                        <a:t>10件</a:t>
+                        <a:t>11件</a:t>
                       </a:r>
                       <a:endParaRPr lang="en-US" sz="900" dirty="0">
                         <a:latin typeface="Arial" charset="0"/>
@@ -13664,7 +13664,7 @@
                           <a:ea typeface="Arial" pitchFamily="34" charset="-122"/>
                           <a:cs typeface="Arial" pitchFamily="34" charset="-120"/>
                         </a:rPr>
-                        <a:t>設備の老朽化</a:t>
+                        <a:t>窓・採光</a:t>
                       </a:r>
                       <a:endParaRPr lang="en-US" sz="900" dirty="0">
                         <a:latin typeface="Arial" charset="0"/>
@@ -13732,7 +13732,7 @@
                           <a:ea typeface="Arial" pitchFamily="34" charset="-122"/>
                           <a:cs typeface="Arial" pitchFamily="34" charset="-120"/>
                         </a:rPr>
-                        <a:t>I was forced to put my global roaming on my phone and get...</a:t>
+                        <a:t>初めて宿泊させていただきました 話に聞いてた通り恐竜がお出迎えしてくれるフロントにはやっぱりビックリさせられました...</a:t>
                       </a:r>
                       <a:endParaRPr lang="en-US" sz="900" dirty="0">
                         <a:latin typeface="Arial" charset="0"/>
@@ -13800,7 +13800,7 @@
                           <a:ea typeface="Arial" pitchFamily="34" charset="-122"/>
                           <a:cs typeface="Arial" pitchFamily="34" charset="-120"/>
                         </a:rPr>
-                        <a:t>1件</a:t>
+                        <a:t>2件</a:t>
                       </a:r>
                       <a:endParaRPr lang="en-US" sz="900" dirty="0">
                         <a:latin typeface="Arial" charset="0"/>
@@ -13938,7 +13938,7 @@
                           <a:ea typeface="Arial" pitchFamily="34" charset="-122"/>
                           <a:cs typeface="Arial" pitchFamily="34" charset="-120"/>
                         </a:rPr>
-                        <a:t>臭い・匂い</a:t>
+                        <a:t>設備の老朽化</a:t>
                       </a:r>
                       <a:endParaRPr lang="en-US" sz="900" dirty="0">
                         <a:latin typeface="Arial" charset="0"/>
@@ -14006,7 +14006,7 @@
                           <a:ea typeface="Arial" pitchFamily="34" charset="-122"/>
                           <a:cs typeface="Arial" pitchFamily="34" charset="-120"/>
                         </a:rPr>
-                        <a:t>カーペットも綺麗でタバコの臭いがなく、トイレに浴槽もあってよかったです</a:t>
+                        <a:t>I was forced to put my global roaming on my phone and get...</a:t>
                       </a:r>
                       <a:endParaRPr lang="en-US" sz="900" dirty="0">
                         <a:latin typeface="Arial" charset="0"/>
@@ -14212,7 +14212,7 @@
                           <a:ea typeface="Arial" pitchFamily="34" charset="-122"/>
                           <a:cs typeface="Arial" pitchFamily="34" charset="-120"/>
                         </a:rPr>
-                        <a:t>窓・採光</a:t>
+                        <a:t>臭い・匂い</a:t>
                       </a:r>
                       <a:endParaRPr lang="en-US" sz="900" dirty="0">
                         <a:latin typeface="Arial" charset="0"/>
@@ -14280,7 +14280,7 @@
                           <a:ea typeface="Arial" pitchFamily="34" charset="-122"/>
                           <a:cs typeface="Arial" pitchFamily="34" charset="-120"/>
                         </a:rPr>
-                        <a:t>部屋はちょっと狭いけど明るく良かったですが、バスルームが狭くて残念です</a:t>
+                        <a:t>カーペットも綺麗でタバコの臭いがなく、トイレに浴槽もあってよかったです</a:t>
                       </a:r>
                       <a:endParaRPr lang="en-US" sz="900" dirty="0">
                         <a:latin typeface="Arial" charset="0"/>

--- a/納品レポート/ホテル別レポート/henn_na_haneda_口コミ分析レポート.pptx
+++ b/納品レポート/ホテル別レポート/henn_na_haneda_口コミ分析レポート.pptx
@@ -211,7 +211,7 @@
                   <c:v>9.35</c:v>
                 </c:pt>
                 <c:pt idx="1">
-                  <c:v>8.57</c:v>
+                  <c:v>8.59</c:v>
                 </c:pt>
                 <c:pt idx="2">
                   <c:v>8.35</c:v>
@@ -220,10 +220,10 @@
                   <c:v>8.15</c:v>
                 </c:pt>
                 <c:pt idx="4">
-                  <c:v>8.11</c:v>
+                  <c:v>8.09</c:v>
                 </c:pt>
                 <c:pt idx="5">
-                  <c:v>8.04</c:v>
+                  <c:v>8.08</c:v>
                 </c:pt>
               </c:numCache>
             </c:numRef>
@@ -566,10 +566,10 @@
               <c:numCache>
                 <c:ptCount val="3"/>
                 <c:pt idx="0">
-                  <c:v>212</c:v>
+                  <c:v>216</c:v>
                 </c:pt>
                 <c:pt idx="1">
-                  <c:v>59</c:v>
+                  <c:v>60</c:v>
                 </c:pt>
                 <c:pt idx="2">
                   <c:v>9</c:v>
@@ -823,19 +823,19 @@
                 <c:formatCode>General</c:formatCode>
                 <c:ptCount val="9"/>
                 <c:pt idx="0">
-                  <c:v>93</c:v>
+                  <c:v>95</c:v>
                 </c:pt>
                 <c:pt idx="1">
                   <c:v>35</c:v>
                 </c:pt>
                 <c:pt idx="2">
-                  <c:v>84</c:v>
+                  <c:v>86</c:v>
                 </c:pt>
                 <c:pt idx="3">
                   <c:v>27</c:v>
                 </c:pt>
                 <c:pt idx="4">
-                  <c:v>25</c:v>
+                  <c:v>26</c:v>
                 </c:pt>
                 <c:pt idx="5">
                   <c:v>7</c:v>
@@ -2798,7 +2798,7 @@
                 <a:ea typeface="Arial" pitchFamily="34" charset="-122"/>
                 <a:cs typeface="Arial" pitchFamily="34" charset="-120"/>
               </a:rPr>
-              <a:t>レビュー総数：280件（6サイト）</a:t>
+              <a:t>レビュー総数：285件（6サイト）</a:t>
             </a:r>
             <a:endParaRPr lang="en-US" sz="1000" dirty="0"/>
           </a:p>
@@ -2818,7 +2818,7 @@
                 <a:ea typeface="Arial" pitchFamily="34" charset="-122"/>
                 <a:cs typeface="Arial" pitchFamily="34" charset="-120"/>
               </a:rPr>
-              <a:t>作成日：2026年3月18日</a:t>
+              <a:t>作成日：2026年3月19日</a:t>
             </a:r>
             <a:endParaRPr lang="en-US" sz="1000" dirty="0"/>
           </a:p>
@@ -3638,7 +3638,7 @@
                           <a:ea typeface="Arial" pitchFamily="34" charset="-122"/>
                           <a:cs typeface="Arial" pitchFamily="34" charset="-120"/>
                         </a:rPr>
-                        <a:t>75.7%</a:t>
+                        <a:t>75.8%</a:t>
                       </a:r>
                       <a:endParaRPr lang="en-US" sz="1000" dirty="0">
                         <a:latin typeface="Arial" charset="0"/>
@@ -4460,7 +4460,7 @@
                           <a:ea typeface="Arial" pitchFamily="34" charset="-122"/>
                           <a:cs typeface="Arial" pitchFamily="34" charset="-120"/>
                         </a:rPr>
-                        <a:t>約78件/期間</a:t>
+                        <a:t>約80件/期間</a:t>
                       </a:r>
                       <a:endParaRPr lang="en-US" sz="1000" dirty="0">
                         <a:latin typeface="Arial" charset="0"/>
@@ -4528,7 +4528,7 @@
                           <a:ea typeface="Arial" pitchFamily="34" charset="-122"/>
                           <a:cs typeface="Arial" pitchFamily="34" charset="-120"/>
                         </a:rPr>
-                        <a:t>39件以下</a:t>
+                        <a:t>40件以下</a:t>
                       </a:r>
                       <a:endParaRPr lang="en-US" sz="1000" dirty="0">
                         <a:latin typeface="Arial" charset="0"/>
@@ -5224,7 +5224,7 @@
                 <a:ea typeface="Arial" pitchFamily="34" charset="-122"/>
                 <a:cs typeface="Arial" pitchFamily="34" charset="-120"/>
               </a:rPr>
-              <a:t>75.7%</a:t>
+              <a:t>75.8%</a:t>
             </a:r>
             <a:endParaRPr lang="en-US" sz="3200" dirty="0"/>
           </a:p>
@@ -5474,7 +5474,7 @@
                 <a:ea typeface="Arial" pitchFamily="34" charset="-122"/>
                 <a:cs typeface="Arial" pitchFamily="34" charset="-120"/>
               </a:rPr>
-              <a:t>280件</a:t>
+              <a:t>285件</a:t>
             </a:r>
             <a:endParaRPr lang="en-US" sz="3200" dirty="0"/>
           </a:p>
@@ -5850,7 +5850,7 @@
                 <a:ea typeface="Arial" pitchFamily="34" charset="-122"/>
                 <a:cs typeface="Arial" pitchFamily="34" charset="-120"/>
               </a:rPr>
-              <a:t>  Я смотрела как автобусы из других отелей по третьему круг...</a:t>
+              <a:t>  夕方のシャトルバスの時間がもう少し早い時間があったらもっと良かったです</a:t>
             </a:r>
             <a:endParaRPr lang="en-US" sz="1100" dirty="0"/>
           </a:p>
@@ -6408,7 +6408,7 @@
                 <a:ea typeface="Arial" pitchFamily="34" charset="-122"/>
                 <a:cs typeface="Arial" pitchFamily="34" charset="-120"/>
               </a:rPr>
-              <a:t>75.7%</a:t>
+              <a:t>75.8%</a:t>
             </a:r>
             <a:endParaRPr lang="en-US" sz="3200" dirty="0"/>
           </a:p>
@@ -6658,7 +6658,7 @@
                 <a:ea typeface="Arial" pitchFamily="34" charset="-122"/>
                 <a:cs typeface="Arial" pitchFamily="34" charset="-120"/>
               </a:rPr>
-              <a:t>280件</a:t>
+              <a:t>285件</a:t>
             </a:r>
             <a:endParaRPr lang="en-US" sz="3200" dirty="0"/>
           </a:p>
@@ -7930,7 +7930,7 @@
                           <a:ea typeface="Arial" pitchFamily="34" charset="-122"/>
                           <a:cs typeface="Arial" pitchFamily="34" charset="-120"/>
                         </a:rPr>
-                        <a:t>35</a:t>
+                        <a:t>37</a:t>
                       </a:r>
                       <a:endParaRPr lang="en-US" sz="900" dirty="0">
                         <a:latin typeface="Arial" charset="0"/>
@@ -7998,7 +7998,7 @@
                           <a:ea typeface="Arial" pitchFamily="34" charset="-122"/>
                           <a:cs typeface="Arial" pitchFamily="34" charset="-120"/>
                         </a:rPr>
-                        <a:t>4.29</a:t>
+                        <a:t>4.3</a:t>
                       </a:r>
                       <a:endParaRPr lang="en-US" sz="900" dirty="0">
                         <a:latin typeface="Arial" charset="0"/>
@@ -8134,7 +8134,7 @@
                           <a:ea typeface="Arial" pitchFamily="34" charset="-122"/>
                           <a:cs typeface="Arial" pitchFamily="34" charset="-120"/>
                         </a:rPr>
-                        <a:t>8.57</a:t>
+                        <a:t>8.59</a:t>
                       </a:r>
                       <a:endParaRPr lang="en-US" sz="900" dirty="0">
                         <a:latin typeface="Arial" charset="0"/>
@@ -8956,7 +8956,7 @@
                           <a:ea typeface="Arial" pitchFamily="34" charset="-122"/>
                           <a:cs typeface="Arial" pitchFamily="34" charset="-120"/>
                         </a:rPr>
-                        <a:t>118</a:t>
+                        <a:t>119</a:t>
                       </a:r>
                       <a:endParaRPr lang="en-US" sz="900" dirty="0">
                         <a:latin typeface="Arial" charset="0"/>
@@ -9024,7 +9024,7 @@
                           <a:ea typeface="Arial" pitchFamily="34" charset="-122"/>
                           <a:cs typeface="Arial" pitchFamily="34" charset="-120"/>
                         </a:rPr>
-                        <a:t>8.11</a:t>
+                        <a:t>8.09</a:t>
                       </a:r>
                       <a:endParaRPr lang="en-US" sz="900" dirty="0">
                         <a:latin typeface="Arial" charset="0"/>
@@ -9160,7 +9160,7 @@
                           <a:ea typeface="Arial" pitchFamily="34" charset="-122"/>
                           <a:cs typeface="Arial" pitchFamily="34" charset="-120"/>
                         </a:rPr>
-                        <a:t>8.11</a:t>
+                        <a:t>8.09</a:t>
                       </a:r>
                       <a:endParaRPr lang="en-US" sz="900" dirty="0">
                         <a:latin typeface="Arial" charset="0"/>
@@ -9298,7 +9298,7 @@
                           <a:ea typeface="Arial" pitchFamily="34" charset="-122"/>
                           <a:cs typeface="Arial" pitchFamily="34" charset="-120"/>
                         </a:rPr>
-                        <a:t>51</a:t>
+                        <a:t>53</a:t>
                       </a:r>
                       <a:endParaRPr lang="en-US" sz="900" dirty="0">
                         <a:latin typeface="Arial" charset="0"/>
@@ -9366,7 +9366,7 @@
                           <a:ea typeface="Arial" pitchFamily="34" charset="-122"/>
                           <a:cs typeface="Arial" pitchFamily="34" charset="-120"/>
                         </a:rPr>
-                        <a:t>4.02</a:t>
+                        <a:t>4.04</a:t>
                       </a:r>
                       <a:endParaRPr lang="en-US" sz="900" dirty="0">
                         <a:latin typeface="Arial" charset="0"/>
@@ -9502,7 +9502,7 @@
                           <a:ea typeface="Arial" pitchFamily="34" charset="-122"/>
                           <a:cs typeface="Arial" pitchFamily="34" charset="-120"/>
                         </a:rPr>
-                        <a:t>8.04</a:t>
+                        <a:t>8.08</a:t>
                       </a:r>
                       <a:endParaRPr lang="en-US" sz="900" dirty="0">
                         <a:latin typeface="Arial" charset="0"/>
@@ -9910,7 +9910,7 @@
                 <a:ea typeface="Arial" pitchFamily="34" charset="-122"/>
                 <a:cs typeface="Arial" pitchFamily="34" charset="-120"/>
               </a:rPr>
-              <a:t>212件（75.7%）</a:t>
+              <a:t>216件（75.8%）</a:t>
             </a:r>
             <a:endParaRPr lang="en-US" sz="1100" dirty="0"/>
           </a:p>
@@ -10008,7 +10008,7 @@
                 <a:ea typeface="Arial" pitchFamily="34" charset="-122"/>
                 <a:cs typeface="Arial" pitchFamily="34" charset="-120"/>
               </a:rPr>
-              <a:t>59件（21.1%）</a:t>
+              <a:t>60件（21.1%）</a:t>
             </a:r>
             <a:endParaRPr lang="en-US" sz="1100" dirty="0"/>
           </a:p>
@@ -12362,7 +12362,7 @@
                           <a:ea typeface="Arial" pitchFamily="34" charset="-122"/>
                           <a:cs typeface="Arial" pitchFamily="34" charset="-120"/>
                         </a:rPr>
-                        <a:t>Я смотрела как автобусы из других отелей по третьему круг...</a:t>
+                        <a:t>夕方のシャトルバスの時間がもう少し早い時間があったらもっと良かったです</a:t>
                       </a:r>
                       <a:endParaRPr lang="en-US" sz="900" dirty="0">
                         <a:latin typeface="Arial" charset="0"/>
@@ -12430,7 +12430,7 @@
                           <a:ea typeface="Arial" pitchFamily="34" charset="-122"/>
                           <a:cs typeface="Arial" pitchFamily="34" charset="-120"/>
                         </a:rPr>
-                        <a:t>78件</a:t>
+                        <a:t>80件</a:t>
                       </a:r>
                       <a:endParaRPr lang="en-US" sz="900" dirty="0">
                         <a:latin typeface="Arial" charset="0"/>

--- a/納品レポート/ホテル別レポート/henn_na_haneda_口コミ分析レポート.pptx
+++ b/納品レポート/ホテル別レポート/henn_na_haneda_口コミ分析レポート.pptx
@@ -208,19 +208,19 @@
                 <c:formatCode>General</c:formatCode>
                 <c:ptCount val="6"/>
                 <c:pt idx="0">
-                  <c:v>9.35</c:v>
+                  <c:v>9.38</c:v>
                 </c:pt>
                 <c:pt idx="1">
                   <c:v>8.59</c:v>
                 </c:pt>
                 <c:pt idx="2">
-                  <c:v>8.35</c:v>
+                  <c:v>8.32</c:v>
                 </c:pt>
                 <c:pt idx="3">
                   <c:v>8.15</c:v>
                 </c:pt>
                 <c:pt idx="4">
-                  <c:v>8.09</c:v>
+                  <c:v>8.11</c:v>
                 </c:pt>
                 <c:pt idx="5">
                   <c:v>8.08</c:v>
@@ -566,7 +566,7 @@
               <c:numCache>
                 <c:ptCount val="3"/>
                 <c:pt idx="0">
-                  <c:v>216</c:v>
+                  <c:v>223</c:v>
                 </c:pt>
                 <c:pt idx="1">
                   <c:v>60</c:v>
@@ -823,13 +823,13 @@
                 <c:formatCode>General</c:formatCode>
                 <c:ptCount val="9"/>
                 <c:pt idx="0">
-                  <c:v>95</c:v>
+                  <c:v>97</c:v>
                 </c:pt>
                 <c:pt idx="1">
-                  <c:v>35</c:v>
+                  <c:v>36</c:v>
                 </c:pt>
                 <c:pt idx="2">
-                  <c:v>86</c:v>
+                  <c:v>90</c:v>
                 </c:pt>
                 <c:pt idx="3">
                   <c:v>27</c:v>
@@ -2798,7 +2798,7 @@
                 <a:ea typeface="Arial" pitchFamily="34" charset="-122"/>
                 <a:cs typeface="Arial" pitchFamily="34" charset="-120"/>
               </a:rPr>
-              <a:t>レビュー総数：285件（6サイト）</a:t>
+              <a:t>レビュー総数：292件（6サイト）</a:t>
             </a:r>
             <a:endParaRPr lang="en-US" sz="1000" dirty="0"/>
           </a:p>
@@ -2818,7 +2818,7 @@
                 <a:ea typeface="Arial" pitchFamily="34" charset="-122"/>
                 <a:cs typeface="Arial" pitchFamily="34" charset="-120"/>
               </a:rPr>
-              <a:t>作成日：2026年3月19日</a:t>
+              <a:t>作成日：2026年3月20日</a:t>
             </a:r>
             <a:endParaRPr lang="en-US" sz="1000" dirty="0"/>
           </a:p>
@@ -3364,7 +3364,7 @@
                           <a:ea typeface="Arial" pitchFamily="34" charset="-122"/>
                           <a:cs typeface="Arial" pitchFamily="34" charset="-120"/>
                         </a:rPr>
-                        <a:t>8.27点</a:t>
+                        <a:t>8.28点</a:t>
                       </a:r>
                       <a:endParaRPr lang="en-US" sz="1000" dirty="0">
                         <a:latin typeface="Arial" charset="0"/>
@@ -3638,7 +3638,7 @@
                           <a:ea typeface="Arial" pitchFamily="34" charset="-122"/>
                           <a:cs typeface="Arial" pitchFamily="34" charset="-120"/>
                         </a:rPr>
-                        <a:t>75.8%</a:t>
+                        <a:t>76.4%</a:t>
                       </a:r>
                       <a:endParaRPr lang="en-US" sz="1000" dirty="0">
                         <a:latin typeface="Arial" charset="0"/>
@@ -3912,7 +3912,7 @@
                           <a:ea typeface="Arial" pitchFamily="34" charset="-122"/>
                           <a:cs typeface="Arial" pitchFamily="34" charset="-120"/>
                         </a:rPr>
-                        <a:t>3.2%</a:t>
+                        <a:t>3.1%</a:t>
                       </a:r>
                       <a:endParaRPr lang="en-US" sz="1000" dirty="0">
                         <a:latin typeface="Arial" charset="0"/>
@@ -4460,7 +4460,7 @@
                           <a:ea typeface="Arial" pitchFamily="34" charset="-122"/>
                           <a:cs typeface="Arial" pitchFamily="34" charset="-120"/>
                         </a:rPr>
-                        <a:t>約80件/期間</a:t>
+                        <a:t>約83件/期間</a:t>
                       </a:r>
                       <a:endParaRPr lang="en-US" sz="1000" dirty="0">
                         <a:latin typeface="Arial" charset="0"/>
@@ -4528,7 +4528,7 @@
                           <a:ea typeface="Arial" pitchFamily="34" charset="-122"/>
                           <a:cs typeface="Arial" pitchFamily="34" charset="-120"/>
                         </a:rPr>
-                        <a:t>40件以下</a:t>
+                        <a:t>41件以下</a:t>
                       </a:r>
                       <a:endParaRPr lang="en-US" sz="1000" dirty="0">
                         <a:latin typeface="Arial" charset="0"/>
@@ -5099,7 +5099,7 @@
                 <a:ea typeface="Arial" pitchFamily="34" charset="-122"/>
                 <a:cs typeface="Arial" pitchFamily="34" charset="-120"/>
               </a:rPr>
-              <a:t>8.27</a:t>
+              <a:t>8.28</a:t>
             </a:r>
             <a:endParaRPr lang="en-US" sz="3200" dirty="0"/>
           </a:p>
@@ -5224,7 +5224,7 @@
                 <a:ea typeface="Arial" pitchFamily="34" charset="-122"/>
                 <a:cs typeface="Arial" pitchFamily="34" charset="-120"/>
               </a:rPr>
-              <a:t>75.8%</a:t>
+              <a:t>76.4%</a:t>
             </a:r>
             <a:endParaRPr lang="en-US" sz="3200" dirty="0"/>
           </a:p>
@@ -5349,7 +5349,7 @@
                 <a:ea typeface="Arial" pitchFamily="34" charset="-122"/>
                 <a:cs typeface="Arial" pitchFamily="34" charset="-120"/>
               </a:rPr>
-              <a:t>3.2%</a:t>
+              <a:t>3.1%</a:t>
             </a:r>
             <a:endParaRPr lang="en-US" sz="3200" dirty="0"/>
           </a:p>
@@ -5474,7 +5474,7 @@
                 <a:ea typeface="Arial" pitchFamily="34" charset="-122"/>
                 <a:cs typeface="Arial" pitchFamily="34" charset="-120"/>
               </a:rPr>
-              <a:t>285件</a:t>
+              <a:t>292件</a:t>
             </a:r>
             <a:endParaRPr lang="en-US" sz="3200" dirty="0"/>
           </a:p>
@@ -5622,7 +5622,7 @@
                 <a:ea typeface="Arial" pitchFamily="34" charset="-122"/>
                 <a:cs typeface="Arial" pitchFamily="34" charset="-120"/>
               </a:rPr>
-              <a:t>  Я смотрела как автобусы из других отелей по третьему круг...</a:t>
+              <a:t>  朝のシャトルバスは10分前に行ったらもぅいっぱいでしたが、駅へもすぐなので電車で行けば問題なくすぐ着きます</a:t>
             </a:r>
             <a:endParaRPr lang="en-US" sz="1100" dirty="0"/>
           </a:p>
@@ -5662,7 +5662,7 @@
                 <a:ea typeface="Arial" pitchFamily="34" charset="-122"/>
                 <a:cs typeface="Arial" pitchFamily="34" charset="-120"/>
               </a:rPr>
-              <a:t>  他のホテルからのバスが3度も到着するのを見ましたが、このホテルは何の対応もしてくれませんでした</a:t>
+              <a:t>  バスのスタッフさんやお部屋からの電話対応をしてくださったスタッフさん、とても親切でした</a:t>
             </a:r>
             <a:endParaRPr lang="en-US" sz="1100" dirty="0"/>
           </a:p>
@@ -5702,7 +5702,7 @@
                 <a:ea typeface="Arial" pitchFamily="34" charset="-122"/>
                 <a:cs typeface="Arial" pitchFamily="34" charset="-120"/>
               </a:rPr>
-              <a:t>  初めて宿泊させていただきました 話に聞いてた通り恐竜がお出迎えしてくれるフロントにはやっぱりビックリさせられました...</a:t>
+              <a:t>  狭いながらも清潔なお部屋で安心して過ごせました</a:t>
             </a:r>
             <a:endParaRPr lang="en-US" sz="1100" dirty="0"/>
           </a:p>
@@ -5850,7 +5850,7 @@
                 <a:ea typeface="Arial" pitchFamily="34" charset="-122"/>
                 <a:cs typeface="Arial" pitchFamily="34" charset="-120"/>
               </a:rPr>
-              <a:t>  夕方のシャトルバスの時間がもう少し早い時間があったらもっと良かったです</a:t>
+              <a:t>  朝のシャトルバスは10分前に行ったらもぅいっぱいでしたが、駅へもすぐなので電車で行けば問題なくすぐ着きます</a:t>
             </a:r>
             <a:endParaRPr lang="en-US" sz="1100" dirty="0"/>
           </a:p>
@@ -5890,7 +5890,7 @@
                 <a:ea typeface="Arial" pitchFamily="34" charset="-122"/>
                 <a:cs typeface="Arial" pitchFamily="34" charset="-120"/>
               </a:rPr>
-              <a:t>  Proximité des moyens de transport pour accéder à L aéropo...</a:t>
+              <a:t>  Needs another pillow on each bed</a:t>
             </a:r>
             <a:endParaRPr lang="en-US" sz="1100" dirty="0"/>
           </a:p>
@@ -5930,7 +5930,7 @@
                 <a:ea typeface="Arial" pitchFamily="34" charset="-122"/>
                 <a:cs typeface="Arial" pitchFamily="34" charset="-120"/>
               </a:rPr>
-              <a:t>  the room i chose was a little small for our luggages, and...</a:t>
+              <a:t>  狭いながらも清潔なお部屋で安心して過ごせました</a:t>
             </a:r>
             <a:endParaRPr lang="en-US" sz="1100" dirty="0"/>
           </a:p>
@@ -6283,7 +6283,7 @@
                 <a:ea typeface="Arial" pitchFamily="34" charset="-122"/>
                 <a:cs typeface="Arial" pitchFamily="34" charset="-120"/>
               </a:rPr>
-              <a:t>8.27</a:t>
+              <a:t>8.28</a:t>
             </a:r>
             <a:endParaRPr lang="en-US" sz="3200" dirty="0"/>
           </a:p>
@@ -6408,7 +6408,7 @@
                 <a:ea typeface="Arial" pitchFamily="34" charset="-122"/>
                 <a:cs typeface="Arial" pitchFamily="34" charset="-120"/>
               </a:rPr>
-              <a:t>75.8%</a:t>
+              <a:t>76.4%</a:t>
             </a:r>
             <a:endParaRPr lang="en-US" sz="3200" dirty="0"/>
           </a:p>
@@ -6533,7 +6533,7 @@
                 <a:ea typeface="Arial" pitchFamily="34" charset="-122"/>
                 <a:cs typeface="Arial" pitchFamily="34" charset="-120"/>
               </a:rPr>
-              <a:t>3.2%</a:t>
+              <a:t>3.1%</a:t>
             </a:r>
             <a:endParaRPr lang="en-US" sz="3200" dirty="0"/>
           </a:p>
@@ -6658,7 +6658,7 @@
                 <a:ea typeface="Arial" pitchFamily="34" charset="-122"/>
                 <a:cs typeface="Arial" pitchFamily="34" charset="-120"/>
               </a:rPr>
-              <a:t>285件</a:t>
+              <a:t>292件</a:t>
             </a:r>
             <a:endParaRPr lang="en-US" sz="3200" dirty="0"/>
           </a:p>
@@ -7079,7 +7079,7 @@
                 <a:ea typeface="Arial" pitchFamily="34" charset="-122"/>
                 <a:cs typeface="Arial" pitchFamily="34" charset="-120"/>
               </a:rPr>
-              <a:t>Trip.com(9.35)が最高スコア。</a:t>
+              <a:t>Trip.com(9.38)が最高スコア。</a:t>
             </a:r>
             <a:endParaRPr lang="en-US" sz="1100" dirty="0"/>
           </a:p>
@@ -7588,7 +7588,7 @@
                           <a:ea typeface="Arial" pitchFamily="34" charset="-122"/>
                           <a:cs typeface="Arial" pitchFamily="34" charset="-120"/>
                         </a:rPr>
-                        <a:t>20</a:t>
+                        <a:t>21</a:t>
                       </a:r>
                       <a:endParaRPr lang="en-US" sz="900" dirty="0">
                         <a:latin typeface="Arial" charset="0"/>
@@ -7656,7 +7656,7 @@
                           <a:ea typeface="Arial" pitchFamily="34" charset="-122"/>
                           <a:cs typeface="Arial" pitchFamily="34" charset="-120"/>
                         </a:rPr>
-                        <a:t>9.35</a:t>
+                        <a:t>9.38</a:t>
                       </a:r>
                       <a:endParaRPr lang="en-US" sz="900" dirty="0">
                         <a:latin typeface="Arial" charset="0"/>
@@ -7792,7 +7792,7 @@
                           <a:ea typeface="Arial" pitchFamily="34" charset="-122"/>
                           <a:cs typeface="Arial" pitchFamily="34" charset="-120"/>
                         </a:rPr>
-                        <a:t>9.35</a:t>
+                        <a:t>9.38</a:t>
                       </a:r>
                       <a:endParaRPr lang="en-US" sz="900" dirty="0">
                         <a:latin typeface="Arial" charset="0"/>
@@ -8272,7 +8272,7 @@
                           <a:ea typeface="Arial" pitchFamily="34" charset="-122"/>
                           <a:cs typeface="Arial" pitchFamily="34" charset="-120"/>
                         </a:rPr>
-                        <a:t>23</a:t>
+                        <a:t>25</a:t>
                       </a:r>
                       <a:endParaRPr lang="en-US" sz="900" dirty="0">
                         <a:latin typeface="Arial" charset="0"/>
@@ -8340,7 +8340,7 @@
                           <a:ea typeface="Arial" pitchFamily="34" charset="-122"/>
                           <a:cs typeface="Arial" pitchFamily="34" charset="-120"/>
                         </a:rPr>
-                        <a:t>4.17</a:t>
+                        <a:t>4.16</a:t>
                       </a:r>
                       <a:endParaRPr lang="en-US" sz="900" dirty="0">
                         <a:latin typeface="Arial" charset="0"/>
@@ -8476,7 +8476,7 @@
                           <a:ea typeface="Arial" pitchFamily="34" charset="-122"/>
                           <a:cs typeface="Arial" pitchFamily="34" charset="-120"/>
                         </a:rPr>
-                        <a:t>8.35</a:t>
+                        <a:t>8.32</a:t>
                       </a:r>
                       <a:endParaRPr lang="en-US" sz="900" dirty="0">
                         <a:latin typeface="Arial" charset="0"/>
@@ -8614,7 +8614,7 @@
                           <a:ea typeface="Arial" pitchFamily="34" charset="-122"/>
                           <a:cs typeface="Arial" pitchFamily="34" charset="-120"/>
                         </a:rPr>
-                        <a:t>33</a:t>
+                        <a:t>34</a:t>
                       </a:r>
                       <a:endParaRPr lang="en-US" sz="900" dirty="0">
                         <a:latin typeface="Arial" charset="0"/>
@@ -8956,7 +8956,7 @@
                           <a:ea typeface="Arial" pitchFamily="34" charset="-122"/>
                           <a:cs typeface="Arial" pitchFamily="34" charset="-120"/>
                         </a:rPr>
-                        <a:t>119</a:t>
+                        <a:t>122</a:t>
                       </a:r>
                       <a:endParaRPr lang="en-US" sz="900" dirty="0">
                         <a:latin typeface="Arial" charset="0"/>
@@ -9024,7 +9024,7 @@
                           <a:ea typeface="Arial" pitchFamily="34" charset="-122"/>
                           <a:cs typeface="Arial" pitchFamily="34" charset="-120"/>
                         </a:rPr>
-                        <a:t>8.09</a:t>
+                        <a:t>8.11</a:t>
                       </a:r>
                       <a:endParaRPr lang="en-US" sz="900" dirty="0">
                         <a:latin typeface="Arial" charset="0"/>
@@ -9160,7 +9160,7 @@
                           <a:ea typeface="Arial" pitchFamily="34" charset="-122"/>
                           <a:cs typeface="Arial" pitchFamily="34" charset="-120"/>
                         </a:rPr>
-                        <a:t>8.09</a:t>
+                        <a:t>8.11</a:t>
                       </a:r>
                       <a:endParaRPr lang="en-US" sz="900" dirty="0">
                         <a:latin typeface="Arial" charset="0"/>
@@ -9910,7 +9910,7 @@
                 <a:ea typeface="Arial" pitchFamily="34" charset="-122"/>
                 <a:cs typeface="Arial" pitchFamily="34" charset="-120"/>
               </a:rPr>
-              <a:t>216件（75.8%）</a:t>
+              <a:t>223件（76.4%）</a:t>
             </a:r>
             <a:endParaRPr lang="en-US" sz="1100" dirty="0"/>
           </a:p>
@@ -10008,7 +10008,7 @@
                 <a:ea typeface="Arial" pitchFamily="34" charset="-122"/>
                 <a:cs typeface="Arial" pitchFamily="34" charset="-120"/>
               </a:rPr>
-              <a:t>60件（21.1%）</a:t>
+              <a:t>60件（20.5%）</a:t>
             </a:r>
             <a:endParaRPr lang="en-US" sz="1100" dirty="0"/>
           </a:p>
@@ -10106,7 +10106,7 @@
                 <a:ea typeface="Arial" pitchFamily="34" charset="-122"/>
                 <a:cs typeface="Arial" pitchFamily="34" charset="-120"/>
               </a:rPr>
-              <a:t>9件（3.2%）</a:t>
+              <a:t>9件（3.1%）</a:t>
             </a:r>
             <a:endParaRPr lang="en-US" sz="1100" dirty="0"/>
           </a:p>
@@ -10518,7 +10518,7 @@
                 <a:ea typeface="Arial" pitchFamily="34" charset="-122"/>
                 <a:cs typeface="Arial" pitchFamily="34" charset="-120"/>
               </a:rPr>
-              <a:t>Я смотрела как автобусы из других отелей по третьему круг...</a:t>
+              <a:t>朝のシャトルバスは10分前に行ったらもぅいっぱいでしたが、駅へもすぐなので電車で行けば問題なくすぐ着きます</a:t>
             </a:r>
             <a:endParaRPr lang="en-US" sz="900" dirty="0"/>
           </a:p>
@@ -10533,6 +10533,452 @@
         <p:spPr>
           <a:xfrm>
             <a:off x="594360" y="1828800"/>
+            <a:ext cx="2377440" cy="640080"/>
+          </a:xfrm>
+          <a:prstGeom prst="rect">
+            <a:avLst/>
+          </a:prstGeom>
+          <a:noFill/>
+          <a:ln/>
+        </p:spPr>
+        <p:txBody>
+          <a:bodyPr wrap="square" lIns="0" tIns="0" rIns="0" bIns="0" rtlCol="0" anchor="ctr"/>
+          <a:lstStyle/>
+          <a:p>
+            <a:pPr indent="0" marL="0">
+              <a:buNone/>
+            </a:pPr>
+            <a:r>
+              <a:rPr lang="en-US" sz="900" i="1" dirty="0">
+                <a:solidFill>
+                  <a:srgbClr val="3B7DD8"/>
+                </a:solidFill>
+                <a:latin typeface="Arial" pitchFamily="34" charset="0"/>
+                <a:ea typeface="Arial" pitchFamily="34" charset="-122"/>
+                <a:cs typeface="Arial" pitchFamily="34" charset="-120"/>
+              </a:rPr>
+              <a:t>「Great location」</a:t>
+            </a:r>
+            <a:endParaRPr lang="en-US" sz="900" dirty="0"/>
+          </a:p>
+        </p:txBody>
+      </p:sp>
+      <p:sp>
+        <p:nvSpPr>
+          <p:cNvPr id="12" name="Shape 10"/>
+          <p:cNvSpPr/>
+          <p:nvPr/>
+        </p:nvSpPr>
+        <p:spPr>
+          <a:xfrm>
+            <a:off x="3291840" y="1051560"/>
+            <a:ext cx="2651760" cy="1600200"/>
+          </a:xfrm>
+          <a:prstGeom prst="rect">
+            <a:avLst/>
+          </a:prstGeom>
+          <a:solidFill>
+            <a:srgbClr val="FFFFFF"/>
+          </a:solidFill>
+          <a:ln/>
+          <a:effectLst>
+            <a:outerShdw sx="100000" sy="100000" kx="0" ky="0" algn="bl" rotWithShape="0" blurRad="50800" dist="25400" dir="8100000">
+              <a:srgbClr val="000000">
+                <a:alpha val="10000"/>
+              </a:srgbClr>
+            </a:outerShdw>
+          </a:effectLst>
+        </p:spPr>
+      </p:sp>
+      <p:sp>
+        <p:nvSpPr>
+          <p:cNvPr id="13" name="Shape 11"/>
+          <p:cNvSpPr/>
+          <p:nvPr/>
+        </p:nvSpPr>
+        <p:spPr>
+          <a:xfrm>
+            <a:off x="3291840" y="1051560"/>
+            <a:ext cx="54864" cy="1600200"/>
+          </a:xfrm>
+          <a:prstGeom prst="rect">
+            <a:avLst/>
+          </a:prstGeom>
+          <a:solidFill>
+            <a:srgbClr val="16A34A"/>
+          </a:solidFill>
+          <a:ln/>
+        </p:spPr>
+      </p:sp>
+      <p:sp>
+        <p:nvSpPr>
+          <p:cNvPr id="14" name="Shape 12"/>
+          <p:cNvSpPr/>
+          <p:nvPr/>
+        </p:nvSpPr>
+        <p:spPr>
+          <a:xfrm>
+            <a:off x="5120640" y="1124712"/>
+            <a:ext cx="658368" cy="228600"/>
+          </a:xfrm>
+          <a:prstGeom prst="rect">
+            <a:avLst/>
+          </a:prstGeom>
+          <a:solidFill>
+            <a:srgbClr val="DCFCE7"/>
+          </a:solidFill>
+          <a:ln/>
+        </p:spPr>
+      </p:sp>
+      <p:sp>
+        <p:nvSpPr>
+          <p:cNvPr id="15" name="Text 13"/>
+          <p:cNvSpPr/>
+          <p:nvPr/>
+        </p:nvSpPr>
+        <p:spPr>
+          <a:xfrm>
+            <a:off x="5120640" y="1124712"/>
+            <a:ext cx="658368" cy="228600"/>
+          </a:xfrm>
+          <a:prstGeom prst="rect">
+            <a:avLst/>
+          </a:prstGeom>
+          <a:noFill/>
+          <a:ln/>
+        </p:spPr>
+        <p:txBody>
+          <a:bodyPr wrap="square" lIns="0" tIns="0" rIns="0" bIns="0" rtlCol="0" anchor="ctr"/>
+          <a:lstStyle/>
+          <a:p>
+            <a:pPr algn="ctr" indent="0" marL="0">
+              <a:buNone/>
+            </a:pPr>
+            <a:r>
+              <a:rPr lang="en-US" sz="900" b="1" dirty="0">
+                <a:solidFill>
+                  <a:srgbClr val="16A34A"/>
+                </a:solidFill>
+                <a:latin typeface="Arial" pitchFamily="34" charset="0"/>
+                <a:ea typeface="Arial" pitchFamily="34" charset="-122"/>
+                <a:cs typeface="Arial" pitchFamily="34" charset="-120"/>
+              </a:rPr>
+              <a:t>50件+</a:t>
+            </a:r>
+            <a:endParaRPr lang="en-US" sz="900" dirty="0"/>
+          </a:p>
+        </p:txBody>
+      </p:sp>
+      <p:sp>
+        <p:nvSpPr>
+          <p:cNvPr id="16" name="Text 14"/>
+          <p:cNvSpPr/>
+          <p:nvPr/>
+        </p:nvSpPr>
+        <p:spPr>
+          <a:xfrm>
+            <a:off x="3429000" y="1124712"/>
+            <a:ext cx="1645920" cy="274320"/>
+          </a:xfrm>
+          <a:prstGeom prst="rect">
+            <a:avLst/>
+          </a:prstGeom>
+          <a:noFill/>
+          <a:ln/>
+        </p:spPr>
+        <p:txBody>
+          <a:bodyPr wrap="square" lIns="0" tIns="0" rIns="0" bIns="0" rtlCol="0" anchor="ctr"/>
+          <a:lstStyle/>
+          <a:p>
+            <a:pPr indent="0" marL="0">
+              <a:buNone/>
+            </a:pPr>
+            <a:r>
+              <a:rPr lang="en-US" sz="1300" b="1" dirty="0">
+                <a:solidFill>
+                  <a:srgbClr val="1A2744"/>
+                </a:solidFill>
+                <a:latin typeface="Arial" pitchFamily="34" charset="0"/>
+                <a:ea typeface="Arial" pitchFamily="34" charset="-122"/>
+                <a:cs typeface="Arial" pitchFamily="34" charset="-120"/>
+              </a:rPr>
+              <a:t>スタッフの対応</a:t>
+            </a:r>
+            <a:endParaRPr lang="en-US" sz="1300" dirty="0"/>
+          </a:p>
+        </p:txBody>
+      </p:sp>
+      <p:sp>
+        <p:nvSpPr>
+          <p:cNvPr id="17" name="Text 15"/>
+          <p:cNvSpPr/>
+          <p:nvPr/>
+        </p:nvSpPr>
+        <p:spPr>
+          <a:xfrm>
+            <a:off x="3429000" y="1417320"/>
+            <a:ext cx="2377440" cy="365760"/>
+          </a:xfrm>
+          <a:prstGeom prst="rect">
+            <a:avLst/>
+          </a:prstGeom>
+          <a:noFill/>
+          <a:ln/>
+        </p:spPr>
+        <p:txBody>
+          <a:bodyPr wrap="square" lIns="0" tIns="0" rIns="0" bIns="0" rtlCol="0" anchor="ctr"/>
+          <a:lstStyle/>
+          <a:p>
+            <a:pPr indent="0" marL="0">
+              <a:buNone/>
+            </a:pPr>
+            <a:r>
+              <a:rPr lang="en-US" sz="900" dirty="0">
+                <a:solidFill>
+                  <a:srgbClr val="64748B"/>
+                </a:solidFill>
+                <a:latin typeface="Arial" pitchFamily="34" charset="0"/>
+                <a:ea typeface="Arial" pitchFamily="34" charset="-122"/>
+                <a:cs typeface="Arial" pitchFamily="34" charset="-120"/>
+              </a:rPr>
+              <a:t>バスのスタッフさんやお部屋からの電話対応をしてくださったスタッフさん、とても親切でした</a:t>
+            </a:r>
+            <a:endParaRPr lang="en-US" sz="900" dirty="0"/>
+          </a:p>
+        </p:txBody>
+      </p:sp>
+      <p:sp>
+        <p:nvSpPr>
+          <p:cNvPr id="18" name="Text 16"/>
+          <p:cNvSpPr/>
+          <p:nvPr/>
+        </p:nvSpPr>
+        <p:spPr>
+          <a:xfrm>
+            <a:off x="3429000" y="1828800"/>
+            <a:ext cx="2377440" cy="640080"/>
+          </a:xfrm>
+          <a:prstGeom prst="rect">
+            <a:avLst/>
+          </a:prstGeom>
+          <a:noFill/>
+          <a:ln/>
+        </p:spPr>
+        <p:txBody>
+          <a:bodyPr wrap="square" lIns="0" tIns="0" rIns="0" bIns="0" rtlCol="0" anchor="ctr"/>
+          <a:lstStyle/>
+          <a:p>
+            <a:pPr indent="0" marL="0">
+              <a:buNone/>
+            </a:pPr>
+            <a:r>
+              <a:rPr lang="en-US" sz="900" i="1" dirty="0">
+                <a:solidFill>
+                  <a:srgbClr val="3B7DD8"/>
+                </a:solidFill>
+                <a:latin typeface="Arial" pitchFamily="34" charset="0"/>
+                <a:ea typeface="Arial" pitchFamily="34" charset="-122"/>
+                <a:cs typeface="Arial" pitchFamily="34" charset="-120"/>
+              </a:rPr>
+              <a:t>「他のホテルからのバスが3度も到着するのを見ましたが、このホテルは何の対応もしてくれませんでした」</a:t>
+            </a:r>
+            <a:endParaRPr lang="en-US" sz="900" dirty="0"/>
+          </a:p>
+        </p:txBody>
+      </p:sp>
+      <p:sp>
+        <p:nvSpPr>
+          <p:cNvPr id="19" name="Shape 17"/>
+          <p:cNvSpPr/>
+          <p:nvPr/>
+        </p:nvSpPr>
+        <p:spPr>
+          <a:xfrm>
+            <a:off x="6126480" y="1051560"/>
+            <a:ext cx="2651760" cy="1600200"/>
+          </a:xfrm>
+          <a:prstGeom prst="rect">
+            <a:avLst/>
+          </a:prstGeom>
+          <a:solidFill>
+            <a:srgbClr val="FFFFFF"/>
+          </a:solidFill>
+          <a:ln/>
+          <a:effectLst>
+            <a:outerShdw sx="100000" sy="100000" kx="0" ky="0" algn="bl" rotWithShape="0" blurRad="50800" dist="25400" dir="8100000">
+              <a:srgbClr val="000000">
+                <a:alpha val="10000"/>
+              </a:srgbClr>
+            </a:outerShdw>
+          </a:effectLst>
+        </p:spPr>
+      </p:sp>
+      <p:sp>
+        <p:nvSpPr>
+          <p:cNvPr id="20" name="Shape 18"/>
+          <p:cNvSpPr/>
+          <p:nvPr/>
+        </p:nvSpPr>
+        <p:spPr>
+          <a:xfrm>
+            <a:off x="6126480" y="1051560"/>
+            <a:ext cx="54864" cy="1600200"/>
+          </a:xfrm>
+          <a:prstGeom prst="rect">
+            <a:avLst/>
+          </a:prstGeom>
+          <a:solidFill>
+            <a:srgbClr val="16A34A"/>
+          </a:solidFill>
+          <a:ln/>
+        </p:spPr>
+      </p:sp>
+      <p:sp>
+        <p:nvSpPr>
+          <p:cNvPr id="21" name="Shape 19"/>
+          <p:cNvSpPr/>
+          <p:nvPr/>
+        </p:nvSpPr>
+        <p:spPr>
+          <a:xfrm>
+            <a:off x="7955280" y="1124712"/>
+            <a:ext cx="658368" cy="228600"/>
+          </a:xfrm>
+          <a:prstGeom prst="rect">
+            <a:avLst/>
+          </a:prstGeom>
+          <a:solidFill>
+            <a:srgbClr val="DCFCE7"/>
+          </a:solidFill>
+          <a:ln/>
+        </p:spPr>
+      </p:sp>
+      <p:sp>
+        <p:nvSpPr>
+          <p:cNvPr id="22" name="Text 20"/>
+          <p:cNvSpPr/>
+          <p:nvPr/>
+        </p:nvSpPr>
+        <p:spPr>
+          <a:xfrm>
+            <a:off x="7955280" y="1124712"/>
+            <a:ext cx="658368" cy="228600"/>
+          </a:xfrm>
+          <a:prstGeom prst="rect">
+            <a:avLst/>
+          </a:prstGeom>
+          <a:noFill/>
+          <a:ln/>
+        </p:spPr>
+        <p:txBody>
+          <a:bodyPr wrap="square" lIns="0" tIns="0" rIns="0" bIns="0" rtlCol="0" anchor="ctr"/>
+          <a:lstStyle/>
+          <a:p>
+            <a:pPr algn="ctr" indent="0" marL="0">
+              <a:buNone/>
+            </a:pPr>
+            <a:r>
+              <a:rPr lang="en-US" sz="900" b="1" dirty="0">
+                <a:solidFill>
+                  <a:srgbClr val="16A34A"/>
+                </a:solidFill>
+                <a:latin typeface="Arial" pitchFamily="34" charset="0"/>
+                <a:ea typeface="Arial" pitchFamily="34" charset="-122"/>
+                <a:cs typeface="Arial" pitchFamily="34" charset="-120"/>
+              </a:rPr>
+              <a:t>50件+</a:t>
+            </a:r>
+            <a:endParaRPr lang="en-US" sz="900" dirty="0"/>
+          </a:p>
+        </p:txBody>
+      </p:sp>
+      <p:sp>
+        <p:nvSpPr>
+          <p:cNvPr id="23" name="Text 21"/>
+          <p:cNvSpPr/>
+          <p:nvPr/>
+        </p:nvSpPr>
+        <p:spPr>
+          <a:xfrm>
+            <a:off x="6263640" y="1124712"/>
+            <a:ext cx="1645920" cy="274320"/>
+          </a:xfrm>
+          <a:prstGeom prst="rect">
+            <a:avLst/>
+          </a:prstGeom>
+          <a:noFill/>
+          <a:ln/>
+        </p:spPr>
+        <p:txBody>
+          <a:bodyPr wrap="square" lIns="0" tIns="0" rIns="0" bIns="0" rtlCol="0" anchor="ctr"/>
+          <a:lstStyle/>
+          <a:p>
+            <a:pPr indent="0" marL="0">
+              <a:buNone/>
+            </a:pPr>
+            <a:r>
+              <a:rPr lang="en-US" sz="1300" b="1" dirty="0">
+                <a:solidFill>
+                  <a:srgbClr val="1A2744"/>
+                </a:solidFill>
+                <a:latin typeface="Arial" pitchFamily="34" charset="0"/>
+                <a:ea typeface="Arial" pitchFamily="34" charset="-122"/>
+                <a:cs typeface="Arial" pitchFamily="34" charset="-120"/>
+              </a:rPr>
+              <a:t>清潔さ・清掃</a:t>
+            </a:r>
+            <a:endParaRPr lang="en-US" sz="1300" dirty="0"/>
+          </a:p>
+        </p:txBody>
+      </p:sp>
+      <p:sp>
+        <p:nvSpPr>
+          <p:cNvPr id="24" name="Text 22"/>
+          <p:cNvSpPr/>
+          <p:nvPr/>
+        </p:nvSpPr>
+        <p:spPr>
+          <a:xfrm>
+            <a:off x="6263640" y="1417320"/>
+            <a:ext cx="2377440" cy="365760"/>
+          </a:xfrm>
+          <a:prstGeom prst="rect">
+            <a:avLst/>
+          </a:prstGeom>
+          <a:noFill/>
+          <a:ln/>
+        </p:spPr>
+        <p:txBody>
+          <a:bodyPr wrap="square" lIns="0" tIns="0" rIns="0" bIns="0" rtlCol="0" anchor="ctr"/>
+          <a:lstStyle/>
+          <a:p>
+            <a:pPr indent="0" marL="0">
+              <a:buNone/>
+            </a:pPr>
+            <a:r>
+              <a:rPr lang="en-US" sz="900" dirty="0">
+                <a:solidFill>
+                  <a:srgbClr val="64748B"/>
+                </a:solidFill>
+                <a:latin typeface="Arial" pitchFamily="34" charset="0"/>
+                <a:ea typeface="Arial" pitchFamily="34" charset="-122"/>
+                <a:cs typeface="Arial" pitchFamily="34" charset="-120"/>
+              </a:rPr>
+              <a:t>狭いながらも清潔なお部屋で安心して過ごせました</a:t>
+            </a:r>
+            <a:endParaRPr lang="en-US" sz="900" dirty="0"/>
+          </a:p>
+        </p:txBody>
+      </p:sp>
+      <p:sp>
+        <p:nvSpPr>
+          <p:cNvPr id="25" name="Text 23"/>
+          <p:cNvSpPr/>
+          <p:nvPr/>
+        </p:nvSpPr>
+        <p:spPr>
+          <a:xfrm>
+            <a:off x="6263640" y="1828800"/>
             <a:ext cx="2377440" cy="640080"/>
           </a:xfrm>
           <a:prstGeom prst="rect">
@@ -10565,452 +11011,6 @@
       </p:sp>
       <p:sp>
         <p:nvSpPr>
-          <p:cNvPr id="12" name="Shape 10"/>
-          <p:cNvSpPr/>
-          <p:nvPr/>
-        </p:nvSpPr>
-        <p:spPr>
-          <a:xfrm>
-            <a:off x="3291840" y="1051560"/>
-            <a:ext cx="2651760" cy="1600200"/>
-          </a:xfrm>
-          <a:prstGeom prst="rect">
-            <a:avLst/>
-          </a:prstGeom>
-          <a:solidFill>
-            <a:srgbClr val="FFFFFF"/>
-          </a:solidFill>
-          <a:ln/>
-          <a:effectLst>
-            <a:outerShdw sx="100000" sy="100000" kx="0" ky="0" algn="bl" rotWithShape="0" blurRad="50800" dist="25400" dir="8100000">
-              <a:srgbClr val="000000">
-                <a:alpha val="10000"/>
-              </a:srgbClr>
-            </a:outerShdw>
-          </a:effectLst>
-        </p:spPr>
-      </p:sp>
-      <p:sp>
-        <p:nvSpPr>
-          <p:cNvPr id="13" name="Shape 11"/>
-          <p:cNvSpPr/>
-          <p:nvPr/>
-        </p:nvSpPr>
-        <p:spPr>
-          <a:xfrm>
-            <a:off x="3291840" y="1051560"/>
-            <a:ext cx="54864" cy="1600200"/>
-          </a:xfrm>
-          <a:prstGeom prst="rect">
-            <a:avLst/>
-          </a:prstGeom>
-          <a:solidFill>
-            <a:srgbClr val="16A34A"/>
-          </a:solidFill>
-          <a:ln/>
-        </p:spPr>
-      </p:sp>
-      <p:sp>
-        <p:nvSpPr>
-          <p:cNvPr id="14" name="Shape 12"/>
-          <p:cNvSpPr/>
-          <p:nvPr/>
-        </p:nvSpPr>
-        <p:spPr>
-          <a:xfrm>
-            <a:off x="5120640" y="1124712"/>
-            <a:ext cx="658368" cy="228600"/>
-          </a:xfrm>
-          <a:prstGeom prst="rect">
-            <a:avLst/>
-          </a:prstGeom>
-          <a:solidFill>
-            <a:srgbClr val="DCFCE7"/>
-          </a:solidFill>
-          <a:ln/>
-        </p:spPr>
-      </p:sp>
-      <p:sp>
-        <p:nvSpPr>
-          <p:cNvPr id="15" name="Text 13"/>
-          <p:cNvSpPr/>
-          <p:nvPr/>
-        </p:nvSpPr>
-        <p:spPr>
-          <a:xfrm>
-            <a:off x="5120640" y="1124712"/>
-            <a:ext cx="658368" cy="228600"/>
-          </a:xfrm>
-          <a:prstGeom prst="rect">
-            <a:avLst/>
-          </a:prstGeom>
-          <a:noFill/>
-          <a:ln/>
-        </p:spPr>
-        <p:txBody>
-          <a:bodyPr wrap="square" lIns="0" tIns="0" rIns="0" bIns="0" rtlCol="0" anchor="ctr"/>
-          <a:lstStyle/>
-          <a:p>
-            <a:pPr algn="ctr" indent="0" marL="0">
-              <a:buNone/>
-            </a:pPr>
-            <a:r>
-              <a:rPr lang="en-US" sz="900" b="1" dirty="0">
-                <a:solidFill>
-                  <a:srgbClr val="16A34A"/>
-                </a:solidFill>
-                <a:latin typeface="Arial" pitchFamily="34" charset="0"/>
-                <a:ea typeface="Arial" pitchFamily="34" charset="-122"/>
-                <a:cs typeface="Arial" pitchFamily="34" charset="-120"/>
-              </a:rPr>
-              <a:t>50件+</a:t>
-            </a:r>
-            <a:endParaRPr lang="en-US" sz="900" dirty="0"/>
-          </a:p>
-        </p:txBody>
-      </p:sp>
-      <p:sp>
-        <p:nvSpPr>
-          <p:cNvPr id="16" name="Text 14"/>
-          <p:cNvSpPr/>
-          <p:nvPr/>
-        </p:nvSpPr>
-        <p:spPr>
-          <a:xfrm>
-            <a:off x="3429000" y="1124712"/>
-            <a:ext cx="1645920" cy="274320"/>
-          </a:xfrm>
-          <a:prstGeom prst="rect">
-            <a:avLst/>
-          </a:prstGeom>
-          <a:noFill/>
-          <a:ln/>
-        </p:spPr>
-        <p:txBody>
-          <a:bodyPr wrap="square" lIns="0" tIns="0" rIns="0" bIns="0" rtlCol="0" anchor="ctr"/>
-          <a:lstStyle/>
-          <a:p>
-            <a:pPr indent="0" marL="0">
-              <a:buNone/>
-            </a:pPr>
-            <a:r>
-              <a:rPr lang="en-US" sz="1300" b="1" dirty="0">
-                <a:solidFill>
-                  <a:srgbClr val="1A2744"/>
-                </a:solidFill>
-                <a:latin typeface="Arial" pitchFamily="34" charset="0"/>
-                <a:ea typeface="Arial" pitchFamily="34" charset="-122"/>
-                <a:cs typeface="Arial" pitchFamily="34" charset="-120"/>
-              </a:rPr>
-              <a:t>スタッフの対応</a:t>
-            </a:r>
-            <a:endParaRPr lang="en-US" sz="1300" dirty="0"/>
-          </a:p>
-        </p:txBody>
-      </p:sp>
-      <p:sp>
-        <p:nvSpPr>
-          <p:cNvPr id="17" name="Text 15"/>
-          <p:cNvSpPr/>
-          <p:nvPr/>
-        </p:nvSpPr>
-        <p:spPr>
-          <a:xfrm>
-            <a:off x="3429000" y="1417320"/>
-            <a:ext cx="2377440" cy="365760"/>
-          </a:xfrm>
-          <a:prstGeom prst="rect">
-            <a:avLst/>
-          </a:prstGeom>
-          <a:noFill/>
-          <a:ln/>
-        </p:spPr>
-        <p:txBody>
-          <a:bodyPr wrap="square" lIns="0" tIns="0" rIns="0" bIns="0" rtlCol="0" anchor="ctr"/>
-          <a:lstStyle/>
-          <a:p>
-            <a:pPr indent="0" marL="0">
-              <a:buNone/>
-            </a:pPr>
-            <a:r>
-              <a:rPr lang="en-US" sz="900" dirty="0">
-                <a:solidFill>
-                  <a:srgbClr val="64748B"/>
-                </a:solidFill>
-                <a:latin typeface="Arial" pitchFamily="34" charset="0"/>
-                <a:ea typeface="Arial" pitchFamily="34" charset="-122"/>
-                <a:cs typeface="Arial" pitchFamily="34" charset="-120"/>
-              </a:rPr>
-              <a:t>他のホテルからのバスが3度も到着するのを見ましたが、このホテルは何の対応もしてくれませんでした</a:t>
-            </a:r>
-            <a:endParaRPr lang="en-US" sz="900" dirty="0"/>
-          </a:p>
-        </p:txBody>
-      </p:sp>
-      <p:sp>
-        <p:nvSpPr>
-          <p:cNvPr id="18" name="Text 16"/>
-          <p:cNvSpPr/>
-          <p:nvPr/>
-        </p:nvSpPr>
-        <p:spPr>
-          <a:xfrm>
-            <a:off x="3429000" y="1828800"/>
-            <a:ext cx="2377440" cy="640080"/>
-          </a:xfrm>
-          <a:prstGeom prst="rect">
-            <a:avLst/>
-          </a:prstGeom>
-          <a:noFill/>
-          <a:ln/>
-        </p:spPr>
-        <p:txBody>
-          <a:bodyPr wrap="square" lIns="0" tIns="0" rIns="0" bIns="0" rtlCol="0" anchor="ctr"/>
-          <a:lstStyle/>
-          <a:p>
-            <a:pPr indent="0" marL="0">
-              <a:buNone/>
-            </a:pPr>
-            <a:r>
-              <a:rPr lang="en-US" sz="900" i="1" dirty="0">
-                <a:solidFill>
-                  <a:srgbClr val="3B7DD8"/>
-                </a:solidFill>
-                <a:latin typeface="Arial" pitchFamily="34" charset="0"/>
-                <a:ea typeface="Arial" pitchFamily="34" charset="-122"/>
-                <a:cs typeface="Arial" pitchFamily="34" charset="-120"/>
-              </a:rPr>
-              <a:t>「子どもたちがフロントの恐竜🦖🦕に驚き、お部屋のロボットを気に入り、物語をせがんでいました」</a:t>
-            </a:r>
-            <a:endParaRPr lang="en-US" sz="900" dirty="0"/>
-          </a:p>
-        </p:txBody>
-      </p:sp>
-      <p:sp>
-        <p:nvSpPr>
-          <p:cNvPr id="19" name="Shape 17"/>
-          <p:cNvSpPr/>
-          <p:nvPr/>
-        </p:nvSpPr>
-        <p:spPr>
-          <a:xfrm>
-            <a:off x="6126480" y="1051560"/>
-            <a:ext cx="2651760" cy="1600200"/>
-          </a:xfrm>
-          <a:prstGeom prst="rect">
-            <a:avLst/>
-          </a:prstGeom>
-          <a:solidFill>
-            <a:srgbClr val="FFFFFF"/>
-          </a:solidFill>
-          <a:ln/>
-          <a:effectLst>
-            <a:outerShdw sx="100000" sy="100000" kx="0" ky="0" algn="bl" rotWithShape="0" blurRad="50800" dist="25400" dir="8100000">
-              <a:srgbClr val="000000">
-                <a:alpha val="10000"/>
-              </a:srgbClr>
-            </a:outerShdw>
-          </a:effectLst>
-        </p:spPr>
-      </p:sp>
-      <p:sp>
-        <p:nvSpPr>
-          <p:cNvPr id="20" name="Shape 18"/>
-          <p:cNvSpPr/>
-          <p:nvPr/>
-        </p:nvSpPr>
-        <p:spPr>
-          <a:xfrm>
-            <a:off x="6126480" y="1051560"/>
-            <a:ext cx="54864" cy="1600200"/>
-          </a:xfrm>
-          <a:prstGeom prst="rect">
-            <a:avLst/>
-          </a:prstGeom>
-          <a:solidFill>
-            <a:srgbClr val="16A34A"/>
-          </a:solidFill>
-          <a:ln/>
-        </p:spPr>
-      </p:sp>
-      <p:sp>
-        <p:nvSpPr>
-          <p:cNvPr id="21" name="Shape 19"/>
-          <p:cNvSpPr/>
-          <p:nvPr/>
-        </p:nvSpPr>
-        <p:spPr>
-          <a:xfrm>
-            <a:off x="7955280" y="1124712"/>
-            <a:ext cx="658368" cy="228600"/>
-          </a:xfrm>
-          <a:prstGeom prst="rect">
-            <a:avLst/>
-          </a:prstGeom>
-          <a:solidFill>
-            <a:srgbClr val="DCFCE7"/>
-          </a:solidFill>
-          <a:ln/>
-        </p:spPr>
-      </p:sp>
-      <p:sp>
-        <p:nvSpPr>
-          <p:cNvPr id="22" name="Text 20"/>
-          <p:cNvSpPr/>
-          <p:nvPr/>
-        </p:nvSpPr>
-        <p:spPr>
-          <a:xfrm>
-            <a:off x="7955280" y="1124712"/>
-            <a:ext cx="658368" cy="228600"/>
-          </a:xfrm>
-          <a:prstGeom prst="rect">
-            <a:avLst/>
-          </a:prstGeom>
-          <a:noFill/>
-          <a:ln/>
-        </p:spPr>
-        <p:txBody>
-          <a:bodyPr wrap="square" lIns="0" tIns="0" rIns="0" bIns="0" rtlCol="0" anchor="ctr"/>
-          <a:lstStyle/>
-          <a:p>
-            <a:pPr algn="ctr" indent="0" marL="0">
-              <a:buNone/>
-            </a:pPr>
-            <a:r>
-              <a:rPr lang="en-US" sz="900" b="1" dirty="0">
-                <a:solidFill>
-                  <a:srgbClr val="16A34A"/>
-                </a:solidFill>
-                <a:latin typeface="Arial" pitchFamily="34" charset="0"/>
-                <a:ea typeface="Arial" pitchFamily="34" charset="-122"/>
-                <a:cs typeface="Arial" pitchFamily="34" charset="-120"/>
-              </a:rPr>
-              <a:t>50件+</a:t>
-            </a:r>
-            <a:endParaRPr lang="en-US" sz="900" dirty="0"/>
-          </a:p>
-        </p:txBody>
-      </p:sp>
-      <p:sp>
-        <p:nvSpPr>
-          <p:cNvPr id="23" name="Text 21"/>
-          <p:cNvSpPr/>
-          <p:nvPr/>
-        </p:nvSpPr>
-        <p:spPr>
-          <a:xfrm>
-            <a:off x="6263640" y="1124712"/>
-            <a:ext cx="1645920" cy="274320"/>
-          </a:xfrm>
-          <a:prstGeom prst="rect">
-            <a:avLst/>
-          </a:prstGeom>
-          <a:noFill/>
-          <a:ln/>
-        </p:spPr>
-        <p:txBody>
-          <a:bodyPr wrap="square" lIns="0" tIns="0" rIns="0" bIns="0" rtlCol="0" anchor="ctr"/>
-          <a:lstStyle/>
-          <a:p>
-            <a:pPr indent="0" marL="0">
-              <a:buNone/>
-            </a:pPr>
-            <a:r>
-              <a:rPr lang="en-US" sz="1300" b="1" dirty="0">
-                <a:solidFill>
-                  <a:srgbClr val="1A2744"/>
-                </a:solidFill>
-                <a:latin typeface="Arial" pitchFamily="34" charset="0"/>
-                <a:ea typeface="Arial" pitchFamily="34" charset="-122"/>
-                <a:cs typeface="Arial" pitchFamily="34" charset="-120"/>
-              </a:rPr>
-              <a:t>清潔さ・清掃</a:t>
-            </a:r>
-            <a:endParaRPr lang="en-US" sz="1300" dirty="0"/>
-          </a:p>
-        </p:txBody>
-      </p:sp>
-      <p:sp>
-        <p:nvSpPr>
-          <p:cNvPr id="24" name="Text 22"/>
-          <p:cNvSpPr/>
-          <p:nvPr/>
-        </p:nvSpPr>
-        <p:spPr>
-          <a:xfrm>
-            <a:off x="6263640" y="1417320"/>
-            <a:ext cx="2377440" cy="365760"/>
-          </a:xfrm>
-          <a:prstGeom prst="rect">
-            <a:avLst/>
-          </a:prstGeom>
-          <a:noFill/>
-          <a:ln/>
-        </p:spPr>
-        <p:txBody>
-          <a:bodyPr wrap="square" lIns="0" tIns="0" rIns="0" bIns="0" rtlCol="0" anchor="ctr"/>
-          <a:lstStyle/>
-          <a:p>
-            <a:pPr indent="0" marL="0">
-              <a:buNone/>
-            </a:pPr>
-            <a:r>
-              <a:rPr lang="en-US" sz="900" dirty="0">
-                <a:solidFill>
-                  <a:srgbClr val="64748B"/>
-                </a:solidFill>
-                <a:latin typeface="Arial" pitchFamily="34" charset="0"/>
-                <a:ea typeface="Arial" pitchFamily="34" charset="-122"/>
-                <a:cs typeface="Arial" pitchFamily="34" charset="-120"/>
-              </a:rPr>
-              <a:t>初めて宿泊させていただきました 話に聞いてた通り恐竜がお出迎えしてくれるフロントにはやっぱりビックリさせられました...</a:t>
-            </a:r>
-            <a:endParaRPr lang="en-US" sz="900" dirty="0"/>
-          </a:p>
-        </p:txBody>
-      </p:sp>
-      <p:sp>
-        <p:nvSpPr>
-          <p:cNvPr id="25" name="Text 23"/>
-          <p:cNvSpPr/>
-          <p:nvPr/>
-        </p:nvSpPr>
-        <p:spPr>
-          <a:xfrm>
-            <a:off x="6263640" y="1828800"/>
-            <a:ext cx="2377440" cy="640080"/>
-          </a:xfrm>
-          <a:prstGeom prst="rect">
-            <a:avLst/>
-          </a:prstGeom>
-          <a:noFill/>
-          <a:ln/>
-        </p:spPr>
-        <p:txBody>
-          <a:bodyPr wrap="square" lIns="0" tIns="0" rIns="0" bIns="0" rtlCol="0" anchor="ctr"/>
-          <a:lstStyle/>
-          <a:p>
-            <a:pPr indent="0" marL="0">
-              <a:buNone/>
-            </a:pPr>
-            <a:r>
-              <a:rPr lang="en-US" sz="900" i="1" dirty="0">
-                <a:solidFill>
-                  <a:srgbClr val="3B7DD8"/>
-                </a:solidFill>
-                <a:latin typeface="Arial" pitchFamily="34" charset="0"/>
-                <a:ea typeface="Arial" pitchFamily="34" charset="-122"/>
-                <a:cs typeface="Arial" pitchFamily="34" charset="-120"/>
-              </a:rPr>
-              <a:t>「部屋は広めで清潔、とても快適です」</a:t>
-            </a:r>
-            <a:endParaRPr lang="en-US" sz="900" dirty="0"/>
-          </a:p>
-        </p:txBody>
-      </p:sp>
-      <p:sp>
-        <p:nvSpPr>
           <p:cNvPr id="26" name="Shape 24"/>
           <p:cNvSpPr/>
           <p:nvPr/>
@@ -11187,7 +11187,7 @@
                 <a:ea typeface="Arial" pitchFamily="34" charset="-122"/>
                 <a:cs typeface="Arial" pitchFamily="34" charset="-120"/>
               </a:rPr>
-              <a:t>部屋は広めで清潔、とても快適です</a:t>
+              <a:t>各ベッドに枕がもう一つ必要です</a:t>
             </a:r>
             <a:endParaRPr lang="en-US" sz="900" dirty="0"/>
           </a:p>
@@ -11226,7 +11226,7 @@
                 <a:ea typeface="Arial" pitchFamily="34" charset="-122"/>
                 <a:cs typeface="Arial" pitchFamily="34" charset="-120"/>
               </a:rPr>
-              <a:t>「必要最低限​​の設備は整っているホテルですが、特筆すべき点はありません」</a:t>
+              <a:t>「早朝出発の人などの音が気になるのと、お風呂の排水口の臭いが気になる〜後は快適に過ごせた」</a:t>
             </a:r>
             <a:endParaRPr lang="en-US" sz="900" dirty="0"/>
           </a:p>
@@ -11410,7 +11410,7 @@
                 <a:ea typeface="Arial" pitchFamily="34" charset="-122"/>
                 <a:cs typeface="Arial" pitchFamily="34" charset="-120"/>
               </a:rPr>
-              <a:t>初めて宿泊させていただきました 話に聞いてた通り恐竜がお出迎えしてくれるフロントにはやっぱりビックリさせられました...</a:t>
+              <a:t>近くの洋食レストランがとっても美味しかったので是非オススメします</a:t>
             </a:r>
             <a:endParaRPr lang="en-US" sz="900" dirty="0"/>
           </a:p>
@@ -11449,7 +11449,7 @@
                 <a:ea typeface="Arial" pitchFamily="34" charset="-122"/>
                 <a:cs typeface="Arial" pitchFamily="34" charset="-120"/>
               </a:rPr>
-              <a:t>「良いとこ ・宿泊費がリーズナブル ・１Fに冷凍食品、アイス、生活用品、アルコール類の自販機があって買い物して行かな...」</a:t>
+              <a:t>「初めて宿泊させていただきました 話に聞いてた通り恐竜がお出迎えしてくれるフロントにはやっぱりビックリさせられました...」</a:t>
             </a:r>
             <a:endParaRPr lang="en-US" sz="900" dirty="0"/>
           </a:p>
@@ -11555,7 +11555,7 @@
                 <a:ea typeface="Arial" pitchFamily="34" charset="-122"/>
                 <a:cs typeface="Arial" pitchFamily="34" charset="-120"/>
               </a:rPr>
-              <a:t>10件+</a:t>
+              <a:t>20件+</a:t>
             </a:r>
             <a:endParaRPr lang="en-US" sz="900" dirty="0"/>
           </a:p>
@@ -11633,7 +11633,7 @@
                 <a:ea typeface="Arial" pitchFamily="34" charset="-122"/>
                 <a:cs typeface="Arial" pitchFamily="34" charset="-120"/>
               </a:rPr>
-              <a:t>朝食も美味しくまた利用したいです</a:t>
+              <a:t>近くの洋食レストランがとっても美味しかったので是非オススメします</a:t>
             </a:r>
             <a:endParaRPr lang="en-US" sz="900" dirty="0"/>
           </a:p>
@@ -11672,7 +11672,7 @@
                 <a:ea typeface="Arial" pitchFamily="34" charset="-122"/>
                 <a:cs typeface="Arial" pitchFamily="34" charset="-120"/>
               </a:rPr>
-              <a:t>「朝食も美味しい」</a:t>
+              <a:t>「朝食も美味しくまた利用したいです」</a:t>
             </a:r>
             <a:endParaRPr lang="en-US" sz="900" dirty="0"/>
           </a:p>
@@ -12362,7 +12362,7 @@
                           <a:ea typeface="Arial" pitchFamily="34" charset="-122"/>
                           <a:cs typeface="Arial" pitchFamily="34" charset="-120"/>
                         </a:rPr>
-                        <a:t>夕方のシャトルバスの時間がもう少し早い時間があったらもっと良かったです</a:t>
+                        <a:t>朝のシャトルバスは10分前に行ったらもぅいっぱいでしたが、駅へもすぐなので電車で行けば問題なくすぐ着きます</a:t>
                       </a:r>
                       <a:endParaRPr lang="en-US" sz="900" dirty="0">
                         <a:latin typeface="Arial" charset="0"/>
@@ -12430,7 +12430,7 @@
                           <a:ea typeface="Arial" pitchFamily="34" charset="-122"/>
                           <a:cs typeface="Arial" pitchFamily="34" charset="-120"/>
                         </a:rPr>
-                        <a:t>80件</a:t>
+                        <a:t>83件</a:t>
                       </a:r>
                       <a:endParaRPr lang="en-US" sz="900" dirty="0">
                         <a:latin typeface="Arial" charset="0"/>
@@ -12636,7 +12636,7 @@
                           <a:ea typeface="Arial" pitchFamily="34" charset="-122"/>
                           <a:cs typeface="Arial" pitchFamily="34" charset="-120"/>
                         </a:rPr>
-                        <a:t>Proximité des moyens de transport pour accéder à L aéropo...</a:t>
+                        <a:t>Needs another pillow on each bed</a:t>
                       </a:r>
                       <a:endParaRPr lang="en-US" sz="900" dirty="0">
                         <a:latin typeface="Arial" charset="0"/>
@@ -12704,7 +12704,7 @@
                           <a:ea typeface="Arial" pitchFamily="34" charset="-122"/>
                           <a:cs typeface="Arial" pitchFamily="34" charset="-120"/>
                         </a:rPr>
-                        <a:t>26件</a:t>
+                        <a:t>27件</a:t>
                       </a:r>
                       <a:endParaRPr lang="en-US" sz="900" dirty="0">
                         <a:latin typeface="Arial" charset="0"/>
@@ -12910,7 +12910,7 @@
                           <a:ea typeface="Arial" pitchFamily="34" charset="-122"/>
                           <a:cs typeface="Arial" pitchFamily="34" charset="-120"/>
                         </a:rPr>
-                        <a:t>the room i chose was a little small for our luggages, and...</a:t>
+                        <a:t>狭いながらも清潔なお部屋で安心して過ごせました</a:t>
                       </a:r>
                       <a:endParaRPr lang="en-US" sz="900" dirty="0">
                         <a:latin typeface="Arial" charset="0"/>
@@ -12978,7 +12978,7 @@
                           <a:ea typeface="Arial" pitchFamily="34" charset="-122"/>
                           <a:cs typeface="Arial" pitchFamily="34" charset="-120"/>
                         </a:rPr>
-                        <a:t>19件</a:t>
+                        <a:t>20件</a:t>
                       </a:r>
                       <a:endParaRPr lang="en-US" sz="900" dirty="0">
                         <a:latin typeface="Arial" charset="0"/>
@@ -13184,7 +13184,7 @@
                           <a:ea typeface="Arial" pitchFamily="34" charset="-122"/>
                           <a:cs typeface="Arial" pitchFamily="34" charset="-120"/>
                         </a:rPr>
-                        <a:t>Small but clean room Too expensive and too noisy at 2am  ...</a:t>
+                        <a:t>早朝出発の人などの音が気になるのと、お風呂の排水口の臭いが気になる〜後は快適に過ごせた</a:t>
                       </a:r>
                       <a:endParaRPr lang="en-US" sz="900" dirty="0">
                         <a:latin typeface="Arial" charset="0"/>
@@ -13252,7 +13252,7 @@
                           <a:ea typeface="Arial" pitchFamily="34" charset="-122"/>
                           <a:cs typeface="Arial" pitchFamily="34" charset="-120"/>
                         </a:rPr>
-                        <a:t>11件</a:t>
+                        <a:t>12件</a:t>
                       </a:r>
                       <a:endParaRPr lang="en-US" sz="900" dirty="0">
                         <a:latin typeface="Arial" charset="0"/>
@@ -13664,7 +13664,7 @@
                           <a:ea typeface="Arial" pitchFamily="34" charset="-122"/>
                           <a:cs typeface="Arial" pitchFamily="34" charset="-120"/>
                         </a:rPr>
-                        <a:t>窓・採光</a:t>
+                        <a:t>臭い・匂い</a:t>
                       </a:r>
                       <a:endParaRPr lang="en-US" sz="900" dirty="0">
                         <a:latin typeface="Arial" charset="0"/>
@@ -13732,7 +13732,7 @@
                           <a:ea typeface="Arial" pitchFamily="34" charset="-122"/>
                           <a:cs typeface="Arial" pitchFamily="34" charset="-120"/>
                         </a:rPr>
-                        <a:t>初めて宿泊させていただきました 話に聞いてた通り恐竜がお出迎えしてくれるフロントにはやっぱりビックリさせられました...</a:t>
+                        <a:t>早朝出発の人などの音が気になるのと、お風呂の排水口の臭いが気になる〜後は快適に過ごせた</a:t>
                       </a:r>
                       <a:endParaRPr lang="en-US" sz="900" dirty="0">
                         <a:latin typeface="Arial" charset="0"/>
@@ -13938,7 +13938,7 @@
                           <a:ea typeface="Arial" pitchFamily="34" charset="-122"/>
                           <a:cs typeface="Arial" pitchFamily="34" charset="-120"/>
                         </a:rPr>
-                        <a:t>設備の老朽化</a:t>
+                        <a:t>窓・採光</a:t>
                       </a:r>
                       <a:endParaRPr lang="en-US" sz="900" dirty="0">
                         <a:latin typeface="Arial" charset="0"/>
@@ -14006,7 +14006,7 @@
                           <a:ea typeface="Arial" pitchFamily="34" charset="-122"/>
                           <a:cs typeface="Arial" pitchFamily="34" charset="-120"/>
                         </a:rPr>
-                        <a:t>I was forced to put my global roaming on my phone and get...</a:t>
+                        <a:t>初めて宿泊させていただきました 話に聞いてた通り恐竜がお出迎えしてくれるフロントにはやっぱりビックリさせられました...</a:t>
                       </a:r>
                       <a:endParaRPr lang="en-US" sz="900" dirty="0">
                         <a:latin typeface="Arial" charset="0"/>
@@ -14074,7 +14074,7 @@
                           <a:ea typeface="Arial" pitchFamily="34" charset="-122"/>
                           <a:cs typeface="Arial" pitchFamily="34" charset="-120"/>
                         </a:rPr>
-                        <a:t>1件</a:t>
+                        <a:t>2件</a:t>
                       </a:r>
                       <a:endParaRPr lang="en-US" sz="900" dirty="0">
                         <a:latin typeface="Arial" charset="0"/>
@@ -14212,7 +14212,7 @@
                           <a:ea typeface="Arial" pitchFamily="34" charset="-122"/>
                           <a:cs typeface="Arial" pitchFamily="34" charset="-120"/>
                         </a:rPr>
-                        <a:t>臭い・匂い</a:t>
+                        <a:t>設備の老朽化</a:t>
                       </a:r>
                       <a:endParaRPr lang="en-US" sz="900" dirty="0">
                         <a:latin typeface="Arial" charset="0"/>
@@ -14280,7 +14280,7 @@
                           <a:ea typeface="Arial" pitchFamily="34" charset="-122"/>
                           <a:cs typeface="Arial" pitchFamily="34" charset="-120"/>
                         </a:rPr>
-                        <a:t>カーペットも綺麗でタバコの臭いがなく、トイレに浴槽もあってよかったです</a:t>
+                        <a:t>I was forced to put my global roaming on my phone and get...</a:t>
                       </a:r>
                       <a:endParaRPr lang="en-US" sz="900" dirty="0">
                         <a:latin typeface="Arial" charset="0"/>

--- a/納品レポート/ホテル別レポート/henn_na_haneda_口コミ分析レポート.pptx
+++ b/納品レポート/ホテル別レポート/henn_na_haneda_口コミ分析レポート.pptx
@@ -211,7 +211,7 @@
                   <c:v>9.38</c:v>
                 </c:pt>
                 <c:pt idx="1">
-                  <c:v>8.59</c:v>
+                  <c:v>8.63</c:v>
                 </c:pt>
                 <c:pt idx="2">
                   <c:v>8.32</c:v>
@@ -220,7 +220,7 @@
                   <c:v>8.15</c:v>
                 </c:pt>
                 <c:pt idx="4">
-                  <c:v>8.11</c:v>
+                  <c:v>8.09</c:v>
                 </c:pt>
                 <c:pt idx="5">
                   <c:v>8.08</c:v>
@@ -566,10 +566,10 @@
               <c:numCache>
                 <c:ptCount val="3"/>
                 <c:pt idx="0">
-                  <c:v>223</c:v>
+                  <c:v>226</c:v>
                 </c:pt>
                 <c:pt idx="1">
-                  <c:v>60</c:v>
+                  <c:v>63</c:v>
                 </c:pt>
                 <c:pt idx="2">
                   <c:v>9</c:v>
@@ -823,22 +823,22 @@
                 <c:formatCode>General</c:formatCode>
                 <c:ptCount val="9"/>
                 <c:pt idx="0">
-                  <c:v>97</c:v>
+                  <c:v>99</c:v>
                 </c:pt>
                 <c:pt idx="1">
-                  <c:v>36</c:v>
+                  <c:v>37</c:v>
                 </c:pt>
                 <c:pt idx="2">
                   <c:v>90</c:v>
                 </c:pt>
                 <c:pt idx="3">
+                  <c:v>28</c:v>
+                </c:pt>
+                <c:pt idx="4">
                   <c:v>27</c:v>
                 </c:pt>
-                <c:pt idx="4">
-                  <c:v>26</c:v>
-                </c:pt>
                 <c:pt idx="5">
-                  <c:v>7</c:v>
+                  <c:v>8</c:v>
                 </c:pt>
                 <c:pt idx="6">
                   <c:v>2</c:v>
@@ -2798,7 +2798,7 @@
                 <a:ea typeface="Arial" pitchFamily="34" charset="-122"/>
                 <a:cs typeface="Arial" pitchFamily="34" charset="-120"/>
               </a:rPr>
-              <a:t>レビュー総数：292件（6サイト）</a:t>
+              <a:t>レビュー総数：298件（6サイト）</a:t>
             </a:r>
             <a:endParaRPr lang="en-US" sz="1000" dirty="0"/>
           </a:p>
@@ -2818,7 +2818,7 @@
                 <a:ea typeface="Arial" pitchFamily="34" charset="-122"/>
                 <a:cs typeface="Arial" pitchFamily="34" charset="-120"/>
               </a:rPr>
-              <a:t>作成日：2026年3月20日</a:t>
+              <a:t>作成日：2026年3月21日</a:t>
             </a:r>
             <a:endParaRPr lang="en-US" sz="1000" dirty="0"/>
           </a:p>
@@ -3364,7 +3364,7 @@
                           <a:ea typeface="Arial" pitchFamily="34" charset="-122"/>
                           <a:cs typeface="Arial" pitchFamily="34" charset="-120"/>
                         </a:rPr>
-                        <a:t>8.28点</a:t>
+                        <a:t>8.27点</a:t>
                       </a:r>
                       <a:endParaRPr lang="en-US" sz="1000" dirty="0">
                         <a:latin typeface="Arial" charset="0"/>
@@ -3638,7 +3638,7 @@
                           <a:ea typeface="Arial" pitchFamily="34" charset="-122"/>
                           <a:cs typeface="Arial" pitchFamily="34" charset="-120"/>
                         </a:rPr>
-                        <a:t>76.4%</a:t>
+                        <a:t>75.8%</a:t>
                       </a:r>
                       <a:endParaRPr lang="en-US" sz="1000" dirty="0">
                         <a:latin typeface="Arial" charset="0"/>
@@ -3912,7 +3912,7 @@
                           <a:ea typeface="Arial" pitchFamily="34" charset="-122"/>
                           <a:cs typeface="Arial" pitchFamily="34" charset="-120"/>
                         </a:rPr>
-                        <a:t>3.1%</a:t>
+                        <a:t>3.0%</a:t>
                       </a:r>
                       <a:endParaRPr lang="en-US" sz="1000" dirty="0">
                         <a:latin typeface="Arial" charset="0"/>
@@ -4460,7 +4460,7 @@
                           <a:ea typeface="Arial" pitchFamily="34" charset="-122"/>
                           <a:cs typeface="Arial" pitchFamily="34" charset="-120"/>
                         </a:rPr>
-                        <a:t>約83件/期間</a:t>
+                        <a:t>約85件/期間</a:t>
                       </a:r>
                       <a:endParaRPr lang="en-US" sz="1000" dirty="0">
                         <a:latin typeface="Arial" charset="0"/>
@@ -4528,7 +4528,7 @@
                           <a:ea typeface="Arial" pitchFamily="34" charset="-122"/>
                           <a:cs typeface="Arial" pitchFamily="34" charset="-120"/>
                         </a:rPr>
-                        <a:t>41件以下</a:t>
+                        <a:t>42件以下</a:t>
                       </a:r>
                       <a:endParaRPr lang="en-US" sz="1000" dirty="0">
                         <a:latin typeface="Arial" charset="0"/>
@@ -5099,7 +5099,7 @@
                 <a:ea typeface="Arial" pitchFamily="34" charset="-122"/>
                 <a:cs typeface="Arial" pitchFamily="34" charset="-120"/>
               </a:rPr>
-              <a:t>8.28</a:t>
+              <a:t>8.27</a:t>
             </a:r>
             <a:endParaRPr lang="en-US" sz="3200" dirty="0"/>
           </a:p>
@@ -5224,7 +5224,7 @@
                 <a:ea typeface="Arial" pitchFamily="34" charset="-122"/>
                 <a:cs typeface="Arial" pitchFamily="34" charset="-120"/>
               </a:rPr>
-              <a:t>76.4%</a:t>
+              <a:t>75.8%</a:t>
             </a:r>
             <a:endParaRPr lang="en-US" sz="3200" dirty="0"/>
           </a:p>
@@ -5349,7 +5349,7 @@
                 <a:ea typeface="Arial" pitchFamily="34" charset="-122"/>
                 <a:cs typeface="Arial" pitchFamily="34" charset="-120"/>
               </a:rPr>
-              <a:t>3.1%</a:t>
+              <a:t>3.0%</a:t>
             </a:r>
             <a:endParaRPr lang="en-US" sz="3200" dirty="0"/>
           </a:p>
@@ -5474,7 +5474,7 @@
                 <a:ea typeface="Arial" pitchFamily="34" charset="-122"/>
                 <a:cs typeface="Arial" pitchFamily="34" charset="-120"/>
               </a:rPr>
-              <a:t>292件</a:t>
+              <a:t>298件</a:t>
             </a:r>
             <a:endParaRPr lang="en-US" sz="3200" dirty="0"/>
           </a:p>
@@ -5702,7 +5702,7 @@
                 <a:ea typeface="Arial" pitchFamily="34" charset="-122"/>
                 <a:cs typeface="Arial" pitchFamily="34" charset="-120"/>
               </a:rPr>
-              <a:t>  狭いながらも清潔なお部屋で安心して過ごせました</a:t>
+              <a:t>  2人で一泊14620円と安かったので予約しましたが、部屋がとても綺麗なのとチェックアウトが11時までなのがとてもあ...</a:t>
             </a:r>
             <a:endParaRPr lang="en-US" sz="1100" dirty="0"/>
           </a:p>
@@ -5850,7 +5850,7 @@
                 <a:ea typeface="Arial" pitchFamily="34" charset="-122"/>
                 <a:cs typeface="Arial" pitchFamily="34" charset="-120"/>
               </a:rPr>
-              <a:t>  朝のシャトルバスは10分前に行ったらもぅいっぱいでしたが、駅へもすぐなので電車で行けば問題なくすぐ着きます</a:t>
+              <a:t>  空港迄のバスがある事</a:t>
             </a:r>
             <a:endParaRPr lang="en-US" sz="1100" dirty="0"/>
           </a:p>
@@ -5890,7 +5890,7 @@
                 <a:ea typeface="Arial" pitchFamily="34" charset="-122"/>
                 <a:cs typeface="Arial" pitchFamily="34" charset="-120"/>
               </a:rPr>
-              <a:t>  Needs another pillow on each bed</a:t>
+              <a:t>  The hotel shuttle, which departed at 4:45 am, was very co...</a:t>
             </a:r>
             <a:endParaRPr lang="en-US" sz="1100" dirty="0"/>
           </a:p>
@@ -6283,7 +6283,7 @@
                 <a:ea typeface="Arial" pitchFamily="34" charset="-122"/>
                 <a:cs typeface="Arial" pitchFamily="34" charset="-120"/>
               </a:rPr>
-              <a:t>8.28</a:t>
+              <a:t>8.27</a:t>
             </a:r>
             <a:endParaRPr lang="en-US" sz="3200" dirty="0"/>
           </a:p>
@@ -6408,7 +6408,7 @@
                 <a:ea typeface="Arial" pitchFamily="34" charset="-122"/>
                 <a:cs typeface="Arial" pitchFamily="34" charset="-120"/>
               </a:rPr>
-              <a:t>76.4%</a:t>
+              <a:t>75.8%</a:t>
             </a:r>
             <a:endParaRPr lang="en-US" sz="3200" dirty="0"/>
           </a:p>
@@ -6533,7 +6533,7 @@
                 <a:ea typeface="Arial" pitchFamily="34" charset="-122"/>
                 <a:cs typeface="Arial" pitchFamily="34" charset="-120"/>
               </a:rPr>
-              <a:t>3.1%</a:t>
+              <a:t>3.0%</a:t>
             </a:r>
             <a:endParaRPr lang="en-US" sz="3200" dirty="0"/>
           </a:p>
@@ -6658,7 +6658,7 @@
                 <a:ea typeface="Arial" pitchFamily="34" charset="-122"/>
                 <a:cs typeface="Arial" pitchFamily="34" charset="-120"/>
               </a:rPr>
-              <a:t>292件</a:t>
+              <a:t>298件</a:t>
             </a:r>
             <a:endParaRPr lang="en-US" sz="3200" dirty="0"/>
           </a:p>
@@ -7930,7 +7930,7 @@
                           <a:ea typeface="Arial" pitchFamily="34" charset="-122"/>
                           <a:cs typeface="Arial" pitchFamily="34" charset="-120"/>
                         </a:rPr>
-                        <a:t>37</a:t>
+                        <a:t>38</a:t>
                       </a:r>
                       <a:endParaRPr lang="en-US" sz="900" dirty="0">
                         <a:latin typeface="Arial" charset="0"/>
@@ -7998,7 +7998,7 @@
                           <a:ea typeface="Arial" pitchFamily="34" charset="-122"/>
                           <a:cs typeface="Arial" pitchFamily="34" charset="-120"/>
                         </a:rPr>
-                        <a:t>4.3</a:t>
+                        <a:t>4.32</a:t>
                       </a:r>
                       <a:endParaRPr lang="en-US" sz="900" dirty="0">
                         <a:latin typeface="Arial" charset="0"/>
@@ -8134,7 +8134,7 @@
                           <a:ea typeface="Arial" pitchFamily="34" charset="-122"/>
                           <a:cs typeface="Arial" pitchFamily="34" charset="-120"/>
                         </a:rPr>
-                        <a:t>8.59</a:t>
+                        <a:t>8.63</a:t>
                       </a:r>
                       <a:endParaRPr lang="en-US" sz="900" dirty="0">
                         <a:latin typeface="Arial" charset="0"/>
@@ -8956,7 +8956,7 @@
                           <a:ea typeface="Arial" pitchFamily="34" charset="-122"/>
                           <a:cs typeface="Arial" pitchFamily="34" charset="-120"/>
                         </a:rPr>
-                        <a:t>122</a:t>
+                        <a:t>127</a:t>
                       </a:r>
                       <a:endParaRPr lang="en-US" sz="900" dirty="0">
                         <a:latin typeface="Arial" charset="0"/>
@@ -9024,7 +9024,7 @@
                           <a:ea typeface="Arial" pitchFamily="34" charset="-122"/>
                           <a:cs typeface="Arial" pitchFamily="34" charset="-120"/>
                         </a:rPr>
-                        <a:t>8.11</a:t>
+                        <a:t>8.09</a:t>
                       </a:r>
                       <a:endParaRPr lang="en-US" sz="900" dirty="0">
                         <a:latin typeface="Arial" charset="0"/>
@@ -9160,7 +9160,7 @@
                           <a:ea typeface="Arial" pitchFamily="34" charset="-122"/>
                           <a:cs typeface="Arial" pitchFamily="34" charset="-120"/>
                         </a:rPr>
-                        <a:t>8.11</a:t>
+                        <a:t>8.09</a:t>
                       </a:r>
                       <a:endParaRPr lang="en-US" sz="900" dirty="0">
                         <a:latin typeface="Arial" charset="0"/>
@@ -9910,7 +9910,7 @@
                 <a:ea typeface="Arial" pitchFamily="34" charset="-122"/>
                 <a:cs typeface="Arial" pitchFamily="34" charset="-120"/>
               </a:rPr>
-              <a:t>223件（76.4%）</a:t>
+              <a:t>226件（75.8%）</a:t>
             </a:r>
             <a:endParaRPr lang="en-US" sz="1100" dirty="0"/>
           </a:p>
@@ -10008,7 +10008,7 @@
                 <a:ea typeface="Arial" pitchFamily="34" charset="-122"/>
                 <a:cs typeface="Arial" pitchFamily="34" charset="-120"/>
               </a:rPr>
-              <a:t>60件（20.5%）</a:t>
+              <a:t>63件（21.1%）</a:t>
             </a:r>
             <a:endParaRPr lang="en-US" sz="1100" dirty="0"/>
           </a:p>
@@ -10106,7 +10106,7 @@
                 <a:ea typeface="Arial" pitchFamily="34" charset="-122"/>
                 <a:cs typeface="Arial" pitchFamily="34" charset="-120"/>
               </a:rPr>
-              <a:t>9件（3.1%）</a:t>
+              <a:t>9件（3.0%）</a:t>
             </a:r>
             <a:endParaRPr lang="en-US" sz="1100" dirty="0"/>
           </a:p>
@@ -10964,7 +10964,7 @@
                 <a:ea typeface="Arial" pitchFamily="34" charset="-122"/>
                 <a:cs typeface="Arial" pitchFamily="34" charset="-120"/>
               </a:rPr>
-              <a:t>狭いながらも清潔なお部屋で安心して過ごせました</a:t>
+              <a:t>2人で一泊14620円と安かったので予約しましたが、部屋がとても綺麗なのとチェックアウトが11時までなのがとてもあ...</a:t>
             </a:r>
             <a:endParaRPr lang="en-US" sz="900" dirty="0"/>
           </a:p>
@@ -11003,7 +11003,7 @@
                 <a:ea typeface="Arial" pitchFamily="34" charset="-122"/>
                 <a:cs typeface="Arial" pitchFamily="34" charset="-120"/>
               </a:rPr>
-              <a:t>「初めて宿泊させていただきました 話に聞いてた通り恐竜がお出迎えしてくれるフロントにはやっぱりビックリさせられました...」</a:t>
+              <a:t>「狭いながらも清潔なお部屋で安心して過ごせました」</a:t>
             </a:r>
             <a:endParaRPr lang="en-US" sz="900" dirty="0"/>
           </a:p>
@@ -12362,7 +12362,7 @@
                           <a:ea typeface="Arial" pitchFamily="34" charset="-122"/>
                           <a:cs typeface="Arial" pitchFamily="34" charset="-120"/>
                         </a:rPr>
-                        <a:t>朝のシャトルバスは10分前に行ったらもぅいっぱいでしたが、駅へもすぐなので電車で行けば問題なくすぐ着きます</a:t>
+                        <a:t>空港迄のバスがある事</a:t>
                       </a:r>
                       <a:endParaRPr lang="en-US" sz="900" dirty="0">
                         <a:latin typeface="Arial" charset="0"/>
@@ -12430,7 +12430,7 @@
                           <a:ea typeface="Arial" pitchFamily="34" charset="-122"/>
                           <a:cs typeface="Arial" pitchFamily="34" charset="-120"/>
                         </a:rPr>
-                        <a:t>83件</a:t>
+                        <a:t>85件</a:t>
                       </a:r>
                       <a:endParaRPr lang="en-US" sz="900" dirty="0">
                         <a:latin typeface="Arial" charset="0"/>
@@ -12636,7 +12636,7 @@
                           <a:ea typeface="Arial" pitchFamily="34" charset="-122"/>
                           <a:cs typeface="Arial" pitchFamily="34" charset="-120"/>
                         </a:rPr>
-                        <a:t>Needs another pillow on each bed</a:t>
+                        <a:t>The hotel shuttle, which departed at 4:45 am, was very co...</a:t>
                       </a:r>
                       <a:endParaRPr lang="en-US" sz="900" dirty="0">
                         <a:latin typeface="Arial" charset="0"/>
@@ -12704,7 +12704,7 @@
                           <a:ea typeface="Arial" pitchFamily="34" charset="-122"/>
                           <a:cs typeface="Arial" pitchFamily="34" charset="-120"/>
                         </a:rPr>
-                        <a:t>27件</a:t>
+                        <a:t>28件</a:t>
                       </a:r>
                       <a:endParaRPr lang="en-US" sz="900" dirty="0">
                         <a:latin typeface="Arial" charset="0"/>

--- a/納品レポート/ホテル別レポート/henn_na_haneda_口コミ分析レポート.pptx
+++ b/納品レポート/ホテル別レポート/henn_na_haneda_口コミ分析レポート.pptx
@@ -189,13 +189,13 @@
                     <c:v>じゃらん</c:v>
                   </c:pt>
                   <c:pt idx="3">
+                    <c:v>Google</c:v>
+                  </c:pt>
+                  <c:pt idx="4">
                     <c:v>Agoda</c:v>
                   </c:pt>
-                  <c:pt idx="4">
+                  <c:pt idx="5">
                     <c:v>Booking.com</c:v>
-                  </c:pt>
-                  <c:pt idx="5">
-                    <c:v>Google</c:v>
                   </c:pt>
                 </c:lvl>
               </c:multiLvlStrCache>
@@ -208,10 +208,10 @@
                 <c:formatCode>General</c:formatCode>
                 <c:ptCount val="6"/>
                 <c:pt idx="0">
-                  <c:v>9.38</c:v>
+                  <c:v>9.41</c:v>
                 </c:pt>
                 <c:pt idx="1">
-                  <c:v>8.63</c:v>
+                  <c:v>8.6</c:v>
                 </c:pt>
                 <c:pt idx="2">
                   <c:v>8.32</c:v>
@@ -220,10 +220,10 @@
                   <c:v>8.15</c:v>
                 </c:pt>
                 <c:pt idx="4">
-                  <c:v>8.09</c:v>
+                  <c:v>8.11</c:v>
                 </c:pt>
                 <c:pt idx="5">
-                  <c:v>8.08</c:v>
+                  <c:v>8.11</c:v>
                 </c:pt>
               </c:numCache>
             </c:numRef>
@@ -566,10 +566,10 @@
               <c:numCache>
                 <c:ptCount val="3"/>
                 <c:pt idx="0">
-                  <c:v>226</c:v>
+                  <c:v>235</c:v>
                 </c:pt>
                 <c:pt idx="1">
-                  <c:v>63</c:v>
+                  <c:v>65</c:v>
                 </c:pt>
                 <c:pt idx="2">
                   <c:v>9</c:v>
@@ -823,19 +823,19 @@
                 <c:formatCode>General</c:formatCode>
                 <c:ptCount val="9"/>
                 <c:pt idx="0">
-                  <c:v>99</c:v>
+                  <c:v>104</c:v>
                 </c:pt>
                 <c:pt idx="1">
-                  <c:v>37</c:v>
+                  <c:v>39</c:v>
                 </c:pt>
                 <c:pt idx="2">
-                  <c:v>90</c:v>
+                  <c:v>92</c:v>
                 </c:pt>
                 <c:pt idx="3">
-                  <c:v>28</c:v>
+                  <c:v>29</c:v>
                 </c:pt>
                 <c:pt idx="4">
-                  <c:v>27</c:v>
+                  <c:v>28</c:v>
                 </c:pt>
                 <c:pt idx="5">
                   <c:v>8</c:v>
@@ -2798,7 +2798,7 @@
                 <a:ea typeface="Arial" pitchFamily="34" charset="-122"/>
                 <a:cs typeface="Arial" pitchFamily="34" charset="-120"/>
               </a:rPr>
-              <a:t>レビュー総数：298件（6サイト）</a:t>
+              <a:t>レビュー総数：309件（6サイト）</a:t>
             </a:r>
             <a:endParaRPr lang="en-US" sz="1000" dirty="0"/>
           </a:p>
@@ -2818,7 +2818,7 @@
                 <a:ea typeface="Arial" pitchFamily="34" charset="-122"/>
                 <a:cs typeface="Arial" pitchFamily="34" charset="-120"/>
               </a:rPr>
-              <a:t>作成日：2026年3月21日</a:t>
+              <a:t>作成日：2026年3月23日</a:t>
             </a:r>
             <a:endParaRPr lang="en-US" sz="1000" dirty="0"/>
           </a:p>
@@ -3364,7 +3364,7 @@
                           <a:ea typeface="Arial" pitchFamily="34" charset="-122"/>
                           <a:cs typeface="Arial" pitchFamily="34" charset="-120"/>
                         </a:rPr>
-                        <a:t>8.27点</a:t>
+                        <a:t>8.29点</a:t>
                       </a:r>
                       <a:endParaRPr lang="en-US" sz="1000" dirty="0">
                         <a:latin typeface="Arial" charset="0"/>
@@ -3638,7 +3638,7 @@
                           <a:ea typeface="Arial" pitchFamily="34" charset="-122"/>
                           <a:cs typeface="Arial" pitchFamily="34" charset="-120"/>
                         </a:rPr>
-                        <a:t>75.8%</a:t>
+                        <a:t>76.1%</a:t>
                       </a:r>
                       <a:endParaRPr lang="en-US" sz="1000" dirty="0">
                         <a:latin typeface="Arial" charset="0"/>
@@ -3912,7 +3912,7 @@
                           <a:ea typeface="Arial" pitchFamily="34" charset="-122"/>
                           <a:cs typeface="Arial" pitchFamily="34" charset="-120"/>
                         </a:rPr>
-                        <a:t>3.0%</a:t>
+                        <a:t>2.9%</a:t>
                       </a:r>
                       <a:endParaRPr lang="en-US" sz="1000" dirty="0">
                         <a:latin typeface="Arial" charset="0"/>
@@ -4460,7 +4460,7 @@
                           <a:ea typeface="Arial" pitchFamily="34" charset="-122"/>
                           <a:cs typeface="Arial" pitchFamily="34" charset="-120"/>
                         </a:rPr>
-                        <a:t>約85件/期間</a:t>
+                        <a:t>約89件/期間</a:t>
                       </a:r>
                       <a:endParaRPr lang="en-US" sz="1000" dirty="0">
                         <a:latin typeface="Arial" charset="0"/>
@@ -4528,7 +4528,7 @@
                           <a:ea typeface="Arial" pitchFamily="34" charset="-122"/>
                           <a:cs typeface="Arial" pitchFamily="34" charset="-120"/>
                         </a:rPr>
-                        <a:t>42件以下</a:t>
+                        <a:t>44件以下</a:t>
                       </a:r>
                       <a:endParaRPr lang="en-US" sz="1000" dirty="0">
                         <a:latin typeface="Arial" charset="0"/>
@@ -5099,7 +5099,7 @@
                 <a:ea typeface="Arial" pitchFamily="34" charset="-122"/>
                 <a:cs typeface="Arial" pitchFamily="34" charset="-120"/>
               </a:rPr>
-              <a:t>8.27</a:t>
+              <a:t>8.29</a:t>
             </a:r>
             <a:endParaRPr lang="en-US" sz="3200" dirty="0"/>
           </a:p>
@@ -5224,7 +5224,7 @@
                 <a:ea typeface="Arial" pitchFamily="34" charset="-122"/>
                 <a:cs typeface="Arial" pitchFamily="34" charset="-120"/>
               </a:rPr>
-              <a:t>75.8%</a:t>
+              <a:t>76.1%</a:t>
             </a:r>
             <a:endParaRPr lang="en-US" sz="3200" dirty="0"/>
           </a:p>
@@ -5349,7 +5349,7 @@
                 <a:ea typeface="Arial" pitchFamily="34" charset="-122"/>
                 <a:cs typeface="Arial" pitchFamily="34" charset="-120"/>
               </a:rPr>
-              <a:t>3.0%</a:t>
+              <a:t>2.9%</a:t>
             </a:r>
             <a:endParaRPr lang="en-US" sz="3200" dirty="0"/>
           </a:p>
@@ -5474,7 +5474,7 @@
                 <a:ea typeface="Arial" pitchFamily="34" charset="-122"/>
                 <a:cs typeface="Arial" pitchFamily="34" charset="-120"/>
               </a:rPr>
-              <a:t>298件</a:t>
+              <a:t>309件</a:t>
             </a:r>
             <a:endParaRPr lang="en-US" sz="3200" dirty="0"/>
           </a:p>
@@ -5622,7 +5622,7 @@
                 <a:ea typeface="Arial" pitchFamily="34" charset="-122"/>
                 <a:cs typeface="Arial" pitchFamily="34" charset="-120"/>
               </a:rPr>
-              <a:t>  朝のシャトルバスは10分前に行ったらもぅいっぱいでしたが、駅へもすぐなので電車で行けば問題なくすぐ着きます</a:t>
+              <a:t>  羽田空港から近くて便利です 羽田空港から近くて便利です</a:t>
             </a:r>
             <a:endParaRPr lang="en-US" sz="1100" dirty="0"/>
           </a:p>
@@ -5662,7 +5662,7 @@
                 <a:ea typeface="Arial" pitchFamily="34" charset="-122"/>
                 <a:cs typeface="Arial" pitchFamily="34" charset="-120"/>
               </a:rPr>
-              <a:t>  バスのスタッフさんやお部屋からの電話対応をしてくださったスタッフさん、とても親切でした</a:t>
+              <a:t>  On se demande à qui s'adresser en cas de problème ホテルのフロン...</a:t>
             </a:r>
             <a:endParaRPr lang="en-US" sz="1100" dirty="0"/>
           </a:p>
@@ -5702,7 +5702,7 @@
                 <a:ea typeface="Arial" pitchFamily="34" charset="-122"/>
                 <a:cs typeface="Arial" pitchFamily="34" charset="-120"/>
               </a:rPr>
-              <a:t>  2人で一泊14620円と安かったので予約しましたが、部屋がとても綺麗なのとチェックアウトが11時までなのがとてもあ...</a:t>
+              <a:t>  部屋自体は概ね清潔で（トイレと床に髪の毛が少し落ちていましたが）、快適で、料金に見合った価値があります</a:t>
             </a:r>
             <a:endParaRPr lang="en-US" sz="1100" dirty="0"/>
           </a:p>
@@ -5850,7 +5850,7 @@
                 <a:ea typeface="Arial" pitchFamily="34" charset="-122"/>
                 <a:cs typeface="Arial" pitchFamily="34" charset="-120"/>
               </a:rPr>
-              <a:t>  空港迄のバスがある事</a:t>
+              <a:t>  部屋自体は概ね清潔で（トイレと床に髪の毛が少し落ちていましたが）、快適で、料金に見合った価値があります</a:t>
             </a:r>
             <a:endParaRPr lang="en-US" sz="1100" dirty="0"/>
           </a:p>
@@ -5890,7 +5890,7 @@
                 <a:ea typeface="Arial" pitchFamily="34" charset="-122"/>
                 <a:cs typeface="Arial" pitchFamily="34" charset="-120"/>
               </a:rPr>
-              <a:t>  The hotel shuttle, which departed at 4:45 am, was very co...</a:t>
+              <a:t>  La proximité de l'aéroport  Le décors Accueil de l'hôtel ...</a:t>
             </a:r>
             <a:endParaRPr lang="en-US" sz="1100" dirty="0"/>
           </a:p>
@@ -5930,7 +5930,7 @@
                 <a:ea typeface="Arial" pitchFamily="34" charset="-122"/>
                 <a:cs typeface="Arial" pitchFamily="34" charset="-120"/>
               </a:rPr>
-              <a:t>  狭いながらも清潔なお部屋で安心して過ごせました</a:t>
+              <a:t>  Understandably small like any other hotel in Tokyo</a:t>
             </a:r>
             <a:endParaRPr lang="en-US" sz="1100" dirty="0"/>
           </a:p>
@@ -6283,7 +6283,7 @@
                 <a:ea typeface="Arial" pitchFamily="34" charset="-122"/>
                 <a:cs typeface="Arial" pitchFamily="34" charset="-120"/>
               </a:rPr>
-              <a:t>8.27</a:t>
+              <a:t>8.29</a:t>
             </a:r>
             <a:endParaRPr lang="en-US" sz="3200" dirty="0"/>
           </a:p>
@@ -6408,7 +6408,7 @@
                 <a:ea typeface="Arial" pitchFamily="34" charset="-122"/>
                 <a:cs typeface="Arial" pitchFamily="34" charset="-120"/>
               </a:rPr>
-              <a:t>75.8%</a:t>
+              <a:t>76.1%</a:t>
             </a:r>
             <a:endParaRPr lang="en-US" sz="3200" dirty="0"/>
           </a:p>
@@ -6533,7 +6533,7 @@
                 <a:ea typeface="Arial" pitchFamily="34" charset="-122"/>
                 <a:cs typeface="Arial" pitchFamily="34" charset="-120"/>
               </a:rPr>
-              <a:t>3.0%</a:t>
+              <a:t>2.9%</a:t>
             </a:r>
             <a:endParaRPr lang="en-US" sz="3200" dirty="0"/>
           </a:p>
@@ -6658,7 +6658,7 @@
                 <a:ea typeface="Arial" pitchFamily="34" charset="-122"/>
                 <a:cs typeface="Arial" pitchFamily="34" charset="-120"/>
               </a:rPr>
-              <a:t>298件</a:t>
+              <a:t>309件</a:t>
             </a:r>
             <a:endParaRPr lang="en-US" sz="3200" dirty="0"/>
           </a:p>
@@ -7079,7 +7079,7 @@
                 <a:ea typeface="Arial" pitchFamily="34" charset="-122"/>
                 <a:cs typeface="Arial" pitchFamily="34" charset="-120"/>
               </a:rPr>
-              <a:t>Trip.com(9.38)が最高スコア。</a:t>
+              <a:t>Trip.com(9.41)が最高スコア。</a:t>
             </a:r>
             <a:endParaRPr lang="en-US" sz="1100" dirty="0"/>
           </a:p>
@@ -7588,7 +7588,7 @@
                           <a:ea typeface="Arial" pitchFamily="34" charset="-122"/>
                           <a:cs typeface="Arial" pitchFamily="34" charset="-120"/>
                         </a:rPr>
-                        <a:t>21</a:t>
+                        <a:t>22</a:t>
                       </a:r>
                       <a:endParaRPr lang="en-US" sz="900" dirty="0">
                         <a:latin typeface="Arial" charset="0"/>
@@ -7656,7 +7656,7 @@
                           <a:ea typeface="Arial" pitchFamily="34" charset="-122"/>
                           <a:cs typeface="Arial" pitchFamily="34" charset="-120"/>
                         </a:rPr>
-                        <a:t>9.38</a:t>
+                        <a:t>9.41</a:t>
                       </a:r>
                       <a:endParaRPr lang="en-US" sz="900" dirty="0">
                         <a:latin typeface="Arial" charset="0"/>
@@ -7792,7 +7792,7 @@
                           <a:ea typeface="Arial" pitchFamily="34" charset="-122"/>
                           <a:cs typeface="Arial" pitchFamily="34" charset="-120"/>
                         </a:rPr>
-                        <a:t>9.38</a:t>
+                        <a:t>9.41</a:t>
                       </a:r>
                       <a:endParaRPr lang="en-US" sz="900" dirty="0">
                         <a:latin typeface="Arial" charset="0"/>
@@ -7930,7 +7930,7 @@
                           <a:ea typeface="Arial" pitchFamily="34" charset="-122"/>
                           <a:cs typeface="Arial" pitchFamily="34" charset="-120"/>
                         </a:rPr>
-                        <a:t>38</a:t>
+                        <a:t>40</a:t>
                       </a:r>
                       <a:endParaRPr lang="en-US" sz="900" dirty="0">
                         <a:latin typeface="Arial" charset="0"/>
@@ -7998,7 +7998,7 @@
                           <a:ea typeface="Arial" pitchFamily="34" charset="-122"/>
                           <a:cs typeface="Arial" pitchFamily="34" charset="-120"/>
                         </a:rPr>
-                        <a:t>4.32</a:t>
+                        <a:t>4.3</a:t>
                       </a:r>
                       <a:endParaRPr lang="en-US" sz="900" dirty="0">
                         <a:latin typeface="Arial" charset="0"/>
@@ -8134,7 +8134,7 @@
                           <a:ea typeface="Arial" pitchFamily="34" charset="-122"/>
                           <a:cs typeface="Arial" pitchFamily="34" charset="-120"/>
                         </a:rPr>
-                        <a:t>8.63</a:t>
+                        <a:t>8.6</a:t>
                       </a:r>
                       <a:endParaRPr lang="en-US" sz="900" dirty="0">
                         <a:latin typeface="Arial" charset="0"/>
@@ -8546,7 +8546,7 @@
                           <a:ea typeface="Arial" pitchFamily="34" charset="-122"/>
                           <a:cs typeface="Arial" pitchFamily="34" charset="-120"/>
                         </a:rPr>
-                        <a:t>Agoda</a:t>
+                        <a:t>Google</a:t>
                       </a:r>
                       <a:endParaRPr lang="en-US" sz="900" dirty="0">
                         <a:latin typeface="Arial" charset="0"/>
@@ -8614,7 +8614,143 @@
                           <a:ea typeface="Arial" pitchFamily="34" charset="-122"/>
                           <a:cs typeface="Arial" pitchFamily="34" charset="-120"/>
                         </a:rPr>
-                        <a:t>34</a:t>
+                        <a:t>55</a:t>
+                      </a:r>
+                      <a:endParaRPr lang="en-US" sz="900" dirty="0">
+                        <a:latin typeface="Arial" charset="0"/>
+                        <a:ea typeface="Arial" charset="0"/>
+                        <a:cs typeface="Arial" charset="0"/>
+                      </a:endParaRPr>
+                    </a:p>
+                  </a:txBody>
+                  <a:tcPr marL="91440" marR="91440" marT="45720" marB="45720">
+                    <a:lnL w="6350" cap="flat" cmpd="sng" algn="ctr">
+                      <a:solidFill>
+                        <a:srgbClr val="CBD5E1"/>
+                      </a:solidFill>
+                      <a:prstDash val="solid"/>
+                      <a:round/>
+                      <a:headEnd type="none" w="med" len="med"/>
+                      <a:tailEnd type="none" w="med" len="med"/>
+                    </a:lnL>
+                    <a:lnR w="6350" cap="flat" cmpd="sng" algn="ctr">
+                      <a:solidFill>
+                        <a:srgbClr val="CBD5E1"/>
+                      </a:solidFill>
+                      <a:prstDash val="solid"/>
+                      <a:round/>
+                      <a:headEnd type="none" w="med" len="med"/>
+                      <a:tailEnd type="none" w="med" len="med"/>
+                    </a:lnR>
+                    <a:lnT w="6350" cap="flat" cmpd="sng" algn="ctr">
+                      <a:solidFill>
+                        <a:srgbClr val="CBD5E1"/>
+                      </a:solidFill>
+                      <a:prstDash val="solid"/>
+                      <a:round/>
+                      <a:headEnd type="none" w="med" len="med"/>
+                      <a:tailEnd type="none" w="med" len="med"/>
+                    </a:lnT>
+                    <a:lnB w="6350" cap="flat" cmpd="sng" algn="ctr">
+                      <a:solidFill>
+                        <a:srgbClr val="CBD5E1"/>
+                      </a:solidFill>
+                      <a:prstDash val="solid"/>
+                      <a:round/>
+                      <a:headEnd type="none" w="med" len="med"/>
+                      <a:tailEnd type="none" w="med" len="med"/>
+                    </a:lnB>
+                    <a:solidFill>
+                      <a:srgbClr val="FFFFFF"/>
+                    </a:solidFill>
+                  </a:tcPr>
+                </a:tc>
+                <a:tc>
+                  <a:txBody>
+                    <a:bodyPr/>
+                    <a:lstStyle/>
+                    <a:p>
+                      <a:pPr algn="ctr" indent="0" marL="0">
+                        <a:buNone/>
+                      </a:pPr>
+                      <a:r>
+                        <a:rPr lang="en-US" sz="900" dirty="0">
+                          <a:solidFill>
+                            <a:srgbClr val="000000"/>
+                          </a:solidFill>
+                          <a:latin typeface="Arial" pitchFamily="34" charset="0"/>
+                          <a:ea typeface="Arial" pitchFamily="34" charset="-122"/>
+                          <a:cs typeface="Arial" pitchFamily="34" charset="-120"/>
+                        </a:rPr>
+                        <a:t>4.07</a:t>
+                      </a:r>
+                      <a:endParaRPr lang="en-US" sz="900" dirty="0">
+                        <a:latin typeface="Arial" charset="0"/>
+                        <a:ea typeface="Arial" charset="0"/>
+                        <a:cs typeface="Arial" charset="0"/>
+                      </a:endParaRPr>
+                    </a:p>
+                  </a:txBody>
+                  <a:tcPr marL="91440" marR="91440" marT="45720" marB="45720">
+                    <a:lnL w="6350" cap="flat" cmpd="sng" algn="ctr">
+                      <a:solidFill>
+                        <a:srgbClr val="CBD5E1"/>
+                      </a:solidFill>
+                      <a:prstDash val="solid"/>
+                      <a:round/>
+                      <a:headEnd type="none" w="med" len="med"/>
+                      <a:tailEnd type="none" w="med" len="med"/>
+                    </a:lnL>
+                    <a:lnR w="6350" cap="flat" cmpd="sng" algn="ctr">
+                      <a:solidFill>
+                        <a:srgbClr val="CBD5E1"/>
+                      </a:solidFill>
+                      <a:prstDash val="solid"/>
+                      <a:round/>
+                      <a:headEnd type="none" w="med" len="med"/>
+                      <a:tailEnd type="none" w="med" len="med"/>
+                    </a:lnR>
+                    <a:lnT w="6350" cap="flat" cmpd="sng" algn="ctr">
+                      <a:solidFill>
+                        <a:srgbClr val="CBD5E1"/>
+                      </a:solidFill>
+                      <a:prstDash val="solid"/>
+                      <a:round/>
+                      <a:headEnd type="none" w="med" len="med"/>
+                      <a:tailEnd type="none" w="med" len="med"/>
+                    </a:lnT>
+                    <a:lnB w="6350" cap="flat" cmpd="sng" algn="ctr">
+                      <a:solidFill>
+                        <a:srgbClr val="CBD5E1"/>
+                      </a:solidFill>
+                      <a:prstDash val="solid"/>
+                      <a:round/>
+                      <a:headEnd type="none" w="med" len="med"/>
+                      <a:tailEnd type="none" w="med" len="med"/>
+                    </a:lnB>
+                    <a:solidFill>
+                      <a:srgbClr val="FFFFFF"/>
+                    </a:solidFill>
+                  </a:tcPr>
+                </a:tc>
+                <a:tc>
+                  <a:txBody>
+                    <a:bodyPr/>
+                    <a:lstStyle/>
+                    <a:p>
+                      <a:pPr algn="ctr" indent="0" marL="0">
+                        <a:buNone/>
+                      </a:pPr>
+                      <a:r>
+                        <a:rPr lang="en-US" sz="900" dirty="0">
+                          <a:solidFill>
+                            <a:srgbClr val="000000"/>
+                          </a:solidFill>
+                          <a:latin typeface="Arial" pitchFamily="34" charset="0"/>
+                          <a:ea typeface="Arial" pitchFamily="34" charset="-122"/>
+                          <a:cs typeface="Arial" pitchFamily="34" charset="-120"/>
+                        </a:rPr>
+                        <a:t>/5 (×2)</a:t>
                       </a:r>
                       <a:endParaRPr lang="en-US" sz="900" dirty="0">
                         <a:latin typeface="Arial" charset="0"/>
@@ -8733,142 +8869,6 @@
                     </a:solidFill>
                   </a:tcPr>
                 </a:tc>
-                <a:tc>
-                  <a:txBody>
-                    <a:bodyPr/>
-                    <a:lstStyle/>
-                    <a:p>
-                      <a:pPr algn="ctr" indent="0" marL="0">
-                        <a:buNone/>
-                      </a:pPr>
-                      <a:r>
-                        <a:rPr lang="en-US" sz="900" dirty="0">
-                          <a:solidFill>
-                            <a:srgbClr val="000000"/>
-                          </a:solidFill>
-                          <a:latin typeface="Arial" pitchFamily="34" charset="0"/>
-                          <a:ea typeface="Arial" pitchFamily="34" charset="-122"/>
-                          <a:cs typeface="Arial" pitchFamily="34" charset="-120"/>
-                        </a:rPr>
-                        <a:t>/10</a:t>
-                      </a:r>
-                      <a:endParaRPr lang="en-US" sz="900" dirty="0">
-                        <a:latin typeface="Arial" charset="0"/>
-                        <a:ea typeface="Arial" charset="0"/>
-                        <a:cs typeface="Arial" charset="0"/>
-                      </a:endParaRPr>
-                    </a:p>
-                  </a:txBody>
-                  <a:tcPr marL="91440" marR="91440" marT="45720" marB="45720">
-                    <a:lnL w="6350" cap="flat" cmpd="sng" algn="ctr">
-                      <a:solidFill>
-                        <a:srgbClr val="CBD5E1"/>
-                      </a:solidFill>
-                      <a:prstDash val="solid"/>
-                      <a:round/>
-                      <a:headEnd type="none" w="med" len="med"/>
-                      <a:tailEnd type="none" w="med" len="med"/>
-                    </a:lnL>
-                    <a:lnR w="6350" cap="flat" cmpd="sng" algn="ctr">
-                      <a:solidFill>
-                        <a:srgbClr val="CBD5E1"/>
-                      </a:solidFill>
-                      <a:prstDash val="solid"/>
-                      <a:round/>
-                      <a:headEnd type="none" w="med" len="med"/>
-                      <a:tailEnd type="none" w="med" len="med"/>
-                    </a:lnR>
-                    <a:lnT w="6350" cap="flat" cmpd="sng" algn="ctr">
-                      <a:solidFill>
-                        <a:srgbClr val="CBD5E1"/>
-                      </a:solidFill>
-                      <a:prstDash val="solid"/>
-                      <a:round/>
-                      <a:headEnd type="none" w="med" len="med"/>
-                      <a:tailEnd type="none" w="med" len="med"/>
-                    </a:lnT>
-                    <a:lnB w="6350" cap="flat" cmpd="sng" algn="ctr">
-                      <a:solidFill>
-                        <a:srgbClr val="CBD5E1"/>
-                      </a:solidFill>
-                      <a:prstDash val="solid"/>
-                      <a:round/>
-                      <a:headEnd type="none" w="med" len="med"/>
-                      <a:tailEnd type="none" w="med" len="med"/>
-                    </a:lnB>
-                    <a:solidFill>
-                      <a:srgbClr val="FFFFFF"/>
-                    </a:solidFill>
-                  </a:tcPr>
-                </a:tc>
-                <a:tc>
-                  <a:txBody>
-                    <a:bodyPr/>
-                    <a:lstStyle/>
-                    <a:p>
-                      <a:pPr algn="ctr" indent="0" marL="0">
-                        <a:buNone/>
-                      </a:pPr>
-                      <a:r>
-                        <a:rPr lang="en-US" sz="900" dirty="0">
-                          <a:solidFill>
-                            <a:srgbClr val="000000"/>
-                          </a:solidFill>
-                          <a:latin typeface="Arial" pitchFamily="34" charset="0"/>
-                          <a:ea typeface="Arial" pitchFamily="34" charset="-122"/>
-                          <a:cs typeface="Arial" pitchFamily="34" charset="-120"/>
-                        </a:rPr>
-                        <a:t>8.15</a:t>
-                      </a:r>
-                      <a:endParaRPr lang="en-US" sz="900" dirty="0">
-                        <a:latin typeface="Arial" charset="0"/>
-                        <a:ea typeface="Arial" charset="0"/>
-                        <a:cs typeface="Arial" charset="0"/>
-                      </a:endParaRPr>
-                    </a:p>
-                  </a:txBody>
-                  <a:tcPr marL="91440" marR="91440" marT="45720" marB="45720">
-                    <a:lnL w="6350" cap="flat" cmpd="sng" algn="ctr">
-                      <a:solidFill>
-                        <a:srgbClr val="CBD5E1"/>
-                      </a:solidFill>
-                      <a:prstDash val="solid"/>
-                      <a:round/>
-                      <a:headEnd type="none" w="med" len="med"/>
-                      <a:tailEnd type="none" w="med" len="med"/>
-                    </a:lnL>
-                    <a:lnR w="6350" cap="flat" cmpd="sng" algn="ctr">
-                      <a:solidFill>
-                        <a:srgbClr val="CBD5E1"/>
-                      </a:solidFill>
-                      <a:prstDash val="solid"/>
-                      <a:round/>
-                      <a:headEnd type="none" w="med" len="med"/>
-                      <a:tailEnd type="none" w="med" len="med"/>
-                    </a:lnR>
-                    <a:lnT w="6350" cap="flat" cmpd="sng" algn="ctr">
-                      <a:solidFill>
-                        <a:srgbClr val="CBD5E1"/>
-                      </a:solidFill>
-                      <a:prstDash val="solid"/>
-                      <a:round/>
-                      <a:headEnd type="none" w="med" len="med"/>
-                      <a:tailEnd type="none" w="med" len="med"/>
-                    </a:lnT>
-                    <a:lnB w="6350" cap="flat" cmpd="sng" algn="ctr">
-                      <a:solidFill>
-                        <a:srgbClr val="CBD5E1"/>
-                      </a:solidFill>
-                      <a:prstDash val="solid"/>
-                      <a:round/>
-                      <a:headEnd type="none" w="med" len="med"/>
-                      <a:tailEnd type="none" w="med" len="med"/>
-                    </a:lnB>
-                    <a:solidFill>
-                      <a:srgbClr val="FFFFFF"/>
-                    </a:solidFill>
-                  </a:tcPr>
-                </a:tc>
               </a:tr>
               <a:tr h="201168">
                 <a:tc>
@@ -8888,7 +8888,7 @@
                           <a:ea typeface="Arial" pitchFamily="34" charset="-122"/>
                           <a:cs typeface="Arial" pitchFamily="34" charset="-120"/>
                         </a:rPr>
-                        <a:t>Booking.com</a:t>
+                        <a:t>Agoda</a:t>
                       </a:r>
                       <a:endParaRPr lang="en-US" sz="900" dirty="0">
                         <a:latin typeface="Arial" charset="0"/>
@@ -8956,7 +8956,7 @@
                           <a:ea typeface="Arial" pitchFamily="34" charset="-122"/>
                           <a:cs typeface="Arial" pitchFamily="34" charset="-120"/>
                         </a:rPr>
-                        <a:t>127</a:t>
+                        <a:t>35</a:t>
                       </a:r>
                       <a:endParaRPr lang="en-US" sz="900" dirty="0">
                         <a:latin typeface="Arial" charset="0"/>
@@ -9024,7 +9024,7 @@
                           <a:ea typeface="Arial" pitchFamily="34" charset="-122"/>
                           <a:cs typeface="Arial" pitchFamily="34" charset="-120"/>
                         </a:rPr>
-                        <a:t>8.09</a:t>
+                        <a:t>8.11</a:t>
                       </a:r>
                       <a:endParaRPr lang="en-US" sz="900" dirty="0">
                         <a:latin typeface="Arial" charset="0"/>
@@ -9160,7 +9160,7 @@
                           <a:ea typeface="Arial" pitchFamily="34" charset="-122"/>
                           <a:cs typeface="Arial" pitchFamily="34" charset="-120"/>
                         </a:rPr>
-                        <a:t>8.09</a:t>
+                        <a:t>8.11</a:t>
                       </a:r>
                       <a:endParaRPr lang="en-US" sz="900" dirty="0">
                         <a:latin typeface="Arial" charset="0"/>
@@ -9230,7 +9230,7 @@
                           <a:ea typeface="Arial" pitchFamily="34" charset="-122"/>
                           <a:cs typeface="Arial" pitchFamily="34" charset="-120"/>
                         </a:rPr>
-                        <a:t>Google</a:t>
+                        <a:t>Booking.com</a:t>
                       </a:r>
                       <a:endParaRPr lang="en-US" sz="900" dirty="0">
                         <a:latin typeface="Arial" charset="0"/>
@@ -9298,7 +9298,7 @@
                           <a:ea typeface="Arial" pitchFamily="34" charset="-122"/>
                           <a:cs typeface="Arial" pitchFamily="34" charset="-120"/>
                         </a:rPr>
-                        <a:t>53</a:t>
+                        <a:t>132</a:t>
                       </a:r>
                       <a:endParaRPr lang="en-US" sz="900" dirty="0">
                         <a:latin typeface="Arial" charset="0"/>
@@ -9366,7 +9366,7 @@
                           <a:ea typeface="Arial" pitchFamily="34" charset="-122"/>
                           <a:cs typeface="Arial" pitchFamily="34" charset="-120"/>
                         </a:rPr>
-                        <a:t>4.04</a:t>
+                        <a:t>8.11</a:t>
                       </a:r>
                       <a:endParaRPr lang="en-US" sz="900" dirty="0">
                         <a:latin typeface="Arial" charset="0"/>
@@ -9434,7 +9434,7 @@
                           <a:ea typeface="Arial" pitchFamily="34" charset="-122"/>
                           <a:cs typeface="Arial" pitchFamily="34" charset="-120"/>
                         </a:rPr>
-                        <a:t>/5 (×2)</a:t>
+                        <a:t>/10</a:t>
                       </a:r>
                       <a:endParaRPr lang="en-US" sz="900" dirty="0">
                         <a:latin typeface="Arial" charset="0"/>
@@ -9502,7 +9502,7 @@
                           <a:ea typeface="Arial" pitchFamily="34" charset="-122"/>
                           <a:cs typeface="Arial" pitchFamily="34" charset="-120"/>
                         </a:rPr>
-                        <a:t>8.08</a:t>
+                        <a:t>8.11</a:t>
                       </a:r>
                       <a:endParaRPr lang="en-US" sz="900" dirty="0">
                         <a:latin typeface="Arial" charset="0"/>
@@ -9910,7 +9910,7 @@
                 <a:ea typeface="Arial" pitchFamily="34" charset="-122"/>
                 <a:cs typeface="Arial" pitchFamily="34" charset="-120"/>
               </a:rPr>
-              <a:t>226件（75.8%）</a:t>
+              <a:t>235件（76.1%）</a:t>
             </a:r>
             <a:endParaRPr lang="en-US" sz="1100" dirty="0"/>
           </a:p>
@@ -10008,7 +10008,7 @@
                 <a:ea typeface="Arial" pitchFamily="34" charset="-122"/>
                 <a:cs typeface="Arial" pitchFamily="34" charset="-120"/>
               </a:rPr>
-              <a:t>63件（21.1%）</a:t>
+              <a:t>65件（21.0%）</a:t>
             </a:r>
             <a:endParaRPr lang="en-US" sz="1100" dirty="0"/>
           </a:p>
@@ -10106,7 +10106,7 @@
                 <a:ea typeface="Arial" pitchFamily="34" charset="-122"/>
                 <a:cs typeface="Arial" pitchFamily="34" charset="-120"/>
               </a:rPr>
-              <a:t>9件（3.0%）</a:t>
+              <a:t>9件（2.9%）</a:t>
             </a:r>
             <a:endParaRPr lang="en-US" sz="1100" dirty="0"/>
           </a:p>
@@ -10518,7 +10518,7 @@
                 <a:ea typeface="Arial" pitchFamily="34" charset="-122"/>
                 <a:cs typeface="Arial" pitchFamily="34" charset="-120"/>
               </a:rPr>
-              <a:t>朝のシャトルバスは10分前に行ったらもぅいっぱいでしたが、駅へもすぐなので電車で行けば問題なくすぐ着きます</a:t>
+              <a:t>羽田空港から近くて便利です 羽田空港から近くて便利です</a:t>
             </a:r>
             <a:endParaRPr lang="en-US" sz="900" dirty="0"/>
           </a:p>
@@ -10557,7 +10557,7 @@
                 <a:ea typeface="Arial" pitchFamily="34" charset="-122"/>
                 <a:cs typeface="Arial" pitchFamily="34" charset="-120"/>
               </a:rPr>
-              <a:t>「Great location」</a:t>
+              <a:t>「朝のシャトルバスは10分前に行ったらもぅいっぱいでしたが、駅へもすぐなので電車で行けば問題なくすぐ着きます」</a:t>
             </a:r>
             <a:endParaRPr lang="en-US" sz="900" dirty="0"/>
           </a:p>
@@ -10741,7 +10741,7 @@
                 <a:ea typeface="Arial" pitchFamily="34" charset="-122"/>
                 <a:cs typeface="Arial" pitchFamily="34" charset="-120"/>
               </a:rPr>
-              <a:t>バスのスタッフさんやお部屋からの電話対応をしてくださったスタッフさん、とても親切でした</a:t>
+              <a:t>On se demande à qui s'adresser en cas de problème ホテルのフロン...</a:t>
             </a:r>
             <a:endParaRPr lang="en-US" sz="900" dirty="0"/>
           </a:p>
@@ -10780,7 +10780,7 @@
                 <a:ea typeface="Arial" pitchFamily="34" charset="-122"/>
                 <a:cs typeface="Arial" pitchFamily="34" charset="-120"/>
               </a:rPr>
-              <a:t>「他のホテルからのバスが3度も到着するのを見ましたが、このホテルは何の対応もしてくれませんでした」</a:t>
+              <a:t>「もちろん、スタッフも常駐しており（案内表示にも記載されています）、必要な時にいつでも対応してくれます」</a:t>
             </a:r>
             <a:endParaRPr lang="en-US" sz="900" dirty="0"/>
           </a:p>
@@ -10964,7 +10964,7 @@
                 <a:ea typeface="Arial" pitchFamily="34" charset="-122"/>
                 <a:cs typeface="Arial" pitchFamily="34" charset="-120"/>
               </a:rPr>
-              <a:t>2人で一泊14620円と安かったので予約しましたが、部屋がとても綺麗なのとチェックアウトが11時までなのがとてもあ...</a:t>
+              <a:t>部屋自体は概ね清潔で（トイレと床に髪の毛が少し落ちていましたが）、快適で、料金に見合った価値があります</a:t>
             </a:r>
             <a:endParaRPr lang="en-US" sz="900" dirty="0"/>
           </a:p>
@@ -11003,7 +11003,7 @@
                 <a:ea typeface="Arial" pitchFamily="34" charset="-122"/>
                 <a:cs typeface="Arial" pitchFamily="34" charset="-120"/>
               </a:rPr>
-              <a:t>「狭いながらも清潔なお部屋で安心して過ごせました」</a:t>
+              <a:t>「The room was decently sized for Japan standards, very clean」</a:t>
             </a:r>
             <a:endParaRPr lang="en-US" sz="900" dirty="0"/>
           </a:p>
@@ -11187,7 +11187,7 @@
                 <a:ea typeface="Arial" pitchFamily="34" charset="-122"/>
                 <a:cs typeface="Arial" pitchFamily="34" charset="-120"/>
               </a:rPr>
-              <a:t>各ベッドに枕がもう一つ必要です</a:t>
+              <a:t>部屋自体は概ね清潔で（トイレと床に髪の毛が少し落ちていましたが）、快適で、料金に見合った価値があります</a:t>
             </a:r>
             <a:endParaRPr lang="en-US" sz="900" dirty="0"/>
           </a:p>
@@ -11226,7 +11226,7 @@
                 <a:ea typeface="Arial" pitchFamily="34" charset="-122"/>
                 <a:cs typeface="Arial" pitchFamily="34" charset="-120"/>
               </a:rPr>
-              <a:t>「早朝出発の人などの音が気になるのと、お風呂の排水口の臭いが気になる〜後は快適に過ごせた」</a:t>
+              <a:t>「ベッドが別々でツインだったから 朝空港迄の送迎バスに乗れて助かった バッグの荷物が重すぎるので コロコロじゃなかっ...」</a:t>
             </a:r>
             <a:endParaRPr lang="en-US" sz="900" dirty="0"/>
           </a:p>
@@ -12362,7 +12362,7 @@
                           <a:ea typeface="Arial" pitchFamily="34" charset="-122"/>
                           <a:cs typeface="Arial" pitchFamily="34" charset="-120"/>
                         </a:rPr>
-                        <a:t>空港迄のバスがある事</a:t>
+                        <a:t>部屋自体は概ね清潔で（トイレと床に髪の毛が少し落ちていましたが）、快適で、料金に見合った価値があります</a:t>
                       </a:r>
                       <a:endParaRPr lang="en-US" sz="900" dirty="0">
                         <a:latin typeface="Arial" charset="0"/>
@@ -12430,7 +12430,7 @@
                           <a:ea typeface="Arial" pitchFamily="34" charset="-122"/>
                           <a:cs typeface="Arial" pitchFamily="34" charset="-120"/>
                         </a:rPr>
-                        <a:t>85件</a:t>
+                        <a:t>89件</a:t>
                       </a:r>
                       <a:endParaRPr lang="en-US" sz="900" dirty="0">
                         <a:latin typeface="Arial" charset="0"/>
@@ -12636,7 +12636,7 @@
                           <a:ea typeface="Arial" pitchFamily="34" charset="-122"/>
                           <a:cs typeface="Arial" pitchFamily="34" charset="-120"/>
                         </a:rPr>
-                        <a:t>The hotel shuttle, which departed at 4:45 am, was very co...</a:t>
+                        <a:t>La proximité de l'aéroport  Le décors Accueil de l'hôtel ...</a:t>
                       </a:r>
                       <a:endParaRPr lang="en-US" sz="900" dirty="0">
                         <a:latin typeface="Arial" charset="0"/>
@@ -12704,7 +12704,7 @@
                           <a:ea typeface="Arial" pitchFamily="34" charset="-122"/>
                           <a:cs typeface="Arial" pitchFamily="34" charset="-120"/>
                         </a:rPr>
-                        <a:t>28件</a:t>
+                        <a:t>31件</a:t>
                       </a:r>
                       <a:endParaRPr lang="en-US" sz="900" dirty="0">
                         <a:latin typeface="Arial" charset="0"/>
@@ -12910,7 +12910,7 @@
                           <a:ea typeface="Arial" pitchFamily="34" charset="-122"/>
                           <a:cs typeface="Arial" pitchFamily="34" charset="-120"/>
                         </a:rPr>
-                        <a:t>狭いながらも清潔なお部屋で安心して過ごせました</a:t>
+                        <a:t>Understandably small like any other hotel in Tokyo</a:t>
                       </a:r>
                       <a:endParaRPr lang="en-US" sz="900" dirty="0">
                         <a:latin typeface="Arial" charset="0"/>
@@ -12978,7 +12978,7 @@
                           <a:ea typeface="Arial" pitchFamily="34" charset="-122"/>
                           <a:cs typeface="Arial" pitchFamily="34" charset="-120"/>
                         </a:rPr>
-                        <a:t>20件</a:t>
+                        <a:t>21件</a:t>
                       </a:r>
                       <a:endParaRPr lang="en-US" sz="900" dirty="0">
                         <a:latin typeface="Arial" charset="0"/>

--- a/納品レポート/ホテル別レポート/henn_na_haneda_口コミ分析レポート.pptx
+++ b/納品レポート/ホテル別レポート/henn_na_haneda_口コミ分析レポート.pptx
@@ -208,10 +208,10 @@
                 <c:formatCode>General</c:formatCode>
                 <c:ptCount val="6"/>
                 <c:pt idx="0">
-                  <c:v>9.41</c:v>
+                  <c:v>9.43</c:v>
                 </c:pt>
                 <c:pt idx="1">
-                  <c:v>8.6</c:v>
+                  <c:v>8.57</c:v>
                 </c:pt>
                 <c:pt idx="2">
                   <c:v>8.32</c:v>
@@ -220,10 +220,10 @@
                   <c:v>8.15</c:v>
                 </c:pt>
                 <c:pt idx="4">
-                  <c:v>8.11</c:v>
+                  <c:v>8.14</c:v>
                 </c:pt>
                 <c:pt idx="5">
-                  <c:v>8.11</c:v>
+                  <c:v>8.12</c:v>
                 </c:pt>
               </c:numCache>
             </c:numRef>
@@ -566,10 +566,10 @@
               <c:numCache>
                 <c:ptCount val="3"/>
                 <c:pt idx="0">
-                  <c:v>235</c:v>
+                  <c:v>242</c:v>
                 </c:pt>
                 <c:pt idx="1">
-                  <c:v>65</c:v>
+                  <c:v>66</c:v>
                 </c:pt>
                 <c:pt idx="2">
                   <c:v>9</c:v>
@@ -823,16 +823,16 @@
                 <c:formatCode>General</c:formatCode>
                 <c:ptCount val="9"/>
                 <c:pt idx="0">
-                  <c:v>104</c:v>
+                  <c:v>106</c:v>
                 </c:pt>
                 <c:pt idx="1">
-                  <c:v>39</c:v>
+                  <c:v>41</c:v>
                 </c:pt>
                 <c:pt idx="2">
-                  <c:v>92</c:v>
+                  <c:v>95</c:v>
                 </c:pt>
                 <c:pt idx="3">
-                  <c:v>29</c:v>
+                  <c:v>30</c:v>
                 </c:pt>
                 <c:pt idx="4">
                   <c:v>28</c:v>
@@ -2798,7 +2798,7 @@
                 <a:ea typeface="Arial" pitchFamily="34" charset="-122"/>
                 <a:cs typeface="Arial" pitchFamily="34" charset="-120"/>
               </a:rPr>
-              <a:t>レビュー総数：309件（6サイト）</a:t>
+              <a:t>レビュー総数：317件（6サイト）</a:t>
             </a:r>
             <a:endParaRPr lang="en-US" sz="1000" dirty="0"/>
           </a:p>
@@ -2818,7 +2818,7 @@
                 <a:ea typeface="Arial" pitchFamily="34" charset="-122"/>
                 <a:cs typeface="Arial" pitchFamily="34" charset="-120"/>
               </a:rPr>
-              <a:t>作成日：2026年3月23日</a:t>
+              <a:t>作成日：2026年3月24日</a:t>
             </a:r>
             <a:endParaRPr lang="en-US" sz="1000" dirty="0"/>
           </a:p>
@@ -3364,7 +3364,7 @@
                           <a:ea typeface="Arial" pitchFamily="34" charset="-122"/>
                           <a:cs typeface="Arial" pitchFamily="34" charset="-120"/>
                         </a:rPr>
-                        <a:t>8.29点</a:t>
+                        <a:t>8.30点</a:t>
                       </a:r>
                       <a:endParaRPr lang="en-US" sz="1000" dirty="0">
                         <a:latin typeface="Arial" charset="0"/>
@@ -3638,7 +3638,7 @@
                           <a:ea typeface="Arial" pitchFamily="34" charset="-122"/>
                           <a:cs typeface="Arial" pitchFamily="34" charset="-120"/>
                         </a:rPr>
-                        <a:t>76.1%</a:t>
+                        <a:t>76.3%</a:t>
                       </a:r>
                       <a:endParaRPr lang="en-US" sz="1000" dirty="0">
                         <a:latin typeface="Arial" charset="0"/>
@@ -3912,7 +3912,7 @@
                           <a:ea typeface="Arial" pitchFamily="34" charset="-122"/>
                           <a:cs typeface="Arial" pitchFamily="34" charset="-120"/>
                         </a:rPr>
-                        <a:t>2.9%</a:t>
+                        <a:t>2.8%</a:t>
                       </a:r>
                       <a:endParaRPr lang="en-US" sz="1000" dirty="0">
                         <a:latin typeface="Arial" charset="0"/>
@@ -4460,7 +4460,7 @@
                           <a:ea typeface="Arial" pitchFamily="34" charset="-122"/>
                           <a:cs typeface="Arial" pitchFamily="34" charset="-120"/>
                         </a:rPr>
-                        <a:t>約89件/期間</a:t>
+                        <a:t>約95件/期間</a:t>
                       </a:r>
                       <a:endParaRPr lang="en-US" sz="1000" dirty="0">
                         <a:latin typeface="Arial" charset="0"/>
@@ -4528,7 +4528,7 @@
                           <a:ea typeface="Arial" pitchFamily="34" charset="-122"/>
                           <a:cs typeface="Arial" pitchFamily="34" charset="-120"/>
                         </a:rPr>
-                        <a:t>44件以下</a:t>
+                        <a:t>47件以下</a:t>
                       </a:r>
                       <a:endParaRPr lang="en-US" sz="1000" dirty="0">
                         <a:latin typeface="Arial" charset="0"/>
@@ -5099,7 +5099,7 @@
                 <a:ea typeface="Arial" pitchFamily="34" charset="-122"/>
                 <a:cs typeface="Arial" pitchFamily="34" charset="-120"/>
               </a:rPr>
-              <a:t>8.29</a:t>
+              <a:t>8.30</a:t>
             </a:r>
             <a:endParaRPr lang="en-US" sz="3200" dirty="0"/>
           </a:p>
@@ -5224,7 +5224,7 @@
                 <a:ea typeface="Arial" pitchFamily="34" charset="-122"/>
                 <a:cs typeface="Arial" pitchFamily="34" charset="-120"/>
               </a:rPr>
-              <a:t>76.1%</a:t>
+              <a:t>76.3%</a:t>
             </a:r>
             <a:endParaRPr lang="en-US" sz="3200" dirty="0"/>
           </a:p>
@@ -5349,7 +5349,7 @@
                 <a:ea typeface="Arial" pitchFamily="34" charset="-122"/>
                 <a:cs typeface="Arial" pitchFamily="34" charset="-120"/>
               </a:rPr>
-              <a:t>2.9%</a:t>
+              <a:t>2.8%</a:t>
             </a:r>
             <a:endParaRPr lang="en-US" sz="3200" dirty="0"/>
           </a:p>
@@ -5474,7 +5474,7 @@
                 <a:ea typeface="Arial" pitchFamily="34" charset="-122"/>
                 <a:cs typeface="Arial" pitchFamily="34" charset="-120"/>
               </a:rPr>
-              <a:t>309件</a:t>
+              <a:t>317件</a:t>
             </a:r>
             <a:endParaRPr lang="en-US" sz="3200" dirty="0"/>
           </a:p>
@@ -5622,7 +5622,7 @@
                 <a:ea typeface="Arial" pitchFamily="34" charset="-122"/>
                 <a:cs typeface="Arial" pitchFamily="34" charset="-120"/>
               </a:rPr>
-              <a:t>  羽田空港から近くて便利です 羽田空港から近くて便利です</a:t>
+              <a:t>  We only stayed one night and we wanted someplace close to...</a:t>
             </a:r>
             <a:endParaRPr lang="en-US" sz="1100" dirty="0"/>
           </a:p>
@@ -5662,7 +5662,7 @@
                 <a:ea typeface="Arial" pitchFamily="34" charset="-122"/>
                 <a:cs typeface="Arial" pitchFamily="34" charset="-120"/>
               </a:rPr>
-              <a:t>  On se demande à qui s'adresser en cas de problème ホテルのフロン...</a:t>
+              <a:t>  チェックイン手続きは全体的にスムーズでしたが、自動ロボットによる対応が少し気になりました</a:t>
             </a:r>
             <a:endParaRPr lang="en-US" sz="1100" dirty="0"/>
           </a:p>
@@ -5702,7 +5702,7 @@
                 <a:ea typeface="Arial" pitchFamily="34" charset="-122"/>
                 <a:cs typeface="Arial" pitchFamily="34" charset="-120"/>
               </a:rPr>
-              <a:t>  部屋自体は概ね清潔で（トイレと床に髪の毛が少し落ちていましたが）、快適で、料金に見合った価値があります</a:t>
+              <a:t>  とても清潔でコンパクト、そして快適でした</a:t>
             </a:r>
             <a:endParaRPr lang="en-US" sz="1100" dirty="0"/>
           </a:p>
@@ -5850,7 +5850,7 @@
                 <a:ea typeface="Arial" pitchFamily="34" charset="-122"/>
                 <a:cs typeface="Arial" pitchFamily="34" charset="-120"/>
               </a:rPr>
-              <a:t>  部屋自体は概ね清潔で（トイレと床に髪の毛が少し落ちていましたが）、快適で、料金に見合った価値があります</a:t>
+              <a:t>  無料シャトルバスは時間通りに運行していました</a:t>
             </a:r>
             <a:endParaRPr lang="en-US" sz="1100" dirty="0"/>
           </a:p>
@@ -5890,7 +5890,7 @@
                 <a:ea typeface="Arial" pitchFamily="34" charset="-122"/>
                 <a:cs typeface="Arial" pitchFamily="34" charset="-120"/>
               </a:rPr>
-              <a:t>  La proximité de l'aéroport  Le décors Accueil de l'hôtel ...</a:t>
+              <a:t>  Very clean, compact and comfy</a:t>
             </a:r>
             <a:endParaRPr lang="en-US" sz="1100" dirty="0"/>
           </a:p>
@@ -5930,7 +5930,7 @@
                 <a:ea typeface="Arial" pitchFamily="34" charset="-122"/>
                 <a:cs typeface="Arial" pitchFamily="34" charset="-120"/>
               </a:rPr>
-              <a:t>  Understandably small like any other hotel in Tokyo</a:t>
+              <a:t>  was small but good enough for us to rest well</a:t>
             </a:r>
             <a:endParaRPr lang="en-US" sz="1100" dirty="0"/>
           </a:p>
@@ -6283,7 +6283,7 @@
                 <a:ea typeface="Arial" pitchFamily="34" charset="-122"/>
                 <a:cs typeface="Arial" pitchFamily="34" charset="-120"/>
               </a:rPr>
-              <a:t>8.29</a:t>
+              <a:t>8.30</a:t>
             </a:r>
             <a:endParaRPr lang="en-US" sz="3200" dirty="0"/>
           </a:p>
@@ -6408,7 +6408,7 @@
                 <a:ea typeface="Arial" pitchFamily="34" charset="-122"/>
                 <a:cs typeface="Arial" pitchFamily="34" charset="-120"/>
               </a:rPr>
-              <a:t>76.1%</a:t>
+              <a:t>76.3%</a:t>
             </a:r>
             <a:endParaRPr lang="en-US" sz="3200" dirty="0"/>
           </a:p>
@@ -6533,7 +6533,7 @@
                 <a:ea typeface="Arial" pitchFamily="34" charset="-122"/>
                 <a:cs typeface="Arial" pitchFamily="34" charset="-120"/>
               </a:rPr>
-              <a:t>2.9%</a:t>
+              <a:t>2.8%</a:t>
             </a:r>
             <a:endParaRPr lang="en-US" sz="3200" dirty="0"/>
           </a:p>
@@ -6658,7 +6658,7 @@
                 <a:ea typeface="Arial" pitchFamily="34" charset="-122"/>
                 <a:cs typeface="Arial" pitchFamily="34" charset="-120"/>
               </a:rPr>
-              <a:t>309件</a:t>
+              <a:t>317件</a:t>
             </a:r>
             <a:endParaRPr lang="en-US" sz="3200" dirty="0"/>
           </a:p>
@@ -7079,7 +7079,7 @@
                 <a:ea typeface="Arial" pitchFamily="34" charset="-122"/>
                 <a:cs typeface="Arial" pitchFamily="34" charset="-120"/>
               </a:rPr>
-              <a:t>Trip.com(9.41)が最高スコア。</a:t>
+              <a:t>Trip.com(9.43)が最高スコア。</a:t>
             </a:r>
             <a:endParaRPr lang="en-US" sz="1100" dirty="0"/>
           </a:p>
@@ -7588,7 +7588,7 @@
                           <a:ea typeface="Arial" pitchFamily="34" charset="-122"/>
                           <a:cs typeface="Arial" pitchFamily="34" charset="-120"/>
                         </a:rPr>
-                        <a:t>22</a:t>
+                        <a:t>23</a:t>
                       </a:r>
                       <a:endParaRPr lang="en-US" sz="900" dirty="0">
                         <a:latin typeface="Arial" charset="0"/>
@@ -7656,7 +7656,7 @@
                           <a:ea typeface="Arial" pitchFamily="34" charset="-122"/>
                           <a:cs typeface="Arial" pitchFamily="34" charset="-120"/>
                         </a:rPr>
-                        <a:t>9.41</a:t>
+                        <a:t>9.43</a:t>
                       </a:r>
                       <a:endParaRPr lang="en-US" sz="900" dirty="0">
                         <a:latin typeface="Arial" charset="0"/>
@@ -7792,7 +7792,7 @@
                           <a:ea typeface="Arial" pitchFamily="34" charset="-122"/>
                           <a:cs typeface="Arial" pitchFamily="34" charset="-120"/>
                         </a:rPr>
-                        <a:t>9.41</a:t>
+                        <a:t>9.43</a:t>
                       </a:r>
                       <a:endParaRPr lang="en-US" sz="900" dirty="0">
                         <a:latin typeface="Arial" charset="0"/>
@@ -7930,7 +7930,7 @@
                           <a:ea typeface="Arial" pitchFamily="34" charset="-122"/>
                           <a:cs typeface="Arial" pitchFamily="34" charset="-120"/>
                         </a:rPr>
-                        <a:t>40</a:t>
+                        <a:t>42</a:t>
                       </a:r>
                       <a:endParaRPr lang="en-US" sz="900" dirty="0">
                         <a:latin typeface="Arial" charset="0"/>
@@ -7998,7 +7998,7 @@
                           <a:ea typeface="Arial" pitchFamily="34" charset="-122"/>
                           <a:cs typeface="Arial" pitchFamily="34" charset="-120"/>
                         </a:rPr>
-                        <a:t>4.3</a:t>
+                        <a:t>4.29</a:t>
                       </a:r>
                       <a:endParaRPr lang="en-US" sz="900" dirty="0">
                         <a:latin typeface="Arial" charset="0"/>
@@ -8134,7 +8134,7 @@
                           <a:ea typeface="Arial" pitchFamily="34" charset="-122"/>
                           <a:cs typeface="Arial" pitchFamily="34" charset="-120"/>
                         </a:rPr>
-                        <a:t>8.6</a:t>
+                        <a:t>8.57</a:t>
                       </a:r>
                       <a:endParaRPr lang="en-US" sz="900" dirty="0">
                         <a:latin typeface="Arial" charset="0"/>
@@ -8956,7 +8956,7 @@
                           <a:ea typeface="Arial" pitchFamily="34" charset="-122"/>
                           <a:cs typeface="Arial" pitchFamily="34" charset="-120"/>
                         </a:rPr>
-                        <a:t>35</a:t>
+                        <a:t>36</a:t>
                       </a:r>
                       <a:endParaRPr lang="en-US" sz="900" dirty="0">
                         <a:latin typeface="Arial" charset="0"/>
@@ -9024,7 +9024,7 @@
                           <a:ea typeface="Arial" pitchFamily="34" charset="-122"/>
                           <a:cs typeface="Arial" pitchFamily="34" charset="-120"/>
                         </a:rPr>
-                        <a:t>8.11</a:t>
+                        <a:t>8.14</a:t>
                       </a:r>
                       <a:endParaRPr lang="en-US" sz="900" dirty="0">
                         <a:latin typeface="Arial" charset="0"/>
@@ -9160,7 +9160,7 @@
                           <a:ea typeface="Arial" pitchFamily="34" charset="-122"/>
                           <a:cs typeface="Arial" pitchFamily="34" charset="-120"/>
                         </a:rPr>
-                        <a:t>8.11</a:t>
+                        <a:t>8.14</a:t>
                       </a:r>
                       <a:endParaRPr lang="en-US" sz="900" dirty="0">
                         <a:latin typeface="Arial" charset="0"/>
@@ -9298,7 +9298,7 @@
                           <a:ea typeface="Arial" pitchFamily="34" charset="-122"/>
                           <a:cs typeface="Arial" pitchFamily="34" charset="-120"/>
                         </a:rPr>
-                        <a:t>132</a:t>
+                        <a:t>136</a:t>
                       </a:r>
                       <a:endParaRPr lang="en-US" sz="900" dirty="0">
                         <a:latin typeface="Arial" charset="0"/>
@@ -9366,7 +9366,7 @@
                           <a:ea typeface="Arial" pitchFamily="34" charset="-122"/>
                           <a:cs typeface="Arial" pitchFamily="34" charset="-120"/>
                         </a:rPr>
-                        <a:t>8.11</a:t>
+                        <a:t>8.12</a:t>
                       </a:r>
                       <a:endParaRPr lang="en-US" sz="900" dirty="0">
                         <a:latin typeface="Arial" charset="0"/>
@@ -9502,7 +9502,7 @@
                           <a:ea typeface="Arial" pitchFamily="34" charset="-122"/>
                           <a:cs typeface="Arial" pitchFamily="34" charset="-120"/>
                         </a:rPr>
-                        <a:t>8.11</a:t>
+                        <a:t>8.12</a:t>
                       </a:r>
                       <a:endParaRPr lang="en-US" sz="900" dirty="0">
                         <a:latin typeface="Arial" charset="0"/>
@@ -9910,7 +9910,7 @@
                 <a:ea typeface="Arial" pitchFamily="34" charset="-122"/>
                 <a:cs typeface="Arial" pitchFamily="34" charset="-120"/>
               </a:rPr>
-              <a:t>235件（76.1%）</a:t>
+              <a:t>242件（76.3%）</a:t>
             </a:r>
             <a:endParaRPr lang="en-US" sz="1100" dirty="0"/>
           </a:p>
@@ -10008,7 +10008,7 @@
                 <a:ea typeface="Arial" pitchFamily="34" charset="-122"/>
                 <a:cs typeface="Arial" pitchFamily="34" charset="-120"/>
               </a:rPr>
-              <a:t>65件（21.0%）</a:t>
+              <a:t>66件（20.8%）</a:t>
             </a:r>
             <a:endParaRPr lang="en-US" sz="1100" dirty="0"/>
           </a:p>
@@ -10106,7 +10106,7 @@
                 <a:ea typeface="Arial" pitchFamily="34" charset="-122"/>
                 <a:cs typeface="Arial" pitchFamily="34" charset="-120"/>
               </a:rPr>
-              <a:t>9件（2.9%）</a:t>
+              <a:t>9件（2.8%）</a:t>
             </a:r>
             <a:endParaRPr lang="en-US" sz="1100" dirty="0"/>
           </a:p>
@@ -10518,7 +10518,7 @@
                 <a:ea typeface="Arial" pitchFamily="34" charset="-122"/>
                 <a:cs typeface="Arial" pitchFamily="34" charset="-120"/>
               </a:rPr>
-              <a:t>羽田空港から近くて便利です 羽田空港から近くて便利です</a:t>
+              <a:t>We only stayed one night and we wanted someplace close to...</a:t>
             </a:r>
             <a:endParaRPr lang="en-US" sz="900" dirty="0"/>
           </a:p>
@@ -10557,7 +10557,7 @@
                 <a:ea typeface="Arial" pitchFamily="34" charset="-122"/>
                 <a:cs typeface="Arial" pitchFamily="34" charset="-120"/>
               </a:rPr>
-              <a:t>「朝のシャトルバスは10分前に行ったらもぅいっぱいでしたが、駅へもすぐなので電車で行けば問題なくすぐ着きます」</a:t>
+              <a:t>「素泊まりでしたが近くにスーパーがあり便利でした」</a:t>
             </a:r>
             <a:endParaRPr lang="en-US" sz="900" dirty="0"/>
           </a:p>
@@ -10741,7 +10741,7 @@
                 <a:ea typeface="Arial" pitchFamily="34" charset="-122"/>
                 <a:cs typeface="Arial" pitchFamily="34" charset="-120"/>
               </a:rPr>
-              <a:t>On se demande à qui s'adresser en cas de problème ホテルのフロン...</a:t>
+              <a:t>チェックイン手続きは全体的にスムーズでしたが、自動ロボットによる対応が少し気になりました</a:t>
             </a:r>
             <a:endParaRPr lang="en-US" sz="900" dirty="0"/>
           </a:p>
@@ -10780,7 +10780,7 @@
                 <a:ea typeface="Arial" pitchFamily="34" charset="-122"/>
                 <a:cs typeface="Arial" pitchFamily="34" charset="-120"/>
               </a:rPr>
-              <a:t>「もちろん、スタッフも常駐しており（案内表示にも記載されています）、必要な時にいつでも対応してくれます」</a:t>
+              <a:t>「スタッフさんの対応もよかったです」</a:t>
             </a:r>
             <a:endParaRPr lang="en-US" sz="900" dirty="0"/>
           </a:p>
@@ -10964,7 +10964,7 @@
                 <a:ea typeface="Arial" pitchFamily="34" charset="-122"/>
                 <a:cs typeface="Arial" pitchFamily="34" charset="-120"/>
               </a:rPr>
-              <a:t>部屋自体は概ね清潔で（トイレと床に髪の毛が少し落ちていましたが）、快適で、料金に見合った価値があります</a:t>
+              <a:t>とても清潔でコンパクト、そして快適でした</a:t>
             </a:r>
             <a:endParaRPr lang="en-US" sz="900" dirty="0"/>
           </a:p>
@@ -11003,7 +11003,7 @@
                 <a:ea typeface="Arial" pitchFamily="34" charset="-122"/>
                 <a:cs typeface="Arial" pitchFamily="34" charset="-120"/>
               </a:rPr>
-              <a:t>「The room was decently sized for Japan standards, very clean」</a:t>
+              <a:t>「部屋はきれいに清掃されていて少し狭いですが前泊で泊まるには問題ありません」</a:t>
             </a:r>
             <a:endParaRPr lang="en-US" sz="900" dirty="0"/>
           </a:p>
@@ -11187,7 +11187,7 @@
                 <a:ea typeface="Arial" pitchFamily="34" charset="-122"/>
                 <a:cs typeface="Arial" pitchFamily="34" charset="-120"/>
               </a:rPr>
-              <a:t>部屋自体は概ね清潔で（トイレと床に髪の毛が少し落ちていましたが）、快適で、料金に見合った価値があります</a:t>
+              <a:t>とても清潔でコンパクト、そして快適でした</a:t>
             </a:r>
             <a:endParaRPr lang="en-US" sz="900" dirty="0"/>
           </a:p>
@@ -11226,7 +11226,7 @@
                 <a:ea typeface="Arial" pitchFamily="34" charset="-122"/>
                 <a:cs typeface="Arial" pitchFamily="34" charset="-120"/>
               </a:rPr>
-              <a:t>「ベッドが別々でツインだったから 朝空港迄の送迎バスに乗れて助かった バッグの荷物が重すぎるので コロコロじゃなかっ...」</a:t>
+              <a:t>「部屋自体は概ね清潔で（トイレと床に髪の毛が少し落ちていましたが）、快適で、料金に見合った価値があります」</a:t>
             </a:r>
             <a:endParaRPr lang="en-US" sz="900" dirty="0"/>
           </a:p>
@@ -11410,7 +11410,7 @@
                 <a:ea typeface="Arial" pitchFamily="34" charset="-122"/>
                 <a:cs typeface="Arial" pitchFamily="34" charset="-120"/>
               </a:rPr>
-              <a:t>近くの洋食レストランがとっても美味しかったので是非オススメします</a:t>
+              <a:t>素泊まりでしたが近くにスーパーがあり便利でした</a:t>
             </a:r>
             <a:endParaRPr lang="en-US" sz="900" dirty="0"/>
           </a:p>
@@ -11449,7 +11449,7 @@
                 <a:ea typeface="Arial" pitchFamily="34" charset="-122"/>
                 <a:cs typeface="Arial" pitchFamily="34" charset="-120"/>
               </a:rPr>
-              <a:t>「初めて宿泊させていただきました 話に聞いてた通り恐竜がお出迎えしてくれるフロントにはやっぱりビックリさせられました...」</a:t>
+              <a:t>「駅からも近くまわりには多くの飲食店やスーパーもあります」</a:t>
             </a:r>
             <a:endParaRPr lang="en-US" sz="900" dirty="0"/>
           </a:p>
@@ -11633,7 +11633,7 @@
                 <a:ea typeface="Arial" pitchFamily="34" charset="-122"/>
                 <a:cs typeface="Arial" pitchFamily="34" charset="-120"/>
               </a:rPr>
-              <a:t>近くの洋食レストランがとっても美味しかったので是非オススメします</a:t>
+              <a:t>We didn’t have breakfast there</a:t>
             </a:r>
             <a:endParaRPr lang="en-US" sz="900" dirty="0"/>
           </a:p>
@@ -11672,7 +11672,7 @@
                 <a:ea typeface="Arial" pitchFamily="34" charset="-122"/>
                 <a:cs typeface="Arial" pitchFamily="34" charset="-120"/>
               </a:rPr>
-              <a:t>「朝食も美味しくまた利用したいです」</a:t>
+              <a:t>「近くの洋食レストランがとっても美味しかったので是非オススメします」</a:t>
             </a:r>
             <a:endParaRPr lang="en-US" sz="900" dirty="0"/>
           </a:p>
@@ -12362,7 +12362,7 @@
                           <a:ea typeface="Arial" pitchFamily="34" charset="-122"/>
                           <a:cs typeface="Arial" pitchFamily="34" charset="-120"/>
                         </a:rPr>
-                        <a:t>部屋自体は概ね清潔で（トイレと床に髪の毛が少し落ちていましたが）、快適で、料金に見合った価値があります</a:t>
+                        <a:t>無料シャトルバスは時間通りに運行していました</a:t>
                       </a:r>
                       <a:endParaRPr lang="en-US" sz="900" dirty="0">
                         <a:latin typeface="Arial" charset="0"/>
@@ -12430,7 +12430,7 @@
                           <a:ea typeface="Arial" pitchFamily="34" charset="-122"/>
                           <a:cs typeface="Arial" pitchFamily="34" charset="-120"/>
                         </a:rPr>
-                        <a:t>89件</a:t>
+                        <a:t>95件</a:t>
                       </a:r>
                       <a:endParaRPr lang="en-US" sz="900" dirty="0">
                         <a:latin typeface="Arial" charset="0"/>
@@ -12636,7 +12636,7 @@
                           <a:ea typeface="Arial" pitchFamily="34" charset="-122"/>
                           <a:cs typeface="Arial" pitchFamily="34" charset="-120"/>
                         </a:rPr>
-                        <a:t>La proximité de l'aéroport  Le décors Accueil de l'hôtel ...</a:t>
+                        <a:t>Very clean, compact and comfy</a:t>
                       </a:r>
                       <a:endParaRPr lang="en-US" sz="900" dirty="0">
                         <a:latin typeface="Arial" charset="0"/>
@@ -12704,7 +12704,7 @@
                           <a:ea typeface="Arial" pitchFamily="34" charset="-122"/>
                           <a:cs typeface="Arial" pitchFamily="34" charset="-120"/>
                         </a:rPr>
-                        <a:t>31件</a:t>
+                        <a:t>33件</a:t>
                       </a:r>
                       <a:endParaRPr lang="en-US" sz="900" dirty="0">
                         <a:latin typeface="Arial" charset="0"/>
@@ -12910,7 +12910,7 @@
                           <a:ea typeface="Arial" pitchFamily="34" charset="-122"/>
                           <a:cs typeface="Arial" pitchFamily="34" charset="-120"/>
                         </a:rPr>
-                        <a:t>Understandably small like any other hotel in Tokyo</a:t>
+                        <a:t>was small but good enough for us to rest well</a:t>
                       </a:r>
                       <a:endParaRPr lang="en-US" sz="900" dirty="0">
                         <a:latin typeface="Arial" charset="0"/>
@@ -12978,7 +12978,7 @@
                           <a:ea typeface="Arial" pitchFamily="34" charset="-122"/>
                           <a:cs typeface="Arial" pitchFamily="34" charset="-120"/>
                         </a:rPr>
-                        <a:t>21件</a:t>
+                        <a:t>24件</a:t>
                       </a:r>
                       <a:endParaRPr lang="en-US" sz="900" dirty="0">
                         <a:latin typeface="Arial" charset="0"/>

--- a/納品レポート/ホテル別レポート/henn_na_haneda_口コミ分析レポート.pptx
+++ b/納品レポート/ホテル別レポート/henn_na_haneda_口コミ分析レポート.pptx
@@ -189,13 +189,13 @@
                     <c:v>じゃらん</c:v>
                   </c:pt>
                   <c:pt idx="3">
-                    <c:v>Google</c:v>
+                    <c:v>Agoda</c:v>
                   </c:pt>
                   <c:pt idx="4">
-                    <c:v>Agoda</c:v>
+                    <c:v>Booking.com</c:v>
                   </c:pt>
                   <c:pt idx="5">
-                    <c:v>Booking.com</c:v>
+                    <c:v>Google</c:v>
                   </c:pt>
                 </c:lvl>
               </c:multiLvlStrCache>
@@ -217,13 +217,13 @@
                   <c:v>8.32</c:v>
                 </c:pt>
                 <c:pt idx="3">
-                  <c:v>8.15</c:v>
+                  <c:v>8.14</c:v>
                 </c:pt>
                 <c:pt idx="4">
-                  <c:v>8.14</c:v>
+                  <c:v>8.11</c:v>
                 </c:pt>
                 <c:pt idx="5">
-                  <c:v>8.12</c:v>
+                  <c:v>8.11</c:v>
                 </c:pt>
               </c:numCache>
             </c:numRef>
@@ -566,10 +566,10 @@
               <c:numCache>
                 <c:ptCount val="3"/>
                 <c:pt idx="0">
-                  <c:v>242</c:v>
+                  <c:v>246</c:v>
                 </c:pt>
                 <c:pt idx="1">
-                  <c:v>66</c:v>
+                  <c:v>69</c:v>
                 </c:pt>
                 <c:pt idx="2">
                   <c:v>9</c:v>
@@ -823,22 +823,22 @@
                 <c:formatCode>General</c:formatCode>
                 <c:ptCount val="9"/>
                 <c:pt idx="0">
-                  <c:v>106</c:v>
+                  <c:v>107</c:v>
                 </c:pt>
                 <c:pt idx="1">
-                  <c:v>41</c:v>
+                  <c:v>42</c:v>
                 </c:pt>
                 <c:pt idx="2">
-                  <c:v>95</c:v>
+                  <c:v>97</c:v>
                 </c:pt>
                 <c:pt idx="3">
-                  <c:v>30</c:v>
+                  <c:v>31</c:v>
                 </c:pt>
                 <c:pt idx="4">
-                  <c:v>28</c:v>
+                  <c:v>29</c:v>
                 </c:pt>
                 <c:pt idx="5">
-                  <c:v>8</c:v>
+                  <c:v>9</c:v>
                 </c:pt>
                 <c:pt idx="6">
                   <c:v>2</c:v>
@@ -2798,7 +2798,7 @@
                 <a:ea typeface="Arial" pitchFamily="34" charset="-122"/>
                 <a:cs typeface="Arial" pitchFamily="34" charset="-120"/>
               </a:rPr>
-              <a:t>レビュー総数：317件（6サイト）</a:t>
+              <a:t>レビュー総数：324件（6サイト）</a:t>
             </a:r>
             <a:endParaRPr lang="en-US" sz="1000" dirty="0"/>
           </a:p>
@@ -2818,7 +2818,7 @@
                 <a:ea typeface="Arial" pitchFamily="34" charset="-122"/>
                 <a:cs typeface="Arial" pitchFamily="34" charset="-120"/>
               </a:rPr>
-              <a:t>作成日：2026年3月24日</a:t>
+              <a:t>作成日：2026年3月25日</a:t>
             </a:r>
             <a:endParaRPr lang="en-US" sz="1000" dirty="0"/>
           </a:p>
@@ -3364,7 +3364,7 @@
                           <a:ea typeface="Arial" pitchFamily="34" charset="-122"/>
                           <a:cs typeface="Arial" pitchFamily="34" charset="-120"/>
                         </a:rPr>
-                        <a:t>8.30点</a:t>
+                        <a:t>8.28点</a:t>
                       </a:r>
                       <a:endParaRPr lang="en-US" sz="1000" dirty="0">
                         <a:latin typeface="Arial" charset="0"/>
@@ -3638,7 +3638,7 @@
                           <a:ea typeface="Arial" pitchFamily="34" charset="-122"/>
                           <a:cs typeface="Arial" pitchFamily="34" charset="-120"/>
                         </a:rPr>
-                        <a:t>76.3%</a:t>
+                        <a:t>75.9%</a:t>
                       </a:r>
                       <a:endParaRPr lang="en-US" sz="1000" dirty="0">
                         <a:latin typeface="Arial" charset="0"/>
@@ -4460,7 +4460,7 @@
                           <a:ea typeface="Arial" pitchFamily="34" charset="-122"/>
                           <a:cs typeface="Arial" pitchFamily="34" charset="-120"/>
                         </a:rPr>
-                        <a:t>約95件/期間</a:t>
+                        <a:t>約96件/期間</a:t>
                       </a:r>
                       <a:endParaRPr lang="en-US" sz="1000" dirty="0">
                         <a:latin typeface="Arial" charset="0"/>
@@ -4528,7 +4528,7 @@
                           <a:ea typeface="Arial" pitchFamily="34" charset="-122"/>
                           <a:cs typeface="Arial" pitchFamily="34" charset="-120"/>
                         </a:rPr>
-                        <a:t>47件以下</a:t>
+                        <a:t>48件以下</a:t>
                       </a:r>
                       <a:endParaRPr lang="en-US" sz="1000" dirty="0">
                         <a:latin typeface="Arial" charset="0"/>
@@ -5099,7 +5099,7 @@
                 <a:ea typeface="Arial" pitchFamily="34" charset="-122"/>
                 <a:cs typeface="Arial" pitchFamily="34" charset="-120"/>
               </a:rPr>
-              <a:t>8.30</a:t>
+              <a:t>8.28</a:t>
             </a:r>
             <a:endParaRPr lang="en-US" sz="3200" dirty="0"/>
           </a:p>
@@ -5224,7 +5224,7 @@
                 <a:ea typeface="Arial" pitchFamily="34" charset="-122"/>
                 <a:cs typeface="Arial" pitchFamily="34" charset="-120"/>
               </a:rPr>
-              <a:t>76.3%</a:t>
+              <a:t>75.9%</a:t>
             </a:r>
             <a:endParaRPr lang="en-US" sz="3200" dirty="0"/>
           </a:p>
@@ -5474,7 +5474,7 @@
                 <a:ea typeface="Arial" pitchFamily="34" charset="-122"/>
                 <a:cs typeface="Arial" pitchFamily="34" charset="-120"/>
               </a:rPr>
-              <a:t>317件</a:t>
+              <a:t>324件</a:t>
             </a:r>
             <a:endParaRPr lang="en-US" sz="3200" dirty="0"/>
           </a:p>
@@ -5622,7 +5622,7 @@
                 <a:ea typeface="Arial" pitchFamily="34" charset="-122"/>
                 <a:cs typeface="Arial" pitchFamily="34" charset="-120"/>
               </a:rPr>
-              <a:t>  We only stayed one night and we wanted someplace close to...</a:t>
+              <a:t>  立地がよい</a:t>
             </a:r>
             <a:endParaRPr lang="en-US" sz="1100" dirty="0"/>
           </a:p>
@@ -5890,7 +5890,7 @@
                 <a:ea typeface="Arial" pitchFamily="34" charset="-122"/>
                 <a:cs typeface="Arial" pitchFamily="34" charset="-120"/>
               </a:rPr>
-              <a:t>  Very clean, compact and comfy</a:t>
+              <a:t>  Le Check in avec l’accueil par des robots dinosaures et l...</a:t>
             </a:r>
             <a:endParaRPr lang="en-US" sz="1100" dirty="0"/>
           </a:p>
@@ -6283,7 +6283,7 @@
                 <a:ea typeface="Arial" pitchFamily="34" charset="-122"/>
                 <a:cs typeface="Arial" pitchFamily="34" charset="-120"/>
               </a:rPr>
-              <a:t>8.30</a:t>
+              <a:t>8.28</a:t>
             </a:r>
             <a:endParaRPr lang="en-US" sz="3200" dirty="0"/>
           </a:p>
@@ -6408,7 +6408,7 @@
                 <a:ea typeface="Arial" pitchFamily="34" charset="-122"/>
                 <a:cs typeface="Arial" pitchFamily="34" charset="-120"/>
               </a:rPr>
-              <a:t>76.3%</a:t>
+              <a:t>75.9%</a:t>
             </a:r>
             <a:endParaRPr lang="en-US" sz="3200" dirty="0"/>
           </a:p>
@@ -6658,7 +6658,7 @@
                 <a:ea typeface="Arial" pitchFamily="34" charset="-122"/>
                 <a:cs typeface="Arial" pitchFamily="34" charset="-120"/>
               </a:rPr>
-              <a:t>317件</a:t>
+              <a:t>324件</a:t>
             </a:r>
             <a:endParaRPr lang="en-US" sz="3200" dirty="0"/>
           </a:p>
@@ -8546,7 +8546,7 @@
                           <a:ea typeface="Arial" pitchFamily="34" charset="-122"/>
                           <a:cs typeface="Arial" pitchFamily="34" charset="-120"/>
                         </a:rPr>
-                        <a:t>Google</a:t>
+                        <a:t>Agoda</a:t>
                       </a:r>
                       <a:endParaRPr lang="en-US" sz="900" dirty="0">
                         <a:latin typeface="Arial" charset="0"/>
@@ -8614,7 +8614,7 @@
                           <a:ea typeface="Arial" pitchFamily="34" charset="-122"/>
                           <a:cs typeface="Arial" pitchFamily="34" charset="-120"/>
                         </a:rPr>
-                        <a:t>55</a:t>
+                        <a:t>37</a:t>
                       </a:r>
                       <a:endParaRPr lang="en-US" sz="900" dirty="0">
                         <a:latin typeface="Arial" charset="0"/>
@@ -8682,7 +8682,691 @@
                           <a:ea typeface="Arial" pitchFamily="34" charset="-122"/>
                           <a:cs typeface="Arial" pitchFamily="34" charset="-120"/>
                         </a:rPr>
-                        <a:t>4.07</a:t>
+                        <a:t>8.14</a:t>
+                      </a:r>
+                      <a:endParaRPr lang="en-US" sz="900" dirty="0">
+                        <a:latin typeface="Arial" charset="0"/>
+                        <a:ea typeface="Arial" charset="0"/>
+                        <a:cs typeface="Arial" charset="0"/>
+                      </a:endParaRPr>
+                    </a:p>
+                  </a:txBody>
+                  <a:tcPr marL="91440" marR="91440" marT="45720" marB="45720">
+                    <a:lnL w="6350" cap="flat" cmpd="sng" algn="ctr">
+                      <a:solidFill>
+                        <a:srgbClr val="CBD5E1"/>
+                      </a:solidFill>
+                      <a:prstDash val="solid"/>
+                      <a:round/>
+                      <a:headEnd type="none" w="med" len="med"/>
+                      <a:tailEnd type="none" w="med" len="med"/>
+                    </a:lnL>
+                    <a:lnR w="6350" cap="flat" cmpd="sng" algn="ctr">
+                      <a:solidFill>
+                        <a:srgbClr val="CBD5E1"/>
+                      </a:solidFill>
+                      <a:prstDash val="solid"/>
+                      <a:round/>
+                      <a:headEnd type="none" w="med" len="med"/>
+                      <a:tailEnd type="none" w="med" len="med"/>
+                    </a:lnR>
+                    <a:lnT w="6350" cap="flat" cmpd="sng" algn="ctr">
+                      <a:solidFill>
+                        <a:srgbClr val="CBD5E1"/>
+                      </a:solidFill>
+                      <a:prstDash val="solid"/>
+                      <a:round/>
+                      <a:headEnd type="none" w="med" len="med"/>
+                      <a:tailEnd type="none" w="med" len="med"/>
+                    </a:lnT>
+                    <a:lnB w="6350" cap="flat" cmpd="sng" algn="ctr">
+                      <a:solidFill>
+                        <a:srgbClr val="CBD5E1"/>
+                      </a:solidFill>
+                      <a:prstDash val="solid"/>
+                      <a:round/>
+                      <a:headEnd type="none" w="med" len="med"/>
+                      <a:tailEnd type="none" w="med" len="med"/>
+                    </a:lnB>
+                    <a:solidFill>
+                      <a:srgbClr val="FFFFFF"/>
+                    </a:solidFill>
+                  </a:tcPr>
+                </a:tc>
+                <a:tc>
+                  <a:txBody>
+                    <a:bodyPr/>
+                    <a:lstStyle/>
+                    <a:p>
+                      <a:pPr algn="ctr" indent="0" marL="0">
+                        <a:buNone/>
+                      </a:pPr>
+                      <a:r>
+                        <a:rPr lang="en-US" sz="900" dirty="0">
+                          <a:solidFill>
+                            <a:srgbClr val="000000"/>
+                          </a:solidFill>
+                          <a:latin typeface="Arial" pitchFamily="34" charset="0"/>
+                          <a:ea typeface="Arial" pitchFamily="34" charset="-122"/>
+                          <a:cs typeface="Arial" pitchFamily="34" charset="-120"/>
+                        </a:rPr>
+                        <a:t>/10</a:t>
+                      </a:r>
+                      <a:endParaRPr lang="en-US" sz="900" dirty="0">
+                        <a:latin typeface="Arial" charset="0"/>
+                        <a:ea typeface="Arial" charset="0"/>
+                        <a:cs typeface="Arial" charset="0"/>
+                      </a:endParaRPr>
+                    </a:p>
+                  </a:txBody>
+                  <a:tcPr marL="91440" marR="91440" marT="45720" marB="45720">
+                    <a:lnL w="6350" cap="flat" cmpd="sng" algn="ctr">
+                      <a:solidFill>
+                        <a:srgbClr val="CBD5E1"/>
+                      </a:solidFill>
+                      <a:prstDash val="solid"/>
+                      <a:round/>
+                      <a:headEnd type="none" w="med" len="med"/>
+                      <a:tailEnd type="none" w="med" len="med"/>
+                    </a:lnL>
+                    <a:lnR w="6350" cap="flat" cmpd="sng" algn="ctr">
+                      <a:solidFill>
+                        <a:srgbClr val="CBD5E1"/>
+                      </a:solidFill>
+                      <a:prstDash val="solid"/>
+                      <a:round/>
+                      <a:headEnd type="none" w="med" len="med"/>
+                      <a:tailEnd type="none" w="med" len="med"/>
+                    </a:lnR>
+                    <a:lnT w="6350" cap="flat" cmpd="sng" algn="ctr">
+                      <a:solidFill>
+                        <a:srgbClr val="CBD5E1"/>
+                      </a:solidFill>
+                      <a:prstDash val="solid"/>
+                      <a:round/>
+                      <a:headEnd type="none" w="med" len="med"/>
+                      <a:tailEnd type="none" w="med" len="med"/>
+                    </a:lnT>
+                    <a:lnB w="6350" cap="flat" cmpd="sng" algn="ctr">
+                      <a:solidFill>
+                        <a:srgbClr val="CBD5E1"/>
+                      </a:solidFill>
+                      <a:prstDash val="solid"/>
+                      <a:round/>
+                      <a:headEnd type="none" w="med" len="med"/>
+                      <a:tailEnd type="none" w="med" len="med"/>
+                    </a:lnB>
+                    <a:solidFill>
+                      <a:srgbClr val="FFFFFF"/>
+                    </a:solidFill>
+                  </a:tcPr>
+                </a:tc>
+                <a:tc>
+                  <a:txBody>
+                    <a:bodyPr/>
+                    <a:lstStyle/>
+                    <a:p>
+                      <a:pPr algn="ctr" indent="0" marL="0">
+                        <a:buNone/>
+                      </a:pPr>
+                      <a:r>
+                        <a:rPr lang="en-US" sz="900" dirty="0">
+                          <a:solidFill>
+                            <a:srgbClr val="000000"/>
+                          </a:solidFill>
+                          <a:latin typeface="Arial" pitchFamily="34" charset="0"/>
+                          <a:ea typeface="Arial" pitchFamily="34" charset="-122"/>
+                          <a:cs typeface="Arial" pitchFamily="34" charset="-120"/>
+                        </a:rPr>
+                        <a:t>8.14</a:t>
+                      </a:r>
+                      <a:endParaRPr lang="en-US" sz="900" dirty="0">
+                        <a:latin typeface="Arial" charset="0"/>
+                        <a:ea typeface="Arial" charset="0"/>
+                        <a:cs typeface="Arial" charset="0"/>
+                      </a:endParaRPr>
+                    </a:p>
+                  </a:txBody>
+                  <a:tcPr marL="91440" marR="91440" marT="45720" marB="45720">
+                    <a:lnL w="6350" cap="flat" cmpd="sng" algn="ctr">
+                      <a:solidFill>
+                        <a:srgbClr val="CBD5E1"/>
+                      </a:solidFill>
+                      <a:prstDash val="solid"/>
+                      <a:round/>
+                      <a:headEnd type="none" w="med" len="med"/>
+                      <a:tailEnd type="none" w="med" len="med"/>
+                    </a:lnL>
+                    <a:lnR w="6350" cap="flat" cmpd="sng" algn="ctr">
+                      <a:solidFill>
+                        <a:srgbClr val="CBD5E1"/>
+                      </a:solidFill>
+                      <a:prstDash val="solid"/>
+                      <a:round/>
+                      <a:headEnd type="none" w="med" len="med"/>
+                      <a:tailEnd type="none" w="med" len="med"/>
+                    </a:lnR>
+                    <a:lnT w="6350" cap="flat" cmpd="sng" algn="ctr">
+                      <a:solidFill>
+                        <a:srgbClr val="CBD5E1"/>
+                      </a:solidFill>
+                      <a:prstDash val="solid"/>
+                      <a:round/>
+                      <a:headEnd type="none" w="med" len="med"/>
+                      <a:tailEnd type="none" w="med" len="med"/>
+                    </a:lnT>
+                    <a:lnB w="6350" cap="flat" cmpd="sng" algn="ctr">
+                      <a:solidFill>
+                        <a:srgbClr val="CBD5E1"/>
+                      </a:solidFill>
+                      <a:prstDash val="solid"/>
+                      <a:round/>
+                      <a:headEnd type="none" w="med" len="med"/>
+                      <a:tailEnd type="none" w="med" len="med"/>
+                    </a:lnB>
+                    <a:solidFill>
+                      <a:srgbClr val="FFFFFF"/>
+                    </a:solidFill>
+                  </a:tcPr>
+                </a:tc>
+              </a:tr>
+              <a:tr h="201168">
+                <a:tc>
+                  <a:txBody>
+                    <a:bodyPr/>
+                    <a:lstStyle/>
+                    <a:p>
+                      <a:pPr algn="ctr" indent="0" marL="0">
+                        <a:buNone/>
+                      </a:pPr>
+                      <a:r>
+                        <a:rPr lang="en-US" sz="900" dirty="0">
+                          <a:solidFill>
+                            <a:srgbClr val="000000"/>
+                          </a:solidFill>
+                          <a:latin typeface="Arial" pitchFamily="34" charset="0"/>
+                          <a:ea typeface="Arial" pitchFamily="34" charset="-122"/>
+                          <a:cs typeface="Arial" pitchFamily="34" charset="-120"/>
+                        </a:rPr>
+                        <a:t>Booking.com</a:t>
+                      </a:r>
+                      <a:endParaRPr lang="en-US" sz="900" dirty="0">
+                        <a:latin typeface="Arial" charset="0"/>
+                        <a:ea typeface="Arial" charset="0"/>
+                        <a:cs typeface="Arial" charset="0"/>
+                      </a:endParaRPr>
+                    </a:p>
+                  </a:txBody>
+                  <a:tcPr marL="91440" marR="91440" marT="45720" marB="45720">
+                    <a:lnL w="6350" cap="flat" cmpd="sng" algn="ctr">
+                      <a:solidFill>
+                        <a:srgbClr val="CBD5E1"/>
+                      </a:solidFill>
+                      <a:prstDash val="solid"/>
+                      <a:round/>
+                      <a:headEnd type="none" w="med" len="med"/>
+                      <a:tailEnd type="none" w="med" len="med"/>
+                    </a:lnL>
+                    <a:lnR w="6350" cap="flat" cmpd="sng" algn="ctr">
+                      <a:solidFill>
+                        <a:srgbClr val="CBD5E1"/>
+                      </a:solidFill>
+                      <a:prstDash val="solid"/>
+                      <a:round/>
+                      <a:headEnd type="none" w="med" len="med"/>
+                      <a:tailEnd type="none" w="med" len="med"/>
+                    </a:lnR>
+                    <a:lnT w="6350" cap="flat" cmpd="sng" algn="ctr">
+                      <a:solidFill>
+                        <a:srgbClr val="CBD5E1"/>
+                      </a:solidFill>
+                      <a:prstDash val="solid"/>
+                      <a:round/>
+                      <a:headEnd type="none" w="med" len="med"/>
+                      <a:tailEnd type="none" w="med" len="med"/>
+                    </a:lnT>
+                    <a:lnB w="6350" cap="flat" cmpd="sng" algn="ctr">
+                      <a:solidFill>
+                        <a:srgbClr val="CBD5E1"/>
+                      </a:solidFill>
+                      <a:prstDash val="solid"/>
+                      <a:round/>
+                      <a:headEnd type="none" w="med" len="med"/>
+                      <a:tailEnd type="none" w="med" len="med"/>
+                    </a:lnB>
+                    <a:solidFill>
+                      <a:srgbClr val="E8EFF8"/>
+                    </a:solidFill>
+                  </a:tcPr>
+                </a:tc>
+                <a:tc>
+                  <a:txBody>
+                    <a:bodyPr/>
+                    <a:lstStyle/>
+                    <a:p>
+                      <a:pPr algn="ctr" indent="0" marL="0">
+                        <a:buNone/>
+                      </a:pPr>
+                      <a:r>
+                        <a:rPr lang="en-US" sz="900" dirty="0">
+                          <a:solidFill>
+                            <a:srgbClr val="000000"/>
+                          </a:solidFill>
+                          <a:latin typeface="Arial" pitchFamily="34" charset="0"/>
+                          <a:ea typeface="Arial" pitchFamily="34" charset="-122"/>
+                          <a:cs typeface="Arial" pitchFamily="34" charset="-120"/>
+                        </a:rPr>
+                        <a:t>141</a:t>
+                      </a:r>
+                      <a:endParaRPr lang="en-US" sz="900" dirty="0">
+                        <a:latin typeface="Arial" charset="0"/>
+                        <a:ea typeface="Arial" charset="0"/>
+                        <a:cs typeface="Arial" charset="0"/>
+                      </a:endParaRPr>
+                    </a:p>
+                  </a:txBody>
+                  <a:tcPr marL="91440" marR="91440" marT="45720" marB="45720">
+                    <a:lnL w="6350" cap="flat" cmpd="sng" algn="ctr">
+                      <a:solidFill>
+                        <a:srgbClr val="CBD5E1"/>
+                      </a:solidFill>
+                      <a:prstDash val="solid"/>
+                      <a:round/>
+                      <a:headEnd type="none" w="med" len="med"/>
+                      <a:tailEnd type="none" w="med" len="med"/>
+                    </a:lnL>
+                    <a:lnR w="6350" cap="flat" cmpd="sng" algn="ctr">
+                      <a:solidFill>
+                        <a:srgbClr val="CBD5E1"/>
+                      </a:solidFill>
+                      <a:prstDash val="solid"/>
+                      <a:round/>
+                      <a:headEnd type="none" w="med" len="med"/>
+                      <a:tailEnd type="none" w="med" len="med"/>
+                    </a:lnR>
+                    <a:lnT w="6350" cap="flat" cmpd="sng" algn="ctr">
+                      <a:solidFill>
+                        <a:srgbClr val="CBD5E1"/>
+                      </a:solidFill>
+                      <a:prstDash val="solid"/>
+                      <a:round/>
+                      <a:headEnd type="none" w="med" len="med"/>
+                      <a:tailEnd type="none" w="med" len="med"/>
+                    </a:lnT>
+                    <a:lnB w="6350" cap="flat" cmpd="sng" algn="ctr">
+                      <a:solidFill>
+                        <a:srgbClr val="CBD5E1"/>
+                      </a:solidFill>
+                      <a:prstDash val="solid"/>
+                      <a:round/>
+                      <a:headEnd type="none" w="med" len="med"/>
+                      <a:tailEnd type="none" w="med" len="med"/>
+                    </a:lnB>
+                    <a:solidFill>
+                      <a:srgbClr val="E8EFF8"/>
+                    </a:solidFill>
+                  </a:tcPr>
+                </a:tc>
+                <a:tc>
+                  <a:txBody>
+                    <a:bodyPr/>
+                    <a:lstStyle/>
+                    <a:p>
+                      <a:pPr algn="ctr" indent="0" marL="0">
+                        <a:buNone/>
+                      </a:pPr>
+                      <a:r>
+                        <a:rPr lang="en-US" sz="900" dirty="0">
+                          <a:solidFill>
+                            <a:srgbClr val="000000"/>
+                          </a:solidFill>
+                          <a:latin typeface="Arial" pitchFamily="34" charset="0"/>
+                          <a:ea typeface="Arial" pitchFamily="34" charset="-122"/>
+                          <a:cs typeface="Arial" pitchFamily="34" charset="-120"/>
+                        </a:rPr>
+                        <a:t>8.11</a:t>
+                      </a:r>
+                      <a:endParaRPr lang="en-US" sz="900" dirty="0">
+                        <a:latin typeface="Arial" charset="0"/>
+                        <a:ea typeface="Arial" charset="0"/>
+                        <a:cs typeface="Arial" charset="0"/>
+                      </a:endParaRPr>
+                    </a:p>
+                  </a:txBody>
+                  <a:tcPr marL="91440" marR="91440" marT="45720" marB="45720">
+                    <a:lnL w="6350" cap="flat" cmpd="sng" algn="ctr">
+                      <a:solidFill>
+                        <a:srgbClr val="CBD5E1"/>
+                      </a:solidFill>
+                      <a:prstDash val="solid"/>
+                      <a:round/>
+                      <a:headEnd type="none" w="med" len="med"/>
+                      <a:tailEnd type="none" w="med" len="med"/>
+                    </a:lnL>
+                    <a:lnR w="6350" cap="flat" cmpd="sng" algn="ctr">
+                      <a:solidFill>
+                        <a:srgbClr val="CBD5E1"/>
+                      </a:solidFill>
+                      <a:prstDash val="solid"/>
+                      <a:round/>
+                      <a:headEnd type="none" w="med" len="med"/>
+                      <a:tailEnd type="none" w="med" len="med"/>
+                    </a:lnR>
+                    <a:lnT w="6350" cap="flat" cmpd="sng" algn="ctr">
+                      <a:solidFill>
+                        <a:srgbClr val="CBD5E1"/>
+                      </a:solidFill>
+                      <a:prstDash val="solid"/>
+                      <a:round/>
+                      <a:headEnd type="none" w="med" len="med"/>
+                      <a:tailEnd type="none" w="med" len="med"/>
+                    </a:lnT>
+                    <a:lnB w="6350" cap="flat" cmpd="sng" algn="ctr">
+                      <a:solidFill>
+                        <a:srgbClr val="CBD5E1"/>
+                      </a:solidFill>
+                      <a:prstDash val="solid"/>
+                      <a:round/>
+                      <a:headEnd type="none" w="med" len="med"/>
+                      <a:tailEnd type="none" w="med" len="med"/>
+                    </a:lnB>
+                    <a:solidFill>
+                      <a:srgbClr val="E8EFF8"/>
+                    </a:solidFill>
+                  </a:tcPr>
+                </a:tc>
+                <a:tc>
+                  <a:txBody>
+                    <a:bodyPr/>
+                    <a:lstStyle/>
+                    <a:p>
+                      <a:pPr algn="ctr" indent="0" marL="0">
+                        <a:buNone/>
+                      </a:pPr>
+                      <a:r>
+                        <a:rPr lang="en-US" sz="900" dirty="0">
+                          <a:solidFill>
+                            <a:srgbClr val="000000"/>
+                          </a:solidFill>
+                          <a:latin typeface="Arial" pitchFamily="34" charset="0"/>
+                          <a:ea typeface="Arial" pitchFamily="34" charset="-122"/>
+                          <a:cs typeface="Arial" pitchFamily="34" charset="-120"/>
+                        </a:rPr>
+                        <a:t>/10</a:t>
+                      </a:r>
+                      <a:endParaRPr lang="en-US" sz="900" dirty="0">
+                        <a:latin typeface="Arial" charset="0"/>
+                        <a:ea typeface="Arial" charset="0"/>
+                        <a:cs typeface="Arial" charset="0"/>
+                      </a:endParaRPr>
+                    </a:p>
+                  </a:txBody>
+                  <a:tcPr marL="91440" marR="91440" marT="45720" marB="45720">
+                    <a:lnL w="6350" cap="flat" cmpd="sng" algn="ctr">
+                      <a:solidFill>
+                        <a:srgbClr val="CBD5E1"/>
+                      </a:solidFill>
+                      <a:prstDash val="solid"/>
+                      <a:round/>
+                      <a:headEnd type="none" w="med" len="med"/>
+                      <a:tailEnd type="none" w="med" len="med"/>
+                    </a:lnL>
+                    <a:lnR w="6350" cap="flat" cmpd="sng" algn="ctr">
+                      <a:solidFill>
+                        <a:srgbClr val="CBD5E1"/>
+                      </a:solidFill>
+                      <a:prstDash val="solid"/>
+                      <a:round/>
+                      <a:headEnd type="none" w="med" len="med"/>
+                      <a:tailEnd type="none" w="med" len="med"/>
+                    </a:lnR>
+                    <a:lnT w="6350" cap="flat" cmpd="sng" algn="ctr">
+                      <a:solidFill>
+                        <a:srgbClr val="CBD5E1"/>
+                      </a:solidFill>
+                      <a:prstDash val="solid"/>
+                      <a:round/>
+                      <a:headEnd type="none" w="med" len="med"/>
+                      <a:tailEnd type="none" w="med" len="med"/>
+                    </a:lnT>
+                    <a:lnB w="6350" cap="flat" cmpd="sng" algn="ctr">
+                      <a:solidFill>
+                        <a:srgbClr val="CBD5E1"/>
+                      </a:solidFill>
+                      <a:prstDash val="solid"/>
+                      <a:round/>
+                      <a:headEnd type="none" w="med" len="med"/>
+                      <a:tailEnd type="none" w="med" len="med"/>
+                    </a:lnB>
+                    <a:solidFill>
+                      <a:srgbClr val="E8EFF8"/>
+                    </a:solidFill>
+                  </a:tcPr>
+                </a:tc>
+                <a:tc>
+                  <a:txBody>
+                    <a:bodyPr/>
+                    <a:lstStyle/>
+                    <a:p>
+                      <a:pPr algn="ctr" indent="0" marL="0">
+                        <a:buNone/>
+                      </a:pPr>
+                      <a:r>
+                        <a:rPr lang="en-US" sz="900" dirty="0">
+                          <a:solidFill>
+                            <a:srgbClr val="000000"/>
+                          </a:solidFill>
+                          <a:latin typeface="Arial" pitchFamily="34" charset="0"/>
+                          <a:ea typeface="Arial" pitchFamily="34" charset="-122"/>
+                          <a:cs typeface="Arial" pitchFamily="34" charset="-120"/>
+                        </a:rPr>
+                        <a:t>8.11</a:t>
+                      </a:r>
+                      <a:endParaRPr lang="en-US" sz="900" dirty="0">
+                        <a:latin typeface="Arial" charset="0"/>
+                        <a:ea typeface="Arial" charset="0"/>
+                        <a:cs typeface="Arial" charset="0"/>
+                      </a:endParaRPr>
+                    </a:p>
+                  </a:txBody>
+                  <a:tcPr marL="91440" marR="91440" marT="45720" marB="45720">
+                    <a:lnL w="6350" cap="flat" cmpd="sng" algn="ctr">
+                      <a:solidFill>
+                        <a:srgbClr val="CBD5E1"/>
+                      </a:solidFill>
+                      <a:prstDash val="solid"/>
+                      <a:round/>
+                      <a:headEnd type="none" w="med" len="med"/>
+                      <a:tailEnd type="none" w="med" len="med"/>
+                    </a:lnL>
+                    <a:lnR w="6350" cap="flat" cmpd="sng" algn="ctr">
+                      <a:solidFill>
+                        <a:srgbClr val="CBD5E1"/>
+                      </a:solidFill>
+                      <a:prstDash val="solid"/>
+                      <a:round/>
+                      <a:headEnd type="none" w="med" len="med"/>
+                      <a:tailEnd type="none" w="med" len="med"/>
+                    </a:lnR>
+                    <a:lnT w="6350" cap="flat" cmpd="sng" algn="ctr">
+                      <a:solidFill>
+                        <a:srgbClr val="CBD5E1"/>
+                      </a:solidFill>
+                      <a:prstDash val="solid"/>
+                      <a:round/>
+                      <a:headEnd type="none" w="med" len="med"/>
+                      <a:tailEnd type="none" w="med" len="med"/>
+                    </a:lnT>
+                    <a:lnB w="6350" cap="flat" cmpd="sng" algn="ctr">
+                      <a:solidFill>
+                        <a:srgbClr val="CBD5E1"/>
+                      </a:solidFill>
+                      <a:prstDash val="solid"/>
+                      <a:round/>
+                      <a:headEnd type="none" w="med" len="med"/>
+                      <a:tailEnd type="none" w="med" len="med"/>
+                    </a:lnB>
+                    <a:solidFill>
+                      <a:srgbClr val="E8EFF8"/>
+                    </a:solidFill>
+                  </a:tcPr>
+                </a:tc>
+              </a:tr>
+              <a:tr h="201168">
+                <a:tc>
+                  <a:txBody>
+                    <a:bodyPr/>
+                    <a:lstStyle/>
+                    <a:p>
+                      <a:pPr algn="ctr" indent="0" marL="0">
+                        <a:buNone/>
+                      </a:pPr>
+                      <a:r>
+                        <a:rPr lang="en-US" sz="900" dirty="0">
+                          <a:solidFill>
+                            <a:srgbClr val="000000"/>
+                          </a:solidFill>
+                          <a:latin typeface="Arial" pitchFamily="34" charset="0"/>
+                          <a:ea typeface="Arial" pitchFamily="34" charset="-122"/>
+                          <a:cs typeface="Arial" pitchFamily="34" charset="-120"/>
+                        </a:rPr>
+                        <a:t>Google</a:t>
+                      </a:r>
+                      <a:endParaRPr lang="en-US" sz="900" dirty="0">
+                        <a:latin typeface="Arial" charset="0"/>
+                        <a:ea typeface="Arial" charset="0"/>
+                        <a:cs typeface="Arial" charset="0"/>
+                      </a:endParaRPr>
+                    </a:p>
+                  </a:txBody>
+                  <a:tcPr marL="91440" marR="91440" marT="45720" marB="45720">
+                    <a:lnL w="6350" cap="flat" cmpd="sng" algn="ctr">
+                      <a:solidFill>
+                        <a:srgbClr val="CBD5E1"/>
+                      </a:solidFill>
+                      <a:prstDash val="solid"/>
+                      <a:round/>
+                      <a:headEnd type="none" w="med" len="med"/>
+                      <a:tailEnd type="none" w="med" len="med"/>
+                    </a:lnL>
+                    <a:lnR w="6350" cap="flat" cmpd="sng" algn="ctr">
+                      <a:solidFill>
+                        <a:srgbClr val="CBD5E1"/>
+                      </a:solidFill>
+                      <a:prstDash val="solid"/>
+                      <a:round/>
+                      <a:headEnd type="none" w="med" len="med"/>
+                      <a:tailEnd type="none" w="med" len="med"/>
+                    </a:lnR>
+                    <a:lnT w="6350" cap="flat" cmpd="sng" algn="ctr">
+                      <a:solidFill>
+                        <a:srgbClr val="CBD5E1"/>
+                      </a:solidFill>
+                      <a:prstDash val="solid"/>
+                      <a:round/>
+                      <a:headEnd type="none" w="med" len="med"/>
+                      <a:tailEnd type="none" w="med" len="med"/>
+                    </a:lnT>
+                    <a:lnB w="6350" cap="flat" cmpd="sng" algn="ctr">
+                      <a:solidFill>
+                        <a:srgbClr val="CBD5E1"/>
+                      </a:solidFill>
+                      <a:prstDash val="solid"/>
+                      <a:round/>
+                      <a:headEnd type="none" w="med" len="med"/>
+                      <a:tailEnd type="none" w="med" len="med"/>
+                    </a:lnB>
+                    <a:solidFill>
+                      <a:srgbClr val="FFFFFF"/>
+                    </a:solidFill>
+                  </a:tcPr>
+                </a:tc>
+                <a:tc>
+                  <a:txBody>
+                    <a:bodyPr/>
+                    <a:lstStyle/>
+                    <a:p>
+                      <a:pPr algn="ctr" indent="0" marL="0">
+                        <a:buNone/>
+                      </a:pPr>
+                      <a:r>
+                        <a:rPr lang="en-US" sz="900" dirty="0">
+                          <a:solidFill>
+                            <a:srgbClr val="000000"/>
+                          </a:solidFill>
+                          <a:latin typeface="Arial" pitchFamily="34" charset="0"/>
+                          <a:ea typeface="Arial" pitchFamily="34" charset="-122"/>
+                          <a:cs typeface="Arial" pitchFamily="34" charset="-120"/>
+                        </a:rPr>
+                        <a:t>56</a:t>
+                      </a:r>
+                      <a:endParaRPr lang="en-US" sz="900" dirty="0">
+                        <a:latin typeface="Arial" charset="0"/>
+                        <a:ea typeface="Arial" charset="0"/>
+                        <a:cs typeface="Arial" charset="0"/>
+                      </a:endParaRPr>
+                    </a:p>
+                  </a:txBody>
+                  <a:tcPr marL="91440" marR="91440" marT="45720" marB="45720">
+                    <a:lnL w="6350" cap="flat" cmpd="sng" algn="ctr">
+                      <a:solidFill>
+                        <a:srgbClr val="CBD5E1"/>
+                      </a:solidFill>
+                      <a:prstDash val="solid"/>
+                      <a:round/>
+                      <a:headEnd type="none" w="med" len="med"/>
+                      <a:tailEnd type="none" w="med" len="med"/>
+                    </a:lnL>
+                    <a:lnR w="6350" cap="flat" cmpd="sng" algn="ctr">
+                      <a:solidFill>
+                        <a:srgbClr val="CBD5E1"/>
+                      </a:solidFill>
+                      <a:prstDash val="solid"/>
+                      <a:round/>
+                      <a:headEnd type="none" w="med" len="med"/>
+                      <a:tailEnd type="none" w="med" len="med"/>
+                    </a:lnR>
+                    <a:lnT w="6350" cap="flat" cmpd="sng" algn="ctr">
+                      <a:solidFill>
+                        <a:srgbClr val="CBD5E1"/>
+                      </a:solidFill>
+                      <a:prstDash val="solid"/>
+                      <a:round/>
+                      <a:headEnd type="none" w="med" len="med"/>
+                      <a:tailEnd type="none" w="med" len="med"/>
+                    </a:lnT>
+                    <a:lnB w="6350" cap="flat" cmpd="sng" algn="ctr">
+                      <a:solidFill>
+                        <a:srgbClr val="CBD5E1"/>
+                      </a:solidFill>
+                      <a:prstDash val="solid"/>
+                      <a:round/>
+                      <a:headEnd type="none" w="med" len="med"/>
+                      <a:tailEnd type="none" w="med" len="med"/>
+                    </a:lnB>
+                    <a:solidFill>
+                      <a:srgbClr val="FFFFFF"/>
+                    </a:solidFill>
+                  </a:tcPr>
+                </a:tc>
+                <a:tc>
+                  <a:txBody>
+                    <a:bodyPr/>
+                    <a:lstStyle/>
+                    <a:p>
+                      <a:pPr algn="ctr" indent="0" marL="0">
+                        <a:buNone/>
+                      </a:pPr>
+                      <a:r>
+                        <a:rPr lang="en-US" sz="900" dirty="0">
+                          <a:solidFill>
+                            <a:srgbClr val="000000"/>
+                          </a:solidFill>
+                          <a:latin typeface="Arial" pitchFamily="34" charset="0"/>
+                          <a:ea typeface="Arial" pitchFamily="34" charset="-122"/>
+                          <a:cs typeface="Arial" pitchFamily="34" charset="-120"/>
+                        </a:rPr>
+                        <a:t>4.05</a:t>
                       </a:r>
                       <a:endParaRPr lang="en-US" sz="900" dirty="0">
                         <a:latin typeface="Arial" charset="0"/>
@@ -8818,691 +9502,7 @@
                           <a:ea typeface="Arial" pitchFamily="34" charset="-122"/>
                           <a:cs typeface="Arial" pitchFamily="34" charset="-120"/>
                         </a:rPr>
-                        <a:t>8.15</a:t>
-                      </a:r>
-                      <a:endParaRPr lang="en-US" sz="900" dirty="0">
-                        <a:latin typeface="Arial" charset="0"/>
-                        <a:ea typeface="Arial" charset="0"/>
-                        <a:cs typeface="Arial" charset="0"/>
-                      </a:endParaRPr>
-                    </a:p>
-                  </a:txBody>
-                  <a:tcPr marL="91440" marR="91440" marT="45720" marB="45720">
-                    <a:lnL w="6350" cap="flat" cmpd="sng" algn="ctr">
-                      <a:solidFill>
-                        <a:srgbClr val="CBD5E1"/>
-                      </a:solidFill>
-                      <a:prstDash val="solid"/>
-                      <a:round/>
-                      <a:headEnd type="none" w="med" len="med"/>
-                      <a:tailEnd type="none" w="med" len="med"/>
-                    </a:lnL>
-                    <a:lnR w="6350" cap="flat" cmpd="sng" algn="ctr">
-                      <a:solidFill>
-                        <a:srgbClr val="CBD5E1"/>
-                      </a:solidFill>
-                      <a:prstDash val="solid"/>
-                      <a:round/>
-                      <a:headEnd type="none" w="med" len="med"/>
-                      <a:tailEnd type="none" w="med" len="med"/>
-                    </a:lnR>
-                    <a:lnT w="6350" cap="flat" cmpd="sng" algn="ctr">
-                      <a:solidFill>
-                        <a:srgbClr val="CBD5E1"/>
-                      </a:solidFill>
-                      <a:prstDash val="solid"/>
-                      <a:round/>
-                      <a:headEnd type="none" w="med" len="med"/>
-                      <a:tailEnd type="none" w="med" len="med"/>
-                    </a:lnT>
-                    <a:lnB w="6350" cap="flat" cmpd="sng" algn="ctr">
-                      <a:solidFill>
-                        <a:srgbClr val="CBD5E1"/>
-                      </a:solidFill>
-                      <a:prstDash val="solid"/>
-                      <a:round/>
-                      <a:headEnd type="none" w="med" len="med"/>
-                      <a:tailEnd type="none" w="med" len="med"/>
-                    </a:lnB>
-                    <a:solidFill>
-                      <a:srgbClr val="FFFFFF"/>
-                    </a:solidFill>
-                  </a:tcPr>
-                </a:tc>
-              </a:tr>
-              <a:tr h="201168">
-                <a:tc>
-                  <a:txBody>
-                    <a:bodyPr/>
-                    <a:lstStyle/>
-                    <a:p>
-                      <a:pPr algn="ctr" indent="0" marL="0">
-                        <a:buNone/>
-                      </a:pPr>
-                      <a:r>
-                        <a:rPr lang="en-US" sz="900" dirty="0">
-                          <a:solidFill>
-                            <a:srgbClr val="000000"/>
-                          </a:solidFill>
-                          <a:latin typeface="Arial" pitchFamily="34" charset="0"/>
-                          <a:ea typeface="Arial" pitchFamily="34" charset="-122"/>
-                          <a:cs typeface="Arial" pitchFamily="34" charset="-120"/>
-                        </a:rPr>
-                        <a:t>Agoda</a:t>
-                      </a:r>
-                      <a:endParaRPr lang="en-US" sz="900" dirty="0">
-                        <a:latin typeface="Arial" charset="0"/>
-                        <a:ea typeface="Arial" charset="0"/>
-                        <a:cs typeface="Arial" charset="0"/>
-                      </a:endParaRPr>
-                    </a:p>
-                  </a:txBody>
-                  <a:tcPr marL="91440" marR="91440" marT="45720" marB="45720">
-                    <a:lnL w="6350" cap="flat" cmpd="sng" algn="ctr">
-                      <a:solidFill>
-                        <a:srgbClr val="CBD5E1"/>
-                      </a:solidFill>
-                      <a:prstDash val="solid"/>
-                      <a:round/>
-                      <a:headEnd type="none" w="med" len="med"/>
-                      <a:tailEnd type="none" w="med" len="med"/>
-                    </a:lnL>
-                    <a:lnR w="6350" cap="flat" cmpd="sng" algn="ctr">
-                      <a:solidFill>
-                        <a:srgbClr val="CBD5E1"/>
-                      </a:solidFill>
-                      <a:prstDash val="solid"/>
-                      <a:round/>
-                      <a:headEnd type="none" w="med" len="med"/>
-                      <a:tailEnd type="none" w="med" len="med"/>
-                    </a:lnR>
-                    <a:lnT w="6350" cap="flat" cmpd="sng" algn="ctr">
-                      <a:solidFill>
-                        <a:srgbClr val="CBD5E1"/>
-                      </a:solidFill>
-                      <a:prstDash val="solid"/>
-                      <a:round/>
-                      <a:headEnd type="none" w="med" len="med"/>
-                      <a:tailEnd type="none" w="med" len="med"/>
-                    </a:lnT>
-                    <a:lnB w="6350" cap="flat" cmpd="sng" algn="ctr">
-                      <a:solidFill>
-                        <a:srgbClr val="CBD5E1"/>
-                      </a:solidFill>
-                      <a:prstDash val="solid"/>
-                      <a:round/>
-                      <a:headEnd type="none" w="med" len="med"/>
-                      <a:tailEnd type="none" w="med" len="med"/>
-                    </a:lnB>
-                    <a:solidFill>
-                      <a:srgbClr val="E8EFF8"/>
-                    </a:solidFill>
-                  </a:tcPr>
-                </a:tc>
-                <a:tc>
-                  <a:txBody>
-                    <a:bodyPr/>
-                    <a:lstStyle/>
-                    <a:p>
-                      <a:pPr algn="ctr" indent="0" marL="0">
-                        <a:buNone/>
-                      </a:pPr>
-                      <a:r>
-                        <a:rPr lang="en-US" sz="900" dirty="0">
-                          <a:solidFill>
-                            <a:srgbClr val="000000"/>
-                          </a:solidFill>
-                          <a:latin typeface="Arial" pitchFamily="34" charset="0"/>
-                          <a:ea typeface="Arial" pitchFamily="34" charset="-122"/>
-                          <a:cs typeface="Arial" pitchFamily="34" charset="-120"/>
-                        </a:rPr>
-                        <a:t>36</a:t>
-                      </a:r>
-                      <a:endParaRPr lang="en-US" sz="900" dirty="0">
-                        <a:latin typeface="Arial" charset="0"/>
-                        <a:ea typeface="Arial" charset="0"/>
-                        <a:cs typeface="Arial" charset="0"/>
-                      </a:endParaRPr>
-                    </a:p>
-                  </a:txBody>
-                  <a:tcPr marL="91440" marR="91440" marT="45720" marB="45720">
-                    <a:lnL w="6350" cap="flat" cmpd="sng" algn="ctr">
-                      <a:solidFill>
-                        <a:srgbClr val="CBD5E1"/>
-                      </a:solidFill>
-                      <a:prstDash val="solid"/>
-                      <a:round/>
-                      <a:headEnd type="none" w="med" len="med"/>
-                      <a:tailEnd type="none" w="med" len="med"/>
-                    </a:lnL>
-                    <a:lnR w="6350" cap="flat" cmpd="sng" algn="ctr">
-                      <a:solidFill>
-                        <a:srgbClr val="CBD5E1"/>
-                      </a:solidFill>
-                      <a:prstDash val="solid"/>
-                      <a:round/>
-                      <a:headEnd type="none" w="med" len="med"/>
-                      <a:tailEnd type="none" w="med" len="med"/>
-                    </a:lnR>
-                    <a:lnT w="6350" cap="flat" cmpd="sng" algn="ctr">
-                      <a:solidFill>
-                        <a:srgbClr val="CBD5E1"/>
-                      </a:solidFill>
-                      <a:prstDash val="solid"/>
-                      <a:round/>
-                      <a:headEnd type="none" w="med" len="med"/>
-                      <a:tailEnd type="none" w="med" len="med"/>
-                    </a:lnT>
-                    <a:lnB w="6350" cap="flat" cmpd="sng" algn="ctr">
-                      <a:solidFill>
-                        <a:srgbClr val="CBD5E1"/>
-                      </a:solidFill>
-                      <a:prstDash val="solid"/>
-                      <a:round/>
-                      <a:headEnd type="none" w="med" len="med"/>
-                      <a:tailEnd type="none" w="med" len="med"/>
-                    </a:lnB>
-                    <a:solidFill>
-                      <a:srgbClr val="E8EFF8"/>
-                    </a:solidFill>
-                  </a:tcPr>
-                </a:tc>
-                <a:tc>
-                  <a:txBody>
-                    <a:bodyPr/>
-                    <a:lstStyle/>
-                    <a:p>
-                      <a:pPr algn="ctr" indent="0" marL="0">
-                        <a:buNone/>
-                      </a:pPr>
-                      <a:r>
-                        <a:rPr lang="en-US" sz="900" dirty="0">
-                          <a:solidFill>
-                            <a:srgbClr val="000000"/>
-                          </a:solidFill>
-                          <a:latin typeface="Arial" pitchFamily="34" charset="0"/>
-                          <a:ea typeface="Arial" pitchFamily="34" charset="-122"/>
-                          <a:cs typeface="Arial" pitchFamily="34" charset="-120"/>
-                        </a:rPr>
-                        <a:t>8.14</a:t>
-                      </a:r>
-                      <a:endParaRPr lang="en-US" sz="900" dirty="0">
-                        <a:latin typeface="Arial" charset="0"/>
-                        <a:ea typeface="Arial" charset="0"/>
-                        <a:cs typeface="Arial" charset="0"/>
-                      </a:endParaRPr>
-                    </a:p>
-                  </a:txBody>
-                  <a:tcPr marL="91440" marR="91440" marT="45720" marB="45720">
-                    <a:lnL w="6350" cap="flat" cmpd="sng" algn="ctr">
-                      <a:solidFill>
-                        <a:srgbClr val="CBD5E1"/>
-                      </a:solidFill>
-                      <a:prstDash val="solid"/>
-                      <a:round/>
-                      <a:headEnd type="none" w="med" len="med"/>
-                      <a:tailEnd type="none" w="med" len="med"/>
-                    </a:lnL>
-                    <a:lnR w="6350" cap="flat" cmpd="sng" algn="ctr">
-                      <a:solidFill>
-                        <a:srgbClr val="CBD5E1"/>
-                      </a:solidFill>
-                      <a:prstDash val="solid"/>
-                      <a:round/>
-                      <a:headEnd type="none" w="med" len="med"/>
-                      <a:tailEnd type="none" w="med" len="med"/>
-                    </a:lnR>
-                    <a:lnT w="6350" cap="flat" cmpd="sng" algn="ctr">
-                      <a:solidFill>
-                        <a:srgbClr val="CBD5E1"/>
-                      </a:solidFill>
-                      <a:prstDash val="solid"/>
-                      <a:round/>
-                      <a:headEnd type="none" w="med" len="med"/>
-                      <a:tailEnd type="none" w="med" len="med"/>
-                    </a:lnT>
-                    <a:lnB w="6350" cap="flat" cmpd="sng" algn="ctr">
-                      <a:solidFill>
-                        <a:srgbClr val="CBD5E1"/>
-                      </a:solidFill>
-                      <a:prstDash val="solid"/>
-                      <a:round/>
-                      <a:headEnd type="none" w="med" len="med"/>
-                      <a:tailEnd type="none" w="med" len="med"/>
-                    </a:lnB>
-                    <a:solidFill>
-                      <a:srgbClr val="E8EFF8"/>
-                    </a:solidFill>
-                  </a:tcPr>
-                </a:tc>
-                <a:tc>
-                  <a:txBody>
-                    <a:bodyPr/>
-                    <a:lstStyle/>
-                    <a:p>
-                      <a:pPr algn="ctr" indent="0" marL="0">
-                        <a:buNone/>
-                      </a:pPr>
-                      <a:r>
-                        <a:rPr lang="en-US" sz="900" dirty="0">
-                          <a:solidFill>
-                            <a:srgbClr val="000000"/>
-                          </a:solidFill>
-                          <a:latin typeface="Arial" pitchFamily="34" charset="0"/>
-                          <a:ea typeface="Arial" pitchFamily="34" charset="-122"/>
-                          <a:cs typeface="Arial" pitchFamily="34" charset="-120"/>
-                        </a:rPr>
-                        <a:t>/10</a:t>
-                      </a:r>
-                      <a:endParaRPr lang="en-US" sz="900" dirty="0">
-                        <a:latin typeface="Arial" charset="0"/>
-                        <a:ea typeface="Arial" charset="0"/>
-                        <a:cs typeface="Arial" charset="0"/>
-                      </a:endParaRPr>
-                    </a:p>
-                  </a:txBody>
-                  <a:tcPr marL="91440" marR="91440" marT="45720" marB="45720">
-                    <a:lnL w="6350" cap="flat" cmpd="sng" algn="ctr">
-                      <a:solidFill>
-                        <a:srgbClr val="CBD5E1"/>
-                      </a:solidFill>
-                      <a:prstDash val="solid"/>
-                      <a:round/>
-                      <a:headEnd type="none" w="med" len="med"/>
-                      <a:tailEnd type="none" w="med" len="med"/>
-                    </a:lnL>
-                    <a:lnR w="6350" cap="flat" cmpd="sng" algn="ctr">
-                      <a:solidFill>
-                        <a:srgbClr val="CBD5E1"/>
-                      </a:solidFill>
-                      <a:prstDash val="solid"/>
-                      <a:round/>
-                      <a:headEnd type="none" w="med" len="med"/>
-                      <a:tailEnd type="none" w="med" len="med"/>
-                    </a:lnR>
-                    <a:lnT w="6350" cap="flat" cmpd="sng" algn="ctr">
-                      <a:solidFill>
-                        <a:srgbClr val="CBD5E1"/>
-                      </a:solidFill>
-                      <a:prstDash val="solid"/>
-                      <a:round/>
-                      <a:headEnd type="none" w="med" len="med"/>
-                      <a:tailEnd type="none" w="med" len="med"/>
-                    </a:lnT>
-                    <a:lnB w="6350" cap="flat" cmpd="sng" algn="ctr">
-                      <a:solidFill>
-                        <a:srgbClr val="CBD5E1"/>
-                      </a:solidFill>
-                      <a:prstDash val="solid"/>
-                      <a:round/>
-                      <a:headEnd type="none" w="med" len="med"/>
-                      <a:tailEnd type="none" w="med" len="med"/>
-                    </a:lnB>
-                    <a:solidFill>
-                      <a:srgbClr val="E8EFF8"/>
-                    </a:solidFill>
-                  </a:tcPr>
-                </a:tc>
-                <a:tc>
-                  <a:txBody>
-                    <a:bodyPr/>
-                    <a:lstStyle/>
-                    <a:p>
-                      <a:pPr algn="ctr" indent="0" marL="0">
-                        <a:buNone/>
-                      </a:pPr>
-                      <a:r>
-                        <a:rPr lang="en-US" sz="900" dirty="0">
-                          <a:solidFill>
-                            <a:srgbClr val="000000"/>
-                          </a:solidFill>
-                          <a:latin typeface="Arial" pitchFamily="34" charset="0"/>
-                          <a:ea typeface="Arial" pitchFamily="34" charset="-122"/>
-                          <a:cs typeface="Arial" pitchFamily="34" charset="-120"/>
-                        </a:rPr>
-                        <a:t>8.14</a:t>
-                      </a:r>
-                      <a:endParaRPr lang="en-US" sz="900" dirty="0">
-                        <a:latin typeface="Arial" charset="0"/>
-                        <a:ea typeface="Arial" charset="0"/>
-                        <a:cs typeface="Arial" charset="0"/>
-                      </a:endParaRPr>
-                    </a:p>
-                  </a:txBody>
-                  <a:tcPr marL="91440" marR="91440" marT="45720" marB="45720">
-                    <a:lnL w="6350" cap="flat" cmpd="sng" algn="ctr">
-                      <a:solidFill>
-                        <a:srgbClr val="CBD5E1"/>
-                      </a:solidFill>
-                      <a:prstDash val="solid"/>
-                      <a:round/>
-                      <a:headEnd type="none" w="med" len="med"/>
-                      <a:tailEnd type="none" w="med" len="med"/>
-                    </a:lnL>
-                    <a:lnR w="6350" cap="flat" cmpd="sng" algn="ctr">
-                      <a:solidFill>
-                        <a:srgbClr val="CBD5E1"/>
-                      </a:solidFill>
-                      <a:prstDash val="solid"/>
-                      <a:round/>
-                      <a:headEnd type="none" w="med" len="med"/>
-                      <a:tailEnd type="none" w="med" len="med"/>
-                    </a:lnR>
-                    <a:lnT w="6350" cap="flat" cmpd="sng" algn="ctr">
-                      <a:solidFill>
-                        <a:srgbClr val="CBD5E1"/>
-                      </a:solidFill>
-                      <a:prstDash val="solid"/>
-                      <a:round/>
-                      <a:headEnd type="none" w="med" len="med"/>
-                      <a:tailEnd type="none" w="med" len="med"/>
-                    </a:lnT>
-                    <a:lnB w="6350" cap="flat" cmpd="sng" algn="ctr">
-                      <a:solidFill>
-                        <a:srgbClr val="CBD5E1"/>
-                      </a:solidFill>
-                      <a:prstDash val="solid"/>
-                      <a:round/>
-                      <a:headEnd type="none" w="med" len="med"/>
-                      <a:tailEnd type="none" w="med" len="med"/>
-                    </a:lnB>
-                    <a:solidFill>
-                      <a:srgbClr val="E8EFF8"/>
-                    </a:solidFill>
-                  </a:tcPr>
-                </a:tc>
-              </a:tr>
-              <a:tr h="201168">
-                <a:tc>
-                  <a:txBody>
-                    <a:bodyPr/>
-                    <a:lstStyle/>
-                    <a:p>
-                      <a:pPr algn="ctr" indent="0" marL="0">
-                        <a:buNone/>
-                      </a:pPr>
-                      <a:r>
-                        <a:rPr lang="en-US" sz="900" dirty="0">
-                          <a:solidFill>
-                            <a:srgbClr val="000000"/>
-                          </a:solidFill>
-                          <a:latin typeface="Arial" pitchFamily="34" charset="0"/>
-                          <a:ea typeface="Arial" pitchFamily="34" charset="-122"/>
-                          <a:cs typeface="Arial" pitchFamily="34" charset="-120"/>
-                        </a:rPr>
-                        <a:t>Booking.com</a:t>
-                      </a:r>
-                      <a:endParaRPr lang="en-US" sz="900" dirty="0">
-                        <a:latin typeface="Arial" charset="0"/>
-                        <a:ea typeface="Arial" charset="0"/>
-                        <a:cs typeface="Arial" charset="0"/>
-                      </a:endParaRPr>
-                    </a:p>
-                  </a:txBody>
-                  <a:tcPr marL="91440" marR="91440" marT="45720" marB="45720">
-                    <a:lnL w="6350" cap="flat" cmpd="sng" algn="ctr">
-                      <a:solidFill>
-                        <a:srgbClr val="CBD5E1"/>
-                      </a:solidFill>
-                      <a:prstDash val="solid"/>
-                      <a:round/>
-                      <a:headEnd type="none" w="med" len="med"/>
-                      <a:tailEnd type="none" w="med" len="med"/>
-                    </a:lnL>
-                    <a:lnR w="6350" cap="flat" cmpd="sng" algn="ctr">
-                      <a:solidFill>
-                        <a:srgbClr val="CBD5E1"/>
-                      </a:solidFill>
-                      <a:prstDash val="solid"/>
-                      <a:round/>
-                      <a:headEnd type="none" w="med" len="med"/>
-                      <a:tailEnd type="none" w="med" len="med"/>
-                    </a:lnR>
-                    <a:lnT w="6350" cap="flat" cmpd="sng" algn="ctr">
-                      <a:solidFill>
-                        <a:srgbClr val="CBD5E1"/>
-                      </a:solidFill>
-                      <a:prstDash val="solid"/>
-                      <a:round/>
-                      <a:headEnd type="none" w="med" len="med"/>
-                      <a:tailEnd type="none" w="med" len="med"/>
-                    </a:lnT>
-                    <a:lnB w="6350" cap="flat" cmpd="sng" algn="ctr">
-                      <a:solidFill>
-                        <a:srgbClr val="CBD5E1"/>
-                      </a:solidFill>
-                      <a:prstDash val="solid"/>
-                      <a:round/>
-                      <a:headEnd type="none" w="med" len="med"/>
-                      <a:tailEnd type="none" w="med" len="med"/>
-                    </a:lnB>
-                    <a:solidFill>
-                      <a:srgbClr val="FFFFFF"/>
-                    </a:solidFill>
-                  </a:tcPr>
-                </a:tc>
-                <a:tc>
-                  <a:txBody>
-                    <a:bodyPr/>
-                    <a:lstStyle/>
-                    <a:p>
-                      <a:pPr algn="ctr" indent="0" marL="0">
-                        <a:buNone/>
-                      </a:pPr>
-                      <a:r>
-                        <a:rPr lang="en-US" sz="900" dirty="0">
-                          <a:solidFill>
-                            <a:srgbClr val="000000"/>
-                          </a:solidFill>
-                          <a:latin typeface="Arial" pitchFamily="34" charset="0"/>
-                          <a:ea typeface="Arial" pitchFamily="34" charset="-122"/>
-                          <a:cs typeface="Arial" pitchFamily="34" charset="-120"/>
-                        </a:rPr>
-                        <a:t>136</a:t>
-                      </a:r>
-                      <a:endParaRPr lang="en-US" sz="900" dirty="0">
-                        <a:latin typeface="Arial" charset="0"/>
-                        <a:ea typeface="Arial" charset="0"/>
-                        <a:cs typeface="Arial" charset="0"/>
-                      </a:endParaRPr>
-                    </a:p>
-                  </a:txBody>
-                  <a:tcPr marL="91440" marR="91440" marT="45720" marB="45720">
-                    <a:lnL w="6350" cap="flat" cmpd="sng" algn="ctr">
-                      <a:solidFill>
-                        <a:srgbClr val="CBD5E1"/>
-                      </a:solidFill>
-                      <a:prstDash val="solid"/>
-                      <a:round/>
-                      <a:headEnd type="none" w="med" len="med"/>
-                      <a:tailEnd type="none" w="med" len="med"/>
-                    </a:lnL>
-                    <a:lnR w="6350" cap="flat" cmpd="sng" algn="ctr">
-                      <a:solidFill>
-                        <a:srgbClr val="CBD5E1"/>
-                      </a:solidFill>
-                      <a:prstDash val="solid"/>
-                      <a:round/>
-                      <a:headEnd type="none" w="med" len="med"/>
-                      <a:tailEnd type="none" w="med" len="med"/>
-                    </a:lnR>
-                    <a:lnT w="6350" cap="flat" cmpd="sng" algn="ctr">
-                      <a:solidFill>
-                        <a:srgbClr val="CBD5E1"/>
-                      </a:solidFill>
-                      <a:prstDash val="solid"/>
-                      <a:round/>
-                      <a:headEnd type="none" w="med" len="med"/>
-                      <a:tailEnd type="none" w="med" len="med"/>
-                    </a:lnT>
-                    <a:lnB w="6350" cap="flat" cmpd="sng" algn="ctr">
-                      <a:solidFill>
-                        <a:srgbClr val="CBD5E1"/>
-                      </a:solidFill>
-                      <a:prstDash val="solid"/>
-                      <a:round/>
-                      <a:headEnd type="none" w="med" len="med"/>
-                      <a:tailEnd type="none" w="med" len="med"/>
-                    </a:lnB>
-                    <a:solidFill>
-                      <a:srgbClr val="FFFFFF"/>
-                    </a:solidFill>
-                  </a:tcPr>
-                </a:tc>
-                <a:tc>
-                  <a:txBody>
-                    <a:bodyPr/>
-                    <a:lstStyle/>
-                    <a:p>
-                      <a:pPr algn="ctr" indent="0" marL="0">
-                        <a:buNone/>
-                      </a:pPr>
-                      <a:r>
-                        <a:rPr lang="en-US" sz="900" dirty="0">
-                          <a:solidFill>
-                            <a:srgbClr val="000000"/>
-                          </a:solidFill>
-                          <a:latin typeface="Arial" pitchFamily="34" charset="0"/>
-                          <a:ea typeface="Arial" pitchFamily="34" charset="-122"/>
-                          <a:cs typeface="Arial" pitchFamily="34" charset="-120"/>
-                        </a:rPr>
-                        <a:t>8.12</a:t>
-                      </a:r>
-                      <a:endParaRPr lang="en-US" sz="900" dirty="0">
-                        <a:latin typeface="Arial" charset="0"/>
-                        <a:ea typeface="Arial" charset="0"/>
-                        <a:cs typeface="Arial" charset="0"/>
-                      </a:endParaRPr>
-                    </a:p>
-                  </a:txBody>
-                  <a:tcPr marL="91440" marR="91440" marT="45720" marB="45720">
-                    <a:lnL w="6350" cap="flat" cmpd="sng" algn="ctr">
-                      <a:solidFill>
-                        <a:srgbClr val="CBD5E1"/>
-                      </a:solidFill>
-                      <a:prstDash val="solid"/>
-                      <a:round/>
-                      <a:headEnd type="none" w="med" len="med"/>
-                      <a:tailEnd type="none" w="med" len="med"/>
-                    </a:lnL>
-                    <a:lnR w="6350" cap="flat" cmpd="sng" algn="ctr">
-                      <a:solidFill>
-                        <a:srgbClr val="CBD5E1"/>
-                      </a:solidFill>
-                      <a:prstDash val="solid"/>
-                      <a:round/>
-                      <a:headEnd type="none" w="med" len="med"/>
-                      <a:tailEnd type="none" w="med" len="med"/>
-                    </a:lnR>
-                    <a:lnT w="6350" cap="flat" cmpd="sng" algn="ctr">
-                      <a:solidFill>
-                        <a:srgbClr val="CBD5E1"/>
-                      </a:solidFill>
-                      <a:prstDash val="solid"/>
-                      <a:round/>
-                      <a:headEnd type="none" w="med" len="med"/>
-                      <a:tailEnd type="none" w="med" len="med"/>
-                    </a:lnT>
-                    <a:lnB w="6350" cap="flat" cmpd="sng" algn="ctr">
-                      <a:solidFill>
-                        <a:srgbClr val="CBD5E1"/>
-                      </a:solidFill>
-                      <a:prstDash val="solid"/>
-                      <a:round/>
-                      <a:headEnd type="none" w="med" len="med"/>
-                      <a:tailEnd type="none" w="med" len="med"/>
-                    </a:lnB>
-                    <a:solidFill>
-                      <a:srgbClr val="FFFFFF"/>
-                    </a:solidFill>
-                  </a:tcPr>
-                </a:tc>
-                <a:tc>
-                  <a:txBody>
-                    <a:bodyPr/>
-                    <a:lstStyle/>
-                    <a:p>
-                      <a:pPr algn="ctr" indent="0" marL="0">
-                        <a:buNone/>
-                      </a:pPr>
-                      <a:r>
-                        <a:rPr lang="en-US" sz="900" dirty="0">
-                          <a:solidFill>
-                            <a:srgbClr val="000000"/>
-                          </a:solidFill>
-                          <a:latin typeface="Arial" pitchFamily="34" charset="0"/>
-                          <a:ea typeface="Arial" pitchFamily="34" charset="-122"/>
-                          <a:cs typeface="Arial" pitchFamily="34" charset="-120"/>
-                        </a:rPr>
-                        <a:t>/10</a:t>
-                      </a:r>
-                      <a:endParaRPr lang="en-US" sz="900" dirty="0">
-                        <a:latin typeface="Arial" charset="0"/>
-                        <a:ea typeface="Arial" charset="0"/>
-                        <a:cs typeface="Arial" charset="0"/>
-                      </a:endParaRPr>
-                    </a:p>
-                  </a:txBody>
-                  <a:tcPr marL="91440" marR="91440" marT="45720" marB="45720">
-                    <a:lnL w="6350" cap="flat" cmpd="sng" algn="ctr">
-                      <a:solidFill>
-                        <a:srgbClr val="CBD5E1"/>
-                      </a:solidFill>
-                      <a:prstDash val="solid"/>
-                      <a:round/>
-                      <a:headEnd type="none" w="med" len="med"/>
-                      <a:tailEnd type="none" w="med" len="med"/>
-                    </a:lnL>
-                    <a:lnR w="6350" cap="flat" cmpd="sng" algn="ctr">
-                      <a:solidFill>
-                        <a:srgbClr val="CBD5E1"/>
-                      </a:solidFill>
-                      <a:prstDash val="solid"/>
-                      <a:round/>
-                      <a:headEnd type="none" w="med" len="med"/>
-                      <a:tailEnd type="none" w="med" len="med"/>
-                    </a:lnR>
-                    <a:lnT w="6350" cap="flat" cmpd="sng" algn="ctr">
-                      <a:solidFill>
-                        <a:srgbClr val="CBD5E1"/>
-                      </a:solidFill>
-                      <a:prstDash val="solid"/>
-                      <a:round/>
-                      <a:headEnd type="none" w="med" len="med"/>
-                      <a:tailEnd type="none" w="med" len="med"/>
-                    </a:lnT>
-                    <a:lnB w="6350" cap="flat" cmpd="sng" algn="ctr">
-                      <a:solidFill>
-                        <a:srgbClr val="CBD5E1"/>
-                      </a:solidFill>
-                      <a:prstDash val="solid"/>
-                      <a:round/>
-                      <a:headEnd type="none" w="med" len="med"/>
-                      <a:tailEnd type="none" w="med" len="med"/>
-                    </a:lnB>
-                    <a:solidFill>
-                      <a:srgbClr val="FFFFFF"/>
-                    </a:solidFill>
-                  </a:tcPr>
-                </a:tc>
-                <a:tc>
-                  <a:txBody>
-                    <a:bodyPr/>
-                    <a:lstStyle/>
-                    <a:p>
-                      <a:pPr algn="ctr" indent="0" marL="0">
-                        <a:buNone/>
-                      </a:pPr>
-                      <a:r>
-                        <a:rPr lang="en-US" sz="900" dirty="0">
-                          <a:solidFill>
-                            <a:srgbClr val="000000"/>
-                          </a:solidFill>
-                          <a:latin typeface="Arial" pitchFamily="34" charset="0"/>
-                          <a:ea typeface="Arial" pitchFamily="34" charset="-122"/>
-                          <a:cs typeface="Arial" pitchFamily="34" charset="-120"/>
-                        </a:rPr>
-                        <a:t>8.12</a:t>
+                        <a:t>8.11</a:t>
                       </a:r>
                       <a:endParaRPr lang="en-US" sz="900" dirty="0">
                         <a:latin typeface="Arial" charset="0"/>
@@ -9910,7 +9910,7 @@
                 <a:ea typeface="Arial" pitchFamily="34" charset="-122"/>
                 <a:cs typeface="Arial" pitchFamily="34" charset="-120"/>
               </a:rPr>
-              <a:t>242件（76.3%）</a:t>
+              <a:t>246件（75.9%）</a:t>
             </a:r>
             <a:endParaRPr lang="en-US" sz="1100" dirty="0"/>
           </a:p>
@@ -10008,7 +10008,7 @@
                 <a:ea typeface="Arial" pitchFamily="34" charset="-122"/>
                 <a:cs typeface="Arial" pitchFamily="34" charset="-120"/>
               </a:rPr>
-              <a:t>66件（20.8%）</a:t>
+              <a:t>69件（21.3%）</a:t>
             </a:r>
             <a:endParaRPr lang="en-US" sz="1100" dirty="0"/>
           </a:p>
@@ -10518,7 +10518,7 @@
                 <a:ea typeface="Arial" pitchFamily="34" charset="-122"/>
                 <a:cs typeface="Arial" pitchFamily="34" charset="-120"/>
               </a:rPr>
-              <a:t>We only stayed one night and we wanted someplace close to...</a:t>
+              <a:t>立地がよい</a:t>
             </a:r>
             <a:endParaRPr lang="en-US" sz="900" dirty="0"/>
           </a:p>
@@ -10533,6 +10533,898 @@
         <p:spPr>
           <a:xfrm>
             <a:off x="594360" y="1828800"/>
+            <a:ext cx="2377440" cy="640080"/>
+          </a:xfrm>
+          <a:prstGeom prst="rect">
+            <a:avLst/>
+          </a:prstGeom>
+          <a:noFill/>
+          <a:ln/>
+        </p:spPr>
+        <p:txBody>
+          <a:bodyPr wrap="square" lIns="0" tIns="0" rIns="0" bIns="0" rtlCol="0" anchor="ctr"/>
+          <a:lstStyle/>
+          <a:p>
+            <a:pPr indent="0" marL="0">
+              <a:buNone/>
+            </a:pPr>
+            <a:r>
+              <a:rPr lang="en-US" sz="900" i="1" dirty="0">
+                <a:solidFill>
+                  <a:srgbClr val="3B7DD8"/>
+                </a:solidFill>
+                <a:latin typeface="Arial" pitchFamily="34" charset="0"/>
+                <a:ea typeface="Arial" pitchFamily="34" charset="-122"/>
+                <a:cs typeface="Arial" pitchFamily="34" charset="-120"/>
+              </a:rPr>
+              <a:t>「立地に関しては、東京中心部への電車が30分に1本しかないため、東京滞在の拠点として利用するのはお勧めしません」</a:t>
+            </a:r>
+            <a:endParaRPr lang="en-US" sz="900" dirty="0"/>
+          </a:p>
+        </p:txBody>
+      </p:sp>
+      <p:sp>
+        <p:nvSpPr>
+          <p:cNvPr id="12" name="Shape 10"/>
+          <p:cNvSpPr/>
+          <p:nvPr/>
+        </p:nvSpPr>
+        <p:spPr>
+          <a:xfrm>
+            <a:off x="3291840" y="1051560"/>
+            <a:ext cx="2651760" cy="1600200"/>
+          </a:xfrm>
+          <a:prstGeom prst="rect">
+            <a:avLst/>
+          </a:prstGeom>
+          <a:solidFill>
+            <a:srgbClr val="FFFFFF"/>
+          </a:solidFill>
+          <a:ln/>
+          <a:effectLst>
+            <a:outerShdw sx="100000" sy="100000" kx="0" ky="0" algn="bl" rotWithShape="0" blurRad="50800" dist="25400" dir="8100000">
+              <a:srgbClr val="000000">
+                <a:alpha val="10000"/>
+              </a:srgbClr>
+            </a:outerShdw>
+          </a:effectLst>
+        </p:spPr>
+      </p:sp>
+      <p:sp>
+        <p:nvSpPr>
+          <p:cNvPr id="13" name="Shape 11"/>
+          <p:cNvSpPr/>
+          <p:nvPr/>
+        </p:nvSpPr>
+        <p:spPr>
+          <a:xfrm>
+            <a:off x="3291840" y="1051560"/>
+            <a:ext cx="54864" cy="1600200"/>
+          </a:xfrm>
+          <a:prstGeom prst="rect">
+            <a:avLst/>
+          </a:prstGeom>
+          <a:solidFill>
+            <a:srgbClr val="16A34A"/>
+          </a:solidFill>
+          <a:ln/>
+        </p:spPr>
+      </p:sp>
+      <p:sp>
+        <p:nvSpPr>
+          <p:cNvPr id="14" name="Shape 12"/>
+          <p:cNvSpPr/>
+          <p:nvPr/>
+        </p:nvSpPr>
+        <p:spPr>
+          <a:xfrm>
+            <a:off x="5120640" y="1124712"/>
+            <a:ext cx="658368" cy="228600"/>
+          </a:xfrm>
+          <a:prstGeom prst="rect">
+            <a:avLst/>
+          </a:prstGeom>
+          <a:solidFill>
+            <a:srgbClr val="DCFCE7"/>
+          </a:solidFill>
+          <a:ln/>
+        </p:spPr>
+      </p:sp>
+      <p:sp>
+        <p:nvSpPr>
+          <p:cNvPr id="15" name="Text 13"/>
+          <p:cNvSpPr/>
+          <p:nvPr/>
+        </p:nvSpPr>
+        <p:spPr>
+          <a:xfrm>
+            <a:off x="5120640" y="1124712"/>
+            <a:ext cx="658368" cy="228600"/>
+          </a:xfrm>
+          <a:prstGeom prst="rect">
+            <a:avLst/>
+          </a:prstGeom>
+          <a:noFill/>
+          <a:ln/>
+        </p:spPr>
+        <p:txBody>
+          <a:bodyPr wrap="square" lIns="0" tIns="0" rIns="0" bIns="0" rtlCol="0" anchor="ctr"/>
+          <a:lstStyle/>
+          <a:p>
+            <a:pPr algn="ctr" indent="0" marL="0">
+              <a:buNone/>
+            </a:pPr>
+            <a:r>
+              <a:rPr lang="en-US" sz="900" b="1" dirty="0">
+                <a:solidFill>
+                  <a:srgbClr val="16A34A"/>
+                </a:solidFill>
+                <a:latin typeface="Arial" pitchFamily="34" charset="0"/>
+                <a:ea typeface="Arial" pitchFamily="34" charset="-122"/>
+                <a:cs typeface="Arial" pitchFamily="34" charset="-120"/>
+              </a:rPr>
+              <a:t>50件+</a:t>
+            </a:r>
+            <a:endParaRPr lang="en-US" sz="900" dirty="0"/>
+          </a:p>
+        </p:txBody>
+      </p:sp>
+      <p:sp>
+        <p:nvSpPr>
+          <p:cNvPr id="16" name="Text 14"/>
+          <p:cNvSpPr/>
+          <p:nvPr/>
+        </p:nvSpPr>
+        <p:spPr>
+          <a:xfrm>
+            <a:off x="3429000" y="1124712"/>
+            <a:ext cx="1645920" cy="274320"/>
+          </a:xfrm>
+          <a:prstGeom prst="rect">
+            <a:avLst/>
+          </a:prstGeom>
+          <a:noFill/>
+          <a:ln/>
+        </p:spPr>
+        <p:txBody>
+          <a:bodyPr wrap="square" lIns="0" tIns="0" rIns="0" bIns="0" rtlCol="0" anchor="ctr"/>
+          <a:lstStyle/>
+          <a:p>
+            <a:pPr indent="0" marL="0">
+              <a:buNone/>
+            </a:pPr>
+            <a:r>
+              <a:rPr lang="en-US" sz="1300" b="1" dirty="0">
+                <a:solidFill>
+                  <a:srgbClr val="1A2744"/>
+                </a:solidFill>
+                <a:latin typeface="Arial" pitchFamily="34" charset="0"/>
+                <a:ea typeface="Arial" pitchFamily="34" charset="-122"/>
+                <a:cs typeface="Arial" pitchFamily="34" charset="-120"/>
+              </a:rPr>
+              <a:t>スタッフの対応</a:t>
+            </a:r>
+            <a:endParaRPr lang="en-US" sz="1300" dirty="0"/>
+          </a:p>
+        </p:txBody>
+      </p:sp>
+      <p:sp>
+        <p:nvSpPr>
+          <p:cNvPr id="17" name="Text 15"/>
+          <p:cNvSpPr/>
+          <p:nvPr/>
+        </p:nvSpPr>
+        <p:spPr>
+          <a:xfrm>
+            <a:off x="3429000" y="1417320"/>
+            <a:ext cx="2377440" cy="365760"/>
+          </a:xfrm>
+          <a:prstGeom prst="rect">
+            <a:avLst/>
+          </a:prstGeom>
+          <a:noFill/>
+          <a:ln/>
+        </p:spPr>
+        <p:txBody>
+          <a:bodyPr wrap="square" lIns="0" tIns="0" rIns="0" bIns="0" rtlCol="0" anchor="ctr"/>
+          <a:lstStyle/>
+          <a:p>
+            <a:pPr indent="0" marL="0">
+              <a:buNone/>
+            </a:pPr>
+            <a:r>
+              <a:rPr lang="en-US" sz="900" dirty="0">
+                <a:solidFill>
+                  <a:srgbClr val="64748B"/>
+                </a:solidFill>
+                <a:latin typeface="Arial" pitchFamily="34" charset="0"/>
+                <a:ea typeface="Arial" pitchFamily="34" charset="-122"/>
+                <a:cs typeface="Arial" pitchFamily="34" charset="-120"/>
+              </a:rPr>
+              <a:t>チェックイン手続きは全体的にスムーズでしたが、自動ロボットによる対応が少し気になりました</a:t>
+            </a:r>
+            <a:endParaRPr lang="en-US" sz="900" dirty="0"/>
+          </a:p>
+        </p:txBody>
+      </p:sp>
+      <p:sp>
+        <p:nvSpPr>
+          <p:cNvPr id="18" name="Text 16"/>
+          <p:cNvSpPr/>
+          <p:nvPr/>
+        </p:nvSpPr>
+        <p:spPr>
+          <a:xfrm>
+            <a:off x="3429000" y="1828800"/>
+            <a:ext cx="2377440" cy="640080"/>
+          </a:xfrm>
+          <a:prstGeom prst="rect">
+            <a:avLst/>
+          </a:prstGeom>
+          <a:noFill/>
+          <a:ln/>
+        </p:spPr>
+        <p:txBody>
+          <a:bodyPr wrap="square" lIns="0" tIns="0" rIns="0" bIns="0" rtlCol="0" anchor="ctr"/>
+          <a:lstStyle/>
+          <a:p>
+            <a:pPr indent="0" marL="0">
+              <a:buNone/>
+            </a:pPr>
+            <a:r>
+              <a:rPr lang="en-US" sz="900" i="1" dirty="0">
+                <a:solidFill>
+                  <a:srgbClr val="3B7DD8"/>
+                </a:solidFill>
+                <a:latin typeface="Arial" pitchFamily="34" charset="0"/>
+                <a:ea typeface="Arial" pitchFamily="34" charset="-122"/>
+                <a:cs typeface="Arial" pitchFamily="34" charset="-120"/>
+              </a:rPr>
+              <a:t>「スタッフが親切」</a:t>
+            </a:r>
+            <a:endParaRPr lang="en-US" sz="900" dirty="0"/>
+          </a:p>
+        </p:txBody>
+      </p:sp>
+      <p:sp>
+        <p:nvSpPr>
+          <p:cNvPr id="19" name="Shape 17"/>
+          <p:cNvSpPr/>
+          <p:nvPr/>
+        </p:nvSpPr>
+        <p:spPr>
+          <a:xfrm>
+            <a:off x="6126480" y="1051560"/>
+            <a:ext cx="2651760" cy="1600200"/>
+          </a:xfrm>
+          <a:prstGeom prst="rect">
+            <a:avLst/>
+          </a:prstGeom>
+          <a:solidFill>
+            <a:srgbClr val="FFFFFF"/>
+          </a:solidFill>
+          <a:ln/>
+          <a:effectLst>
+            <a:outerShdw sx="100000" sy="100000" kx="0" ky="0" algn="bl" rotWithShape="0" blurRad="50800" dist="25400" dir="8100000">
+              <a:srgbClr val="000000">
+                <a:alpha val="10000"/>
+              </a:srgbClr>
+            </a:outerShdw>
+          </a:effectLst>
+        </p:spPr>
+      </p:sp>
+      <p:sp>
+        <p:nvSpPr>
+          <p:cNvPr id="20" name="Shape 18"/>
+          <p:cNvSpPr/>
+          <p:nvPr/>
+        </p:nvSpPr>
+        <p:spPr>
+          <a:xfrm>
+            <a:off x="6126480" y="1051560"/>
+            <a:ext cx="54864" cy="1600200"/>
+          </a:xfrm>
+          <a:prstGeom prst="rect">
+            <a:avLst/>
+          </a:prstGeom>
+          <a:solidFill>
+            <a:srgbClr val="16A34A"/>
+          </a:solidFill>
+          <a:ln/>
+        </p:spPr>
+      </p:sp>
+      <p:sp>
+        <p:nvSpPr>
+          <p:cNvPr id="21" name="Shape 19"/>
+          <p:cNvSpPr/>
+          <p:nvPr/>
+        </p:nvSpPr>
+        <p:spPr>
+          <a:xfrm>
+            <a:off x="7955280" y="1124712"/>
+            <a:ext cx="658368" cy="228600"/>
+          </a:xfrm>
+          <a:prstGeom prst="rect">
+            <a:avLst/>
+          </a:prstGeom>
+          <a:solidFill>
+            <a:srgbClr val="DCFCE7"/>
+          </a:solidFill>
+          <a:ln/>
+        </p:spPr>
+      </p:sp>
+      <p:sp>
+        <p:nvSpPr>
+          <p:cNvPr id="22" name="Text 20"/>
+          <p:cNvSpPr/>
+          <p:nvPr/>
+        </p:nvSpPr>
+        <p:spPr>
+          <a:xfrm>
+            <a:off x="7955280" y="1124712"/>
+            <a:ext cx="658368" cy="228600"/>
+          </a:xfrm>
+          <a:prstGeom prst="rect">
+            <a:avLst/>
+          </a:prstGeom>
+          <a:noFill/>
+          <a:ln/>
+        </p:spPr>
+        <p:txBody>
+          <a:bodyPr wrap="square" lIns="0" tIns="0" rIns="0" bIns="0" rtlCol="0" anchor="ctr"/>
+          <a:lstStyle/>
+          <a:p>
+            <a:pPr algn="ctr" indent="0" marL="0">
+              <a:buNone/>
+            </a:pPr>
+            <a:r>
+              <a:rPr lang="en-US" sz="900" b="1" dirty="0">
+                <a:solidFill>
+                  <a:srgbClr val="16A34A"/>
+                </a:solidFill>
+                <a:latin typeface="Arial" pitchFamily="34" charset="0"/>
+                <a:ea typeface="Arial" pitchFamily="34" charset="-122"/>
+                <a:cs typeface="Arial" pitchFamily="34" charset="-120"/>
+              </a:rPr>
+              <a:t>50件+</a:t>
+            </a:r>
+            <a:endParaRPr lang="en-US" sz="900" dirty="0"/>
+          </a:p>
+        </p:txBody>
+      </p:sp>
+      <p:sp>
+        <p:nvSpPr>
+          <p:cNvPr id="23" name="Text 21"/>
+          <p:cNvSpPr/>
+          <p:nvPr/>
+        </p:nvSpPr>
+        <p:spPr>
+          <a:xfrm>
+            <a:off x="6263640" y="1124712"/>
+            <a:ext cx="1645920" cy="274320"/>
+          </a:xfrm>
+          <a:prstGeom prst="rect">
+            <a:avLst/>
+          </a:prstGeom>
+          <a:noFill/>
+          <a:ln/>
+        </p:spPr>
+        <p:txBody>
+          <a:bodyPr wrap="square" lIns="0" tIns="0" rIns="0" bIns="0" rtlCol="0" anchor="ctr"/>
+          <a:lstStyle/>
+          <a:p>
+            <a:pPr indent="0" marL="0">
+              <a:buNone/>
+            </a:pPr>
+            <a:r>
+              <a:rPr lang="en-US" sz="1300" b="1" dirty="0">
+                <a:solidFill>
+                  <a:srgbClr val="1A2744"/>
+                </a:solidFill>
+                <a:latin typeface="Arial" pitchFamily="34" charset="0"/>
+                <a:ea typeface="Arial" pitchFamily="34" charset="-122"/>
+                <a:cs typeface="Arial" pitchFamily="34" charset="-120"/>
+              </a:rPr>
+              <a:t>清潔さ・清掃</a:t>
+            </a:r>
+            <a:endParaRPr lang="en-US" sz="1300" dirty="0"/>
+          </a:p>
+        </p:txBody>
+      </p:sp>
+      <p:sp>
+        <p:nvSpPr>
+          <p:cNvPr id="24" name="Text 22"/>
+          <p:cNvSpPr/>
+          <p:nvPr/>
+        </p:nvSpPr>
+        <p:spPr>
+          <a:xfrm>
+            <a:off x="6263640" y="1417320"/>
+            <a:ext cx="2377440" cy="365760"/>
+          </a:xfrm>
+          <a:prstGeom prst="rect">
+            <a:avLst/>
+          </a:prstGeom>
+          <a:noFill/>
+          <a:ln/>
+        </p:spPr>
+        <p:txBody>
+          <a:bodyPr wrap="square" lIns="0" tIns="0" rIns="0" bIns="0" rtlCol="0" anchor="ctr"/>
+          <a:lstStyle/>
+          <a:p>
+            <a:pPr indent="0" marL="0">
+              <a:buNone/>
+            </a:pPr>
+            <a:r>
+              <a:rPr lang="en-US" sz="900" dirty="0">
+                <a:solidFill>
+                  <a:srgbClr val="64748B"/>
+                </a:solidFill>
+                <a:latin typeface="Arial" pitchFamily="34" charset="0"/>
+                <a:ea typeface="Arial" pitchFamily="34" charset="-122"/>
+                <a:cs typeface="Arial" pitchFamily="34" charset="-120"/>
+              </a:rPr>
+              <a:t>とても清潔でコンパクト、そして快適でした</a:t>
+            </a:r>
+            <a:endParaRPr lang="en-US" sz="900" dirty="0"/>
+          </a:p>
+        </p:txBody>
+      </p:sp>
+      <p:sp>
+        <p:nvSpPr>
+          <p:cNvPr id="25" name="Text 23"/>
+          <p:cNvSpPr/>
+          <p:nvPr/>
+        </p:nvSpPr>
+        <p:spPr>
+          <a:xfrm>
+            <a:off x="6263640" y="1828800"/>
+            <a:ext cx="2377440" cy="640080"/>
+          </a:xfrm>
+          <a:prstGeom prst="rect">
+            <a:avLst/>
+          </a:prstGeom>
+          <a:noFill/>
+          <a:ln/>
+        </p:spPr>
+        <p:txBody>
+          <a:bodyPr wrap="square" lIns="0" tIns="0" rIns="0" bIns="0" rtlCol="0" anchor="ctr"/>
+          <a:lstStyle/>
+          <a:p>
+            <a:pPr indent="0" marL="0">
+              <a:buNone/>
+            </a:pPr>
+            <a:r>
+              <a:rPr lang="en-US" sz="900" i="1" dirty="0">
+                <a:solidFill>
+                  <a:srgbClr val="3B7DD8"/>
+                </a:solidFill>
+                <a:latin typeface="Arial" pitchFamily="34" charset="0"/>
+                <a:ea typeface="Arial" pitchFamily="34" charset="-122"/>
+                <a:cs typeface="Arial" pitchFamily="34" charset="-120"/>
+              </a:rPr>
+              <a:t>「部屋もプロジェクター付きでとても綺麗でした」</a:t>
+            </a:r>
+            <a:endParaRPr lang="en-US" sz="900" dirty="0"/>
+          </a:p>
+        </p:txBody>
+      </p:sp>
+      <p:sp>
+        <p:nvSpPr>
+          <p:cNvPr id="26" name="Shape 24"/>
+          <p:cNvSpPr/>
+          <p:nvPr/>
+        </p:nvSpPr>
+        <p:spPr>
+          <a:xfrm>
+            <a:off x="457200" y="2880360"/>
+            <a:ext cx="2651760" cy="1600200"/>
+          </a:xfrm>
+          <a:prstGeom prst="rect">
+            <a:avLst/>
+          </a:prstGeom>
+          <a:solidFill>
+            <a:srgbClr val="FFFFFF"/>
+          </a:solidFill>
+          <a:ln/>
+          <a:effectLst>
+            <a:outerShdw sx="100000" sy="100000" kx="0" ky="0" algn="bl" rotWithShape="0" blurRad="50800" dist="25400" dir="8100000">
+              <a:srgbClr val="000000">
+                <a:alpha val="10000"/>
+              </a:srgbClr>
+            </a:outerShdw>
+          </a:effectLst>
+        </p:spPr>
+      </p:sp>
+      <p:sp>
+        <p:nvSpPr>
+          <p:cNvPr id="27" name="Shape 25"/>
+          <p:cNvSpPr/>
+          <p:nvPr/>
+        </p:nvSpPr>
+        <p:spPr>
+          <a:xfrm>
+            <a:off x="457200" y="2880360"/>
+            <a:ext cx="54864" cy="1600200"/>
+          </a:xfrm>
+          <a:prstGeom prst="rect">
+            <a:avLst/>
+          </a:prstGeom>
+          <a:solidFill>
+            <a:srgbClr val="16A34A"/>
+          </a:solidFill>
+          <a:ln/>
+        </p:spPr>
+      </p:sp>
+      <p:sp>
+        <p:nvSpPr>
+          <p:cNvPr id="28" name="Shape 26"/>
+          <p:cNvSpPr/>
+          <p:nvPr/>
+        </p:nvSpPr>
+        <p:spPr>
+          <a:xfrm>
+            <a:off x="2286000" y="2953512"/>
+            <a:ext cx="658368" cy="228600"/>
+          </a:xfrm>
+          <a:prstGeom prst="rect">
+            <a:avLst/>
+          </a:prstGeom>
+          <a:solidFill>
+            <a:srgbClr val="DCFCE7"/>
+          </a:solidFill>
+          <a:ln/>
+        </p:spPr>
+      </p:sp>
+      <p:sp>
+        <p:nvSpPr>
+          <p:cNvPr id="29" name="Text 27"/>
+          <p:cNvSpPr/>
+          <p:nvPr/>
+        </p:nvSpPr>
+        <p:spPr>
+          <a:xfrm>
+            <a:off x="2286000" y="2953512"/>
+            <a:ext cx="658368" cy="228600"/>
+          </a:xfrm>
+          <a:prstGeom prst="rect">
+            <a:avLst/>
+          </a:prstGeom>
+          <a:noFill/>
+          <a:ln/>
+        </p:spPr>
+        <p:txBody>
+          <a:bodyPr wrap="square" lIns="0" tIns="0" rIns="0" bIns="0" rtlCol="0" anchor="ctr"/>
+          <a:lstStyle/>
+          <a:p>
+            <a:pPr algn="ctr" indent="0" marL="0">
+              <a:buNone/>
+            </a:pPr>
+            <a:r>
+              <a:rPr lang="en-US" sz="900" b="1" dirty="0">
+                <a:solidFill>
+                  <a:srgbClr val="16A34A"/>
+                </a:solidFill>
+                <a:latin typeface="Arial" pitchFamily="34" charset="0"/>
+                <a:ea typeface="Arial" pitchFamily="34" charset="-122"/>
+                <a:cs typeface="Arial" pitchFamily="34" charset="-120"/>
+              </a:rPr>
+              <a:t>20件+</a:t>
+            </a:r>
+            <a:endParaRPr lang="en-US" sz="900" dirty="0"/>
+          </a:p>
+        </p:txBody>
+      </p:sp>
+      <p:sp>
+        <p:nvSpPr>
+          <p:cNvPr id="30" name="Text 28"/>
+          <p:cNvSpPr/>
+          <p:nvPr/>
+        </p:nvSpPr>
+        <p:spPr>
+          <a:xfrm>
+            <a:off x="594360" y="2953512"/>
+            <a:ext cx="1645920" cy="274320"/>
+          </a:xfrm>
+          <a:prstGeom prst="rect">
+            <a:avLst/>
+          </a:prstGeom>
+          <a:noFill/>
+          <a:ln/>
+        </p:spPr>
+        <p:txBody>
+          <a:bodyPr wrap="square" lIns="0" tIns="0" rIns="0" bIns="0" rtlCol="0" anchor="ctr"/>
+          <a:lstStyle/>
+          <a:p>
+            <a:pPr indent="0" marL="0">
+              <a:buNone/>
+            </a:pPr>
+            <a:r>
+              <a:rPr lang="en-US" sz="1300" b="1" dirty="0">
+                <a:solidFill>
+                  <a:srgbClr val="1A2744"/>
+                </a:solidFill>
+                <a:latin typeface="Arial" pitchFamily="34" charset="0"/>
+                <a:ea typeface="Arial" pitchFamily="34" charset="-122"/>
+                <a:cs typeface="Arial" pitchFamily="34" charset="-120"/>
+              </a:rPr>
+              <a:t>快適さ・設備</a:t>
+            </a:r>
+            <a:endParaRPr lang="en-US" sz="1300" dirty="0"/>
+          </a:p>
+        </p:txBody>
+      </p:sp>
+      <p:sp>
+        <p:nvSpPr>
+          <p:cNvPr id="31" name="Text 29"/>
+          <p:cNvSpPr/>
+          <p:nvPr/>
+        </p:nvSpPr>
+        <p:spPr>
+          <a:xfrm>
+            <a:off x="594360" y="3246120"/>
+            <a:ext cx="2377440" cy="365760"/>
+          </a:xfrm>
+          <a:prstGeom prst="rect">
+            <a:avLst/>
+          </a:prstGeom>
+          <a:noFill/>
+          <a:ln/>
+        </p:spPr>
+        <p:txBody>
+          <a:bodyPr wrap="square" lIns="0" tIns="0" rIns="0" bIns="0" rtlCol="0" anchor="ctr"/>
+          <a:lstStyle/>
+          <a:p>
+            <a:pPr indent="0" marL="0">
+              <a:buNone/>
+            </a:pPr>
+            <a:r>
+              <a:rPr lang="en-US" sz="900" dirty="0">
+                <a:solidFill>
+                  <a:srgbClr val="64748B"/>
+                </a:solidFill>
+                <a:latin typeface="Arial" pitchFamily="34" charset="0"/>
+                <a:ea typeface="Arial" pitchFamily="34" charset="-122"/>
+                <a:cs typeface="Arial" pitchFamily="34" charset="-120"/>
+              </a:rPr>
+              <a:t>とても清潔でコンパクト、そして快適でした</a:t>
+            </a:r>
+            <a:endParaRPr lang="en-US" sz="900" dirty="0"/>
+          </a:p>
+        </p:txBody>
+      </p:sp>
+      <p:sp>
+        <p:nvSpPr>
+          <p:cNvPr id="32" name="Text 30"/>
+          <p:cNvSpPr/>
+          <p:nvPr/>
+        </p:nvSpPr>
+        <p:spPr>
+          <a:xfrm>
+            <a:off x="594360" y="3657600"/>
+            <a:ext cx="2377440" cy="640080"/>
+          </a:xfrm>
+          <a:prstGeom prst="rect">
+            <a:avLst/>
+          </a:prstGeom>
+          <a:noFill/>
+          <a:ln/>
+        </p:spPr>
+        <p:txBody>
+          <a:bodyPr wrap="square" lIns="0" tIns="0" rIns="0" bIns="0" rtlCol="0" anchor="ctr"/>
+          <a:lstStyle/>
+          <a:p>
+            <a:pPr indent="0" marL="0">
+              <a:buNone/>
+            </a:pPr>
+            <a:r>
+              <a:rPr lang="en-US" sz="900" i="1" dirty="0">
+                <a:solidFill>
+                  <a:srgbClr val="3B7DD8"/>
+                </a:solidFill>
+                <a:latin typeface="Arial" pitchFamily="34" charset="0"/>
+                <a:ea typeface="Arial" pitchFamily="34" charset="-122"/>
+                <a:cs typeface="Arial" pitchFamily="34" charset="-120"/>
+              </a:rPr>
+              <a:t>「Great amenities (laundry, free toothbrushes, etc), nice r...」</a:t>
+            </a:r>
+            <a:endParaRPr lang="en-US" sz="900" dirty="0"/>
+          </a:p>
+        </p:txBody>
+      </p:sp>
+      <p:sp>
+        <p:nvSpPr>
+          <p:cNvPr id="33" name="Shape 31"/>
+          <p:cNvSpPr/>
+          <p:nvPr/>
+        </p:nvSpPr>
+        <p:spPr>
+          <a:xfrm>
+            <a:off x="3291840" y="2880360"/>
+            <a:ext cx="2651760" cy="1600200"/>
+          </a:xfrm>
+          <a:prstGeom prst="rect">
+            <a:avLst/>
+          </a:prstGeom>
+          <a:solidFill>
+            <a:srgbClr val="FFFFFF"/>
+          </a:solidFill>
+          <a:ln/>
+          <a:effectLst>
+            <a:outerShdw sx="100000" sy="100000" kx="0" ky="0" algn="bl" rotWithShape="0" blurRad="50800" dist="25400" dir="8100000">
+              <a:srgbClr val="000000">
+                <a:alpha val="10000"/>
+              </a:srgbClr>
+            </a:outerShdw>
+          </a:effectLst>
+        </p:spPr>
+      </p:sp>
+      <p:sp>
+        <p:nvSpPr>
+          <p:cNvPr id="34" name="Shape 32"/>
+          <p:cNvSpPr/>
+          <p:nvPr/>
+        </p:nvSpPr>
+        <p:spPr>
+          <a:xfrm>
+            <a:off x="3291840" y="2880360"/>
+            <a:ext cx="54864" cy="1600200"/>
+          </a:xfrm>
+          <a:prstGeom prst="rect">
+            <a:avLst/>
+          </a:prstGeom>
+          <a:solidFill>
+            <a:srgbClr val="16A34A"/>
+          </a:solidFill>
+          <a:ln/>
+        </p:spPr>
+      </p:sp>
+      <p:sp>
+        <p:nvSpPr>
+          <p:cNvPr id="35" name="Shape 33"/>
+          <p:cNvSpPr/>
+          <p:nvPr/>
+        </p:nvSpPr>
+        <p:spPr>
+          <a:xfrm>
+            <a:off x="5120640" y="2953512"/>
+            <a:ext cx="658368" cy="228600"/>
+          </a:xfrm>
+          <a:prstGeom prst="rect">
+            <a:avLst/>
+          </a:prstGeom>
+          <a:solidFill>
+            <a:srgbClr val="DCFCE7"/>
+          </a:solidFill>
+          <a:ln/>
+        </p:spPr>
+      </p:sp>
+      <p:sp>
+        <p:nvSpPr>
+          <p:cNvPr id="36" name="Text 34"/>
+          <p:cNvSpPr/>
+          <p:nvPr/>
+        </p:nvSpPr>
+        <p:spPr>
+          <a:xfrm>
+            <a:off x="5120640" y="2953512"/>
+            <a:ext cx="658368" cy="228600"/>
+          </a:xfrm>
+          <a:prstGeom prst="rect">
+            <a:avLst/>
+          </a:prstGeom>
+          <a:noFill/>
+          <a:ln/>
+        </p:spPr>
+        <p:txBody>
+          <a:bodyPr wrap="square" lIns="0" tIns="0" rIns="0" bIns="0" rtlCol="0" anchor="ctr"/>
+          <a:lstStyle/>
+          <a:p>
+            <a:pPr algn="ctr" indent="0" marL="0">
+              <a:buNone/>
+            </a:pPr>
+            <a:r>
+              <a:rPr lang="en-US" sz="900" b="1" dirty="0">
+                <a:solidFill>
+                  <a:srgbClr val="16A34A"/>
+                </a:solidFill>
+                <a:latin typeface="Arial" pitchFamily="34" charset="0"/>
+                <a:ea typeface="Arial" pitchFamily="34" charset="-122"/>
+                <a:cs typeface="Arial" pitchFamily="34" charset="-120"/>
+              </a:rPr>
+              <a:t>20件+</a:t>
+            </a:r>
+            <a:endParaRPr lang="en-US" sz="900" dirty="0"/>
+          </a:p>
+        </p:txBody>
+      </p:sp>
+      <p:sp>
+        <p:nvSpPr>
+          <p:cNvPr id="37" name="Text 35"/>
+          <p:cNvSpPr/>
+          <p:nvPr/>
+        </p:nvSpPr>
+        <p:spPr>
+          <a:xfrm>
+            <a:off x="3429000" y="2953512"/>
+            <a:ext cx="1645920" cy="274320"/>
+          </a:xfrm>
+          <a:prstGeom prst="rect">
+            <a:avLst/>
+          </a:prstGeom>
+          <a:noFill/>
+          <a:ln/>
+        </p:spPr>
+        <p:txBody>
+          <a:bodyPr wrap="square" lIns="0" tIns="0" rIns="0" bIns="0" rtlCol="0" anchor="ctr"/>
+          <a:lstStyle/>
+          <a:p>
+            <a:pPr indent="0" marL="0">
+              <a:buNone/>
+            </a:pPr>
+            <a:r>
+              <a:rPr lang="en-US" sz="1300" b="1" dirty="0">
+                <a:solidFill>
+                  <a:srgbClr val="1A2744"/>
+                </a:solidFill>
+                <a:latin typeface="Arial" pitchFamily="34" charset="0"/>
+                <a:ea typeface="Arial" pitchFamily="34" charset="-122"/>
+                <a:cs typeface="Arial" pitchFamily="34" charset="-120"/>
+              </a:rPr>
+              <a:t>コンビニ・周辺施設</a:t>
+            </a:r>
+            <a:endParaRPr lang="en-US" sz="1300" dirty="0"/>
+          </a:p>
+        </p:txBody>
+      </p:sp>
+      <p:sp>
+        <p:nvSpPr>
+          <p:cNvPr id="38" name="Text 36"/>
+          <p:cNvSpPr/>
+          <p:nvPr/>
+        </p:nvSpPr>
+        <p:spPr>
+          <a:xfrm>
+            <a:off x="3429000" y="3246120"/>
+            <a:ext cx="2377440" cy="365760"/>
+          </a:xfrm>
+          <a:prstGeom prst="rect">
+            <a:avLst/>
+          </a:prstGeom>
+          <a:noFill/>
+          <a:ln/>
+        </p:spPr>
+        <p:txBody>
+          <a:bodyPr wrap="square" lIns="0" tIns="0" rIns="0" bIns="0" rtlCol="0" anchor="ctr"/>
+          <a:lstStyle/>
+          <a:p>
+            <a:pPr indent="0" marL="0">
+              <a:buNone/>
+            </a:pPr>
+            <a:r>
+              <a:rPr lang="en-US" sz="900" dirty="0">
+                <a:solidFill>
+                  <a:srgbClr val="64748B"/>
+                </a:solidFill>
+                <a:latin typeface="Arial" pitchFamily="34" charset="0"/>
+                <a:ea typeface="Arial" pitchFamily="34" charset="-122"/>
+                <a:cs typeface="Arial" pitchFamily="34" charset="-120"/>
+              </a:rPr>
+              <a:t>場所も大鳥居駅から近く、周りにもコンビニやテイクアウトできるレストランがあったので便利でした</a:t>
+            </a:r>
+            <a:endParaRPr lang="en-US" sz="900" dirty="0"/>
+          </a:p>
+        </p:txBody>
+      </p:sp>
+      <p:sp>
+        <p:nvSpPr>
+          <p:cNvPr id="39" name="Text 37"/>
+          <p:cNvSpPr/>
+          <p:nvPr/>
+        </p:nvSpPr>
+        <p:spPr>
+          <a:xfrm>
+            <a:off x="3429000" y="3657600"/>
             <a:ext cx="2377440" cy="640080"/>
           </a:xfrm>
           <a:prstGeom prst="rect">
@@ -10558,898 +11450,6 @@
                 <a:cs typeface="Arial" pitchFamily="34" charset="-120"/>
               </a:rPr>
               <a:t>「素泊まりでしたが近くにスーパーがあり便利でした」</a:t>
-            </a:r>
-            <a:endParaRPr lang="en-US" sz="900" dirty="0"/>
-          </a:p>
-        </p:txBody>
-      </p:sp>
-      <p:sp>
-        <p:nvSpPr>
-          <p:cNvPr id="12" name="Shape 10"/>
-          <p:cNvSpPr/>
-          <p:nvPr/>
-        </p:nvSpPr>
-        <p:spPr>
-          <a:xfrm>
-            <a:off x="3291840" y="1051560"/>
-            <a:ext cx="2651760" cy="1600200"/>
-          </a:xfrm>
-          <a:prstGeom prst="rect">
-            <a:avLst/>
-          </a:prstGeom>
-          <a:solidFill>
-            <a:srgbClr val="FFFFFF"/>
-          </a:solidFill>
-          <a:ln/>
-          <a:effectLst>
-            <a:outerShdw sx="100000" sy="100000" kx="0" ky="0" algn="bl" rotWithShape="0" blurRad="50800" dist="25400" dir="8100000">
-              <a:srgbClr val="000000">
-                <a:alpha val="10000"/>
-              </a:srgbClr>
-            </a:outerShdw>
-          </a:effectLst>
-        </p:spPr>
-      </p:sp>
-      <p:sp>
-        <p:nvSpPr>
-          <p:cNvPr id="13" name="Shape 11"/>
-          <p:cNvSpPr/>
-          <p:nvPr/>
-        </p:nvSpPr>
-        <p:spPr>
-          <a:xfrm>
-            <a:off x="3291840" y="1051560"/>
-            <a:ext cx="54864" cy="1600200"/>
-          </a:xfrm>
-          <a:prstGeom prst="rect">
-            <a:avLst/>
-          </a:prstGeom>
-          <a:solidFill>
-            <a:srgbClr val="16A34A"/>
-          </a:solidFill>
-          <a:ln/>
-        </p:spPr>
-      </p:sp>
-      <p:sp>
-        <p:nvSpPr>
-          <p:cNvPr id="14" name="Shape 12"/>
-          <p:cNvSpPr/>
-          <p:nvPr/>
-        </p:nvSpPr>
-        <p:spPr>
-          <a:xfrm>
-            <a:off x="5120640" y="1124712"/>
-            <a:ext cx="658368" cy="228600"/>
-          </a:xfrm>
-          <a:prstGeom prst="rect">
-            <a:avLst/>
-          </a:prstGeom>
-          <a:solidFill>
-            <a:srgbClr val="DCFCE7"/>
-          </a:solidFill>
-          <a:ln/>
-        </p:spPr>
-      </p:sp>
-      <p:sp>
-        <p:nvSpPr>
-          <p:cNvPr id="15" name="Text 13"/>
-          <p:cNvSpPr/>
-          <p:nvPr/>
-        </p:nvSpPr>
-        <p:spPr>
-          <a:xfrm>
-            <a:off x="5120640" y="1124712"/>
-            <a:ext cx="658368" cy="228600"/>
-          </a:xfrm>
-          <a:prstGeom prst="rect">
-            <a:avLst/>
-          </a:prstGeom>
-          <a:noFill/>
-          <a:ln/>
-        </p:spPr>
-        <p:txBody>
-          <a:bodyPr wrap="square" lIns="0" tIns="0" rIns="0" bIns="0" rtlCol="0" anchor="ctr"/>
-          <a:lstStyle/>
-          <a:p>
-            <a:pPr algn="ctr" indent="0" marL="0">
-              <a:buNone/>
-            </a:pPr>
-            <a:r>
-              <a:rPr lang="en-US" sz="900" b="1" dirty="0">
-                <a:solidFill>
-                  <a:srgbClr val="16A34A"/>
-                </a:solidFill>
-                <a:latin typeface="Arial" pitchFamily="34" charset="0"/>
-                <a:ea typeface="Arial" pitchFamily="34" charset="-122"/>
-                <a:cs typeface="Arial" pitchFamily="34" charset="-120"/>
-              </a:rPr>
-              <a:t>50件+</a:t>
-            </a:r>
-            <a:endParaRPr lang="en-US" sz="900" dirty="0"/>
-          </a:p>
-        </p:txBody>
-      </p:sp>
-      <p:sp>
-        <p:nvSpPr>
-          <p:cNvPr id="16" name="Text 14"/>
-          <p:cNvSpPr/>
-          <p:nvPr/>
-        </p:nvSpPr>
-        <p:spPr>
-          <a:xfrm>
-            <a:off x="3429000" y="1124712"/>
-            <a:ext cx="1645920" cy="274320"/>
-          </a:xfrm>
-          <a:prstGeom prst="rect">
-            <a:avLst/>
-          </a:prstGeom>
-          <a:noFill/>
-          <a:ln/>
-        </p:spPr>
-        <p:txBody>
-          <a:bodyPr wrap="square" lIns="0" tIns="0" rIns="0" bIns="0" rtlCol="0" anchor="ctr"/>
-          <a:lstStyle/>
-          <a:p>
-            <a:pPr indent="0" marL="0">
-              <a:buNone/>
-            </a:pPr>
-            <a:r>
-              <a:rPr lang="en-US" sz="1300" b="1" dirty="0">
-                <a:solidFill>
-                  <a:srgbClr val="1A2744"/>
-                </a:solidFill>
-                <a:latin typeface="Arial" pitchFamily="34" charset="0"/>
-                <a:ea typeface="Arial" pitchFamily="34" charset="-122"/>
-                <a:cs typeface="Arial" pitchFamily="34" charset="-120"/>
-              </a:rPr>
-              <a:t>スタッフの対応</a:t>
-            </a:r>
-            <a:endParaRPr lang="en-US" sz="1300" dirty="0"/>
-          </a:p>
-        </p:txBody>
-      </p:sp>
-      <p:sp>
-        <p:nvSpPr>
-          <p:cNvPr id="17" name="Text 15"/>
-          <p:cNvSpPr/>
-          <p:nvPr/>
-        </p:nvSpPr>
-        <p:spPr>
-          <a:xfrm>
-            <a:off x="3429000" y="1417320"/>
-            <a:ext cx="2377440" cy="365760"/>
-          </a:xfrm>
-          <a:prstGeom prst="rect">
-            <a:avLst/>
-          </a:prstGeom>
-          <a:noFill/>
-          <a:ln/>
-        </p:spPr>
-        <p:txBody>
-          <a:bodyPr wrap="square" lIns="0" tIns="0" rIns="0" bIns="0" rtlCol="0" anchor="ctr"/>
-          <a:lstStyle/>
-          <a:p>
-            <a:pPr indent="0" marL="0">
-              <a:buNone/>
-            </a:pPr>
-            <a:r>
-              <a:rPr lang="en-US" sz="900" dirty="0">
-                <a:solidFill>
-                  <a:srgbClr val="64748B"/>
-                </a:solidFill>
-                <a:latin typeface="Arial" pitchFamily="34" charset="0"/>
-                <a:ea typeface="Arial" pitchFamily="34" charset="-122"/>
-                <a:cs typeface="Arial" pitchFamily="34" charset="-120"/>
-              </a:rPr>
-              <a:t>チェックイン手続きは全体的にスムーズでしたが、自動ロボットによる対応が少し気になりました</a:t>
-            </a:r>
-            <a:endParaRPr lang="en-US" sz="900" dirty="0"/>
-          </a:p>
-        </p:txBody>
-      </p:sp>
-      <p:sp>
-        <p:nvSpPr>
-          <p:cNvPr id="18" name="Text 16"/>
-          <p:cNvSpPr/>
-          <p:nvPr/>
-        </p:nvSpPr>
-        <p:spPr>
-          <a:xfrm>
-            <a:off x="3429000" y="1828800"/>
-            <a:ext cx="2377440" cy="640080"/>
-          </a:xfrm>
-          <a:prstGeom prst="rect">
-            <a:avLst/>
-          </a:prstGeom>
-          <a:noFill/>
-          <a:ln/>
-        </p:spPr>
-        <p:txBody>
-          <a:bodyPr wrap="square" lIns="0" tIns="0" rIns="0" bIns="0" rtlCol="0" anchor="ctr"/>
-          <a:lstStyle/>
-          <a:p>
-            <a:pPr indent="0" marL="0">
-              <a:buNone/>
-            </a:pPr>
-            <a:r>
-              <a:rPr lang="en-US" sz="900" i="1" dirty="0">
-                <a:solidFill>
-                  <a:srgbClr val="3B7DD8"/>
-                </a:solidFill>
-                <a:latin typeface="Arial" pitchFamily="34" charset="0"/>
-                <a:ea typeface="Arial" pitchFamily="34" charset="-122"/>
-                <a:cs typeface="Arial" pitchFamily="34" charset="-120"/>
-              </a:rPr>
-              <a:t>「スタッフさんの対応もよかったです」</a:t>
-            </a:r>
-            <a:endParaRPr lang="en-US" sz="900" dirty="0"/>
-          </a:p>
-        </p:txBody>
-      </p:sp>
-      <p:sp>
-        <p:nvSpPr>
-          <p:cNvPr id="19" name="Shape 17"/>
-          <p:cNvSpPr/>
-          <p:nvPr/>
-        </p:nvSpPr>
-        <p:spPr>
-          <a:xfrm>
-            <a:off x="6126480" y="1051560"/>
-            <a:ext cx="2651760" cy="1600200"/>
-          </a:xfrm>
-          <a:prstGeom prst="rect">
-            <a:avLst/>
-          </a:prstGeom>
-          <a:solidFill>
-            <a:srgbClr val="FFFFFF"/>
-          </a:solidFill>
-          <a:ln/>
-          <a:effectLst>
-            <a:outerShdw sx="100000" sy="100000" kx="0" ky="0" algn="bl" rotWithShape="0" blurRad="50800" dist="25400" dir="8100000">
-              <a:srgbClr val="000000">
-                <a:alpha val="10000"/>
-              </a:srgbClr>
-            </a:outerShdw>
-          </a:effectLst>
-        </p:spPr>
-      </p:sp>
-      <p:sp>
-        <p:nvSpPr>
-          <p:cNvPr id="20" name="Shape 18"/>
-          <p:cNvSpPr/>
-          <p:nvPr/>
-        </p:nvSpPr>
-        <p:spPr>
-          <a:xfrm>
-            <a:off x="6126480" y="1051560"/>
-            <a:ext cx="54864" cy="1600200"/>
-          </a:xfrm>
-          <a:prstGeom prst="rect">
-            <a:avLst/>
-          </a:prstGeom>
-          <a:solidFill>
-            <a:srgbClr val="16A34A"/>
-          </a:solidFill>
-          <a:ln/>
-        </p:spPr>
-      </p:sp>
-      <p:sp>
-        <p:nvSpPr>
-          <p:cNvPr id="21" name="Shape 19"/>
-          <p:cNvSpPr/>
-          <p:nvPr/>
-        </p:nvSpPr>
-        <p:spPr>
-          <a:xfrm>
-            <a:off x="7955280" y="1124712"/>
-            <a:ext cx="658368" cy="228600"/>
-          </a:xfrm>
-          <a:prstGeom prst="rect">
-            <a:avLst/>
-          </a:prstGeom>
-          <a:solidFill>
-            <a:srgbClr val="DCFCE7"/>
-          </a:solidFill>
-          <a:ln/>
-        </p:spPr>
-      </p:sp>
-      <p:sp>
-        <p:nvSpPr>
-          <p:cNvPr id="22" name="Text 20"/>
-          <p:cNvSpPr/>
-          <p:nvPr/>
-        </p:nvSpPr>
-        <p:spPr>
-          <a:xfrm>
-            <a:off x="7955280" y="1124712"/>
-            <a:ext cx="658368" cy="228600"/>
-          </a:xfrm>
-          <a:prstGeom prst="rect">
-            <a:avLst/>
-          </a:prstGeom>
-          <a:noFill/>
-          <a:ln/>
-        </p:spPr>
-        <p:txBody>
-          <a:bodyPr wrap="square" lIns="0" tIns="0" rIns="0" bIns="0" rtlCol="0" anchor="ctr"/>
-          <a:lstStyle/>
-          <a:p>
-            <a:pPr algn="ctr" indent="0" marL="0">
-              <a:buNone/>
-            </a:pPr>
-            <a:r>
-              <a:rPr lang="en-US" sz="900" b="1" dirty="0">
-                <a:solidFill>
-                  <a:srgbClr val="16A34A"/>
-                </a:solidFill>
-                <a:latin typeface="Arial" pitchFamily="34" charset="0"/>
-                <a:ea typeface="Arial" pitchFamily="34" charset="-122"/>
-                <a:cs typeface="Arial" pitchFamily="34" charset="-120"/>
-              </a:rPr>
-              <a:t>50件+</a:t>
-            </a:r>
-            <a:endParaRPr lang="en-US" sz="900" dirty="0"/>
-          </a:p>
-        </p:txBody>
-      </p:sp>
-      <p:sp>
-        <p:nvSpPr>
-          <p:cNvPr id="23" name="Text 21"/>
-          <p:cNvSpPr/>
-          <p:nvPr/>
-        </p:nvSpPr>
-        <p:spPr>
-          <a:xfrm>
-            <a:off x="6263640" y="1124712"/>
-            <a:ext cx="1645920" cy="274320"/>
-          </a:xfrm>
-          <a:prstGeom prst="rect">
-            <a:avLst/>
-          </a:prstGeom>
-          <a:noFill/>
-          <a:ln/>
-        </p:spPr>
-        <p:txBody>
-          <a:bodyPr wrap="square" lIns="0" tIns="0" rIns="0" bIns="0" rtlCol="0" anchor="ctr"/>
-          <a:lstStyle/>
-          <a:p>
-            <a:pPr indent="0" marL="0">
-              <a:buNone/>
-            </a:pPr>
-            <a:r>
-              <a:rPr lang="en-US" sz="1300" b="1" dirty="0">
-                <a:solidFill>
-                  <a:srgbClr val="1A2744"/>
-                </a:solidFill>
-                <a:latin typeface="Arial" pitchFamily="34" charset="0"/>
-                <a:ea typeface="Arial" pitchFamily="34" charset="-122"/>
-                <a:cs typeface="Arial" pitchFamily="34" charset="-120"/>
-              </a:rPr>
-              <a:t>清潔さ・清掃</a:t>
-            </a:r>
-            <a:endParaRPr lang="en-US" sz="1300" dirty="0"/>
-          </a:p>
-        </p:txBody>
-      </p:sp>
-      <p:sp>
-        <p:nvSpPr>
-          <p:cNvPr id="24" name="Text 22"/>
-          <p:cNvSpPr/>
-          <p:nvPr/>
-        </p:nvSpPr>
-        <p:spPr>
-          <a:xfrm>
-            <a:off x="6263640" y="1417320"/>
-            <a:ext cx="2377440" cy="365760"/>
-          </a:xfrm>
-          <a:prstGeom prst="rect">
-            <a:avLst/>
-          </a:prstGeom>
-          <a:noFill/>
-          <a:ln/>
-        </p:spPr>
-        <p:txBody>
-          <a:bodyPr wrap="square" lIns="0" tIns="0" rIns="0" bIns="0" rtlCol="0" anchor="ctr"/>
-          <a:lstStyle/>
-          <a:p>
-            <a:pPr indent="0" marL="0">
-              <a:buNone/>
-            </a:pPr>
-            <a:r>
-              <a:rPr lang="en-US" sz="900" dirty="0">
-                <a:solidFill>
-                  <a:srgbClr val="64748B"/>
-                </a:solidFill>
-                <a:latin typeface="Arial" pitchFamily="34" charset="0"/>
-                <a:ea typeface="Arial" pitchFamily="34" charset="-122"/>
-                <a:cs typeface="Arial" pitchFamily="34" charset="-120"/>
-              </a:rPr>
-              <a:t>とても清潔でコンパクト、そして快適でした</a:t>
-            </a:r>
-            <a:endParaRPr lang="en-US" sz="900" dirty="0"/>
-          </a:p>
-        </p:txBody>
-      </p:sp>
-      <p:sp>
-        <p:nvSpPr>
-          <p:cNvPr id="25" name="Text 23"/>
-          <p:cNvSpPr/>
-          <p:nvPr/>
-        </p:nvSpPr>
-        <p:spPr>
-          <a:xfrm>
-            <a:off x="6263640" y="1828800"/>
-            <a:ext cx="2377440" cy="640080"/>
-          </a:xfrm>
-          <a:prstGeom prst="rect">
-            <a:avLst/>
-          </a:prstGeom>
-          <a:noFill/>
-          <a:ln/>
-        </p:spPr>
-        <p:txBody>
-          <a:bodyPr wrap="square" lIns="0" tIns="0" rIns="0" bIns="0" rtlCol="0" anchor="ctr"/>
-          <a:lstStyle/>
-          <a:p>
-            <a:pPr indent="0" marL="0">
-              <a:buNone/>
-            </a:pPr>
-            <a:r>
-              <a:rPr lang="en-US" sz="900" i="1" dirty="0">
-                <a:solidFill>
-                  <a:srgbClr val="3B7DD8"/>
-                </a:solidFill>
-                <a:latin typeface="Arial" pitchFamily="34" charset="0"/>
-                <a:ea typeface="Arial" pitchFamily="34" charset="-122"/>
-                <a:cs typeface="Arial" pitchFamily="34" charset="-120"/>
-              </a:rPr>
-              <a:t>「部屋はきれいに清掃されていて少し狭いですが前泊で泊まるには問題ありません」</a:t>
-            </a:r>
-            <a:endParaRPr lang="en-US" sz="900" dirty="0"/>
-          </a:p>
-        </p:txBody>
-      </p:sp>
-      <p:sp>
-        <p:nvSpPr>
-          <p:cNvPr id="26" name="Shape 24"/>
-          <p:cNvSpPr/>
-          <p:nvPr/>
-        </p:nvSpPr>
-        <p:spPr>
-          <a:xfrm>
-            <a:off x="457200" y="2880360"/>
-            <a:ext cx="2651760" cy="1600200"/>
-          </a:xfrm>
-          <a:prstGeom prst="rect">
-            <a:avLst/>
-          </a:prstGeom>
-          <a:solidFill>
-            <a:srgbClr val="FFFFFF"/>
-          </a:solidFill>
-          <a:ln/>
-          <a:effectLst>
-            <a:outerShdw sx="100000" sy="100000" kx="0" ky="0" algn="bl" rotWithShape="0" blurRad="50800" dist="25400" dir="8100000">
-              <a:srgbClr val="000000">
-                <a:alpha val="10000"/>
-              </a:srgbClr>
-            </a:outerShdw>
-          </a:effectLst>
-        </p:spPr>
-      </p:sp>
-      <p:sp>
-        <p:nvSpPr>
-          <p:cNvPr id="27" name="Shape 25"/>
-          <p:cNvSpPr/>
-          <p:nvPr/>
-        </p:nvSpPr>
-        <p:spPr>
-          <a:xfrm>
-            <a:off x="457200" y="2880360"/>
-            <a:ext cx="54864" cy="1600200"/>
-          </a:xfrm>
-          <a:prstGeom prst="rect">
-            <a:avLst/>
-          </a:prstGeom>
-          <a:solidFill>
-            <a:srgbClr val="16A34A"/>
-          </a:solidFill>
-          <a:ln/>
-        </p:spPr>
-      </p:sp>
-      <p:sp>
-        <p:nvSpPr>
-          <p:cNvPr id="28" name="Shape 26"/>
-          <p:cNvSpPr/>
-          <p:nvPr/>
-        </p:nvSpPr>
-        <p:spPr>
-          <a:xfrm>
-            <a:off x="2286000" y="2953512"/>
-            <a:ext cx="658368" cy="228600"/>
-          </a:xfrm>
-          <a:prstGeom prst="rect">
-            <a:avLst/>
-          </a:prstGeom>
-          <a:solidFill>
-            <a:srgbClr val="DCFCE7"/>
-          </a:solidFill>
-          <a:ln/>
-        </p:spPr>
-      </p:sp>
-      <p:sp>
-        <p:nvSpPr>
-          <p:cNvPr id="29" name="Text 27"/>
-          <p:cNvSpPr/>
-          <p:nvPr/>
-        </p:nvSpPr>
-        <p:spPr>
-          <a:xfrm>
-            <a:off x="2286000" y="2953512"/>
-            <a:ext cx="658368" cy="228600"/>
-          </a:xfrm>
-          <a:prstGeom prst="rect">
-            <a:avLst/>
-          </a:prstGeom>
-          <a:noFill/>
-          <a:ln/>
-        </p:spPr>
-        <p:txBody>
-          <a:bodyPr wrap="square" lIns="0" tIns="0" rIns="0" bIns="0" rtlCol="0" anchor="ctr"/>
-          <a:lstStyle/>
-          <a:p>
-            <a:pPr algn="ctr" indent="0" marL="0">
-              <a:buNone/>
-            </a:pPr>
-            <a:r>
-              <a:rPr lang="en-US" sz="900" b="1" dirty="0">
-                <a:solidFill>
-                  <a:srgbClr val="16A34A"/>
-                </a:solidFill>
-                <a:latin typeface="Arial" pitchFamily="34" charset="0"/>
-                <a:ea typeface="Arial" pitchFamily="34" charset="-122"/>
-                <a:cs typeface="Arial" pitchFamily="34" charset="-120"/>
-              </a:rPr>
-              <a:t>20件+</a:t>
-            </a:r>
-            <a:endParaRPr lang="en-US" sz="900" dirty="0"/>
-          </a:p>
-        </p:txBody>
-      </p:sp>
-      <p:sp>
-        <p:nvSpPr>
-          <p:cNvPr id="30" name="Text 28"/>
-          <p:cNvSpPr/>
-          <p:nvPr/>
-        </p:nvSpPr>
-        <p:spPr>
-          <a:xfrm>
-            <a:off x="594360" y="2953512"/>
-            <a:ext cx="1645920" cy="274320"/>
-          </a:xfrm>
-          <a:prstGeom prst="rect">
-            <a:avLst/>
-          </a:prstGeom>
-          <a:noFill/>
-          <a:ln/>
-        </p:spPr>
-        <p:txBody>
-          <a:bodyPr wrap="square" lIns="0" tIns="0" rIns="0" bIns="0" rtlCol="0" anchor="ctr"/>
-          <a:lstStyle/>
-          <a:p>
-            <a:pPr indent="0" marL="0">
-              <a:buNone/>
-            </a:pPr>
-            <a:r>
-              <a:rPr lang="en-US" sz="1300" b="1" dirty="0">
-                <a:solidFill>
-                  <a:srgbClr val="1A2744"/>
-                </a:solidFill>
-                <a:latin typeface="Arial" pitchFamily="34" charset="0"/>
-                <a:ea typeface="Arial" pitchFamily="34" charset="-122"/>
-                <a:cs typeface="Arial" pitchFamily="34" charset="-120"/>
-              </a:rPr>
-              <a:t>快適さ・設備</a:t>
-            </a:r>
-            <a:endParaRPr lang="en-US" sz="1300" dirty="0"/>
-          </a:p>
-        </p:txBody>
-      </p:sp>
-      <p:sp>
-        <p:nvSpPr>
-          <p:cNvPr id="31" name="Text 29"/>
-          <p:cNvSpPr/>
-          <p:nvPr/>
-        </p:nvSpPr>
-        <p:spPr>
-          <a:xfrm>
-            <a:off x="594360" y="3246120"/>
-            <a:ext cx="2377440" cy="365760"/>
-          </a:xfrm>
-          <a:prstGeom prst="rect">
-            <a:avLst/>
-          </a:prstGeom>
-          <a:noFill/>
-          <a:ln/>
-        </p:spPr>
-        <p:txBody>
-          <a:bodyPr wrap="square" lIns="0" tIns="0" rIns="0" bIns="0" rtlCol="0" anchor="ctr"/>
-          <a:lstStyle/>
-          <a:p>
-            <a:pPr indent="0" marL="0">
-              <a:buNone/>
-            </a:pPr>
-            <a:r>
-              <a:rPr lang="en-US" sz="900" dirty="0">
-                <a:solidFill>
-                  <a:srgbClr val="64748B"/>
-                </a:solidFill>
-                <a:latin typeface="Arial" pitchFamily="34" charset="0"/>
-                <a:ea typeface="Arial" pitchFamily="34" charset="-122"/>
-                <a:cs typeface="Arial" pitchFamily="34" charset="-120"/>
-              </a:rPr>
-              <a:t>とても清潔でコンパクト、そして快適でした</a:t>
-            </a:r>
-            <a:endParaRPr lang="en-US" sz="900" dirty="0"/>
-          </a:p>
-        </p:txBody>
-      </p:sp>
-      <p:sp>
-        <p:nvSpPr>
-          <p:cNvPr id="32" name="Text 30"/>
-          <p:cNvSpPr/>
-          <p:nvPr/>
-        </p:nvSpPr>
-        <p:spPr>
-          <a:xfrm>
-            <a:off x="594360" y="3657600"/>
-            <a:ext cx="2377440" cy="640080"/>
-          </a:xfrm>
-          <a:prstGeom prst="rect">
-            <a:avLst/>
-          </a:prstGeom>
-          <a:noFill/>
-          <a:ln/>
-        </p:spPr>
-        <p:txBody>
-          <a:bodyPr wrap="square" lIns="0" tIns="0" rIns="0" bIns="0" rtlCol="0" anchor="ctr"/>
-          <a:lstStyle/>
-          <a:p>
-            <a:pPr indent="0" marL="0">
-              <a:buNone/>
-            </a:pPr>
-            <a:r>
-              <a:rPr lang="en-US" sz="900" i="1" dirty="0">
-                <a:solidFill>
-                  <a:srgbClr val="3B7DD8"/>
-                </a:solidFill>
-                <a:latin typeface="Arial" pitchFamily="34" charset="0"/>
-                <a:ea typeface="Arial" pitchFamily="34" charset="-122"/>
-                <a:cs typeface="Arial" pitchFamily="34" charset="-120"/>
-              </a:rPr>
-              <a:t>「部屋自体は概ね清潔で（トイレと床に髪の毛が少し落ちていましたが）、快適で、料金に見合った価値があります」</a:t>
-            </a:r>
-            <a:endParaRPr lang="en-US" sz="900" dirty="0"/>
-          </a:p>
-        </p:txBody>
-      </p:sp>
-      <p:sp>
-        <p:nvSpPr>
-          <p:cNvPr id="33" name="Shape 31"/>
-          <p:cNvSpPr/>
-          <p:nvPr/>
-        </p:nvSpPr>
-        <p:spPr>
-          <a:xfrm>
-            <a:off x="3291840" y="2880360"/>
-            <a:ext cx="2651760" cy="1600200"/>
-          </a:xfrm>
-          <a:prstGeom prst="rect">
-            <a:avLst/>
-          </a:prstGeom>
-          <a:solidFill>
-            <a:srgbClr val="FFFFFF"/>
-          </a:solidFill>
-          <a:ln/>
-          <a:effectLst>
-            <a:outerShdw sx="100000" sy="100000" kx="0" ky="0" algn="bl" rotWithShape="0" blurRad="50800" dist="25400" dir="8100000">
-              <a:srgbClr val="000000">
-                <a:alpha val="10000"/>
-              </a:srgbClr>
-            </a:outerShdw>
-          </a:effectLst>
-        </p:spPr>
-      </p:sp>
-      <p:sp>
-        <p:nvSpPr>
-          <p:cNvPr id="34" name="Shape 32"/>
-          <p:cNvSpPr/>
-          <p:nvPr/>
-        </p:nvSpPr>
-        <p:spPr>
-          <a:xfrm>
-            <a:off x="3291840" y="2880360"/>
-            <a:ext cx="54864" cy="1600200"/>
-          </a:xfrm>
-          <a:prstGeom prst="rect">
-            <a:avLst/>
-          </a:prstGeom>
-          <a:solidFill>
-            <a:srgbClr val="16A34A"/>
-          </a:solidFill>
-          <a:ln/>
-        </p:spPr>
-      </p:sp>
-      <p:sp>
-        <p:nvSpPr>
-          <p:cNvPr id="35" name="Shape 33"/>
-          <p:cNvSpPr/>
-          <p:nvPr/>
-        </p:nvSpPr>
-        <p:spPr>
-          <a:xfrm>
-            <a:off x="5120640" y="2953512"/>
-            <a:ext cx="658368" cy="228600"/>
-          </a:xfrm>
-          <a:prstGeom prst="rect">
-            <a:avLst/>
-          </a:prstGeom>
-          <a:solidFill>
-            <a:srgbClr val="DCFCE7"/>
-          </a:solidFill>
-          <a:ln/>
-        </p:spPr>
-      </p:sp>
-      <p:sp>
-        <p:nvSpPr>
-          <p:cNvPr id="36" name="Text 34"/>
-          <p:cNvSpPr/>
-          <p:nvPr/>
-        </p:nvSpPr>
-        <p:spPr>
-          <a:xfrm>
-            <a:off x="5120640" y="2953512"/>
-            <a:ext cx="658368" cy="228600"/>
-          </a:xfrm>
-          <a:prstGeom prst="rect">
-            <a:avLst/>
-          </a:prstGeom>
-          <a:noFill/>
-          <a:ln/>
-        </p:spPr>
-        <p:txBody>
-          <a:bodyPr wrap="square" lIns="0" tIns="0" rIns="0" bIns="0" rtlCol="0" anchor="ctr"/>
-          <a:lstStyle/>
-          <a:p>
-            <a:pPr algn="ctr" indent="0" marL="0">
-              <a:buNone/>
-            </a:pPr>
-            <a:r>
-              <a:rPr lang="en-US" sz="900" b="1" dirty="0">
-                <a:solidFill>
-                  <a:srgbClr val="16A34A"/>
-                </a:solidFill>
-                <a:latin typeface="Arial" pitchFamily="34" charset="0"/>
-                <a:ea typeface="Arial" pitchFamily="34" charset="-122"/>
-                <a:cs typeface="Arial" pitchFamily="34" charset="-120"/>
-              </a:rPr>
-              <a:t>20件+</a:t>
-            </a:r>
-            <a:endParaRPr lang="en-US" sz="900" dirty="0"/>
-          </a:p>
-        </p:txBody>
-      </p:sp>
-      <p:sp>
-        <p:nvSpPr>
-          <p:cNvPr id="37" name="Text 35"/>
-          <p:cNvSpPr/>
-          <p:nvPr/>
-        </p:nvSpPr>
-        <p:spPr>
-          <a:xfrm>
-            <a:off x="3429000" y="2953512"/>
-            <a:ext cx="1645920" cy="274320"/>
-          </a:xfrm>
-          <a:prstGeom prst="rect">
-            <a:avLst/>
-          </a:prstGeom>
-          <a:noFill/>
-          <a:ln/>
-        </p:spPr>
-        <p:txBody>
-          <a:bodyPr wrap="square" lIns="0" tIns="0" rIns="0" bIns="0" rtlCol="0" anchor="ctr"/>
-          <a:lstStyle/>
-          <a:p>
-            <a:pPr indent="0" marL="0">
-              <a:buNone/>
-            </a:pPr>
-            <a:r>
-              <a:rPr lang="en-US" sz="1300" b="1" dirty="0">
-                <a:solidFill>
-                  <a:srgbClr val="1A2744"/>
-                </a:solidFill>
-                <a:latin typeface="Arial" pitchFamily="34" charset="0"/>
-                <a:ea typeface="Arial" pitchFamily="34" charset="-122"/>
-                <a:cs typeface="Arial" pitchFamily="34" charset="-120"/>
-              </a:rPr>
-              <a:t>コンビニ・周辺施設</a:t>
-            </a:r>
-            <a:endParaRPr lang="en-US" sz="1300" dirty="0"/>
-          </a:p>
-        </p:txBody>
-      </p:sp>
-      <p:sp>
-        <p:nvSpPr>
-          <p:cNvPr id="38" name="Text 36"/>
-          <p:cNvSpPr/>
-          <p:nvPr/>
-        </p:nvSpPr>
-        <p:spPr>
-          <a:xfrm>
-            <a:off x="3429000" y="3246120"/>
-            <a:ext cx="2377440" cy="365760"/>
-          </a:xfrm>
-          <a:prstGeom prst="rect">
-            <a:avLst/>
-          </a:prstGeom>
-          <a:noFill/>
-          <a:ln/>
-        </p:spPr>
-        <p:txBody>
-          <a:bodyPr wrap="square" lIns="0" tIns="0" rIns="0" bIns="0" rtlCol="0" anchor="ctr"/>
-          <a:lstStyle/>
-          <a:p>
-            <a:pPr indent="0" marL="0">
-              <a:buNone/>
-            </a:pPr>
-            <a:r>
-              <a:rPr lang="en-US" sz="900" dirty="0">
-                <a:solidFill>
-                  <a:srgbClr val="64748B"/>
-                </a:solidFill>
-                <a:latin typeface="Arial" pitchFamily="34" charset="0"/>
-                <a:ea typeface="Arial" pitchFamily="34" charset="-122"/>
-                <a:cs typeface="Arial" pitchFamily="34" charset="-120"/>
-              </a:rPr>
-              <a:t>素泊まりでしたが近くにスーパーがあり便利でした</a:t>
-            </a:r>
-            <a:endParaRPr lang="en-US" sz="900" dirty="0"/>
-          </a:p>
-        </p:txBody>
-      </p:sp>
-      <p:sp>
-        <p:nvSpPr>
-          <p:cNvPr id="39" name="Text 37"/>
-          <p:cNvSpPr/>
-          <p:nvPr/>
-        </p:nvSpPr>
-        <p:spPr>
-          <a:xfrm>
-            <a:off x="3429000" y="3657600"/>
-            <a:ext cx="2377440" cy="640080"/>
-          </a:xfrm>
-          <a:prstGeom prst="rect">
-            <a:avLst/>
-          </a:prstGeom>
-          <a:noFill/>
-          <a:ln/>
-        </p:spPr>
-        <p:txBody>
-          <a:bodyPr wrap="square" lIns="0" tIns="0" rIns="0" bIns="0" rtlCol="0" anchor="ctr"/>
-          <a:lstStyle/>
-          <a:p>
-            <a:pPr indent="0" marL="0">
-              <a:buNone/>
-            </a:pPr>
-            <a:r>
-              <a:rPr lang="en-US" sz="900" i="1" dirty="0">
-                <a:solidFill>
-                  <a:srgbClr val="3B7DD8"/>
-                </a:solidFill>
-                <a:latin typeface="Arial" pitchFamily="34" charset="0"/>
-                <a:ea typeface="Arial" pitchFamily="34" charset="-122"/>
-                <a:cs typeface="Arial" pitchFamily="34" charset="-120"/>
-              </a:rPr>
-              <a:t>「駅からも近くまわりには多くの飲食店やスーパーもあります」</a:t>
             </a:r>
             <a:endParaRPr lang="en-US" sz="900" dirty="0"/>
           </a:p>
@@ -12430,7 +12430,7 @@
                           <a:ea typeface="Arial" pitchFamily="34" charset="-122"/>
                           <a:cs typeface="Arial" pitchFamily="34" charset="-120"/>
                         </a:rPr>
-                        <a:t>95件</a:t>
+                        <a:t>96件</a:t>
                       </a:r>
                       <a:endParaRPr lang="en-US" sz="900" dirty="0">
                         <a:latin typeface="Arial" charset="0"/>
@@ -12636,7 +12636,7 @@
                           <a:ea typeface="Arial" pitchFamily="34" charset="-122"/>
                           <a:cs typeface="Arial" pitchFamily="34" charset="-120"/>
                         </a:rPr>
-                        <a:t>Very clean, compact and comfy</a:t>
+                        <a:t>Le Check in avec l’accueil par des robots dinosaures et l...</a:t>
                       </a:r>
                       <a:endParaRPr lang="en-US" sz="900" dirty="0">
                         <a:latin typeface="Arial" charset="0"/>
@@ -12704,7 +12704,7 @@
                           <a:ea typeface="Arial" pitchFamily="34" charset="-122"/>
                           <a:cs typeface="Arial" pitchFamily="34" charset="-120"/>
                         </a:rPr>
-                        <a:t>33件</a:t>
+                        <a:t>35件</a:t>
                       </a:r>
                       <a:endParaRPr lang="en-US" sz="900" dirty="0">
                         <a:latin typeface="Arial" charset="0"/>
@@ -12978,7 +12978,7 @@
                           <a:ea typeface="Arial" pitchFamily="34" charset="-122"/>
                           <a:cs typeface="Arial" pitchFamily="34" charset="-120"/>
                         </a:rPr>
-                        <a:t>24件</a:t>
+                        <a:t>25件</a:t>
                       </a:r>
                       <a:endParaRPr lang="en-US" sz="900" dirty="0">
                         <a:latin typeface="Arial" charset="0"/>
@@ -13458,7 +13458,7 @@
                           <a:ea typeface="Arial" pitchFamily="34" charset="-122"/>
                           <a:cs typeface="Arial" pitchFamily="34" charset="-120"/>
                         </a:rPr>
-                        <a:t>初めて宿泊させていただきました 話に聞いてた通り恐竜がお出迎えしてくれるフロントにはやっぱりビックリさせられました...</a:t>
+                        <a:t>どうして朝のシャトルバスがなくなったのか分かりませんが、結構残念でした</a:t>
                       </a:r>
                       <a:endParaRPr lang="en-US" sz="900" dirty="0">
                         <a:latin typeface="Arial" charset="0"/>
@@ -13526,7 +13526,7 @@
                           <a:ea typeface="Arial" pitchFamily="34" charset="-122"/>
                           <a:cs typeface="Arial" pitchFamily="34" charset="-120"/>
                         </a:rPr>
-                        <a:t>11件</a:t>
+                        <a:t>12件</a:t>
                       </a:r>
                       <a:endParaRPr lang="en-US" sz="900" dirty="0">
                         <a:latin typeface="Arial" charset="0"/>
@@ -13664,7 +13664,7 @@
                           <a:ea typeface="Arial" pitchFamily="34" charset="-122"/>
                           <a:cs typeface="Arial" pitchFamily="34" charset="-120"/>
                         </a:rPr>
-                        <a:t>臭い・匂い</a:t>
+                        <a:t>設備の老朽化</a:t>
                       </a:r>
                       <a:endParaRPr lang="en-US" sz="900" dirty="0">
                         <a:latin typeface="Arial" charset="0"/>
@@ -13732,7 +13732,7 @@
                           <a:ea typeface="Arial" pitchFamily="34" charset="-122"/>
                           <a:cs typeface="Arial" pitchFamily="34" charset="-120"/>
                         </a:rPr>
-                        <a:t>早朝出発の人などの音が気になるのと、お風呂の排水口の臭いが気になる〜後は快適に過ごせた</a:t>
+                        <a:t>Also, I booked this hotel because I thought the shuttle b...</a:t>
                       </a:r>
                       <a:endParaRPr lang="en-US" sz="900" dirty="0">
                         <a:latin typeface="Arial" charset="0"/>
@@ -13938,7 +13938,7 @@
                           <a:ea typeface="Arial" pitchFamily="34" charset="-122"/>
                           <a:cs typeface="Arial" pitchFamily="34" charset="-120"/>
                         </a:rPr>
-                        <a:t>窓・採光</a:t>
+                        <a:t>臭い・匂い</a:t>
                       </a:r>
                       <a:endParaRPr lang="en-US" sz="900" dirty="0">
                         <a:latin typeface="Arial" charset="0"/>
@@ -14006,7 +14006,7 @@
                           <a:ea typeface="Arial" pitchFamily="34" charset="-122"/>
                           <a:cs typeface="Arial" pitchFamily="34" charset="-120"/>
                         </a:rPr>
-                        <a:t>初めて宿泊させていただきました 話に聞いてた通り恐竜がお出迎えしてくれるフロントにはやっぱりビックリさせられました...</a:t>
+                        <a:t>早朝出発の人などの音が気になるのと、お風呂の排水口の臭いが気になる〜後は快適に過ごせた</a:t>
                       </a:r>
                       <a:endParaRPr lang="en-US" sz="900" dirty="0">
                         <a:latin typeface="Arial" charset="0"/>
@@ -14212,7 +14212,7 @@
                           <a:ea typeface="Arial" pitchFamily="34" charset="-122"/>
                           <a:cs typeface="Arial" pitchFamily="34" charset="-120"/>
                         </a:rPr>
-                        <a:t>設備の老朽化</a:t>
+                        <a:t>窓・採光</a:t>
                       </a:r>
                       <a:endParaRPr lang="en-US" sz="900" dirty="0">
                         <a:latin typeface="Arial" charset="0"/>
@@ -14280,7 +14280,7 @@
                           <a:ea typeface="Arial" pitchFamily="34" charset="-122"/>
                           <a:cs typeface="Arial" pitchFamily="34" charset="-120"/>
                         </a:rPr>
-                        <a:t>I was forced to put my global roaming on my phone and get...</a:t>
+                        <a:t>初めて宿泊させていただきました 話に聞いてた通り恐竜がお出迎えしてくれるフロントにはやっぱりビックリさせられました...</a:t>
                       </a:r>
                       <a:endParaRPr lang="en-US" sz="900" dirty="0">
                         <a:latin typeface="Arial" charset="0"/>
@@ -14348,7 +14348,7 @@
                           <a:ea typeface="Arial" pitchFamily="34" charset="-122"/>
                           <a:cs typeface="Arial" pitchFamily="34" charset="-120"/>
                         </a:rPr>
-                        <a:t>1件</a:t>
+                        <a:t>2件</a:t>
                       </a:r>
                       <a:endParaRPr lang="en-US" sz="900" dirty="0">
                         <a:latin typeface="Arial" charset="0"/>

--- a/納品レポート/ホテル別レポート/henn_na_haneda_口コミ分析レポート.pptx
+++ b/納品レポート/ホテル別レポート/henn_na_haneda_口コミ分析レポート.pptx
@@ -192,10 +192,10 @@
                     <c:v>Agoda</c:v>
                   </c:pt>
                   <c:pt idx="4">
-                    <c:v>Booking.com</c:v>
+                    <c:v>Google</c:v>
                   </c:pt>
                   <c:pt idx="5">
-                    <c:v>Google</c:v>
+                    <c:v>Booking.com</c:v>
                   </c:pt>
                 </c:lvl>
               </c:multiLvlStrCache>
@@ -220,7 +220,7 @@
                   <c:v>8.14</c:v>
                 </c:pt>
                 <c:pt idx="4">
-                  <c:v>8.11</c:v>
+                  <c:v>8.14</c:v>
                 </c:pt>
                 <c:pt idx="5">
                   <c:v>8.11</c:v>
@@ -566,7 +566,7 @@
               <c:numCache>
                 <c:ptCount val="3"/>
                 <c:pt idx="0">
-                  <c:v>246</c:v>
+                  <c:v>247</c:v>
                 </c:pt>
                 <c:pt idx="1">
                   <c:v>69</c:v>
@@ -823,7 +823,7 @@
                 <c:formatCode>General</c:formatCode>
                 <c:ptCount val="9"/>
                 <c:pt idx="0">
-                  <c:v>107</c:v>
+                  <c:v>108</c:v>
                 </c:pt>
                 <c:pt idx="1">
                   <c:v>42</c:v>
@@ -2798,7 +2798,7 @@
                 <a:ea typeface="Arial" pitchFamily="34" charset="-122"/>
                 <a:cs typeface="Arial" pitchFamily="34" charset="-120"/>
               </a:rPr>
-              <a:t>レビュー総数：324件（6サイト）</a:t>
+              <a:t>レビュー総数：325件（6サイト）</a:t>
             </a:r>
             <a:endParaRPr lang="en-US" sz="1000" dirty="0"/>
           </a:p>
@@ -2818,7 +2818,7 @@
                 <a:ea typeface="Arial" pitchFamily="34" charset="-122"/>
                 <a:cs typeface="Arial" pitchFamily="34" charset="-120"/>
               </a:rPr>
-              <a:t>作成日：2026年3月25日</a:t>
+              <a:t>作成日：2026年3月26日</a:t>
             </a:r>
             <a:endParaRPr lang="en-US" sz="1000" dirty="0"/>
           </a:p>
@@ -3364,7 +3364,7 @@
                           <a:ea typeface="Arial" pitchFamily="34" charset="-122"/>
                           <a:cs typeface="Arial" pitchFamily="34" charset="-120"/>
                         </a:rPr>
-                        <a:t>8.28点</a:t>
+                        <a:t>8.29点</a:t>
                       </a:r>
                       <a:endParaRPr lang="en-US" sz="1000" dirty="0">
                         <a:latin typeface="Arial" charset="0"/>
@@ -3638,7 +3638,7 @@
                           <a:ea typeface="Arial" pitchFamily="34" charset="-122"/>
                           <a:cs typeface="Arial" pitchFamily="34" charset="-120"/>
                         </a:rPr>
-                        <a:t>75.9%</a:t>
+                        <a:t>76.0%</a:t>
                       </a:r>
                       <a:endParaRPr lang="en-US" sz="1000" dirty="0">
                         <a:latin typeface="Arial" charset="0"/>
@@ -4460,7 +4460,7 @@
                           <a:ea typeface="Arial" pitchFamily="34" charset="-122"/>
                           <a:cs typeface="Arial" pitchFamily="34" charset="-120"/>
                         </a:rPr>
-                        <a:t>約96件/期間</a:t>
+                        <a:t>約97件/期間</a:t>
                       </a:r>
                       <a:endParaRPr lang="en-US" sz="1000" dirty="0">
                         <a:latin typeface="Arial" charset="0"/>
@@ -5099,7 +5099,7 @@
                 <a:ea typeface="Arial" pitchFamily="34" charset="-122"/>
                 <a:cs typeface="Arial" pitchFamily="34" charset="-120"/>
               </a:rPr>
-              <a:t>8.28</a:t>
+              <a:t>8.29</a:t>
             </a:r>
             <a:endParaRPr lang="en-US" sz="3200" dirty="0"/>
           </a:p>
@@ -5224,7 +5224,7 @@
                 <a:ea typeface="Arial" pitchFamily="34" charset="-122"/>
                 <a:cs typeface="Arial" pitchFamily="34" charset="-120"/>
               </a:rPr>
-              <a:t>75.9%</a:t>
+              <a:t>76.0%</a:t>
             </a:r>
             <a:endParaRPr lang="en-US" sz="3200" dirty="0"/>
           </a:p>
@@ -5474,7 +5474,7 @@
                 <a:ea typeface="Arial" pitchFamily="34" charset="-122"/>
                 <a:cs typeface="Arial" pitchFamily="34" charset="-120"/>
               </a:rPr>
-              <a:t>324件</a:t>
+              <a:t>325件</a:t>
             </a:r>
             <a:endParaRPr lang="en-US" sz="3200" dirty="0"/>
           </a:p>
@@ -5662,7 +5662,7 @@
                 <a:ea typeface="Arial" pitchFamily="34" charset="-122"/>
                 <a:cs typeface="Arial" pitchFamily="34" charset="-120"/>
               </a:rPr>
-              <a:t>  チェックイン手続きは全体的にスムーズでしたが、自動ロボットによる対応が少し気になりました</a:t>
+              <a:t>  とても清潔で快適で、スタッフも親切でした</a:t>
             </a:r>
             <a:endParaRPr lang="en-US" sz="1100" dirty="0"/>
           </a:p>
@@ -5702,7 +5702,7 @@
                 <a:ea typeface="Arial" pitchFamily="34" charset="-122"/>
                 <a:cs typeface="Arial" pitchFamily="34" charset="-120"/>
               </a:rPr>
-              <a:t>  とても清潔でコンパクト、そして快適でした</a:t>
+              <a:t>  とても清潔で快適で、スタッフも親切でした</a:t>
             </a:r>
             <a:endParaRPr lang="en-US" sz="1100" dirty="0"/>
           </a:p>
@@ -5850,7 +5850,7 @@
                 <a:ea typeface="Arial" pitchFamily="34" charset="-122"/>
                 <a:cs typeface="Arial" pitchFamily="34" charset="-120"/>
               </a:rPr>
-              <a:t>  無料シャトルバスは時間通りに運行していました</a:t>
+              <a:t>  特に気に入ったのは、空港までのシャトルバスです☺️ とても清潔で快適で、スタッフも親切でした</a:t>
             </a:r>
             <a:endParaRPr lang="en-US" sz="1100" dirty="0"/>
           </a:p>
@@ -6283,7 +6283,7 @@
                 <a:ea typeface="Arial" pitchFamily="34" charset="-122"/>
                 <a:cs typeface="Arial" pitchFamily="34" charset="-120"/>
               </a:rPr>
-              <a:t>8.28</a:t>
+              <a:t>8.29</a:t>
             </a:r>
             <a:endParaRPr lang="en-US" sz="3200" dirty="0"/>
           </a:p>
@@ -6408,7 +6408,7 @@
                 <a:ea typeface="Arial" pitchFamily="34" charset="-122"/>
                 <a:cs typeface="Arial" pitchFamily="34" charset="-120"/>
               </a:rPr>
-              <a:t>75.9%</a:t>
+              <a:t>76.0%</a:t>
             </a:r>
             <a:endParaRPr lang="en-US" sz="3200" dirty="0"/>
           </a:p>
@@ -6658,7 +6658,7 @@
                 <a:ea typeface="Arial" pitchFamily="34" charset="-122"/>
                 <a:cs typeface="Arial" pitchFamily="34" charset="-120"/>
               </a:rPr>
-              <a:t>324件</a:t>
+              <a:t>325件</a:t>
             </a:r>
             <a:endParaRPr lang="en-US" sz="3200" dirty="0"/>
           </a:p>
@@ -8888,7 +8888,7 @@
                           <a:ea typeface="Arial" pitchFamily="34" charset="-122"/>
                           <a:cs typeface="Arial" pitchFamily="34" charset="-120"/>
                         </a:rPr>
-                        <a:t>Booking.com</a:t>
+                        <a:t>Google</a:t>
                       </a:r>
                       <a:endParaRPr lang="en-US" sz="900" dirty="0">
                         <a:latin typeface="Arial" charset="0"/>
@@ -8956,7 +8956,7 @@
                           <a:ea typeface="Arial" pitchFamily="34" charset="-122"/>
                           <a:cs typeface="Arial" pitchFamily="34" charset="-120"/>
                         </a:rPr>
-                        <a:t>141</a:t>
+                        <a:t>57</a:t>
                       </a:r>
                       <a:endParaRPr lang="en-US" sz="900" dirty="0">
                         <a:latin typeface="Arial" charset="0"/>
@@ -9024,7 +9024,7 @@
                           <a:ea typeface="Arial" pitchFamily="34" charset="-122"/>
                           <a:cs typeface="Arial" pitchFamily="34" charset="-120"/>
                         </a:rPr>
-                        <a:t>8.11</a:t>
+                        <a:t>4.07</a:t>
                       </a:r>
                       <a:endParaRPr lang="en-US" sz="900" dirty="0">
                         <a:latin typeface="Arial" charset="0"/>
@@ -9092,7 +9092,7 @@
                           <a:ea typeface="Arial" pitchFamily="34" charset="-122"/>
                           <a:cs typeface="Arial" pitchFamily="34" charset="-120"/>
                         </a:rPr>
-                        <a:t>/10</a:t>
+                        <a:t>/5 (×2)</a:t>
                       </a:r>
                       <a:endParaRPr lang="en-US" sz="900" dirty="0">
                         <a:latin typeface="Arial" charset="0"/>
@@ -9160,7 +9160,7 @@
                           <a:ea typeface="Arial" pitchFamily="34" charset="-122"/>
                           <a:cs typeface="Arial" pitchFamily="34" charset="-120"/>
                         </a:rPr>
-                        <a:t>8.11</a:t>
+                        <a:t>8.14</a:t>
                       </a:r>
                       <a:endParaRPr lang="en-US" sz="900" dirty="0">
                         <a:latin typeface="Arial" charset="0"/>
@@ -9230,7 +9230,7 @@
                           <a:ea typeface="Arial" pitchFamily="34" charset="-122"/>
                           <a:cs typeface="Arial" pitchFamily="34" charset="-120"/>
                         </a:rPr>
-                        <a:t>Google</a:t>
+                        <a:t>Booking.com</a:t>
                       </a:r>
                       <a:endParaRPr lang="en-US" sz="900" dirty="0">
                         <a:latin typeface="Arial" charset="0"/>
@@ -9298,143 +9298,7 @@
                           <a:ea typeface="Arial" pitchFamily="34" charset="-122"/>
                           <a:cs typeface="Arial" pitchFamily="34" charset="-120"/>
                         </a:rPr>
-                        <a:t>56</a:t>
-                      </a:r>
-                      <a:endParaRPr lang="en-US" sz="900" dirty="0">
-                        <a:latin typeface="Arial" charset="0"/>
-                        <a:ea typeface="Arial" charset="0"/>
-                        <a:cs typeface="Arial" charset="0"/>
-                      </a:endParaRPr>
-                    </a:p>
-                  </a:txBody>
-                  <a:tcPr marL="91440" marR="91440" marT="45720" marB="45720">
-                    <a:lnL w="6350" cap="flat" cmpd="sng" algn="ctr">
-                      <a:solidFill>
-                        <a:srgbClr val="CBD5E1"/>
-                      </a:solidFill>
-                      <a:prstDash val="solid"/>
-                      <a:round/>
-                      <a:headEnd type="none" w="med" len="med"/>
-                      <a:tailEnd type="none" w="med" len="med"/>
-                    </a:lnL>
-                    <a:lnR w="6350" cap="flat" cmpd="sng" algn="ctr">
-                      <a:solidFill>
-                        <a:srgbClr val="CBD5E1"/>
-                      </a:solidFill>
-                      <a:prstDash val="solid"/>
-                      <a:round/>
-                      <a:headEnd type="none" w="med" len="med"/>
-                      <a:tailEnd type="none" w="med" len="med"/>
-                    </a:lnR>
-                    <a:lnT w="6350" cap="flat" cmpd="sng" algn="ctr">
-                      <a:solidFill>
-                        <a:srgbClr val="CBD5E1"/>
-                      </a:solidFill>
-                      <a:prstDash val="solid"/>
-                      <a:round/>
-                      <a:headEnd type="none" w="med" len="med"/>
-                      <a:tailEnd type="none" w="med" len="med"/>
-                    </a:lnT>
-                    <a:lnB w="6350" cap="flat" cmpd="sng" algn="ctr">
-                      <a:solidFill>
-                        <a:srgbClr val="CBD5E1"/>
-                      </a:solidFill>
-                      <a:prstDash val="solid"/>
-                      <a:round/>
-                      <a:headEnd type="none" w="med" len="med"/>
-                      <a:tailEnd type="none" w="med" len="med"/>
-                    </a:lnB>
-                    <a:solidFill>
-                      <a:srgbClr val="FFFFFF"/>
-                    </a:solidFill>
-                  </a:tcPr>
-                </a:tc>
-                <a:tc>
-                  <a:txBody>
-                    <a:bodyPr/>
-                    <a:lstStyle/>
-                    <a:p>
-                      <a:pPr algn="ctr" indent="0" marL="0">
-                        <a:buNone/>
-                      </a:pPr>
-                      <a:r>
-                        <a:rPr lang="en-US" sz="900" dirty="0">
-                          <a:solidFill>
-                            <a:srgbClr val="000000"/>
-                          </a:solidFill>
-                          <a:latin typeface="Arial" pitchFamily="34" charset="0"/>
-                          <a:ea typeface="Arial" pitchFamily="34" charset="-122"/>
-                          <a:cs typeface="Arial" pitchFamily="34" charset="-120"/>
-                        </a:rPr>
-                        <a:t>4.05</a:t>
-                      </a:r>
-                      <a:endParaRPr lang="en-US" sz="900" dirty="0">
-                        <a:latin typeface="Arial" charset="0"/>
-                        <a:ea typeface="Arial" charset="0"/>
-                        <a:cs typeface="Arial" charset="0"/>
-                      </a:endParaRPr>
-                    </a:p>
-                  </a:txBody>
-                  <a:tcPr marL="91440" marR="91440" marT="45720" marB="45720">
-                    <a:lnL w="6350" cap="flat" cmpd="sng" algn="ctr">
-                      <a:solidFill>
-                        <a:srgbClr val="CBD5E1"/>
-                      </a:solidFill>
-                      <a:prstDash val="solid"/>
-                      <a:round/>
-                      <a:headEnd type="none" w="med" len="med"/>
-                      <a:tailEnd type="none" w="med" len="med"/>
-                    </a:lnL>
-                    <a:lnR w="6350" cap="flat" cmpd="sng" algn="ctr">
-                      <a:solidFill>
-                        <a:srgbClr val="CBD5E1"/>
-                      </a:solidFill>
-                      <a:prstDash val="solid"/>
-                      <a:round/>
-                      <a:headEnd type="none" w="med" len="med"/>
-                      <a:tailEnd type="none" w="med" len="med"/>
-                    </a:lnR>
-                    <a:lnT w="6350" cap="flat" cmpd="sng" algn="ctr">
-                      <a:solidFill>
-                        <a:srgbClr val="CBD5E1"/>
-                      </a:solidFill>
-                      <a:prstDash val="solid"/>
-                      <a:round/>
-                      <a:headEnd type="none" w="med" len="med"/>
-                      <a:tailEnd type="none" w="med" len="med"/>
-                    </a:lnT>
-                    <a:lnB w="6350" cap="flat" cmpd="sng" algn="ctr">
-                      <a:solidFill>
-                        <a:srgbClr val="CBD5E1"/>
-                      </a:solidFill>
-                      <a:prstDash val="solid"/>
-                      <a:round/>
-                      <a:headEnd type="none" w="med" len="med"/>
-                      <a:tailEnd type="none" w="med" len="med"/>
-                    </a:lnB>
-                    <a:solidFill>
-                      <a:srgbClr val="FFFFFF"/>
-                    </a:solidFill>
-                  </a:tcPr>
-                </a:tc>
-                <a:tc>
-                  <a:txBody>
-                    <a:bodyPr/>
-                    <a:lstStyle/>
-                    <a:p>
-                      <a:pPr algn="ctr" indent="0" marL="0">
-                        <a:buNone/>
-                      </a:pPr>
-                      <a:r>
-                        <a:rPr lang="en-US" sz="900" dirty="0">
-                          <a:solidFill>
-                            <a:srgbClr val="000000"/>
-                          </a:solidFill>
-                          <a:latin typeface="Arial" pitchFamily="34" charset="0"/>
-                          <a:ea typeface="Arial" pitchFamily="34" charset="-122"/>
-                          <a:cs typeface="Arial" pitchFamily="34" charset="-120"/>
-                        </a:rPr>
-                        <a:t>/5 (×2)</a:t>
+                        <a:t>141</a:t>
                       </a:r>
                       <a:endParaRPr lang="en-US" sz="900" dirty="0">
                         <a:latin typeface="Arial" charset="0"/>
@@ -9553,6 +9417,142 @@
                     </a:solidFill>
                   </a:tcPr>
                 </a:tc>
+                <a:tc>
+                  <a:txBody>
+                    <a:bodyPr/>
+                    <a:lstStyle/>
+                    <a:p>
+                      <a:pPr algn="ctr" indent="0" marL="0">
+                        <a:buNone/>
+                      </a:pPr>
+                      <a:r>
+                        <a:rPr lang="en-US" sz="900" dirty="0">
+                          <a:solidFill>
+                            <a:srgbClr val="000000"/>
+                          </a:solidFill>
+                          <a:latin typeface="Arial" pitchFamily="34" charset="0"/>
+                          <a:ea typeface="Arial" pitchFamily="34" charset="-122"/>
+                          <a:cs typeface="Arial" pitchFamily="34" charset="-120"/>
+                        </a:rPr>
+                        <a:t>/10</a:t>
+                      </a:r>
+                      <a:endParaRPr lang="en-US" sz="900" dirty="0">
+                        <a:latin typeface="Arial" charset="0"/>
+                        <a:ea typeface="Arial" charset="0"/>
+                        <a:cs typeface="Arial" charset="0"/>
+                      </a:endParaRPr>
+                    </a:p>
+                  </a:txBody>
+                  <a:tcPr marL="91440" marR="91440" marT="45720" marB="45720">
+                    <a:lnL w="6350" cap="flat" cmpd="sng" algn="ctr">
+                      <a:solidFill>
+                        <a:srgbClr val="CBD5E1"/>
+                      </a:solidFill>
+                      <a:prstDash val="solid"/>
+                      <a:round/>
+                      <a:headEnd type="none" w="med" len="med"/>
+                      <a:tailEnd type="none" w="med" len="med"/>
+                    </a:lnL>
+                    <a:lnR w="6350" cap="flat" cmpd="sng" algn="ctr">
+                      <a:solidFill>
+                        <a:srgbClr val="CBD5E1"/>
+                      </a:solidFill>
+                      <a:prstDash val="solid"/>
+                      <a:round/>
+                      <a:headEnd type="none" w="med" len="med"/>
+                      <a:tailEnd type="none" w="med" len="med"/>
+                    </a:lnR>
+                    <a:lnT w="6350" cap="flat" cmpd="sng" algn="ctr">
+                      <a:solidFill>
+                        <a:srgbClr val="CBD5E1"/>
+                      </a:solidFill>
+                      <a:prstDash val="solid"/>
+                      <a:round/>
+                      <a:headEnd type="none" w="med" len="med"/>
+                      <a:tailEnd type="none" w="med" len="med"/>
+                    </a:lnT>
+                    <a:lnB w="6350" cap="flat" cmpd="sng" algn="ctr">
+                      <a:solidFill>
+                        <a:srgbClr val="CBD5E1"/>
+                      </a:solidFill>
+                      <a:prstDash val="solid"/>
+                      <a:round/>
+                      <a:headEnd type="none" w="med" len="med"/>
+                      <a:tailEnd type="none" w="med" len="med"/>
+                    </a:lnB>
+                    <a:solidFill>
+                      <a:srgbClr val="FFFFFF"/>
+                    </a:solidFill>
+                  </a:tcPr>
+                </a:tc>
+                <a:tc>
+                  <a:txBody>
+                    <a:bodyPr/>
+                    <a:lstStyle/>
+                    <a:p>
+                      <a:pPr algn="ctr" indent="0" marL="0">
+                        <a:buNone/>
+                      </a:pPr>
+                      <a:r>
+                        <a:rPr lang="en-US" sz="900" dirty="0">
+                          <a:solidFill>
+                            <a:srgbClr val="000000"/>
+                          </a:solidFill>
+                          <a:latin typeface="Arial" pitchFamily="34" charset="0"/>
+                          <a:ea typeface="Arial" pitchFamily="34" charset="-122"/>
+                          <a:cs typeface="Arial" pitchFamily="34" charset="-120"/>
+                        </a:rPr>
+                        <a:t>8.11</a:t>
+                      </a:r>
+                      <a:endParaRPr lang="en-US" sz="900" dirty="0">
+                        <a:latin typeface="Arial" charset="0"/>
+                        <a:ea typeface="Arial" charset="0"/>
+                        <a:cs typeface="Arial" charset="0"/>
+                      </a:endParaRPr>
+                    </a:p>
+                  </a:txBody>
+                  <a:tcPr marL="91440" marR="91440" marT="45720" marB="45720">
+                    <a:lnL w="6350" cap="flat" cmpd="sng" algn="ctr">
+                      <a:solidFill>
+                        <a:srgbClr val="CBD5E1"/>
+                      </a:solidFill>
+                      <a:prstDash val="solid"/>
+                      <a:round/>
+                      <a:headEnd type="none" w="med" len="med"/>
+                      <a:tailEnd type="none" w="med" len="med"/>
+                    </a:lnL>
+                    <a:lnR w="6350" cap="flat" cmpd="sng" algn="ctr">
+                      <a:solidFill>
+                        <a:srgbClr val="CBD5E1"/>
+                      </a:solidFill>
+                      <a:prstDash val="solid"/>
+                      <a:round/>
+                      <a:headEnd type="none" w="med" len="med"/>
+                      <a:tailEnd type="none" w="med" len="med"/>
+                    </a:lnR>
+                    <a:lnT w="6350" cap="flat" cmpd="sng" algn="ctr">
+                      <a:solidFill>
+                        <a:srgbClr val="CBD5E1"/>
+                      </a:solidFill>
+                      <a:prstDash val="solid"/>
+                      <a:round/>
+                      <a:headEnd type="none" w="med" len="med"/>
+                      <a:tailEnd type="none" w="med" len="med"/>
+                    </a:lnT>
+                    <a:lnB w="6350" cap="flat" cmpd="sng" algn="ctr">
+                      <a:solidFill>
+                        <a:srgbClr val="CBD5E1"/>
+                      </a:solidFill>
+                      <a:prstDash val="solid"/>
+                      <a:round/>
+                      <a:headEnd type="none" w="med" len="med"/>
+                      <a:tailEnd type="none" w="med" len="med"/>
+                    </a:lnB>
+                    <a:solidFill>
+                      <a:srgbClr val="FFFFFF"/>
+                    </a:solidFill>
+                  </a:tcPr>
+                </a:tc>
               </a:tr>
             </a:tbl>
           </a:graphicData>
@@ -9910,7 +9910,7 @@
                 <a:ea typeface="Arial" pitchFamily="34" charset="-122"/>
                 <a:cs typeface="Arial" pitchFamily="34" charset="-120"/>
               </a:rPr>
-              <a:t>246件（75.9%）</a:t>
+              <a:t>247件（76.0%）</a:t>
             </a:r>
             <a:endParaRPr lang="en-US" sz="1100" dirty="0"/>
           </a:p>
@@ -10008,7 +10008,7 @@
                 <a:ea typeface="Arial" pitchFamily="34" charset="-122"/>
                 <a:cs typeface="Arial" pitchFamily="34" charset="-120"/>
               </a:rPr>
-              <a:t>69件（21.3%）</a:t>
+              <a:t>69件（21.2%）</a:t>
             </a:r>
             <a:endParaRPr lang="en-US" sz="1100" dirty="0"/>
           </a:p>
@@ -10741,7 +10741,7 @@
                 <a:ea typeface="Arial" pitchFamily="34" charset="-122"/>
                 <a:cs typeface="Arial" pitchFamily="34" charset="-120"/>
               </a:rPr>
-              <a:t>チェックイン手続きは全体的にスムーズでしたが、自動ロボットによる対応が少し気になりました</a:t>
+              <a:t>とても清潔で快適で、スタッフも親切でした</a:t>
             </a:r>
             <a:endParaRPr lang="en-US" sz="900" dirty="0"/>
           </a:p>
@@ -10780,7 +10780,7 @@
                 <a:ea typeface="Arial" pitchFamily="34" charset="-122"/>
                 <a:cs typeface="Arial" pitchFamily="34" charset="-120"/>
               </a:rPr>
-              <a:t>「スタッフが親切」</a:t>
+              <a:t>「チェックイン手続きは全体的にスムーズでしたが、自動ロボットによる対応が少し気になりました」</a:t>
             </a:r>
             <a:endParaRPr lang="en-US" sz="900" dirty="0"/>
           </a:p>
@@ -10964,7 +10964,7 @@
                 <a:ea typeface="Arial" pitchFamily="34" charset="-122"/>
                 <a:cs typeface="Arial" pitchFamily="34" charset="-120"/>
               </a:rPr>
-              <a:t>とても清潔でコンパクト、そして快適でした</a:t>
+              <a:t>とても清潔で快適で、スタッフも親切でした</a:t>
             </a:r>
             <a:endParaRPr lang="en-US" sz="900" dirty="0"/>
           </a:p>
@@ -11003,7 +11003,7 @@
                 <a:ea typeface="Arial" pitchFamily="34" charset="-122"/>
                 <a:cs typeface="Arial" pitchFamily="34" charset="-120"/>
               </a:rPr>
-              <a:t>「部屋もプロジェクター付きでとても綺麗でした」</a:t>
+              <a:t>「とても清潔でコンパクト、そして快適でした」</a:t>
             </a:r>
             <a:endParaRPr lang="en-US" sz="900" dirty="0"/>
           </a:p>
@@ -11109,7 +11109,7 @@
                 <a:ea typeface="Arial" pitchFamily="34" charset="-122"/>
                 <a:cs typeface="Arial" pitchFamily="34" charset="-120"/>
               </a:rPr>
-              <a:t>20件+</a:t>
+              <a:t>50件+</a:t>
             </a:r>
             <a:endParaRPr lang="en-US" sz="900" dirty="0"/>
           </a:p>
@@ -11187,7 +11187,7 @@
                 <a:ea typeface="Arial" pitchFamily="34" charset="-122"/>
                 <a:cs typeface="Arial" pitchFamily="34" charset="-120"/>
               </a:rPr>
-              <a:t>とても清潔でコンパクト、そして快適でした</a:t>
+              <a:t>とても清潔で快適で、スタッフも親切でした</a:t>
             </a:r>
             <a:endParaRPr lang="en-US" sz="900" dirty="0"/>
           </a:p>
@@ -11226,7 +11226,7 @@
                 <a:ea typeface="Arial" pitchFamily="34" charset="-122"/>
                 <a:cs typeface="Arial" pitchFamily="34" charset="-120"/>
               </a:rPr>
-              <a:t>「Great amenities (laundry, free toothbrushes, etc), nice r...」</a:t>
+              <a:t>「とても清潔でコンパクト、そして快適でした」</a:t>
             </a:r>
             <a:endParaRPr lang="en-US" sz="900" dirty="0"/>
           </a:p>
@@ -12362,7 +12362,7 @@
                           <a:ea typeface="Arial" pitchFamily="34" charset="-122"/>
                           <a:cs typeface="Arial" pitchFamily="34" charset="-120"/>
                         </a:rPr>
-                        <a:t>無料シャトルバスは時間通りに運行していました</a:t>
+                        <a:t>特に気に入ったのは、空港までのシャトルバスです☺️ とても清潔で快適で、スタッフも親切でした</a:t>
                       </a:r>
                       <a:endParaRPr lang="en-US" sz="900" dirty="0">
                         <a:latin typeface="Arial" charset="0"/>
@@ -12430,7 +12430,7 @@
                           <a:ea typeface="Arial" pitchFamily="34" charset="-122"/>
                           <a:cs typeface="Arial" pitchFamily="34" charset="-120"/>
                         </a:rPr>
-                        <a:t>96件</a:t>
+                        <a:t>97件</a:t>
                       </a:r>
                       <a:endParaRPr lang="en-US" sz="900" dirty="0">
                         <a:latin typeface="Arial" charset="0"/>

--- a/納品レポート/ホテル別レポート/henn_na_haneda_口コミ分析レポート.pptx
+++ b/納品レポート/ホテル別レポート/henn_na_haneda_口コミ分析レポート.pptx
@@ -192,10 +192,10 @@
                     <c:v>Agoda</c:v>
                   </c:pt>
                   <c:pt idx="4">
-                    <c:v>Google</c:v>
+                    <c:v>Booking.com</c:v>
                   </c:pt>
                   <c:pt idx="5">
-                    <c:v>Booking.com</c:v>
+                    <c:v>Google</c:v>
                   </c:pt>
                 </c:lvl>
               </c:multiLvlStrCache>
@@ -214,16 +214,16 @@
                   <c:v>8.57</c:v>
                 </c:pt>
                 <c:pt idx="2">
-                  <c:v>8.32</c:v>
+                  <c:v>8.38</c:v>
                 </c:pt>
                 <c:pt idx="3">
                   <c:v>8.14</c:v>
                 </c:pt>
                 <c:pt idx="4">
-                  <c:v>8.14</c:v>
+                  <c:v>8.13</c:v>
                 </c:pt>
                 <c:pt idx="5">
-                  <c:v>8.11</c:v>
+                  <c:v>8.06</c:v>
                 </c:pt>
               </c:numCache>
             </c:numRef>
@@ -566,13 +566,13 @@
               <c:numCache>
                 <c:ptCount val="3"/>
                 <c:pt idx="0">
-                  <c:v>247</c:v>
+                  <c:v>254</c:v>
                 </c:pt>
                 <c:pt idx="1">
                   <c:v>69</c:v>
                 </c:pt>
                 <c:pt idx="2">
-                  <c:v>9</c:v>
+                  <c:v>11</c:v>
                 </c:pt>
               </c:numCache>
             </c:numRef>
@@ -823,10 +823,10 @@
                 <c:formatCode>General</c:formatCode>
                 <c:ptCount val="9"/>
                 <c:pt idx="0">
-                  <c:v>108</c:v>
+                  <c:v>114</c:v>
                 </c:pt>
                 <c:pt idx="1">
-                  <c:v>42</c:v>
+                  <c:v>43</c:v>
                 </c:pt>
                 <c:pt idx="2">
                   <c:v>97</c:v>
@@ -847,7 +847,7 @@
                   <c:v>2</c:v>
                 </c:pt>
                 <c:pt idx="8">
-                  <c:v>5</c:v>
+                  <c:v>7</c:v>
                 </c:pt>
               </c:numCache>
             </c:numRef>
@@ -2798,7 +2798,7 @@
                 <a:ea typeface="Arial" pitchFamily="34" charset="-122"/>
                 <a:cs typeface="Arial" pitchFamily="34" charset="-120"/>
               </a:rPr>
-              <a:t>レビュー総数：325件（6サイト）</a:t>
+              <a:t>レビュー総数：334件（6サイト）</a:t>
             </a:r>
             <a:endParaRPr lang="en-US" sz="1000" dirty="0"/>
           </a:p>
@@ -2818,7 +2818,7 @@
                 <a:ea typeface="Arial" pitchFamily="34" charset="-122"/>
                 <a:cs typeface="Arial" pitchFamily="34" charset="-120"/>
               </a:rPr>
-              <a:t>作成日：2026年3月26日</a:t>
+              <a:t>作成日：2026年3月27日</a:t>
             </a:r>
             <a:endParaRPr lang="en-US" sz="1000" dirty="0"/>
           </a:p>
@@ -3364,7 +3364,7 @@
                           <a:ea typeface="Arial" pitchFamily="34" charset="-122"/>
                           <a:cs typeface="Arial" pitchFamily="34" charset="-120"/>
                         </a:rPr>
-                        <a:t>8.29点</a:t>
+                        <a:t>8.28点</a:t>
                       </a:r>
                       <a:endParaRPr lang="en-US" sz="1000" dirty="0">
                         <a:latin typeface="Arial" charset="0"/>
@@ -3912,7 +3912,7 @@
                           <a:ea typeface="Arial" pitchFamily="34" charset="-122"/>
                           <a:cs typeface="Arial" pitchFamily="34" charset="-120"/>
                         </a:rPr>
-                        <a:t>2.8%</a:t>
+                        <a:t>3.3%</a:t>
                       </a:r>
                       <a:endParaRPr lang="en-US" sz="1000" dirty="0">
                         <a:latin typeface="Arial" charset="0"/>
@@ -4460,7 +4460,7 @@
                           <a:ea typeface="Arial" pitchFamily="34" charset="-122"/>
                           <a:cs typeface="Arial" pitchFamily="34" charset="-120"/>
                         </a:rPr>
-                        <a:t>約97件/期間</a:t>
+                        <a:t>約101件/期間</a:t>
                       </a:r>
                       <a:endParaRPr lang="en-US" sz="1000" dirty="0">
                         <a:latin typeface="Arial" charset="0"/>
@@ -4528,7 +4528,7 @@
                           <a:ea typeface="Arial" pitchFamily="34" charset="-122"/>
                           <a:cs typeface="Arial" pitchFamily="34" charset="-120"/>
                         </a:rPr>
-                        <a:t>48件以下</a:t>
+                        <a:t>50件以下</a:t>
                       </a:r>
                       <a:endParaRPr lang="en-US" sz="1000" dirty="0">
                         <a:latin typeface="Arial" charset="0"/>
@@ -5099,7 +5099,7 @@
                 <a:ea typeface="Arial" pitchFamily="34" charset="-122"/>
                 <a:cs typeface="Arial" pitchFamily="34" charset="-120"/>
               </a:rPr>
-              <a:t>8.29</a:t>
+              <a:t>8.28</a:t>
             </a:r>
             <a:endParaRPr lang="en-US" sz="3200" dirty="0"/>
           </a:p>
@@ -5349,7 +5349,7 @@
                 <a:ea typeface="Arial" pitchFamily="34" charset="-122"/>
                 <a:cs typeface="Arial" pitchFamily="34" charset="-120"/>
               </a:rPr>
-              <a:t>2.8%</a:t>
+              <a:t>3.3%</a:t>
             </a:r>
             <a:endParaRPr lang="en-US" sz="3200" dirty="0"/>
           </a:p>
@@ -5474,7 +5474,7 @@
                 <a:ea typeface="Arial" pitchFamily="34" charset="-122"/>
                 <a:cs typeface="Arial" pitchFamily="34" charset="-120"/>
               </a:rPr>
-              <a:t>325件</a:t>
+              <a:t>334件</a:t>
             </a:r>
             <a:endParaRPr lang="en-US" sz="3200" dirty="0"/>
           </a:p>
@@ -5622,7 +5622,7 @@
                 <a:ea typeface="Arial" pitchFamily="34" charset="-122"/>
                 <a:cs typeface="Arial" pitchFamily="34" charset="-120"/>
               </a:rPr>
-              <a:t>  立地がよい</a:t>
+              <a:t>  設備が素晴らしく、サービスも最高で、空港にもとても近い</a:t>
             </a:r>
             <a:endParaRPr lang="en-US" sz="1100" dirty="0"/>
           </a:p>
@@ -5662,7 +5662,7 @@
                 <a:ea typeface="Arial" pitchFamily="34" charset="-122"/>
                 <a:cs typeface="Arial" pitchFamily="34" charset="-120"/>
               </a:rPr>
-              <a:t>  とても清潔で快適で、スタッフも親切でした</a:t>
+              <a:t>  設備が素晴らしく、サービスも最高で、空港にもとても近い</a:t>
             </a:r>
             <a:endParaRPr lang="en-US" sz="1100" dirty="0"/>
           </a:p>
@@ -5702,7 +5702,7 @@
                 <a:ea typeface="Arial" pitchFamily="34" charset="-122"/>
                 <a:cs typeface="Arial" pitchFamily="34" charset="-120"/>
               </a:rPr>
-              <a:t>  とても清潔で快適で、スタッフも親切でした</a:t>
+              <a:t>  綺麗広かった</a:t>
             </a:r>
             <a:endParaRPr lang="en-US" sz="1100" dirty="0"/>
           </a:p>
@@ -5850,7 +5850,7 @@
                 <a:ea typeface="Arial" pitchFamily="34" charset="-122"/>
                 <a:cs typeface="Arial" pitchFamily="34" charset="-120"/>
               </a:rPr>
-              <a:t>  特に気に入ったのは、空港までのシャトルバスです☺️ とても清潔で快適で、スタッフも親切でした</a:t>
+              <a:t>  羽田空港との無料シャトルバスを提供 清潔で静か 羽田空港との無料シャトルバスを提供 清潔で静か</a:t>
             </a:r>
             <a:endParaRPr lang="en-US" sz="1100" dirty="0"/>
           </a:p>
@@ -5890,7 +5890,7 @@
                 <a:ea typeface="Arial" pitchFamily="34" charset="-122"/>
                 <a:cs typeface="Arial" pitchFamily="34" charset="-120"/>
               </a:rPr>
-              <a:t>  Le Check in avec l’accueil par des robots dinosaures et l...</a:t>
+              <a:t>  Had an early flight, and hotel staff were very helpful in...</a:t>
             </a:r>
             <a:endParaRPr lang="en-US" sz="1100" dirty="0"/>
           </a:p>
@@ -6283,7 +6283,7 @@
                 <a:ea typeface="Arial" pitchFamily="34" charset="-122"/>
                 <a:cs typeface="Arial" pitchFamily="34" charset="-120"/>
               </a:rPr>
-              <a:t>8.29</a:t>
+              <a:t>8.28</a:t>
             </a:r>
             <a:endParaRPr lang="en-US" sz="3200" dirty="0"/>
           </a:p>
@@ -6533,7 +6533,7 @@
                 <a:ea typeface="Arial" pitchFamily="34" charset="-122"/>
                 <a:cs typeface="Arial" pitchFamily="34" charset="-120"/>
               </a:rPr>
-              <a:t>2.8%</a:t>
+              <a:t>3.3%</a:t>
             </a:r>
             <a:endParaRPr lang="en-US" sz="3200" dirty="0"/>
           </a:p>
@@ -6658,7 +6658,7 @@
                 <a:ea typeface="Arial" pitchFamily="34" charset="-122"/>
                 <a:cs typeface="Arial" pitchFamily="34" charset="-120"/>
               </a:rPr>
-              <a:t>325件</a:t>
+              <a:t>334件</a:t>
             </a:r>
             <a:endParaRPr lang="en-US" sz="3200" dirty="0"/>
           </a:p>
@@ -8272,7 +8272,7 @@
                           <a:ea typeface="Arial" pitchFamily="34" charset="-122"/>
                           <a:cs typeface="Arial" pitchFamily="34" charset="-120"/>
                         </a:rPr>
-                        <a:t>25</a:t>
+                        <a:t>26</a:t>
                       </a:r>
                       <a:endParaRPr lang="en-US" sz="900" dirty="0">
                         <a:latin typeface="Arial" charset="0"/>
@@ -8340,7 +8340,7 @@
                           <a:ea typeface="Arial" pitchFamily="34" charset="-122"/>
                           <a:cs typeface="Arial" pitchFamily="34" charset="-120"/>
                         </a:rPr>
-                        <a:t>4.16</a:t>
+                        <a:t>4.19</a:t>
                       </a:r>
                       <a:endParaRPr lang="en-US" sz="900" dirty="0">
                         <a:latin typeface="Arial" charset="0"/>
@@ -8476,7 +8476,7 @@
                           <a:ea typeface="Arial" pitchFamily="34" charset="-122"/>
                           <a:cs typeface="Arial" pitchFamily="34" charset="-120"/>
                         </a:rPr>
-                        <a:t>8.32</a:t>
+                        <a:t>8.38</a:t>
                       </a:r>
                       <a:endParaRPr lang="en-US" sz="900" dirty="0">
                         <a:latin typeface="Arial" charset="0"/>
@@ -8888,7 +8888,7 @@
                           <a:ea typeface="Arial" pitchFamily="34" charset="-122"/>
                           <a:cs typeface="Arial" pitchFamily="34" charset="-120"/>
                         </a:rPr>
-                        <a:t>Google</a:t>
+                        <a:t>Booking.com</a:t>
                       </a:r>
                       <a:endParaRPr lang="en-US" sz="900" dirty="0">
                         <a:latin typeface="Arial" charset="0"/>
@@ -8956,7 +8956,7 @@
                           <a:ea typeface="Arial" pitchFamily="34" charset="-122"/>
                           <a:cs typeface="Arial" pitchFamily="34" charset="-120"/>
                         </a:rPr>
-                        <a:t>57</a:t>
+                        <a:t>143</a:t>
                       </a:r>
                       <a:endParaRPr lang="en-US" sz="900" dirty="0">
                         <a:latin typeface="Arial" charset="0"/>
@@ -9024,7 +9024,7 @@
                           <a:ea typeface="Arial" pitchFamily="34" charset="-122"/>
                           <a:cs typeface="Arial" pitchFamily="34" charset="-120"/>
                         </a:rPr>
-                        <a:t>4.07</a:t>
+                        <a:t>8.13</a:t>
                       </a:r>
                       <a:endParaRPr lang="en-US" sz="900" dirty="0">
                         <a:latin typeface="Arial" charset="0"/>
@@ -9072,6 +9072,348 @@
                     </a:lnB>
                     <a:solidFill>
                       <a:srgbClr val="E8EFF8"/>
+                    </a:solidFill>
+                  </a:tcPr>
+                </a:tc>
+                <a:tc>
+                  <a:txBody>
+                    <a:bodyPr/>
+                    <a:lstStyle/>
+                    <a:p>
+                      <a:pPr algn="ctr" indent="0" marL="0">
+                        <a:buNone/>
+                      </a:pPr>
+                      <a:r>
+                        <a:rPr lang="en-US" sz="900" dirty="0">
+                          <a:solidFill>
+                            <a:srgbClr val="000000"/>
+                          </a:solidFill>
+                          <a:latin typeface="Arial" pitchFamily="34" charset="0"/>
+                          <a:ea typeface="Arial" pitchFamily="34" charset="-122"/>
+                          <a:cs typeface="Arial" pitchFamily="34" charset="-120"/>
+                        </a:rPr>
+                        <a:t>/10</a:t>
+                      </a:r>
+                      <a:endParaRPr lang="en-US" sz="900" dirty="0">
+                        <a:latin typeface="Arial" charset="0"/>
+                        <a:ea typeface="Arial" charset="0"/>
+                        <a:cs typeface="Arial" charset="0"/>
+                      </a:endParaRPr>
+                    </a:p>
+                  </a:txBody>
+                  <a:tcPr marL="91440" marR="91440" marT="45720" marB="45720">
+                    <a:lnL w="6350" cap="flat" cmpd="sng" algn="ctr">
+                      <a:solidFill>
+                        <a:srgbClr val="CBD5E1"/>
+                      </a:solidFill>
+                      <a:prstDash val="solid"/>
+                      <a:round/>
+                      <a:headEnd type="none" w="med" len="med"/>
+                      <a:tailEnd type="none" w="med" len="med"/>
+                    </a:lnL>
+                    <a:lnR w="6350" cap="flat" cmpd="sng" algn="ctr">
+                      <a:solidFill>
+                        <a:srgbClr val="CBD5E1"/>
+                      </a:solidFill>
+                      <a:prstDash val="solid"/>
+                      <a:round/>
+                      <a:headEnd type="none" w="med" len="med"/>
+                      <a:tailEnd type="none" w="med" len="med"/>
+                    </a:lnR>
+                    <a:lnT w="6350" cap="flat" cmpd="sng" algn="ctr">
+                      <a:solidFill>
+                        <a:srgbClr val="CBD5E1"/>
+                      </a:solidFill>
+                      <a:prstDash val="solid"/>
+                      <a:round/>
+                      <a:headEnd type="none" w="med" len="med"/>
+                      <a:tailEnd type="none" w="med" len="med"/>
+                    </a:lnT>
+                    <a:lnB w="6350" cap="flat" cmpd="sng" algn="ctr">
+                      <a:solidFill>
+                        <a:srgbClr val="CBD5E1"/>
+                      </a:solidFill>
+                      <a:prstDash val="solid"/>
+                      <a:round/>
+                      <a:headEnd type="none" w="med" len="med"/>
+                      <a:tailEnd type="none" w="med" len="med"/>
+                    </a:lnB>
+                    <a:solidFill>
+                      <a:srgbClr val="E8EFF8"/>
+                    </a:solidFill>
+                  </a:tcPr>
+                </a:tc>
+                <a:tc>
+                  <a:txBody>
+                    <a:bodyPr/>
+                    <a:lstStyle/>
+                    <a:p>
+                      <a:pPr algn="ctr" indent="0" marL="0">
+                        <a:buNone/>
+                      </a:pPr>
+                      <a:r>
+                        <a:rPr lang="en-US" sz="900" dirty="0">
+                          <a:solidFill>
+                            <a:srgbClr val="000000"/>
+                          </a:solidFill>
+                          <a:latin typeface="Arial" pitchFamily="34" charset="0"/>
+                          <a:ea typeface="Arial" pitchFamily="34" charset="-122"/>
+                          <a:cs typeface="Arial" pitchFamily="34" charset="-120"/>
+                        </a:rPr>
+                        <a:t>8.13</a:t>
+                      </a:r>
+                      <a:endParaRPr lang="en-US" sz="900" dirty="0">
+                        <a:latin typeface="Arial" charset="0"/>
+                        <a:ea typeface="Arial" charset="0"/>
+                        <a:cs typeface="Arial" charset="0"/>
+                      </a:endParaRPr>
+                    </a:p>
+                  </a:txBody>
+                  <a:tcPr marL="91440" marR="91440" marT="45720" marB="45720">
+                    <a:lnL w="6350" cap="flat" cmpd="sng" algn="ctr">
+                      <a:solidFill>
+                        <a:srgbClr val="CBD5E1"/>
+                      </a:solidFill>
+                      <a:prstDash val="solid"/>
+                      <a:round/>
+                      <a:headEnd type="none" w="med" len="med"/>
+                      <a:tailEnd type="none" w="med" len="med"/>
+                    </a:lnL>
+                    <a:lnR w="6350" cap="flat" cmpd="sng" algn="ctr">
+                      <a:solidFill>
+                        <a:srgbClr val="CBD5E1"/>
+                      </a:solidFill>
+                      <a:prstDash val="solid"/>
+                      <a:round/>
+                      <a:headEnd type="none" w="med" len="med"/>
+                      <a:tailEnd type="none" w="med" len="med"/>
+                    </a:lnR>
+                    <a:lnT w="6350" cap="flat" cmpd="sng" algn="ctr">
+                      <a:solidFill>
+                        <a:srgbClr val="CBD5E1"/>
+                      </a:solidFill>
+                      <a:prstDash val="solid"/>
+                      <a:round/>
+                      <a:headEnd type="none" w="med" len="med"/>
+                      <a:tailEnd type="none" w="med" len="med"/>
+                    </a:lnT>
+                    <a:lnB w="6350" cap="flat" cmpd="sng" algn="ctr">
+                      <a:solidFill>
+                        <a:srgbClr val="CBD5E1"/>
+                      </a:solidFill>
+                      <a:prstDash val="solid"/>
+                      <a:round/>
+                      <a:headEnd type="none" w="med" len="med"/>
+                      <a:tailEnd type="none" w="med" len="med"/>
+                    </a:lnB>
+                    <a:solidFill>
+                      <a:srgbClr val="E8EFF8"/>
+                    </a:solidFill>
+                  </a:tcPr>
+                </a:tc>
+              </a:tr>
+              <a:tr h="201168">
+                <a:tc>
+                  <a:txBody>
+                    <a:bodyPr/>
+                    <a:lstStyle/>
+                    <a:p>
+                      <a:pPr algn="ctr" indent="0" marL="0">
+                        <a:buNone/>
+                      </a:pPr>
+                      <a:r>
+                        <a:rPr lang="en-US" sz="900" dirty="0">
+                          <a:solidFill>
+                            <a:srgbClr val="000000"/>
+                          </a:solidFill>
+                          <a:latin typeface="Arial" pitchFamily="34" charset="0"/>
+                          <a:ea typeface="Arial" pitchFamily="34" charset="-122"/>
+                          <a:cs typeface="Arial" pitchFamily="34" charset="-120"/>
+                        </a:rPr>
+                        <a:t>Google</a:t>
+                      </a:r>
+                      <a:endParaRPr lang="en-US" sz="900" dirty="0">
+                        <a:latin typeface="Arial" charset="0"/>
+                        <a:ea typeface="Arial" charset="0"/>
+                        <a:cs typeface="Arial" charset="0"/>
+                      </a:endParaRPr>
+                    </a:p>
+                  </a:txBody>
+                  <a:tcPr marL="91440" marR="91440" marT="45720" marB="45720">
+                    <a:lnL w="6350" cap="flat" cmpd="sng" algn="ctr">
+                      <a:solidFill>
+                        <a:srgbClr val="CBD5E1"/>
+                      </a:solidFill>
+                      <a:prstDash val="solid"/>
+                      <a:round/>
+                      <a:headEnd type="none" w="med" len="med"/>
+                      <a:tailEnd type="none" w="med" len="med"/>
+                    </a:lnL>
+                    <a:lnR w="6350" cap="flat" cmpd="sng" algn="ctr">
+                      <a:solidFill>
+                        <a:srgbClr val="CBD5E1"/>
+                      </a:solidFill>
+                      <a:prstDash val="solid"/>
+                      <a:round/>
+                      <a:headEnd type="none" w="med" len="med"/>
+                      <a:tailEnd type="none" w="med" len="med"/>
+                    </a:lnR>
+                    <a:lnT w="6350" cap="flat" cmpd="sng" algn="ctr">
+                      <a:solidFill>
+                        <a:srgbClr val="CBD5E1"/>
+                      </a:solidFill>
+                      <a:prstDash val="solid"/>
+                      <a:round/>
+                      <a:headEnd type="none" w="med" len="med"/>
+                      <a:tailEnd type="none" w="med" len="med"/>
+                    </a:lnT>
+                    <a:lnB w="6350" cap="flat" cmpd="sng" algn="ctr">
+                      <a:solidFill>
+                        <a:srgbClr val="CBD5E1"/>
+                      </a:solidFill>
+                      <a:prstDash val="solid"/>
+                      <a:round/>
+                      <a:headEnd type="none" w="med" len="med"/>
+                      <a:tailEnd type="none" w="med" len="med"/>
+                    </a:lnB>
+                    <a:solidFill>
+                      <a:srgbClr val="FFFFFF"/>
+                    </a:solidFill>
+                  </a:tcPr>
+                </a:tc>
+                <a:tc>
+                  <a:txBody>
+                    <a:bodyPr/>
+                    <a:lstStyle/>
+                    <a:p>
+                      <a:pPr algn="ctr" indent="0" marL="0">
+                        <a:buNone/>
+                      </a:pPr>
+                      <a:r>
+                        <a:rPr lang="en-US" sz="900" dirty="0">
+                          <a:solidFill>
+                            <a:srgbClr val="000000"/>
+                          </a:solidFill>
+                          <a:latin typeface="Arial" pitchFamily="34" charset="0"/>
+                          <a:ea typeface="Arial" pitchFamily="34" charset="-122"/>
+                          <a:cs typeface="Arial" pitchFamily="34" charset="-120"/>
+                        </a:rPr>
+                        <a:t>63</a:t>
+                      </a:r>
+                      <a:endParaRPr lang="en-US" sz="900" dirty="0">
+                        <a:latin typeface="Arial" charset="0"/>
+                        <a:ea typeface="Arial" charset="0"/>
+                        <a:cs typeface="Arial" charset="0"/>
+                      </a:endParaRPr>
+                    </a:p>
+                  </a:txBody>
+                  <a:tcPr marL="91440" marR="91440" marT="45720" marB="45720">
+                    <a:lnL w="6350" cap="flat" cmpd="sng" algn="ctr">
+                      <a:solidFill>
+                        <a:srgbClr val="CBD5E1"/>
+                      </a:solidFill>
+                      <a:prstDash val="solid"/>
+                      <a:round/>
+                      <a:headEnd type="none" w="med" len="med"/>
+                      <a:tailEnd type="none" w="med" len="med"/>
+                    </a:lnL>
+                    <a:lnR w="6350" cap="flat" cmpd="sng" algn="ctr">
+                      <a:solidFill>
+                        <a:srgbClr val="CBD5E1"/>
+                      </a:solidFill>
+                      <a:prstDash val="solid"/>
+                      <a:round/>
+                      <a:headEnd type="none" w="med" len="med"/>
+                      <a:tailEnd type="none" w="med" len="med"/>
+                    </a:lnR>
+                    <a:lnT w="6350" cap="flat" cmpd="sng" algn="ctr">
+                      <a:solidFill>
+                        <a:srgbClr val="CBD5E1"/>
+                      </a:solidFill>
+                      <a:prstDash val="solid"/>
+                      <a:round/>
+                      <a:headEnd type="none" w="med" len="med"/>
+                      <a:tailEnd type="none" w="med" len="med"/>
+                    </a:lnT>
+                    <a:lnB w="6350" cap="flat" cmpd="sng" algn="ctr">
+                      <a:solidFill>
+                        <a:srgbClr val="CBD5E1"/>
+                      </a:solidFill>
+                      <a:prstDash val="solid"/>
+                      <a:round/>
+                      <a:headEnd type="none" w="med" len="med"/>
+                      <a:tailEnd type="none" w="med" len="med"/>
+                    </a:lnB>
+                    <a:solidFill>
+                      <a:srgbClr val="FFFFFF"/>
+                    </a:solidFill>
+                  </a:tcPr>
+                </a:tc>
+                <a:tc>
+                  <a:txBody>
+                    <a:bodyPr/>
+                    <a:lstStyle/>
+                    <a:p>
+                      <a:pPr algn="ctr" indent="0" marL="0">
+                        <a:buNone/>
+                      </a:pPr>
+                      <a:r>
+                        <a:rPr lang="en-US" sz="900" dirty="0">
+                          <a:solidFill>
+                            <a:srgbClr val="000000"/>
+                          </a:solidFill>
+                          <a:latin typeface="Arial" pitchFamily="34" charset="0"/>
+                          <a:ea typeface="Arial" pitchFamily="34" charset="-122"/>
+                          <a:cs typeface="Arial" pitchFamily="34" charset="-120"/>
+                        </a:rPr>
+                        <a:t>4.03</a:t>
+                      </a:r>
+                      <a:endParaRPr lang="en-US" sz="900" dirty="0">
+                        <a:latin typeface="Arial" charset="0"/>
+                        <a:ea typeface="Arial" charset="0"/>
+                        <a:cs typeface="Arial" charset="0"/>
+                      </a:endParaRPr>
+                    </a:p>
+                  </a:txBody>
+                  <a:tcPr marL="91440" marR="91440" marT="45720" marB="45720">
+                    <a:lnL w="6350" cap="flat" cmpd="sng" algn="ctr">
+                      <a:solidFill>
+                        <a:srgbClr val="CBD5E1"/>
+                      </a:solidFill>
+                      <a:prstDash val="solid"/>
+                      <a:round/>
+                      <a:headEnd type="none" w="med" len="med"/>
+                      <a:tailEnd type="none" w="med" len="med"/>
+                    </a:lnL>
+                    <a:lnR w="6350" cap="flat" cmpd="sng" algn="ctr">
+                      <a:solidFill>
+                        <a:srgbClr val="CBD5E1"/>
+                      </a:solidFill>
+                      <a:prstDash val="solid"/>
+                      <a:round/>
+                      <a:headEnd type="none" w="med" len="med"/>
+                      <a:tailEnd type="none" w="med" len="med"/>
+                    </a:lnR>
+                    <a:lnT w="6350" cap="flat" cmpd="sng" algn="ctr">
+                      <a:solidFill>
+                        <a:srgbClr val="CBD5E1"/>
+                      </a:solidFill>
+                      <a:prstDash val="solid"/>
+                      <a:round/>
+                      <a:headEnd type="none" w="med" len="med"/>
+                      <a:tailEnd type="none" w="med" len="med"/>
+                    </a:lnT>
+                    <a:lnB w="6350" cap="flat" cmpd="sng" algn="ctr">
+                      <a:solidFill>
+                        <a:srgbClr val="CBD5E1"/>
+                      </a:solidFill>
+                      <a:prstDash val="solid"/>
+                      <a:round/>
+                      <a:headEnd type="none" w="med" len="med"/>
+                      <a:tailEnd type="none" w="med" len="med"/>
+                    </a:lnB>
+                    <a:solidFill>
+                      <a:srgbClr val="FFFFFF"/>
                     </a:solidFill>
                   </a:tcPr>
                 </a:tc>
@@ -9139,144 +9481,6 @@
                       <a:tailEnd type="none" w="med" len="med"/>
                     </a:lnB>
                     <a:solidFill>
-                      <a:srgbClr val="E8EFF8"/>
-                    </a:solidFill>
-                  </a:tcPr>
-                </a:tc>
-                <a:tc>
-                  <a:txBody>
-                    <a:bodyPr/>
-                    <a:lstStyle/>
-                    <a:p>
-                      <a:pPr algn="ctr" indent="0" marL="0">
-                        <a:buNone/>
-                      </a:pPr>
-                      <a:r>
-                        <a:rPr lang="en-US" sz="900" dirty="0">
-                          <a:solidFill>
-                            <a:srgbClr val="000000"/>
-                          </a:solidFill>
-                          <a:latin typeface="Arial" pitchFamily="34" charset="0"/>
-                          <a:ea typeface="Arial" pitchFamily="34" charset="-122"/>
-                          <a:cs typeface="Arial" pitchFamily="34" charset="-120"/>
-                        </a:rPr>
-                        <a:t>8.14</a:t>
-                      </a:r>
-                      <a:endParaRPr lang="en-US" sz="900" dirty="0">
-                        <a:latin typeface="Arial" charset="0"/>
-                        <a:ea typeface="Arial" charset="0"/>
-                        <a:cs typeface="Arial" charset="0"/>
-                      </a:endParaRPr>
-                    </a:p>
-                  </a:txBody>
-                  <a:tcPr marL="91440" marR="91440" marT="45720" marB="45720">
-                    <a:lnL w="6350" cap="flat" cmpd="sng" algn="ctr">
-                      <a:solidFill>
-                        <a:srgbClr val="CBD5E1"/>
-                      </a:solidFill>
-                      <a:prstDash val="solid"/>
-                      <a:round/>
-                      <a:headEnd type="none" w="med" len="med"/>
-                      <a:tailEnd type="none" w="med" len="med"/>
-                    </a:lnL>
-                    <a:lnR w="6350" cap="flat" cmpd="sng" algn="ctr">
-                      <a:solidFill>
-                        <a:srgbClr val="CBD5E1"/>
-                      </a:solidFill>
-                      <a:prstDash val="solid"/>
-                      <a:round/>
-                      <a:headEnd type="none" w="med" len="med"/>
-                      <a:tailEnd type="none" w="med" len="med"/>
-                    </a:lnR>
-                    <a:lnT w="6350" cap="flat" cmpd="sng" algn="ctr">
-                      <a:solidFill>
-                        <a:srgbClr val="CBD5E1"/>
-                      </a:solidFill>
-                      <a:prstDash val="solid"/>
-                      <a:round/>
-                      <a:headEnd type="none" w="med" len="med"/>
-                      <a:tailEnd type="none" w="med" len="med"/>
-                    </a:lnT>
-                    <a:lnB w="6350" cap="flat" cmpd="sng" algn="ctr">
-                      <a:solidFill>
-                        <a:srgbClr val="CBD5E1"/>
-                      </a:solidFill>
-                      <a:prstDash val="solid"/>
-                      <a:round/>
-                      <a:headEnd type="none" w="med" len="med"/>
-                      <a:tailEnd type="none" w="med" len="med"/>
-                    </a:lnB>
-                    <a:solidFill>
-                      <a:srgbClr val="E8EFF8"/>
-                    </a:solidFill>
-                  </a:tcPr>
-                </a:tc>
-              </a:tr>
-              <a:tr h="201168">
-                <a:tc>
-                  <a:txBody>
-                    <a:bodyPr/>
-                    <a:lstStyle/>
-                    <a:p>
-                      <a:pPr algn="ctr" indent="0" marL="0">
-                        <a:buNone/>
-                      </a:pPr>
-                      <a:r>
-                        <a:rPr lang="en-US" sz="900" dirty="0">
-                          <a:solidFill>
-                            <a:srgbClr val="000000"/>
-                          </a:solidFill>
-                          <a:latin typeface="Arial" pitchFamily="34" charset="0"/>
-                          <a:ea typeface="Arial" pitchFamily="34" charset="-122"/>
-                          <a:cs typeface="Arial" pitchFamily="34" charset="-120"/>
-                        </a:rPr>
-                        <a:t>Booking.com</a:t>
-                      </a:r>
-                      <a:endParaRPr lang="en-US" sz="900" dirty="0">
-                        <a:latin typeface="Arial" charset="0"/>
-                        <a:ea typeface="Arial" charset="0"/>
-                        <a:cs typeface="Arial" charset="0"/>
-                      </a:endParaRPr>
-                    </a:p>
-                  </a:txBody>
-                  <a:tcPr marL="91440" marR="91440" marT="45720" marB="45720">
-                    <a:lnL w="6350" cap="flat" cmpd="sng" algn="ctr">
-                      <a:solidFill>
-                        <a:srgbClr val="CBD5E1"/>
-                      </a:solidFill>
-                      <a:prstDash val="solid"/>
-                      <a:round/>
-                      <a:headEnd type="none" w="med" len="med"/>
-                      <a:tailEnd type="none" w="med" len="med"/>
-                    </a:lnL>
-                    <a:lnR w="6350" cap="flat" cmpd="sng" algn="ctr">
-                      <a:solidFill>
-                        <a:srgbClr val="CBD5E1"/>
-                      </a:solidFill>
-                      <a:prstDash val="solid"/>
-                      <a:round/>
-                      <a:headEnd type="none" w="med" len="med"/>
-                      <a:tailEnd type="none" w="med" len="med"/>
-                    </a:lnR>
-                    <a:lnT w="6350" cap="flat" cmpd="sng" algn="ctr">
-                      <a:solidFill>
-                        <a:srgbClr val="CBD5E1"/>
-                      </a:solidFill>
-                      <a:prstDash val="solid"/>
-                      <a:round/>
-                      <a:headEnd type="none" w="med" len="med"/>
-                      <a:tailEnd type="none" w="med" len="med"/>
-                    </a:lnT>
-                    <a:lnB w="6350" cap="flat" cmpd="sng" algn="ctr">
-                      <a:solidFill>
-                        <a:srgbClr val="CBD5E1"/>
-                      </a:solidFill>
-                      <a:prstDash val="solid"/>
-                      <a:round/>
-                      <a:headEnd type="none" w="med" len="med"/>
-                      <a:tailEnd type="none" w="med" len="med"/>
-                    </a:lnB>
-                    <a:solidFill>
                       <a:srgbClr val="FFFFFF"/>
                     </a:solidFill>
                   </a:tcPr>
@@ -9298,211 +9502,7 @@
                           <a:ea typeface="Arial" pitchFamily="34" charset="-122"/>
                           <a:cs typeface="Arial" pitchFamily="34" charset="-120"/>
                         </a:rPr>
-                        <a:t>141</a:t>
-                      </a:r>
-                      <a:endParaRPr lang="en-US" sz="900" dirty="0">
-                        <a:latin typeface="Arial" charset="0"/>
-                        <a:ea typeface="Arial" charset="0"/>
-                        <a:cs typeface="Arial" charset="0"/>
-                      </a:endParaRPr>
-                    </a:p>
-                  </a:txBody>
-                  <a:tcPr marL="91440" marR="91440" marT="45720" marB="45720">
-                    <a:lnL w="6350" cap="flat" cmpd="sng" algn="ctr">
-                      <a:solidFill>
-                        <a:srgbClr val="CBD5E1"/>
-                      </a:solidFill>
-                      <a:prstDash val="solid"/>
-                      <a:round/>
-                      <a:headEnd type="none" w="med" len="med"/>
-                      <a:tailEnd type="none" w="med" len="med"/>
-                    </a:lnL>
-                    <a:lnR w="6350" cap="flat" cmpd="sng" algn="ctr">
-                      <a:solidFill>
-                        <a:srgbClr val="CBD5E1"/>
-                      </a:solidFill>
-                      <a:prstDash val="solid"/>
-                      <a:round/>
-                      <a:headEnd type="none" w="med" len="med"/>
-                      <a:tailEnd type="none" w="med" len="med"/>
-                    </a:lnR>
-                    <a:lnT w="6350" cap="flat" cmpd="sng" algn="ctr">
-                      <a:solidFill>
-                        <a:srgbClr val="CBD5E1"/>
-                      </a:solidFill>
-                      <a:prstDash val="solid"/>
-                      <a:round/>
-                      <a:headEnd type="none" w="med" len="med"/>
-                      <a:tailEnd type="none" w="med" len="med"/>
-                    </a:lnT>
-                    <a:lnB w="6350" cap="flat" cmpd="sng" algn="ctr">
-                      <a:solidFill>
-                        <a:srgbClr val="CBD5E1"/>
-                      </a:solidFill>
-                      <a:prstDash val="solid"/>
-                      <a:round/>
-                      <a:headEnd type="none" w="med" len="med"/>
-                      <a:tailEnd type="none" w="med" len="med"/>
-                    </a:lnB>
-                    <a:solidFill>
-                      <a:srgbClr val="FFFFFF"/>
-                    </a:solidFill>
-                  </a:tcPr>
-                </a:tc>
-                <a:tc>
-                  <a:txBody>
-                    <a:bodyPr/>
-                    <a:lstStyle/>
-                    <a:p>
-                      <a:pPr algn="ctr" indent="0" marL="0">
-                        <a:buNone/>
-                      </a:pPr>
-                      <a:r>
-                        <a:rPr lang="en-US" sz="900" dirty="0">
-                          <a:solidFill>
-                            <a:srgbClr val="000000"/>
-                          </a:solidFill>
-                          <a:latin typeface="Arial" pitchFamily="34" charset="0"/>
-                          <a:ea typeface="Arial" pitchFamily="34" charset="-122"/>
-                          <a:cs typeface="Arial" pitchFamily="34" charset="-120"/>
-                        </a:rPr>
-                        <a:t>8.11</a:t>
-                      </a:r>
-                      <a:endParaRPr lang="en-US" sz="900" dirty="0">
-                        <a:latin typeface="Arial" charset="0"/>
-                        <a:ea typeface="Arial" charset="0"/>
-                        <a:cs typeface="Arial" charset="0"/>
-                      </a:endParaRPr>
-                    </a:p>
-                  </a:txBody>
-                  <a:tcPr marL="91440" marR="91440" marT="45720" marB="45720">
-                    <a:lnL w="6350" cap="flat" cmpd="sng" algn="ctr">
-                      <a:solidFill>
-                        <a:srgbClr val="CBD5E1"/>
-                      </a:solidFill>
-                      <a:prstDash val="solid"/>
-                      <a:round/>
-                      <a:headEnd type="none" w="med" len="med"/>
-                      <a:tailEnd type="none" w="med" len="med"/>
-                    </a:lnL>
-                    <a:lnR w="6350" cap="flat" cmpd="sng" algn="ctr">
-                      <a:solidFill>
-                        <a:srgbClr val="CBD5E1"/>
-                      </a:solidFill>
-                      <a:prstDash val="solid"/>
-                      <a:round/>
-                      <a:headEnd type="none" w="med" len="med"/>
-                      <a:tailEnd type="none" w="med" len="med"/>
-                    </a:lnR>
-                    <a:lnT w="6350" cap="flat" cmpd="sng" algn="ctr">
-                      <a:solidFill>
-                        <a:srgbClr val="CBD5E1"/>
-                      </a:solidFill>
-                      <a:prstDash val="solid"/>
-                      <a:round/>
-                      <a:headEnd type="none" w="med" len="med"/>
-                      <a:tailEnd type="none" w="med" len="med"/>
-                    </a:lnT>
-                    <a:lnB w="6350" cap="flat" cmpd="sng" algn="ctr">
-                      <a:solidFill>
-                        <a:srgbClr val="CBD5E1"/>
-                      </a:solidFill>
-                      <a:prstDash val="solid"/>
-                      <a:round/>
-                      <a:headEnd type="none" w="med" len="med"/>
-                      <a:tailEnd type="none" w="med" len="med"/>
-                    </a:lnB>
-                    <a:solidFill>
-                      <a:srgbClr val="FFFFFF"/>
-                    </a:solidFill>
-                  </a:tcPr>
-                </a:tc>
-                <a:tc>
-                  <a:txBody>
-                    <a:bodyPr/>
-                    <a:lstStyle/>
-                    <a:p>
-                      <a:pPr algn="ctr" indent="0" marL="0">
-                        <a:buNone/>
-                      </a:pPr>
-                      <a:r>
-                        <a:rPr lang="en-US" sz="900" dirty="0">
-                          <a:solidFill>
-                            <a:srgbClr val="000000"/>
-                          </a:solidFill>
-                          <a:latin typeface="Arial" pitchFamily="34" charset="0"/>
-                          <a:ea typeface="Arial" pitchFamily="34" charset="-122"/>
-                          <a:cs typeface="Arial" pitchFamily="34" charset="-120"/>
-                        </a:rPr>
-                        <a:t>/10</a:t>
-                      </a:r>
-                      <a:endParaRPr lang="en-US" sz="900" dirty="0">
-                        <a:latin typeface="Arial" charset="0"/>
-                        <a:ea typeface="Arial" charset="0"/>
-                        <a:cs typeface="Arial" charset="0"/>
-                      </a:endParaRPr>
-                    </a:p>
-                  </a:txBody>
-                  <a:tcPr marL="91440" marR="91440" marT="45720" marB="45720">
-                    <a:lnL w="6350" cap="flat" cmpd="sng" algn="ctr">
-                      <a:solidFill>
-                        <a:srgbClr val="CBD5E1"/>
-                      </a:solidFill>
-                      <a:prstDash val="solid"/>
-                      <a:round/>
-                      <a:headEnd type="none" w="med" len="med"/>
-                      <a:tailEnd type="none" w="med" len="med"/>
-                    </a:lnL>
-                    <a:lnR w="6350" cap="flat" cmpd="sng" algn="ctr">
-                      <a:solidFill>
-                        <a:srgbClr val="CBD5E1"/>
-                      </a:solidFill>
-                      <a:prstDash val="solid"/>
-                      <a:round/>
-                      <a:headEnd type="none" w="med" len="med"/>
-                      <a:tailEnd type="none" w="med" len="med"/>
-                    </a:lnR>
-                    <a:lnT w="6350" cap="flat" cmpd="sng" algn="ctr">
-                      <a:solidFill>
-                        <a:srgbClr val="CBD5E1"/>
-                      </a:solidFill>
-                      <a:prstDash val="solid"/>
-                      <a:round/>
-                      <a:headEnd type="none" w="med" len="med"/>
-                      <a:tailEnd type="none" w="med" len="med"/>
-                    </a:lnT>
-                    <a:lnB w="6350" cap="flat" cmpd="sng" algn="ctr">
-                      <a:solidFill>
-                        <a:srgbClr val="CBD5E1"/>
-                      </a:solidFill>
-                      <a:prstDash val="solid"/>
-                      <a:round/>
-                      <a:headEnd type="none" w="med" len="med"/>
-                      <a:tailEnd type="none" w="med" len="med"/>
-                    </a:lnB>
-                    <a:solidFill>
-                      <a:srgbClr val="FFFFFF"/>
-                    </a:solidFill>
-                  </a:tcPr>
-                </a:tc>
-                <a:tc>
-                  <a:txBody>
-                    <a:bodyPr/>
-                    <a:lstStyle/>
-                    <a:p>
-                      <a:pPr algn="ctr" indent="0" marL="0">
-                        <a:buNone/>
-                      </a:pPr>
-                      <a:r>
-                        <a:rPr lang="en-US" sz="900" dirty="0">
-                          <a:solidFill>
-                            <a:srgbClr val="000000"/>
-                          </a:solidFill>
-                          <a:latin typeface="Arial" pitchFamily="34" charset="0"/>
-                          <a:ea typeface="Arial" pitchFamily="34" charset="-122"/>
-                          <a:cs typeface="Arial" pitchFamily="34" charset="-120"/>
-                        </a:rPr>
-                        <a:t>8.11</a:t>
+                        <a:t>8.06</a:t>
                       </a:r>
                       <a:endParaRPr lang="en-US" sz="900" dirty="0">
                         <a:latin typeface="Arial" charset="0"/>
@@ -9910,7 +9910,7 @@
                 <a:ea typeface="Arial" pitchFamily="34" charset="-122"/>
                 <a:cs typeface="Arial" pitchFamily="34" charset="-120"/>
               </a:rPr>
-              <a:t>247件（76.0%）</a:t>
+              <a:t>254件（76.0%）</a:t>
             </a:r>
             <a:endParaRPr lang="en-US" sz="1100" dirty="0"/>
           </a:p>
@@ -10008,7 +10008,7 @@
                 <a:ea typeface="Arial" pitchFamily="34" charset="-122"/>
                 <a:cs typeface="Arial" pitchFamily="34" charset="-120"/>
               </a:rPr>
-              <a:t>69件（21.2%）</a:t>
+              <a:t>69件（20.7%）</a:t>
             </a:r>
             <a:endParaRPr lang="en-US" sz="1100" dirty="0"/>
           </a:p>
@@ -10106,7 +10106,7 @@
                 <a:ea typeface="Arial" pitchFamily="34" charset="-122"/>
                 <a:cs typeface="Arial" pitchFamily="34" charset="-120"/>
               </a:rPr>
-              <a:t>9件（2.8%）</a:t>
+              <a:t>11件（3.3%）</a:t>
             </a:r>
             <a:endParaRPr lang="en-US" sz="1100" dirty="0"/>
           </a:p>
@@ -10518,7 +10518,7 @@
                 <a:ea typeface="Arial" pitchFamily="34" charset="-122"/>
                 <a:cs typeface="Arial" pitchFamily="34" charset="-120"/>
               </a:rPr>
-              <a:t>立地がよい</a:t>
+              <a:t>設備が素晴らしく、サービスも最高で、空港にもとても近い</a:t>
             </a:r>
             <a:endParaRPr lang="en-US" sz="900" dirty="0"/>
           </a:p>
@@ -10557,7 +10557,7 @@
                 <a:ea typeface="Arial" pitchFamily="34" charset="-122"/>
                 <a:cs typeface="Arial" pitchFamily="34" charset="-120"/>
               </a:rPr>
-              <a:t>「立地に関しては、東京中心部への電車が30分に1本しかないため、東京滞在の拠点として利用するのはお勧めしません」</a:t>
+              <a:t>「Sorprendentemente attrezzato ottimo servizio vicinissimo ...」</a:t>
             </a:r>
             <a:endParaRPr lang="en-US" sz="900" dirty="0"/>
           </a:p>
@@ -10741,7 +10741,7 @@
                 <a:ea typeface="Arial" pitchFamily="34" charset="-122"/>
                 <a:cs typeface="Arial" pitchFamily="34" charset="-120"/>
               </a:rPr>
-              <a:t>とても清潔で快適で、スタッフも親切でした</a:t>
+              <a:t>設備が素晴らしく、サービスも最高で、空港にもとても近い</a:t>
             </a:r>
             <a:endParaRPr lang="en-US" sz="900" dirty="0"/>
           </a:p>
@@ -10780,7 +10780,7 @@
                 <a:ea typeface="Arial" pitchFamily="34" charset="-122"/>
                 <a:cs typeface="Arial" pitchFamily="34" charset="-120"/>
               </a:rPr>
-              <a:t>「チェックイン手続きは全体的にスムーズでしたが、自動ロボットによる対応が少し気になりました」</a:t>
+              <a:t>「Had an early flight, and hotel staff were very helpful in...」</a:t>
             </a:r>
             <a:endParaRPr lang="en-US" sz="900" dirty="0"/>
           </a:p>
@@ -10964,7 +10964,7 @@
                 <a:ea typeface="Arial" pitchFamily="34" charset="-122"/>
                 <a:cs typeface="Arial" pitchFamily="34" charset="-120"/>
               </a:rPr>
-              <a:t>とても清潔で快適で、スタッフも親切でした</a:t>
+              <a:t>綺麗広かった</a:t>
             </a:r>
             <a:endParaRPr lang="en-US" sz="900" dirty="0"/>
           </a:p>
@@ -11003,7 +11003,7 @@
                 <a:ea typeface="Arial" pitchFamily="34" charset="-122"/>
                 <a:cs typeface="Arial" pitchFamily="34" charset="-120"/>
               </a:rPr>
-              <a:t>「とても清潔でコンパクト、そして快適でした」</a:t>
+              <a:t>「羽田空港との無料シャトルバスを提供 清潔で静か 羽田空港との無料シャトルバスを提供 清潔で静か」</a:t>
             </a:r>
             <a:endParaRPr lang="en-US" sz="900" dirty="0"/>
           </a:p>
@@ -11187,7 +11187,7 @@
                 <a:ea typeface="Arial" pitchFamily="34" charset="-122"/>
                 <a:cs typeface="Arial" pitchFamily="34" charset="-120"/>
               </a:rPr>
-              <a:t>とても清潔で快適で、スタッフも親切でした</a:t>
+              <a:t>設備が素晴らしく、サービスも最高で、空港にもとても近い</a:t>
             </a:r>
             <a:endParaRPr lang="en-US" sz="900" dirty="0"/>
           </a:p>
@@ -11226,7 +11226,7 @@
                 <a:ea typeface="Arial" pitchFamily="34" charset="-122"/>
                 <a:cs typeface="Arial" pitchFamily="34" charset="-120"/>
               </a:rPr>
-              <a:t>「とても清潔でコンパクト、そして快適でした」</a:t>
+              <a:t>「Sorprendentemente attrezzato ottimo servizio vicinissimo ...」</a:t>
             </a:r>
             <a:endParaRPr lang="en-US" sz="900" dirty="0"/>
           </a:p>
@@ -11633,7 +11633,7 @@
                 <a:ea typeface="Arial" pitchFamily="34" charset="-122"/>
                 <a:cs typeface="Arial" pitchFamily="34" charset="-120"/>
               </a:rPr>
-              <a:t>We didn’t have breakfast there</a:t>
+              <a:t>朝食がバラエティーで美味しかった</a:t>
             </a:r>
             <a:endParaRPr lang="en-US" sz="900" dirty="0"/>
           </a:p>
@@ -11672,7 +11672,7 @@
                 <a:ea typeface="Arial" pitchFamily="34" charset="-122"/>
                 <a:cs typeface="Arial" pitchFamily="34" charset="-120"/>
               </a:rPr>
-              <a:t>「近くの洋食レストランがとっても美味しかったので是非オススメします」</a:t>
+              <a:t>「Had an early flight, and hotel staff were very helpful in...」</a:t>
             </a:r>
             <a:endParaRPr lang="en-US" sz="900" dirty="0"/>
           </a:p>
@@ -12362,7 +12362,7 @@
                           <a:ea typeface="Arial" pitchFamily="34" charset="-122"/>
                           <a:cs typeface="Arial" pitchFamily="34" charset="-120"/>
                         </a:rPr>
-                        <a:t>特に気に入ったのは、空港までのシャトルバスです☺️ とても清潔で快適で、スタッフも親切でした</a:t>
+                        <a:t>羽田空港との無料シャトルバスを提供 清潔で静か 羽田空港との無料シャトルバスを提供 清潔で静か</a:t>
                       </a:r>
                       <a:endParaRPr lang="en-US" sz="900" dirty="0">
                         <a:latin typeface="Arial" charset="0"/>
@@ -12430,7 +12430,7 @@
                           <a:ea typeface="Arial" pitchFamily="34" charset="-122"/>
                           <a:cs typeface="Arial" pitchFamily="34" charset="-120"/>
                         </a:rPr>
-                        <a:t>97件</a:t>
+                        <a:t>101件</a:t>
                       </a:r>
                       <a:endParaRPr lang="en-US" sz="900" dirty="0">
                         <a:latin typeface="Arial" charset="0"/>
@@ -12636,7 +12636,7 @@
                           <a:ea typeface="Arial" pitchFamily="34" charset="-122"/>
                           <a:cs typeface="Arial" pitchFamily="34" charset="-120"/>
                         </a:rPr>
-                        <a:t>Le Check in avec l’accueil par des robots dinosaures et l...</a:t>
+                        <a:t>Had an early flight, and hotel staff were very helpful in...</a:t>
                       </a:r>
                       <a:endParaRPr lang="en-US" sz="900" dirty="0">
                         <a:latin typeface="Arial" charset="0"/>
@@ -12704,7 +12704,7 @@
                           <a:ea typeface="Arial" pitchFamily="34" charset="-122"/>
                           <a:cs typeface="Arial" pitchFamily="34" charset="-120"/>
                         </a:rPr>
-                        <a:t>35件</a:t>
+                        <a:t>36件</a:t>
                       </a:r>
                       <a:endParaRPr lang="en-US" sz="900" dirty="0">
                         <a:latin typeface="Arial" charset="0"/>

--- a/納品レポート/ホテル別レポート/henn_na_haneda_口コミ分析レポート.pptx
+++ b/納品レポート/ホテル別レポート/henn_na_haneda_口コミ分析レポート.pptx
@@ -220,10 +220,10 @@
                   <c:v>8.14</c:v>
                 </c:pt>
                 <c:pt idx="4">
-                  <c:v>8.13</c:v>
+                  <c:v>8.14</c:v>
                 </c:pt>
                 <c:pt idx="5">
-                  <c:v>8.06</c:v>
+                  <c:v>8.12</c:v>
                 </c:pt>
               </c:numCache>
             </c:numRef>
@@ -566,7 +566,7 @@
               <c:numCache>
                 <c:ptCount val="3"/>
                 <c:pt idx="0">
-                  <c:v>254</c:v>
+                  <c:v>258</c:v>
                 </c:pt>
                 <c:pt idx="1">
                   <c:v>69</c:v>
@@ -823,13 +823,13 @@
                 <c:formatCode>General</c:formatCode>
                 <c:ptCount val="9"/>
                 <c:pt idx="0">
-                  <c:v>114</c:v>
+                  <c:v>117</c:v>
                 </c:pt>
                 <c:pt idx="1">
                   <c:v>43</c:v>
                 </c:pt>
                 <c:pt idx="2">
-                  <c:v>97</c:v>
+                  <c:v>98</c:v>
                 </c:pt>
                 <c:pt idx="3">
                   <c:v>31</c:v>
@@ -2798,7 +2798,7 @@
                 <a:ea typeface="Arial" pitchFamily="34" charset="-122"/>
                 <a:cs typeface="Arial" pitchFamily="34" charset="-120"/>
               </a:rPr>
-              <a:t>レビュー総数：334件（6サイト）</a:t>
+              <a:t>レビュー総数：338件（6サイト）</a:t>
             </a:r>
             <a:endParaRPr lang="en-US" sz="1000" dirty="0"/>
           </a:p>
@@ -2818,7 +2818,7 @@
                 <a:ea typeface="Arial" pitchFamily="34" charset="-122"/>
                 <a:cs typeface="Arial" pitchFamily="34" charset="-120"/>
               </a:rPr>
-              <a:t>作成日：2026年3月27日</a:t>
+              <a:t>作成日：2026年3月28日</a:t>
             </a:r>
             <a:endParaRPr lang="en-US" sz="1000" dirty="0"/>
           </a:p>
@@ -3364,7 +3364,7 @@
                           <a:ea typeface="Arial" pitchFamily="34" charset="-122"/>
                           <a:cs typeface="Arial" pitchFamily="34" charset="-120"/>
                         </a:rPr>
-                        <a:t>8.28点</a:t>
+                        <a:t>8.30点</a:t>
                       </a:r>
                       <a:endParaRPr lang="en-US" sz="1000" dirty="0">
                         <a:latin typeface="Arial" charset="0"/>
@@ -3638,7 +3638,7 @@
                           <a:ea typeface="Arial" pitchFamily="34" charset="-122"/>
                           <a:cs typeface="Arial" pitchFamily="34" charset="-120"/>
                         </a:rPr>
-                        <a:t>76.0%</a:t>
+                        <a:t>76.3%</a:t>
                       </a:r>
                       <a:endParaRPr lang="en-US" sz="1000" dirty="0">
                         <a:latin typeface="Arial" charset="0"/>
@@ -4460,7 +4460,7 @@
                           <a:ea typeface="Arial" pitchFamily="34" charset="-122"/>
                           <a:cs typeface="Arial" pitchFamily="34" charset="-120"/>
                         </a:rPr>
-                        <a:t>約101件/期間</a:t>
+                        <a:t>約103件/期間</a:t>
                       </a:r>
                       <a:endParaRPr lang="en-US" sz="1000" dirty="0">
                         <a:latin typeface="Arial" charset="0"/>
@@ -4528,7 +4528,7 @@
                           <a:ea typeface="Arial" pitchFamily="34" charset="-122"/>
                           <a:cs typeface="Arial" pitchFamily="34" charset="-120"/>
                         </a:rPr>
-                        <a:t>50件以下</a:t>
+                        <a:t>51件以下</a:t>
                       </a:r>
                       <a:endParaRPr lang="en-US" sz="1000" dirty="0">
                         <a:latin typeface="Arial" charset="0"/>
@@ -5099,7 +5099,7 @@
                 <a:ea typeface="Arial" pitchFamily="34" charset="-122"/>
                 <a:cs typeface="Arial" pitchFamily="34" charset="-120"/>
               </a:rPr>
-              <a:t>8.28</a:t>
+              <a:t>8.30</a:t>
             </a:r>
             <a:endParaRPr lang="en-US" sz="3200" dirty="0"/>
           </a:p>
@@ -5224,7 +5224,7 @@
                 <a:ea typeface="Arial" pitchFamily="34" charset="-122"/>
                 <a:cs typeface="Arial" pitchFamily="34" charset="-120"/>
               </a:rPr>
-              <a:t>76.0%</a:t>
+              <a:t>76.3%</a:t>
             </a:r>
             <a:endParaRPr lang="en-US" sz="3200" dirty="0"/>
           </a:p>
@@ -5474,7 +5474,7 @@
                 <a:ea typeface="Arial" pitchFamily="34" charset="-122"/>
                 <a:cs typeface="Arial" pitchFamily="34" charset="-120"/>
               </a:rPr>
-              <a:t>334件</a:t>
+              <a:t>338件</a:t>
             </a:r>
             <a:endParaRPr lang="en-US" sz="3200" dirty="0"/>
           </a:p>
@@ -5850,7 +5850,7 @@
                 <a:ea typeface="Arial" pitchFamily="34" charset="-122"/>
                 <a:cs typeface="Arial" pitchFamily="34" charset="-120"/>
               </a:rPr>
-              <a:t>  羽田空港との無料シャトルバスを提供 清潔で静か 羽田空港との無料シャトルバスを提供 清潔で静か</a:t>
+              <a:t>  快適なベッド、ベッドサイドの照明、十分な広さのバスルーム、室温調節機能などが備わっています</a:t>
             </a:r>
             <a:endParaRPr lang="en-US" sz="1100" dirty="0"/>
           </a:p>
@@ -5890,7 +5890,7 @@
                 <a:ea typeface="Arial" pitchFamily="34" charset="-122"/>
                 <a:cs typeface="Arial" pitchFamily="34" charset="-120"/>
               </a:rPr>
-              <a:t>  Had an early flight, and hotel staff were very helpful in...</a:t>
+              <a:t>  Comfortable beds, access to the lights bedside, good size...</a:t>
             </a:r>
             <a:endParaRPr lang="en-US" sz="1100" dirty="0"/>
           </a:p>
@@ -5930,7 +5930,7 @@
                 <a:ea typeface="Arial" pitchFamily="34" charset="-122"/>
                 <a:cs typeface="Arial" pitchFamily="34" charset="-120"/>
               </a:rPr>
-              <a:t>  was small but good enough for us to rest well</a:t>
+              <a:t>  部屋は小さいですが、必要なものはすべて揃っています</a:t>
             </a:r>
             <a:endParaRPr lang="en-US" sz="1100" dirty="0"/>
           </a:p>
@@ -6283,7 +6283,7 @@
                 <a:ea typeface="Arial" pitchFamily="34" charset="-122"/>
                 <a:cs typeface="Arial" pitchFamily="34" charset="-120"/>
               </a:rPr>
-              <a:t>8.28</a:t>
+              <a:t>8.30</a:t>
             </a:r>
             <a:endParaRPr lang="en-US" sz="3200" dirty="0"/>
           </a:p>
@@ -6408,7 +6408,7 @@
                 <a:ea typeface="Arial" pitchFamily="34" charset="-122"/>
                 <a:cs typeface="Arial" pitchFamily="34" charset="-120"/>
               </a:rPr>
-              <a:t>76.0%</a:t>
+              <a:t>76.3%</a:t>
             </a:r>
             <a:endParaRPr lang="en-US" sz="3200" dirty="0"/>
           </a:p>
@@ -6658,7 +6658,7 @@
                 <a:ea typeface="Arial" pitchFamily="34" charset="-122"/>
                 <a:cs typeface="Arial" pitchFamily="34" charset="-120"/>
               </a:rPr>
-              <a:t>334件</a:t>
+              <a:t>338件</a:t>
             </a:r>
             <a:endParaRPr lang="en-US" sz="3200" dirty="0"/>
           </a:p>
@@ -8956,7 +8956,7 @@
                           <a:ea typeface="Arial" pitchFamily="34" charset="-122"/>
                           <a:cs typeface="Arial" pitchFamily="34" charset="-120"/>
                         </a:rPr>
-                        <a:t>143</a:t>
+                        <a:t>145</a:t>
                       </a:r>
                       <a:endParaRPr lang="en-US" sz="900" dirty="0">
                         <a:latin typeface="Arial" charset="0"/>
@@ -9024,7 +9024,7 @@
                           <a:ea typeface="Arial" pitchFamily="34" charset="-122"/>
                           <a:cs typeface="Arial" pitchFamily="34" charset="-120"/>
                         </a:rPr>
-                        <a:t>8.13</a:t>
+                        <a:t>8.14</a:t>
                       </a:r>
                       <a:endParaRPr lang="en-US" sz="900" dirty="0">
                         <a:latin typeface="Arial" charset="0"/>
@@ -9160,7 +9160,7 @@
                           <a:ea typeface="Arial" pitchFamily="34" charset="-122"/>
                           <a:cs typeface="Arial" pitchFamily="34" charset="-120"/>
                         </a:rPr>
-                        <a:t>8.13</a:t>
+                        <a:t>8.14</a:t>
                       </a:r>
                       <a:endParaRPr lang="en-US" sz="900" dirty="0">
                         <a:latin typeface="Arial" charset="0"/>
@@ -9298,7 +9298,7 @@
                           <a:ea typeface="Arial" pitchFamily="34" charset="-122"/>
                           <a:cs typeface="Arial" pitchFamily="34" charset="-120"/>
                         </a:rPr>
-                        <a:t>63</a:t>
+                        <a:t>65</a:t>
                       </a:r>
                       <a:endParaRPr lang="en-US" sz="900" dirty="0">
                         <a:latin typeface="Arial" charset="0"/>
@@ -9366,7 +9366,7 @@
                           <a:ea typeface="Arial" pitchFamily="34" charset="-122"/>
                           <a:cs typeface="Arial" pitchFamily="34" charset="-120"/>
                         </a:rPr>
-                        <a:t>4.03</a:t>
+                        <a:t>4.06</a:t>
                       </a:r>
                       <a:endParaRPr lang="en-US" sz="900" dirty="0">
                         <a:latin typeface="Arial" charset="0"/>
@@ -9502,7 +9502,7 @@
                           <a:ea typeface="Arial" pitchFamily="34" charset="-122"/>
                           <a:cs typeface="Arial" pitchFamily="34" charset="-120"/>
                         </a:rPr>
-                        <a:t>8.06</a:t>
+                        <a:t>8.12</a:t>
                       </a:r>
                       <a:endParaRPr lang="en-US" sz="900" dirty="0">
                         <a:latin typeface="Arial" charset="0"/>
@@ -9910,7 +9910,7 @@
                 <a:ea typeface="Arial" pitchFamily="34" charset="-122"/>
                 <a:cs typeface="Arial" pitchFamily="34" charset="-120"/>
               </a:rPr>
-              <a:t>254件（76.0%）</a:t>
+              <a:t>258件（76.3%）</a:t>
             </a:r>
             <a:endParaRPr lang="en-US" sz="1100" dirty="0"/>
           </a:p>
@@ -10008,7 +10008,7 @@
                 <a:ea typeface="Arial" pitchFamily="34" charset="-122"/>
                 <a:cs typeface="Arial" pitchFamily="34" charset="-120"/>
               </a:rPr>
-              <a:t>69件（20.7%）</a:t>
+              <a:t>69件（20.4%）</a:t>
             </a:r>
             <a:endParaRPr lang="en-US" sz="1100" dirty="0"/>
           </a:p>
@@ -11187,7 +11187,7 @@
                 <a:ea typeface="Arial" pitchFamily="34" charset="-122"/>
                 <a:cs typeface="Arial" pitchFamily="34" charset="-120"/>
               </a:rPr>
-              <a:t>設備が素晴らしく、サービスも最高で、空港にもとても近い</a:t>
+              <a:t>快適なベッド、ベッドサイドの照明、十分な広さのバスルーム、室温調節機能などが備わっています</a:t>
             </a:r>
             <a:endParaRPr lang="en-US" sz="900" dirty="0"/>
           </a:p>
@@ -11226,7 +11226,7 @@
                 <a:ea typeface="Arial" pitchFamily="34" charset="-122"/>
                 <a:cs typeface="Arial" pitchFamily="34" charset="-120"/>
               </a:rPr>
-              <a:t>「Sorprendentemente attrezzato ottimo servizio vicinissimo ...」</a:t>
+              <a:t>「設備が素晴らしく、サービスも最高で、空港にもとても近い」</a:t>
             </a:r>
             <a:endParaRPr lang="en-US" sz="900" dirty="0"/>
           </a:p>
@@ -12362,7 +12362,7 @@
                           <a:ea typeface="Arial" pitchFamily="34" charset="-122"/>
                           <a:cs typeface="Arial" pitchFamily="34" charset="-120"/>
                         </a:rPr>
-                        <a:t>羽田空港との無料シャトルバスを提供 清潔で静か 羽田空港との無料シャトルバスを提供 清潔で静か</a:t>
+                        <a:t>快適なベッド、ベッドサイドの照明、十分な広さのバスルーム、室温調節機能などが備わっています</a:t>
                       </a:r>
                       <a:endParaRPr lang="en-US" sz="900" dirty="0">
                         <a:latin typeface="Arial" charset="0"/>
@@ -12430,7 +12430,7 @@
                           <a:ea typeface="Arial" pitchFamily="34" charset="-122"/>
                           <a:cs typeface="Arial" pitchFamily="34" charset="-120"/>
                         </a:rPr>
-                        <a:t>101件</a:t>
+                        <a:t>103件</a:t>
                       </a:r>
                       <a:endParaRPr lang="en-US" sz="900" dirty="0">
                         <a:latin typeface="Arial" charset="0"/>
@@ -12636,7 +12636,7 @@
                           <a:ea typeface="Arial" pitchFamily="34" charset="-122"/>
                           <a:cs typeface="Arial" pitchFamily="34" charset="-120"/>
                         </a:rPr>
-                        <a:t>Had an early flight, and hotel staff were very helpful in...</a:t>
+                        <a:t>Comfortable beds, access to the lights bedside, good size...</a:t>
                       </a:r>
                       <a:endParaRPr lang="en-US" sz="900" dirty="0">
                         <a:latin typeface="Arial" charset="0"/>
@@ -12704,7 +12704,7 @@
                           <a:ea typeface="Arial" pitchFamily="34" charset="-122"/>
                           <a:cs typeface="Arial" pitchFamily="34" charset="-120"/>
                         </a:rPr>
-                        <a:t>36件</a:t>
+                        <a:t>37件</a:t>
                       </a:r>
                       <a:endParaRPr lang="en-US" sz="900" dirty="0">
                         <a:latin typeface="Arial" charset="0"/>
@@ -12910,7 +12910,7 @@
                           <a:ea typeface="Arial" pitchFamily="34" charset="-122"/>
                           <a:cs typeface="Arial" pitchFamily="34" charset="-120"/>
                         </a:rPr>
-                        <a:t>was small but good enough for us to rest well</a:t>
+                        <a:t>部屋は小さいですが、必要なものはすべて揃っています</a:t>
                       </a:r>
                       <a:endParaRPr lang="en-US" sz="900" dirty="0">
                         <a:latin typeface="Arial" charset="0"/>
@@ -12978,7 +12978,7 @@
                           <a:ea typeface="Arial" pitchFamily="34" charset="-122"/>
                           <a:cs typeface="Arial" pitchFamily="34" charset="-120"/>
                         </a:rPr>
-                        <a:t>25件</a:t>
+                        <a:t>27件</a:t>
                       </a:r>
                       <a:endParaRPr lang="en-US" sz="900" dirty="0">
                         <a:latin typeface="Arial" charset="0"/>

--- a/納品レポート/ホテル別レポート/henn_na_haneda_口コミ分析レポート.pptx
+++ b/納品レポート/ホテル別レポート/henn_na_haneda_口コミ分析レポート.pptx
@@ -255,13 +255,13 @@
                     <c:v>じゃらん</c:v>
                   </c:pt>
                   <c:pt idx="3">
+                    <c:v>Google</c:v>
+                  </c:pt>
+                  <c:pt idx="4">
                     <c:v>Agoda</c:v>
                   </c:pt>
-                  <c:pt idx="4">
+                  <c:pt idx="5">
                     <c:v>Booking.com</c:v>
-                  </c:pt>
-                  <c:pt idx="5">
-                    <c:v>Google</c:v>
                   </c:pt>
                 </c:lvl>
               </c:multiLvlStrCache>
@@ -274,7 +274,7 @@
                 <c:formatCode>General</c:formatCode>
                 <c:ptCount val="6"/>
                 <c:pt idx="0">
-                  <c:v>9.43</c:v>
+                  <c:v>9.46</c:v>
                 </c:pt>
                 <c:pt idx="1">
                   <c:v>8.57</c:v>
@@ -283,13 +283,13 @@
                   <c:v>8.38</c:v>
                 </c:pt>
                 <c:pt idx="3">
-                  <c:v>8.14</c:v>
+                  <c:v>8.15</c:v>
                 </c:pt>
                 <c:pt idx="4">
                   <c:v>8.14</c:v>
                 </c:pt>
                 <c:pt idx="5">
-                  <c:v>8.12</c:v>
+                  <c:v>8.14</c:v>
                 </c:pt>
               </c:numCache>
             </c:numRef>
@@ -642,16 +642,16 @@
                 <c:formatCode>General</c:formatCode>
                 <c:ptCount val="9"/>
                 <c:pt idx="0">
-                  <c:v>117</c:v>
+                  <c:v>119</c:v>
                 </c:pt>
                 <c:pt idx="1">
-                  <c:v>43</c:v>
+                  <c:v>44</c:v>
                 </c:pt>
                 <c:pt idx="2">
-                  <c:v>98</c:v>
+                  <c:v>99</c:v>
                 </c:pt>
                 <c:pt idx="3">
-                  <c:v>31</c:v>
+                  <c:v>32</c:v>
                 </c:pt>
                 <c:pt idx="4">
                   <c:v>29</c:v>
@@ -2554,7 +2554,7 @@
                 <a:ea typeface="Arial" pitchFamily="34" charset="-122"/>
                 <a:cs typeface="Arial" pitchFamily="34" charset="-120"/>
               </a:rPr>
-              <a:t>レビュー総数：338件</a:t>
+              <a:t>レビュー総数：343件</a:t>
             </a:r>
             <a:endParaRPr lang="en-US" sz="1000" dirty="0"/>
           </a:p>
@@ -2834,7 +2834,7 @@
                 <a:ea typeface="Arial" pitchFamily="34" charset="-122"/>
                 <a:cs typeface="Arial" pitchFamily="34" charset="-120"/>
               </a:rPr>
-              <a:t>変なホテル東京羽田は全体平均8.30点（10pt換算）、高評価率76.3%を達成しています。本レポートで示した改善施策を段階的に実施することで、さらなる顧客満足度向上が期待できます。</a:t>
+              <a:t>変なホテル東京羽田は全体平均8.31点（10pt換算）、高評価率76.4%を達成しています。本レポートで示した改善施策を段階的に実施することで、さらなる顧客満足度向上が期待できます。</a:t>
             </a:r>
             <a:endParaRPr lang="en-US" sz="1200" dirty="0"/>
           </a:p>
@@ -3271,7 +3271,7 @@
                 <a:ea typeface="Arial" pitchFamily="34" charset="-122"/>
                 <a:cs typeface="Arial" pitchFamily="34" charset="-120"/>
               </a:rPr>
-              <a:t>8.30</a:t>
+              <a:t>8.31</a:t>
             </a:r>
             <a:endParaRPr lang="en-US" sz="2800" dirty="0"/>
           </a:p>
@@ -3389,7 +3389,7 @@
                 <a:ea typeface="Arial" pitchFamily="34" charset="-122"/>
                 <a:cs typeface="Arial" pitchFamily="34" charset="-120"/>
               </a:rPr>
-              <a:t>76.3%</a:t>
+              <a:t>76.4%</a:t>
             </a:r>
             <a:endParaRPr lang="en-US" sz="2800" dirty="0"/>
           </a:p>
@@ -3507,7 +3507,7 @@
                 <a:ea typeface="Arial" pitchFamily="34" charset="-122"/>
                 <a:cs typeface="Arial" pitchFamily="34" charset="-120"/>
               </a:rPr>
-              <a:t>3.3%</a:t>
+              <a:t>3.2%</a:t>
             </a:r>
             <a:endParaRPr lang="en-US" sz="2800" dirty="0"/>
           </a:p>
@@ -3625,7 +3625,7 @@
                 <a:ea typeface="Arial" pitchFamily="34" charset="-122"/>
                 <a:cs typeface="Arial" pitchFamily="34" charset="-120"/>
               </a:rPr>
-              <a:t>338件</a:t>
+              <a:t>343件</a:t>
             </a:r>
             <a:endParaRPr lang="en-US" sz="2800" dirty="0"/>
           </a:p>
@@ -4364,7 +4364,7 @@
                           <a:ea typeface="Arial" pitchFamily="34" charset="-122"/>
                           <a:cs typeface="Arial" pitchFamily="34" charset="-120"/>
                         </a:rPr>
-                        <a:t>23</a:t>
+                        <a:t>24</a:t>
                       </a:r>
                       <a:endParaRPr lang="en-US" sz="800" dirty="0">
                         <a:latin typeface="Arial" charset="0"/>
@@ -4432,7 +4432,7 @@
                           <a:ea typeface="Arial" pitchFamily="34" charset="-122"/>
                           <a:cs typeface="Arial" pitchFamily="34" charset="-120"/>
                         </a:rPr>
-                        <a:t>9.43/10</a:t>
+                        <a:t>9.46/10</a:t>
                       </a:r>
                       <a:endParaRPr lang="en-US" sz="800" dirty="0">
                         <a:latin typeface="Arial" charset="0"/>
@@ -4500,7 +4500,7 @@
                           <a:ea typeface="Arial" pitchFamily="34" charset="-122"/>
                           <a:cs typeface="Arial" pitchFamily="34" charset="-120"/>
                         </a:rPr>
-                        <a:t>9.43</a:t>
+                        <a:t>9.46</a:t>
                       </a:r>
                       <a:endParaRPr lang="en-US" sz="800" dirty="0">
                         <a:latin typeface="Arial" charset="0"/>
@@ -5322,6 +5322,348 @@
                           <a:ea typeface="Arial" pitchFamily="34" charset="-122"/>
                           <a:cs typeface="Arial" pitchFamily="34" charset="-120"/>
                         </a:rPr>
+                        <a:t>Google</a:t>
+                      </a:r>
+                      <a:endParaRPr lang="en-US" sz="800" dirty="0">
+                        <a:latin typeface="Arial" charset="0"/>
+                        <a:ea typeface="Arial" charset="0"/>
+                        <a:cs typeface="Arial" charset="0"/>
+                      </a:endParaRPr>
+                    </a:p>
+                  </a:txBody>
+                  <a:tcPr marL="91440" marR="91440" marT="45720" marB="45720">
+                    <a:lnL w="6350" cap="flat" cmpd="sng" algn="ctr">
+                      <a:solidFill>
+                        <a:srgbClr val="CCCCCC"/>
+                      </a:solidFill>
+                      <a:prstDash val="solid"/>
+                      <a:round/>
+                      <a:headEnd type="none" w="med" len="med"/>
+                      <a:tailEnd type="none" w="med" len="med"/>
+                    </a:lnL>
+                    <a:lnR w="6350" cap="flat" cmpd="sng" algn="ctr">
+                      <a:solidFill>
+                        <a:srgbClr val="CCCCCC"/>
+                      </a:solidFill>
+                      <a:prstDash val="solid"/>
+                      <a:round/>
+                      <a:headEnd type="none" w="med" len="med"/>
+                      <a:tailEnd type="none" w="med" len="med"/>
+                    </a:lnR>
+                    <a:lnT w="6350" cap="flat" cmpd="sng" algn="ctr">
+                      <a:solidFill>
+                        <a:srgbClr val="CCCCCC"/>
+                      </a:solidFill>
+                      <a:prstDash val="solid"/>
+                      <a:round/>
+                      <a:headEnd type="none" w="med" len="med"/>
+                      <a:tailEnd type="none" w="med" len="med"/>
+                    </a:lnT>
+                    <a:lnB w="6350" cap="flat" cmpd="sng" algn="ctr">
+                      <a:solidFill>
+                        <a:srgbClr val="CCCCCC"/>
+                      </a:solidFill>
+                      <a:prstDash val="solid"/>
+                      <a:round/>
+                      <a:headEnd type="none" w="med" len="med"/>
+                      <a:tailEnd type="none" w="med" len="med"/>
+                    </a:lnB>
+                    <a:solidFill>
+                      <a:srgbClr val="FFFFFF"/>
+                    </a:solidFill>
+                  </a:tcPr>
+                </a:tc>
+                <a:tc>
+                  <a:txBody>
+                    <a:bodyPr/>
+                    <a:lstStyle/>
+                    <a:p>
+                      <a:pPr algn="ctr" indent="0" marL="0">
+                        <a:buNone/>
+                      </a:pPr>
+                      <a:r>
+                        <a:rPr lang="en-US" sz="800" dirty="0">
+                          <a:solidFill>
+                            <a:srgbClr val="000000"/>
+                          </a:solidFill>
+                          <a:latin typeface="Arial" pitchFamily="34" charset="0"/>
+                          <a:ea typeface="Arial" pitchFamily="34" charset="-122"/>
+                          <a:cs typeface="Arial" pitchFamily="34" charset="-120"/>
+                        </a:rPr>
+                        <a:t>66</a:t>
+                      </a:r>
+                      <a:endParaRPr lang="en-US" sz="800" dirty="0">
+                        <a:latin typeface="Arial" charset="0"/>
+                        <a:ea typeface="Arial" charset="0"/>
+                        <a:cs typeface="Arial" charset="0"/>
+                      </a:endParaRPr>
+                    </a:p>
+                  </a:txBody>
+                  <a:tcPr marL="91440" marR="91440" marT="45720" marB="45720">
+                    <a:lnL w="6350" cap="flat" cmpd="sng" algn="ctr">
+                      <a:solidFill>
+                        <a:srgbClr val="CCCCCC"/>
+                      </a:solidFill>
+                      <a:prstDash val="solid"/>
+                      <a:round/>
+                      <a:headEnd type="none" w="med" len="med"/>
+                      <a:tailEnd type="none" w="med" len="med"/>
+                    </a:lnL>
+                    <a:lnR w="6350" cap="flat" cmpd="sng" algn="ctr">
+                      <a:solidFill>
+                        <a:srgbClr val="CCCCCC"/>
+                      </a:solidFill>
+                      <a:prstDash val="solid"/>
+                      <a:round/>
+                      <a:headEnd type="none" w="med" len="med"/>
+                      <a:tailEnd type="none" w="med" len="med"/>
+                    </a:lnR>
+                    <a:lnT w="6350" cap="flat" cmpd="sng" algn="ctr">
+                      <a:solidFill>
+                        <a:srgbClr val="CCCCCC"/>
+                      </a:solidFill>
+                      <a:prstDash val="solid"/>
+                      <a:round/>
+                      <a:headEnd type="none" w="med" len="med"/>
+                      <a:tailEnd type="none" w="med" len="med"/>
+                    </a:lnT>
+                    <a:lnB w="6350" cap="flat" cmpd="sng" algn="ctr">
+                      <a:solidFill>
+                        <a:srgbClr val="CCCCCC"/>
+                      </a:solidFill>
+                      <a:prstDash val="solid"/>
+                      <a:round/>
+                      <a:headEnd type="none" w="med" len="med"/>
+                      <a:tailEnd type="none" w="med" len="med"/>
+                    </a:lnB>
+                    <a:solidFill>
+                      <a:srgbClr val="FFFFFF"/>
+                    </a:solidFill>
+                  </a:tcPr>
+                </a:tc>
+                <a:tc>
+                  <a:txBody>
+                    <a:bodyPr/>
+                    <a:lstStyle/>
+                    <a:p>
+                      <a:pPr algn="ctr" indent="0" marL="0">
+                        <a:buNone/>
+                      </a:pPr>
+                      <a:r>
+                        <a:rPr lang="en-US" sz="800" dirty="0">
+                          <a:solidFill>
+                            <a:srgbClr val="000000"/>
+                          </a:solidFill>
+                          <a:latin typeface="Arial" pitchFamily="34" charset="0"/>
+                          <a:ea typeface="Arial" pitchFamily="34" charset="-122"/>
+                          <a:cs typeface="Arial" pitchFamily="34" charset="-120"/>
+                        </a:rPr>
+                        <a:t>4.08/5</a:t>
+                      </a:r>
+                      <a:endParaRPr lang="en-US" sz="800" dirty="0">
+                        <a:latin typeface="Arial" charset="0"/>
+                        <a:ea typeface="Arial" charset="0"/>
+                        <a:cs typeface="Arial" charset="0"/>
+                      </a:endParaRPr>
+                    </a:p>
+                  </a:txBody>
+                  <a:tcPr marL="91440" marR="91440" marT="45720" marB="45720">
+                    <a:lnL w="6350" cap="flat" cmpd="sng" algn="ctr">
+                      <a:solidFill>
+                        <a:srgbClr val="CCCCCC"/>
+                      </a:solidFill>
+                      <a:prstDash val="solid"/>
+                      <a:round/>
+                      <a:headEnd type="none" w="med" len="med"/>
+                      <a:tailEnd type="none" w="med" len="med"/>
+                    </a:lnL>
+                    <a:lnR w="6350" cap="flat" cmpd="sng" algn="ctr">
+                      <a:solidFill>
+                        <a:srgbClr val="CCCCCC"/>
+                      </a:solidFill>
+                      <a:prstDash val="solid"/>
+                      <a:round/>
+                      <a:headEnd type="none" w="med" len="med"/>
+                      <a:tailEnd type="none" w="med" len="med"/>
+                    </a:lnR>
+                    <a:lnT w="6350" cap="flat" cmpd="sng" algn="ctr">
+                      <a:solidFill>
+                        <a:srgbClr val="CCCCCC"/>
+                      </a:solidFill>
+                      <a:prstDash val="solid"/>
+                      <a:round/>
+                      <a:headEnd type="none" w="med" len="med"/>
+                      <a:tailEnd type="none" w="med" len="med"/>
+                    </a:lnT>
+                    <a:lnB w="6350" cap="flat" cmpd="sng" algn="ctr">
+                      <a:solidFill>
+                        <a:srgbClr val="CCCCCC"/>
+                      </a:solidFill>
+                      <a:prstDash val="solid"/>
+                      <a:round/>
+                      <a:headEnd type="none" w="med" len="med"/>
+                      <a:tailEnd type="none" w="med" len="med"/>
+                    </a:lnB>
+                    <a:solidFill>
+                      <a:srgbClr val="FFFFFF"/>
+                    </a:solidFill>
+                  </a:tcPr>
+                </a:tc>
+                <a:tc>
+                  <a:txBody>
+                    <a:bodyPr/>
+                    <a:lstStyle/>
+                    <a:p>
+                      <a:pPr algn="ctr" indent="0" marL="0">
+                        <a:buNone/>
+                      </a:pPr>
+                      <a:r>
+                        <a:rPr lang="en-US" sz="800" dirty="0">
+                          <a:solidFill>
+                            <a:srgbClr val="000000"/>
+                          </a:solidFill>
+                          <a:latin typeface="Arial" pitchFamily="34" charset="0"/>
+                          <a:ea typeface="Arial" pitchFamily="34" charset="-122"/>
+                          <a:cs typeface="Arial" pitchFamily="34" charset="-120"/>
+                        </a:rPr>
+                        <a:t>8.15</a:t>
+                      </a:r>
+                      <a:endParaRPr lang="en-US" sz="800" dirty="0">
+                        <a:latin typeface="Arial" charset="0"/>
+                        <a:ea typeface="Arial" charset="0"/>
+                        <a:cs typeface="Arial" charset="0"/>
+                      </a:endParaRPr>
+                    </a:p>
+                  </a:txBody>
+                  <a:tcPr marL="91440" marR="91440" marT="45720" marB="45720">
+                    <a:lnL w="6350" cap="flat" cmpd="sng" algn="ctr">
+                      <a:solidFill>
+                        <a:srgbClr val="CCCCCC"/>
+                      </a:solidFill>
+                      <a:prstDash val="solid"/>
+                      <a:round/>
+                      <a:headEnd type="none" w="med" len="med"/>
+                      <a:tailEnd type="none" w="med" len="med"/>
+                    </a:lnL>
+                    <a:lnR w="6350" cap="flat" cmpd="sng" algn="ctr">
+                      <a:solidFill>
+                        <a:srgbClr val="CCCCCC"/>
+                      </a:solidFill>
+                      <a:prstDash val="solid"/>
+                      <a:round/>
+                      <a:headEnd type="none" w="med" len="med"/>
+                      <a:tailEnd type="none" w="med" len="med"/>
+                    </a:lnR>
+                    <a:lnT w="6350" cap="flat" cmpd="sng" algn="ctr">
+                      <a:solidFill>
+                        <a:srgbClr val="CCCCCC"/>
+                      </a:solidFill>
+                      <a:prstDash val="solid"/>
+                      <a:round/>
+                      <a:headEnd type="none" w="med" len="med"/>
+                      <a:tailEnd type="none" w="med" len="med"/>
+                    </a:lnT>
+                    <a:lnB w="6350" cap="flat" cmpd="sng" algn="ctr">
+                      <a:solidFill>
+                        <a:srgbClr val="CCCCCC"/>
+                      </a:solidFill>
+                      <a:prstDash val="solid"/>
+                      <a:round/>
+                      <a:headEnd type="none" w="med" len="med"/>
+                      <a:tailEnd type="none" w="med" len="med"/>
+                    </a:lnB>
+                    <a:solidFill>
+                      <a:srgbClr val="FFFFFF"/>
+                    </a:solidFill>
+                  </a:tcPr>
+                </a:tc>
+                <a:tc>
+                  <a:txBody>
+                    <a:bodyPr/>
+                    <a:lstStyle/>
+                    <a:p>
+                      <a:pPr algn="ctr" indent="0" marL="0">
+                        <a:buNone/>
+                      </a:pPr>
+                      <a:r>
+                        <a:rPr lang="en-US" sz="800" dirty="0">
+                          <a:solidFill>
+                            <a:srgbClr val="000000"/>
+                          </a:solidFill>
+                          <a:latin typeface="Arial" pitchFamily="34" charset="0"/>
+                          <a:ea typeface="Arial" pitchFamily="34" charset="-122"/>
+                          <a:cs typeface="Arial" pitchFamily="34" charset="-120"/>
+                        </a:rPr>
+                        <a:t>良好</a:t>
+                      </a:r>
+                      <a:endParaRPr lang="en-US" sz="800" dirty="0">
+                        <a:latin typeface="Arial" charset="0"/>
+                        <a:ea typeface="Arial" charset="0"/>
+                        <a:cs typeface="Arial" charset="0"/>
+                      </a:endParaRPr>
+                    </a:p>
+                  </a:txBody>
+                  <a:tcPr marL="91440" marR="91440" marT="45720" marB="45720">
+                    <a:lnL w="6350" cap="flat" cmpd="sng" algn="ctr">
+                      <a:solidFill>
+                        <a:srgbClr val="CCCCCC"/>
+                      </a:solidFill>
+                      <a:prstDash val="solid"/>
+                      <a:round/>
+                      <a:headEnd type="none" w="med" len="med"/>
+                      <a:tailEnd type="none" w="med" len="med"/>
+                    </a:lnL>
+                    <a:lnR w="6350" cap="flat" cmpd="sng" algn="ctr">
+                      <a:solidFill>
+                        <a:srgbClr val="CCCCCC"/>
+                      </a:solidFill>
+                      <a:prstDash val="solid"/>
+                      <a:round/>
+                      <a:headEnd type="none" w="med" len="med"/>
+                      <a:tailEnd type="none" w="med" len="med"/>
+                    </a:lnR>
+                    <a:lnT w="6350" cap="flat" cmpd="sng" algn="ctr">
+                      <a:solidFill>
+                        <a:srgbClr val="CCCCCC"/>
+                      </a:solidFill>
+                      <a:prstDash val="solid"/>
+                      <a:round/>
+                      <a:headEnd type="none" w="med" len="med"/>
+                      <a:tailEnd type="none" w="med" len="med"/>
+                    </a:lnT>
+                    <a:lnB w="6350" cap="flat" cmpd="sng" algn="ctr">
+                      <a:solidFill>
+                        <a:srgbClr val="CCCCCC"/>
+                      </a:solidFill>
+                      <a:prstDash val="solid"/>
+                      <a:round/>
+                      <a:headEnd type="none" w="med" len="med"/>
+                      <a:tailEnd type="none" w="med" len="med"/>
+                    </a:lnB>
+                    <a:solidFill>
+                      <a:srgbClr val="FFFFFF"/>
+                    </a:solidFill>
+                  </a:tcPr>
+                </a:tc>
+              </a:tr>
+              <a:tr h="0">
+                <a:tc>
+                  <a:txBody>
+                    <a:bodyPr/>
+                    <a:lstStyle/>
+                    <a:p>
+                      <a:pPr algn="ctr" indent="0" marL="0">
+                        <a:buNone/>
+                      </a:pPr>
+                      <a:r>
+                        <a:rPr lang="en-US" sz="800" dirty="0">
+                          <a:solidFill>
+                            <a:srgbClr val="000000"/>
+                          </a:solidFill>
+                          <a:latin typeface="Arial" pitchFamily="34" charset="0"/>
+                          <a:ea typeface="Arial" pitchFamily="34" charset="-122"/>
+                          <a:cs typeface="Arial" pitchFamily="34" charset="-120"/>
+                        </a:rPr>
                         <a:t>Agoda</a:t>
                       </a:r>
                       <a:endParaRPr lang="en-US" sz="800" dirty="0">
@@ -5732,7 +6074,7 @@
                           <a:ea typeface="Arial" pitchFamily="34" charset="-122"/>
                           <a:cs typeface="Arial" pitchFamily="34" charset="-120"/>
                         </a:rPr>
-                        <a:t>145</a:t>
+                        <a:t>148</a:t>
                       </a:r>
                       <a:endParaRPr lang="en-US" sz="800" dirty="0">
                         <a:latin typeface="Arial" charset="0"/>
@@ -5869,348 +6211,6 @@
                           <a:cs typeface="Arial" pitchFamily="34" charset="-120"/>
                         </a:rPr>
                         <a:t>8.14</a:t>
-                      </a:r>
-                      <a:endParaRPr lang="en-US" sz="800" dirty="0">
-                        <a:latin typeface="Arial" charset="0"/>
-                        <a:ea typeface="Arial" charset="0"/>
-                        <a:cs typeface="Arial" charset="0"/>
-                      </a:endParaRPr>
-                    </a:p>
-                  </a:txBody>
-                  <a:tcPr marL="91440" marR="91440" marT="45720" marB="45720">
-                    <a:lnL w="6350" cap="flat" cmpd="sng" algn="ctr">
-                      <a:solidFill>
-                        <a:srgbClr val="CCCCCC"/>
-                      </a:solidFill>
-                      <a:prstDash val="solid"/>
-                      <a:round/>
-                      <a:headEnd type="none" w="med" len="med"/>
-                      <a:tailEnd type="none" w="med" len="med"/>
-                    </a:lnL>
-                    <a:lnR w="6350" cap="flat" cmpd="sng" algn="ctr">
-                      <a:solidFill>
-                        <a:srgbClr val="CCCCCC"/>
-                      </a:solidFill>
-                      <a:prstDash val="solid"/>
-                      <a:round/>
-                      <a:headEnd type="none" w="med" len="med"/>
-                      <a:tailEnd type="none" w="med" len="med"/>
-                    </a:lnR>
-                    <a:lnT w="6350" cap="flat" cmpd="sng" algn="ctr">
-                      <a:solidFill>
-                        <a:srgbClr val="CCCCCC"/>
-                      </a:solidFill>
-                      <a:prstDash val="solid"/>
-                      <a:round/>
-                      <a:headEnd type="none" w="med" len="med"/>
-                      <a:tailEnd type="none" w="med" len="med"/>
-                    </a:lnT>
-                    <a:lnB w="6350" cap="flat" cmpd="sng" algn="ctr">
-                      <a:solidFill>
-                        <a:srgbClr val="CCCCCC"/>
-                      </a:solidFill>
-                      <a:prstDash val="solid"/>
-                      <a:round/>
-                      <a:headEnd type="none" w="med" len="med"/>
-                      <a:tailEnd type="none" w="med" len="med"/>
-                    </a:lnB>
-                    <a:solidFill>
-                      <a:srgbClr val="FFFFFF"/>
-                    </a:solidFill>
-                  </a:tcPr>
-                </a:tc>
-                <a:tc>
-                  <a:txBody>
-                    <a:bodyPr/>
-                    <a:lstStyle/>
-                    <a:p>
-                      <a:pPr algn="ctr" indent="0" marL="0">
-                        <a:buNone/>
-                      </a:pPr>
-                      <a:r>
-                        <a:rPr lang="en-US" sz="800" dirty="0">
-                          <a:solidFill>
-                            <a:srgbClr val="000000"/>
-                          </a:solidFill>
-                          <a:latin typeface="Arial" pitchFamily="34" charset="0"/>
-                          <a:ea typeface="Arial" pitchFamily="34" charset="-122"/>
-                          <a:cs typeface="Arial" pitchFamily="34" charset="-120"/>
-                        </a:rPr>
-                        <a:t>良好</a:t>
-                      </a:r>
-                      <a:endParaRPr lang="en-US" sz="800" dirty="0">
-                        <a:latin typeface="Arial" charset="0"/>
-                        <a:ea typeface="Arial" charset="0"/>
-                        <a:cs typeface="Arial" charset="0"/>
-                      </a:endParaRPr>
-                    </a:p>
-                  </a:txBody>
-                  <a:tcPr marL="91440" marR="91440" marT="45720" marB="45720">
-                    <a:lnL w="6350" cap="flat" cmpd="sng" algn="ctr">
-                      <a:solidFill>
-                        <a:srgbClr val="CCCCCC"/>
-                      </a:solidFill>
-                      <a:prstDash val="solid"/>
-                      <a:round/>
-                      <a:headEnd type="none" w="med" len="med"/>
-                      <a:tailEnd type="none" w="med" len="med"/>
-                    </a:lnL>
-                    <a:lnR w="6350" cap="flat" cmpd="sng" algn="ctr">
-                      <a:solidFill>
-                        <a:srgbClr val="CCCCCC"/>
-                      </a:solidFill>
-                      <a:prstDash val="solid"/>
-                      <a:round/>
-                      <a:headEnd type="none" w="med" len="med"/>
-                      <a:tailEnd type="none" w="med" len="med"/>
-                    </a:lnR>
-                    <a:lnT w="6350" cap="flat" cmpd="sng" algn="ctr">
-                      <a:solidFill>
-                        <a:srgbClr val="CCCCCC"/>
-                      </a:solidFill>
-                      <a:prstDash val="solid"/>
-                      <a:round/>
-                      <a:headEnd type="none" w="med" len="med"/>
-                      <a:tailEnd type="none" w="med" len="med"/>
-                    </a:lnT>
-                    <a:lnB w="6350" cap="flat" cmpd="sng" algn="ctr">
-                      <a:solidFill>
-                        <a:srgbClr val="CCCCCC"/>
-                      </a:solidFill>
-                      <a:prstDash val="solid"/>
-                      <a:round/>
-                      <a:headEnd type="none" w="med" len="med"/>
-                      <a:tailEnd type="none" w="med" len="med"/>
-                    </a:lnB>
-                    <a:solidFill>
-                      <a:srgbClr val="FFFFFF"/>
-                    </a:solidFill>
-                  </a:tcPr>
-                </a:tc>
-              </a:tr>
-              <a:tr h="0">
-                <a:tc>
-                  <a:txBody>
-                    <a:bodyPr/>
-                    <a:lstStyle/>
-                    <a:p>
-                      <a:pPr algn="ctr" indent="0" marL="0">
-                        <a:buNone/>
-                      </a:pPr>
-                      <a:r>
-                        <a:rPr lang="en-US" sz="800" dirty="0">
-                          <a:solidFill>
-                            <a:srgbClr val="000000"/>
-                          </a:solidFill>
-                          <a:latin typeface="Arial" pitchFamily="34" charset="0"/>
-                          <a:ea typeface="Arial" pitchFamily="34" charset="-122"/>
-                          <a:cs typeface="Arial" pitchFamily="34" charset="-120"/>
-                        </a:rPr>
-                        <a:t>Google</a:t>
-                      </a:r>
-                      <a:endParaRPr lang="en-US" sz="800" dirty="0">
-                        <a:latin typeface="Arial" charset="0"/>
-                        <a:ea typeface="Arial" charset="0"/>
-                        <a:cs typeface="Arial" charset="0"/>
-                      </a:endParaRPr>
-                    </a:p>
-                  </a:txBody>
-                  <a:tcPr marL="91440" marR="91440" marT="45720" marB="45720">
-                    <a:lnL w="6350" cap="flat" cmpd="sng" algn="ctr">
-                      <a:solidFill>
-                        <a:srgbClr val="CCCCCC"/>
-                      </a:solidFill>
-                      <a:prstDash val="solid"/>
-                      <a:round/>
-                      <a:headEnd type="none" w="med" len="med"/>
-                      <a:tailEnd type="none" w="med" len="med"/>
-                    </a:lnL>
-                    <a:lnR w="6350" cap="flat" cmpd="sng" algn="ctr">
-                      <a:solidFill>
-                        <a:srgbClr val="CCCCCC"/>
-                      </a:solidFill>
-                      <a:prstDash val="solid"/>
-                      <a:round/>
-                      <a:headEnd type="none" w="med" len="med"/>
-                      <a:tailEnd type="none" w="med" len="med"/>
-                    </a:lnR>
-                    <a:lnT w="6350" cap="flat" cmpd="sng" algn="ctr">
-                      <a:solidFill>
-                        <a:srgbClr val="CCCCCC"/>
-                      </a:solidFill>
-                      <a:prstDash val="solid"/>
-                      <a:round/>
-                      <a:headEnd type="none" w="med" len="med"/>
-                      <a:tailEnd type="none" w="med" len="med"/>
-                    </a:lnT>
-                    <a:lnB w="6350" cap="flat" cmpd="sng" algn="ctr">
-                      <a:solidFill>
-                        <a:srgbClr val="CCCCCC"/>
-                      </a:solidFill>
-                      <a:prstDash val="solid"/>
-                      <a:round/>
-                      <a:headEnd type="none" w="med" len="med"/>
-                      <a:tailEnd type="none" w="med" len="med"/>
-                    </a:lnB>
-                    <a:solidFill>
-                      <a:srgbClr val="FFFFFF"/>
-                    </a:solidFill>
-                  </a:tcPr>
-                </a:tc>
-                <a:tc>
-                  <a:txBody>
-                    <a:bodyPr/>
-                    <a:lstStyle/>
-                    <a:p>
-                      <a:pPr algn="ctr" indent="0" marL="0">
-                        <a:buNone/>
-                      </a:pPr>
-                      <a:r>
-                        <a:rPr lang="en-US" sz="800" dirty="0">
-                          <a:solidFill>
-                            <a:srgbClr val="000000"/>
-                          </a:solidFill>
-                          <a:latin typeface="Arial" pitchFamily="34" charset="0"/>
-                          <a:ea typeface="Arial" pitchFamily="34" charset="-122"/>
-                          <a:cs typeface="Arial" pitchFamily="34" charset="-120"/>
-                        </a:rPr>
-                        <a:t>65</a:t>
-                      </a:r>
-                      <a:endParaRPr lang="en-US" sz="800" dirty="0">
-                        <a:latin typeface="Arial" charset="0"/>
-                        <a:ea typeface="Arial" charset="0"/>
-                        <a:cs typeface="Arial" charset="0"/>
-                      </a:endParaRPr>
-                    </a:p>
-                  </a:txBody>
-                  <a:tcPr marL="91440" marR="91440" marT="45720" marB="45720">
-                    <a:lnL w="6350" cap="flat" cmpd="sng" algn="ctr">
-                      <a:solidFill>
-                        <a:srgbClr val="CCCCCC"/>
-                      </a:solidFill>
-                      <a:prstDash val="solid"/>
-                      <a:round/>
-                      <a:headEnd type="none" w="med" len="med"/>
-                      <a:tailEnd type="none" w="med" len="med"/>
-                    </a:lnL>
-                    <a:lnR w="6350" cap="flat" cmpd="sng" algn="ctr">
-                      <a:solidFill>
-                        <a:srgbClr val="CCCCCC"/>
-                      </a:solidFill>
-                      <a:prstDash val="solid"/>
-                      <a:round/>
-                      <a:headEnd type="none" w="med" len="med"/>
-                      <a:tailEnd type="none" w="med" len="med"/>
-                    </a:lnR>
-                    <a:lnT w="6350" cap="flat" cmpd="sng" algn="ctr">
-                      <a:solidFill>
-                        <a:srgbClr val="CCCCCC"/>
-                      </a:solidFill>
-                      <a:prstDash val="solid"/>
-                      <a:round/>
-                      <a:headEnd type="none" w="med" len="med"/>
-                      <a:tailEnd type="none" w="med" len="med"/>
-                    </a:lnT>
-                    <a:lnB w="6350" cap="flat" cmpd="sng" algn="ctr">
-                      <a:solidFill>
-                        <a:srgbClr val="CCCCCC"/>
-                      </a:solidFill>
-                      <a:prstDash val="solid"/>
-                      <a:round/>
-                      <a:headEnd type="none" w="med" len="med"/>
-                      <a:tailEnd type="none" w="med" len="med"/>
-                    </a:lnB>
-                    <a:solidFill>
-                      <a:srgbClr val="FFFFFF"/>
-                    </a:solidFill>
-                  </a:tcPr>
-                </a:tc>
-                <a:tc>
-                  <a:txBody>
-                    <a:bodyPr/>
-                    <a:lstStyle/>
-                    <a:p>
-                      <a:pPr algn="ctr" indent="0" marL="0">
-                        <a:buNone/>
-                      </a:pPr>
-                      <a:r>
-                        <a:rPr lang="en-US" sz="800" dirty="0">
-                          <a:solidFill>
-                            <a:srgbClr val="000000"/>
-                          </a:solidFill>
-                          <a:latin typeface="Arial" pitchFamily="34" charset="0"/>
-                          <a:ea typeface="Arial" pitchFamily="34" charset="-122"/>
-                          <a:cs typeface="Arial" pitchFamily="34" charset="-120"/>
-                        </a:rPr>
-                        <a:t>4.06/5</a:t>
-                      </a:r>
-                      <a:endParaRPr lang="en-US" sz="800" dirty="0">
-                        <a:latin typeface="Arial" charset="0"/>
-                        <a:ea typeface="Arial" charset="0"/>
-                        <a:cs typeface="Arial" charset="0"/>
-                      </a:endParaRPr>
-                    </a:p>
-                  </a:txBody>
-                  <a:tcPr marL="91440" marR="91440" marT="45720" marB="45720">
-                    <a:lnL w="6350" cap="flat" cmpd="sng" algn="ctr">
-                      <a:solidFill>
-                        <a:srgbClr val="CCCCCC"/>
-                      </a:solidFill>
-                      <a:prstDash val="solid"/>
-                      <a:round/>
-                      <a:headEnd type="none" w="med" len="med"/>
-                      <a:tailEnd type="none" w="med" len="med"/>
-                    </a:lnL>
-                    <a:lnR w="6350" cap="flat" cmpd="sng" algn="ctr">
-                      <a:solidFill>
-                        <a:srgbClr val="CCCCCC"/>
-                      </a:solidFill>
-                      <a:prstDash val="solid"/>
-                      <a:round/>
-                      <a:headEnd type="none" w="med" len="med"/>
-                      <a:tailEnd type="none" w="med" len="med"/>
-                    </a:lnR>
-                    <a:lnT w="6350" cap="flat" cmpd="sng" algn="ctr">
-                      <a:solidFill>
-                        <a:srgbClr val="CCCCCC"/>
-                      </a:solidFill>
-                      <a:prstDash val="solid"/>
-                      <a:round/>
-                      <a:headEnd type="none" w="med" len="med"/>
-                      <a:tailEnd type="none" w="med" len="med"/>
-                    </a:lnT>
-                    <a:lnB w="6350" cap="flat" cmpd="sng" algn="ctr">
-                      <a:solidFill>
-                        <a:srgbClr val="CCCCCC"/>
-                      </a:solidFill>
-                      <a:prstDash val="solid"/>
-                      <a:round/>
-                      <a:headEnd type="none" w="med" len="med"/>
-                      <a:tailEnd type="none" w="med" len="med"/>
-                    </a:lnB>
-                    <a:solidFill>
-                      <a:srgbClr val="FFFFFF"/>
-                    </a:solidFill>
-                  </a:tcPr>
-                </a:tc>
-                <a:tc>
-                  <a:txBody>
-                    <a:bodyPr/>
-                    <a:lstStyle/>
-                    <a:p>
-                      <a:pPr algn="ctr" indent="0" marL="0">
-                        <a:buNone/>
-                      </a:pPr>
-                      <a:r>
-                        <a:rPr lang="en-US" sz="800" dirty="0">
-                          <a:solidFill>
-                            <a:srgbClr val="000000"/>
-                          </a:solidFill>
-                          <a:latin typeface="Arial" pitchFamily="34" charset="0"/>
-                          <a:ea typeface="Arial" pitchFamily="34" charset="-122"/>
-                          <a:cs typeface="Arial" pitchFamily="34" charset="-120"/>
-                        </a:rPr>
-                        <a:t>8.12</a:t>
                       </a:r>
                       <a:endParaRPr lang="en-US" sz="800" dirty="0">
                         <a:latin typeface="Arial" charset="0"/>
@@ -6663,7 +6663,7 @@
                 <a:ea typeface="Arial" pitchFamily="34" charset="-122"/>
                 <a:cs typeface="Arial" pitchFamily="34" charset="-120"/>
               </a:rPr>
-              <a:t>258件（76.3%）</a:t>
+              <a:t>262件（76.4%）</a:t>
             </a:r>
             <a:endParaRPr lang="en-US" sz="1600" dirty="0"/>
           </a:p>
@@ -6761,7 +6761,7 @@
                 <a:ea typeface="Arial" pitchFamily="34" charset="-122"/>
                 <a:cs typeface="Arial" pitchFamily="34" charset="-120"/>
               </a:rPr>
-              <a:t>69件（20.4%）</a:t>
+              <a:t>70件（20.4%）</a:t>
             </a:r>
             <a:endParaRPr lang="en-US" sz="1600" dirty="0"/>
           </a:p>
@@ -6859,7 +6859,7 @@
                 <a:ea typeface="Arial" pitchFamily="34" charset="-122"/>
                 <a:cs typeface="Arial" pitchFamily="34" charset="-120"/>
               </a:rPr>
-              <a:t>11件（3.3%）</a:t>
+              <a:t>11件（3.2%）</a:t>
             </a:r>
             <a:endParaRPr lang="en-US" sz="1600" dirty="0"/>
           </a:p>
@@ -7021,7 +7021,7 @@
                 <a:ea typeface="Arial" pitchFamily="34" charset="-122"/>
                 <a:cs typeface="Arial" pitchFamily="34" charset="-120"/>
               </a:rPr>
-              <a:t>高評価レビュー（8-10点: 258件）の分析から、主要な強みテーマを抽出しています。立地・アクセス、客室清潔感、スタッフ対応が高評価の中心的テーマです。</a:t>
+              <a:t>高評価レビュー（8-10点: 262件）の分析から、主要な強みテーマを抽出しています。立地・アクセス、客室清潔感、スタッフ対応が高評価の中心的テーマです。</a:t>
             </a:r>
             <a:endParaRPr lang="en-US" sz="1200" dirty="0"/>
           </a:p>
@@ -7281,7 +7281,7 @@
                 <a:ea typeface="Arial" pitchFamily="34" charset="-122"/>
                 <a:cs typeface="Arial" pitchFamily="34" charset="-120"/>
               </a:rPr>
-              <a:t>低評価・中評価レビュー（80件）から改善課題を優先度別に整理しています。S/A/B/Cの4段階で優先度を設定し、計画的な改善を推進します。</a:t>
+              <a:t>低評価・中評価レビュー（81件）から改善課題を優先度別に整理しています。S/A/B/Cの4段階で優先度を設定し、計画的な改善を推進します。</a:t>
             </a:r>
             <a:endParaRPr lang="en-US" sz="1200" dirty="0"/>
           </a:p>
@@ -8061,7 +8061,7 @@
                 <a:ea typeface="Arial" pitchFamily="34" charset="-122"/>
                 <a:cs typeface="Arial" pitchFamily="34" charset="-120"/>
               </a:rPr>
-              <a:t>全体平均 8.30点 → 目標 8.80点</a:t>
+              <a:t>全体平均 8.31点 → 目標 8.81点</a:t>
             </a:r>
             <a:endParaRPr lang="en-US" sz="1200" dirty="0"/>
           </a:p>
@@ -8078,7 +8078,7 @@
                 <a:ea typeface="Arial" pitchFamily="34" charset="-122"/>
                 <a:cs typeface="Arial" pitchFamily="34" charset="-120"/>
               </a:rPr>
-              <a:t>高評価率 76.3% → 目標 81.3%</a:t>
+              <a:t>高評価率 76.4% → 目標 81.4%</a:t>
             </a:r>
             <a:endParaRPr lang="en-US" sz="1200" dirty="0"/>
           </a:p>
@@ -8095,7 +8095,7 @@
                 <a:ea typeface="Arial" pitchFamily="34" charset="-122"/>
                 <a:cs typeface="Arial" pitchFamily="34" charset="-120"/>
               </a:rPr>
-              <a:t>低評価率 3.3% → 目標 1.3%</a:t>
+              <a:t>低評価率 3.2% → 目標 1.2%</a:t>
             </a:r>
             <a:endParaRPr lang="en-US" sz="1200" dirty="0"/>
           </a:p>

--- a/納品レポート/ホテル別レポート/henn_na_haneda_口コミ分析レポート.pptx
+++ b/納品レポート/ホテル別レポート/henn_na_haneda_口コミ分析レポート.pptx
@@ -255,13 +255,13 @@
                     <c:v>じゃらん</c:v>
                   </c:pt>
                   <c:pt idx="3">
-                    <c:v>Google</c:v>
+                    <c:v>Agoda</c:v>
                   </c:pt>
                   <c:pt idx="4">
-                    <c:v>Agoda</c:v>
+                    <c:v>Booking.com</c:v>
                   </c:pt>
                   <c:pt idx="5">
-                    <c:v>Booking.com</c:v>
+                    <c:v>Google</c:v>
                   </c:pt>
                 </c:lvl>
               </c:multiLvlStrCache>
@@ -274,7 +274,7 @@
                 <c:formatCode>General</c:formatCode>
                 <c:ptCount val="6"/>
                 <c:pt idx="0">
-                  <c:v>9.46</c:v>
+                  <c:v>9.4</c:v>
                 </c:pt>
                 <c:pt idx="1">
                   <c:v>8.57</c:v>
@@ -283,13 +283,13 @@
                   <c:v>8.38</c:v>
                 </c:pt>
                 <c:pt idx="3">
+                  <c:v>8.2</c:v>
+                </c:pt>
+                <c:pt idx="4">
                   <c:v>8.15</c:v>
                 </c:pt>
-                <c:pt idx="4">
-                  <c:v>8.14</c:v>
-                </c:pt>
                 <c:pt idx="5">
-                  <c:v>8.14</c:v>
+                  <c:v>8.15</c:v>
                 </c:pt>
               </c:numCache>
             </c:numRef>
@@ -642,16 +642,16 @@
                 <c:formatCode>General</c:formatCode>
                 <c:ptCount val="9"/>
                 <c:pt idx="0">
-                  <c:v>119</c:v>
+                  <c:v>121</c:v>
                 </c:pt>
                 <c:pt idx="1">
-                  <c:v>44</c:v>
+                  <c:v>45</c:v>
                 </c:pt>
                 <c:pt idx="2">
-                  <c:v>99</c:v>
+                  <c:v>102</c:v>
                 </c:pt>
                 <c:pt idx="3">
-                  <c:v>32</c:v>
+                  <c:v>33</c:v>
                 </c:pt>
                 <c:pt idx="4">
                   <c:v>29</c:v>
@@ -2554,7 +2554,7 @@
                 <a:ea typeface="Arial" pitchFamily="34" charset="-122"/>
                 <a:cs typeface="Arial" pitchFamily="34" charset="-120"/>
               </a:rPr>
-              <a:t>レビュー総数：343件</a:t>
+              <a:t>レビュー総数：350件</a:t>
             </a:r>
             <a:endParaRPr lang="en-US" sz="1000" dirty="0"/>
           </a:p>
@@ -2834,7 +2834,7 @@
                 <a:ea typeface="Arial" pitchFamily="34" charset="-122"/>
                 <a:cs typeface="Arial" pitchFamily="34" charset="-120"/>
               </a:rPr>
-              <a:t>変なホテル東京羽田は全体平均8.31点（10pt換算）、高評価率76.4%を達成しています。本レポートで示した改善施策を段階的に実施することで、さらなる顧客満足度向上が期待できます。</a:t>
+              <a:t>変なホテル東京羽田は全体平均8.31点（10pt換算）、高評価率76.6%を達成しています。本レポートで示した改善施策を段階的に実施することで、さらなる顧客満足度向上が期待できます。</a:t>
             </a:r>
             <a:endParaRPr lang="en-US" sz="1200" dirty="0"/>
           </a:p>
@@ -3389,7 +3389,7 @@
                 <a:ea typeface="Arial" pitchFamily="34" charset="-122"/>
                 <a:cs typeface="Arial" pitchFamily="34" charset="-120"/>
               </a:rPr>
-              <a:t>76.4%</a:t>
+              <a:t>76.6%</a:t>
             </a:r>
             <a:endParaRPr lang="en-US" sz="2800" dirty="0"/>
           </a:p>
@@ -3507,7 +3507,7 @@
                 <a:ea typeface="Arial" pitchFamily="34" charset="-122"/>
                 <a:cs typeface="Arial" pitchFamily="34" charset="-120"/>
               </a:rPr>
-              <a:t>3.2%</a:t>
+              <a:t>3.1%</a:t>
             </a:r>
             <a:endParaRPr lang="en-US" sz="2800" dirty="0"/>
           </a:p>
@@ -3625,7 +3625,7 @@
                 <a:ea typeface="Arial" pitchFamily="34" charset="-122"/>
                 <a:cs typeface="Arial" pitchFamily="34" charset="-120"/>
               </a:rPr>
-              <a:t>343件</a:t>
+              <a:t>350件</a:t>
             </a:r>
             <a:endParaRPr lang="en-US" sz="2800" dirty="0"/>
           </a:p>
@@ -4364,7 +4364,7 @@
                           <a:ea typeface="Arial" pitchFamily="34" charset="-122"/>
                           <a:cs typeface="Arial" pitchFamily="34" charset="-120"/>
                         </a:rPr>
-                        <a:t>24</a:t>
+                        <a:t>25</a:t>
                       </a:r>
                       <a:endParaRPr lang="en-US" sz="800" dirty="0">
                         <a:latin typeface="Arial" charset="0"/>
@@ -4432,7 +4432,7 @@
                           <a:ea typeface="Arial" pitchFamily="34" charset="-122"/>
                           <a:cs typeface="Arial" pitchFamily="34" charset="-120"/>
                         </a:rPr>
-                        <a:t>9.46/10</a:t>
+                        <a:t>9.40/10</a:t>
                       </a:r>
                       <a:endParaRPr lang="en-US" sz="800" dirty="0">
                         <a:latin typeface="Arial" charset="0"/>
@@ -4500,7 +4500,7 @@
                           <a:ea typeface="Arial" pitchFamily="34" charset="-122"/>
                           <a:cs typeface="Arial" pitchFamily="34" charset="-120"/>
                         </a:rPr>
-                        <a:t>9.46</a:t>
+                        <a:t>9.40</a:t>
                       </a:r>
                       <a:endParaRPr lang="en-US" sz="800" dirty="0">
                         <a:latin typeface="Arial" charset="0"/>
@@ -5322,7 +5322,7 @@
                           <a:ea typeface="Arial" pitchFamily="34" charset="-122"/>
                           <a:cs typeface="Arial" pitchFamily="34" charset="-120"/>
                         </a:rPr>
-                        <a:t>Google</a:t>
+                        <a:t>Agoda</a:t>
                       </a:r>
                       <a:endParaRPr lang="en-US" sz="800" dirty="0">
                         <a:latin typeface="Arial" charset="0"/>
@@ -5390,7 +5390,7 @@
                           <a:ea typeface="Arial" pitchFamily="34" charset="-122"/>
                           <a:cs typeface="Arial" pitchFamily="34" charset="-120"/>
                         </a:rPr>
-                        <a:t>66</a:t>
+                        <a:t>40</a:t>
                       </a:r>
                       <a:endParaRPr lang="en-US" sz="800" dirty="0">
                         <a:latin typeface="Arial" charset="0"/>
@@ -5458,7 +5458,7 @@
                           <a:ea typeface="Arial" pitchFamily="34" charset="-122"/>
                           <a:cs typeface="Arial" pitchFamily="34" charset="-120"/>
                         </a:rPr>
-                        <a:t>4.08/5</a:t>
+                        <a:t>8.20/10</a:t>
                       </a:r>
                       <a:endParaRPr lang="en-US" sz="800" dirty="0">
                         <a:latin typeface="Arial" charset="0"/>
@@ -5526,349 +5526,7 @@
                           <a:ea typeface="Arial" pitchFamily="34" charset="-122"/>
                           <a:cs typeface="Arial" pitchFamily="34" charset="-120"/>
                         </a:rPr>
-                        <a:t>8.15</a:t>
-                      </a:r>
-                      <a:endParaRPr lang="en-US" sz="800" dirty="0">
-                        <a:latin typeface="Arial" charset="0"/>
-                        <a:ea typeface="Arial" charset="0"/>
-                        <a:cs typeface="Arial" charset="0"/>
-                      </a:endParaRPr>
-                    </a:p>
-                  </a:txBody>
-                  <a:tcPr marL="91440" marR="91440" marT="45720" marB="45720">
-                    <a:lnL w="6350" cap="flat" cmpd="sng" algn="ctr">
-                      <a:solidFill>
-                        <a:srgbClr val="CCCCCC"/>
-                      </a:solidFill>
-                      <a:prstDash val="solid"/>
-                      <a:round/>
-                      <a:headEnd type="none" w="med" len="med"/>
-                      <a:tailEnd type="none" w="med" len="med"/>
-                    </a:lnL>
-                    <a:lnR w="6350" cap="flat" cmpd="sng" algn="ctr">
-                      <a:solidFill>
-                        <a:srgbClr val="CCCCCC"/>
-                      </a:solidFill>
-                      <a:prstDash val="solid"/>
-                      <a:round/>
-                      <a:headEnd type="none" w="med" len="med"/>
-                      <a:tailEnd type="none" w="med" len="med"/>
-                    </a:lnR>
-                    <a:lnT w="6350" cap="flat" cmpd="sng" algn="ctr">
-                      <a:solidFill>
-                        <a:srgbClr val="CCCCCC"/>
-                      </a:solidFill>
-                      <a:prstDash val="solid"/>
-                      <a:round/>
-                      <a:headEnd type="none" w="med" len="med"/>
-                      <a:tailEnd type="none" w="med" len="med"/>
-                    </a:lnT>
-                    <a:lnB w="6350" cap="flat" cmpd="sng" algn="ctr">
-                      <a:solidFill>
-                        <a:srgbClr val="CCCCCC"/>
-                      </a:solidFill>
-                      <a:prstDash val="solid"/>
-                      <a:round/>
-                      <a:headEnd type="none" w="med" len="med"/>
-                      <a:tailEnd type="none" w="med" len="med"/>
-                    </a:lnB>
-                    <a:solidFill>
-                      <a:srgbClr val="FFFFFF"/>
-                    </a:solidFill>
-                  </a:tcPr>
-                </a:tc>
-                <a:tc>
-                  <a:txBody>
-                    <a:bodyPr/>
-                    <a:lstStyle/>
-                    <a:p>
-                      <a:pPr algn="ctr" indent="0" marL="0">
-                        <a:buNone/>
-                      </a:pPr>
-                      <a:r>
-                        <a:rPr lang="en-US" sz="800" dirty="0">
-                          <a:solidFill>
-                            <a:srgbClr val="000000"/>
-                          </a:solidFill>
-                          <a:latin typeface="Arial" pitchFamily="34" charset="0"/>
-                          <a:ea typeface="Arial" pitchFamily="34" charset="-122"/>
-                          <a:cs typeface="Arial" pitchFamily="34" charset="-120"/>
-                        </a:rPr>
-                        <a:t>良好</a:t>
-                      </a:r>
-                      <a:endParaRPr lang="en-US" sz="800" dirty="0">
-                        <a:latin typeface="Arial" charset="0"/>
-                        <a:ea typeface="Arial" charset="0"/>
-                        <a:cs typeface="Arial" charset="0"/>
-                      </a:endParaRPr>
-                    </a:p>
-                  </a:txBody>
-                  <a:tcPr marL="91440" marR="91440" marT="45720" marB="45720">
-                    <a:lnL w="6350" cap="flat" cmpd="sng" algn="ctr">
-                      <a:solidFill>
-                        <a:srgbClr val="CCCCCC"/>
-                      </a:solidFill>
-                      <a:prstDash val="solid"/>
-                      <a:round/>
-                      <a:headEnd type="none" w="med" len="med"/>
-                      <a:tailEnd type="none" w="med" len="med"/>
-                    </a:lnL>
-                    <a:lnR w="6350" cap="flat" cmpd="sng" algn="ctr">
-                      <a:solidFill>
-                        <a:srgbClr val="CCCCCC"/>
-                      </a:solidFill>
-                      <a:prstDash val="solid"/>
-                      <a:round/>
-                      <a:headEnd type="none" w="med" len="med"/>
-                      <a:tailEnd type="none" w="med" len="med"/>
-                    </a:lnR>
-                    <a:lnT w="6350" cap="flat" cmpd="sng" algn="ctr">
-                      <a:solidFill>
-                        <a:srgbClr val="CCCCCC"/>
-                      </a:solidFill>
-                      <a:prstDash val="solid"/>
-                      <a:round/>
-                      <a:headEnd type="none" w="med" len="med"/>
-                      <a:tailEnd type="none" w="med" len="med"/>
-                    </a:lnT>
-                    <a:lnB w="6350" cap="flat" cmpd="sng" algn="ctr">
-                      <a:solidFill>
-                        <a:srgbClr val="CCCCCC"/>
-                      </a:solidFill>
-                      <a:prstDash val="solid"/>
-                      <a:round/>
-                      <a:headEnd type="none" w="med" len="med"/>
-                      <a:tailEnd type="none" w="med" len="med"/>
-                    </a:lnB>
-                    <a:solidFill>
-                      <a:srgbClr val="FFFFFF"/>
-                    </a:solidFill>
-                  </a:tcPr>
-                </a:tc>
-              </a:tr>
-              <a:tr h="0">
-                <a:tc>
-                  <a:txBody>
-                    <a:bodyPr/>
-                    <a:lstStyle/>
-                    <a:p>
-                      <a:pPr algn="ctr" indent="0" marL="0">
-                        <a:buNone/>
-                      </a:pPr>
-                      <a:r>
-                        <a:rPr lang="en-US" sz="800" dirty="0">
-                          <a:solidFill>
-                            <a:srgbClr val="000000"/>
-                          </a:solidFill>
-                          <a:latin typeface="Arial" pitchFamily="34" charset="0"/>
-                          <a:ea typeface="Arial" pitchFamily="34" charset="-122"/>
-                          <a:cs typeface="Arial" pitchFamily="34" charset="-120"/>
-                        </a:rPr>
-                        <a:t>Agoda</a:t>
-                      </a:r>
-                      <a:endParaRPr lang="en-US" sz="800" dirty="0">
-                        <a:latin typeface="Arial" charset="0"/>
-                        <a:ea typeface="Arial" charset="0"/>
-                        <a:cs typeface="Arial" charset="0"/>
-                      </a:endParaRPr>
-                    </a:p>
-                  </a:txBody>
-                  <a:tcPr marL="91440" marR="91440" marT="45720" marB="45720">
-                    <a:lnL w="6350" cap="flat" cmpd="sng" algn="ctr">
-                      <a:solidFill>
-                        <a:srgbClr val="CCCCCC"/>
-                      </a:solidFill>
-                      <a:prstDash val="solid"/>
-                      <a:round/>
-                      <a:headEnd type="none" w="med" len="med"/>
-                      <a:tailEnd type="none" w="med" len="med"/>
-                    </a:lnL>
-                    <a:lnR w="6350" cap="flat" cmpd="sng" algn="ctr">
-                      <a:solidFill>
-                        <a:srgbClr val="CCCCCC"/>
-                      </a:solidFill>
-                      <a:prstDash val="solid"/>
-                      <a:round/>
-                      <a:headEnd type="none" w="med" len="med"/>
-                      <a:tailEnd type="none" w="med" len="med"/>
-                    </a:lnR>
-                    <a:lnT w="6350" cap="flat" cmpd="sng" algn="ctr">
-                      <a:solidFill>
-                        <a:srgbClr val="CCCCCC"/>
-                      </a:solidFill>
-                      <a:prstDash val="solid"/>
-                      <a:round/>
-                      <a:headEnd type="none" w="med" len="med"/>
-                      <a:tailEnd type="none" w="med" len="med"/>
-                    </a:lnT>
-                    <a:lnB w="6350" cap="flat" cmpd="sng" algn="ctr">
-                      <a:solidFill>
-                        <a:srgbClr val="CCCCCC"/>
-                      </a:solidFill>
-                      <a:prstDash val="solid"/>
-                      <a:round/>
-                      <a:headEnd type="none" w="med" len="med"/>
-                      <a:tailEnd type="none" w="med" len="med"/>
-                    </a:lnB>
-                    <a:solidFill>
-                      <a:srgbClr val="FFFFFF"/>
-                    </a:solidFill>
-                  </a:tcPr>
-                </a:tc>
-                <a:tc>
-                  <a:txBody>
-                    <a:bodyPr/>
-                    <a:lstStyle/>
-                    <a:p>
-                      <a:pPr algn="ctr" indent="0" marL="0">
-                        <a:buNone/>
-                      </a:pPr>
-                      <a:r>
-                        <a:rPr lang="en-US" sz="800" dirty="0">
-                          <a:solidFill>
-                            <a:srgbClr val="000000"/>
-                          </a:solidFill>
-                          <a:latin typeface="Arial" pitchFamily="34" charset="0"/>
-                          <a:ea typeface="Arial" pitchFamily="34" charset="-122"/>
-                          <a:cs typeface="Arial" pitchFamily="34" charset="-120"/>
-                        </a:rPr>
-                        <a:t>37</a:t>
-                      </a:r>
-                      <a:endParaRPr lang="en-US" sz="800" dirty="0">
-                        <a:latin typeface="Arial" charset="0"/>
-                        <a:ea typeface="Arial" charset="0"/>
-                        <a:cs typeface="Arial" charset="0"/>
-                      </a:endParaRPr>
-                    </a:p>
-                  </a:txBody>
-                  <a:tcPr marL="91440" marR="91440" marT="45720" marB="45720">
-                    <a:lnL w="6350" cap="flat" cmpd="sng" algn="ctr">
-                      <a:solidFill>
-                        <a:srgbClr val="CCCCCC"/>
-                      </a:solidFill>
-                      <a:prstDash val="solid"/>
-                      <a:round/>
-                      <a:headEnd type="none" w="med" len="med"/>
-                      <a:tailEnd type="none" w="med" len="med"/>
-                    </a:lnL>
-                    <a:lnR w="6350" cap="flat" cmpd="sng" algn="ctr">
-                      <a:solidFill>
-                        <a:srgbClr val="CCCCCC"/>
-                      </a:solidFill>
-                      <a:prstDash val="solid"/>
-                      <a:round/>
-                      <a:headEnd type="none" w="med" len="med"/>
-                      <a:tailEnd type="none" w="med" len="med"/>
-                    </a:lnR>
-                    <a:lnT w="6350" cap="flat" cmpd="sng" algn="ctr">
-                      <a:solidFill>
-                        <a:srgbClr val="CCCCCC"/>
-                      </a:solidFill>
-                      <a:prstDash val="solid"/>
-                      <a:round/>
-                      <a:headEnd type="none" w="med" len="med"/>
-                      <a:tailEnd type="none" w="med" len="med"/>
-                    </a:lnT>
-                    <a:lnB w="6350" cap="flat" cmpd="sng" algn="ctr">
-                      <a:solidFill>
-                        <a:srgbClr val="CCCCCC"/>
-                      </a:solidFill>
-                      <a:prstDash val="solid"/>
-                      <a:round/>
-                      <a:headEnd type="none" w="med" len="med"/>
-                      <a:tailEnd type="none" w="med" len="med"/>
-                    </a:lnB>
-                    <a:solidFill>
-                      <a:srgbClr val="FFFFFF"/>
-                    </a:solidFill>
-                  </a:tcPr>
-                </a:tc>
-                <a:tc>
-                  <a:txBody>
-                    <a:bodyPr/>
-                    <a:lstStyle/>
-                    <a:p>
-                      <a:pPr algn="ctr" indent="0" marL="0">
-                        <a:buNone/>
-                      </a:pPr>
-                      <a:r>
-                        <a:rPr lang="en-US" sz="800" dirty="0">
-                          <a:solidFill>
-                            <a:srgbClr val="000000"/>
-                          </a:solidFill>
-                          <a:latin typeface="Arial" pitchFamily="34" charset="0"/>
-                          <a:ea typeface="Arial" pitchFamily="34" charset="-122"/>
-                          <a:cs typeface="Arial" pitchFamily="34" charset="-120"/>
-                        </a:rPr>
-                        <a:t>8.14/10</a:t>
-                      </a:r>
-                      <a:endParaRPr lang="en-US" sz="800" dirty="0">
-                        <a:latin typeface="Arial" charset="0"/>
-                        <a:ea typeface="Arial" charset="0"/>
-                        <a:cs typeface="Arial" charset="0"/>
-                      </a:endParaRPr>
-                    </a:p>
-                  </a:txBody>
-                  <a:tcPr marL="91440" marR="91440" marT="45720" marB="45720">
-                    <a:lnL w="6350" cap="flat" cmpd="sng" algn="ctr">
-                      <a:solidFill>
-                        <a:srgbClr val="CCCCCC"/>
-                      </a:solidFill>
-                      <a:prstDash val="solid"/>
-                      <a:round/>
-                      <a:headEnd type="none" w="med" len="med"/>
-                      <a:tailEnd type="none" w="med" len="med"/>
-                    </a:lnL>
-                    <a:lnR w="6350" cap="flat" cmpd="sng" algn="ctr">
-                      <a:solidFill>
-                        <a:srgbClr val="CCCCCC"/>
-                      </a:solidFill>
-                      <a:prstDash val="solid"/>
-                      <a:round/>
-                      <a:headEnd type="none" w="med" len="med"/>
-                      <a:tailEnd type="none" w="med" len="med"/>
-                    </a:lnR>
-                    <a:lnT w="6350" cap="flat" cmpd="sng" algn="ctr">
-                      <a:solidFill>
-                        <a:srgbClr val="CCCCCC"/>
-                      </a:solidFill>
-                      <a:prstDash val="solid"/>
-                      <a:round/>
-                      <a:headEnd type="none" w="med" len="med"/>
-                      <a:tailEnd type="none" w="med" len="med"/>
-                    </a:lnT>
-                    <a:lnB w="6350" cap="flat" cmpd="sng" algn="ctr">
-                      <a:solidFill>
-                        <a:srgbClr val="CCCCCC"/>
-                      </a:solidFill>
-                      <a:prstDash val="solid"/>
-                      <a:round/>
-                      <a:headEnd type="none" w="med" len="med"/>
-                      <a:tailEnd type="none" w="med" len="med"/>
-                    </a:lnB>
-                    <a:solidFill>
-                      <a:srgbClr val="FFFFFF"/>
-                    </a:solidFill>
-                  </a:tcPr>
-                </a:tc>
-                <a:tc>
-                  <a:txBody>
-                    <a:bodyPr/>
-                    <a:lstStyle/>
-                    <a:p>
-                      <a:pPr algn="ctr" indent="0" marL="0">
-                        <a:buNone/>
-                      </a:pPr>
-                      <a:r>
-                        <a:rPr lang="en-US" sz="800" dirty="0">
-                          <a:solidFill>
-                            <a:srgbClr val="000000"/>
-                          </a:solidFill>
-                          <a:latin typeface="Arial" pitchFamily="34" charset="0"/>
-                          <a:ea typeface="Arial" pitchFamily="34" charset="-122"/>
-                          <a:cs typeface="Arial" pitchFamily="34" charset="-120"/>
-                        </a:rPr>
-                        <a:t>8.14</a:t>
+                        <a:t>8.20</a:t>
                       </a:r>
                       <a:endParaRPr lang="en-US" sz="800" dirty="0">
                         <a:latin typeface="Arial" charset="0"/>
@@ -6074,7 +5732,7 @@
                           <a:ea typeface="Arial" pitchFamily="34" charset="-122"/>
                           <a:cs typeface="Arial" pitchFamily="34" charset="-120"/>
                         </a:rPr>
-                        <a:t>148</a:t>
+                        <a:t>151</a:t>
                       </a:r>
                       <a:endParaRPr lang="en-US" sz="800" dirty="0">
                         <a:latin typeface="Arial" charset="0"/>
@@ -6142,7 +5800,7 @@
                           <a:ea typeface="Arial" pitchFamily="34" charset="-122"/>
                           <a:cs typeface="Arial" pitchFamily="34" charset="-120"/>
                         </a:rPr>
-                        <a:t>8.14/10</a:t>
+                        <a:t>8.15/10</a:t>
                       </a:r>
                       <a:endParaRPr lang="en-US" sz="800" dirty="0">
                         <a:latin typeface="Arial" charset="0"/>
@@ -6210,7 +5868,349 @@
                           <a:ea typeface="Arial" pitchFamily="34" charset="-122"/>
                           <a:cs typeface="Arial" pitchFamily="34" charset="-120"/>
                         </a:rPr>
-                        <a:t>8.14</a:t>
+                        <a:t>8.15</a:t>
+                      </a:r>
+                      <a:endParaRPr lang="en-US" sz="800" dirty="0">
+                        <a:latin typeface="Arial" charset="0"/>
+                        <a:ea typeface="Arial" charset="0"/>
+                        <a:cs typeface="Arial" charset="0"/>
+                      </a:endParaRPr>
+                    </a:p>
+                  </a:txBody>
+                  <a:tcPr marL="91440" marR="91440" marT="45720" marB="45720">
+                    <a:lnL w="6350" cap="flat" cmpd="sng" algn="ctr">
+                      <a:solidFill>
+                        <a:srgbClr val="CCCCCC"/>
+                      </a:solidFill>
+                      <a:prstDash val="solid"/>
+                      <a:round/>
+                      <a:headEnd type="none" w="med" len="med"/>
+                      <a:tailEnd type="none" w="med" len="med"/>
+                    </a:lnL>
+                    <a:lnR w="6350" cap="flat" cmpd="sng" algn="ctr">
+                      <a:solidFill>
+                        <a:srgbClr val="CCCCCC"/>
+                      </a:solidFill>
+                      <a:prstDash val="solid"/>
+                      <a:round/>
+                      <a:headEnd type="none" w="med" len="med"/>
+                      <a:tailEnd type="none" w="med" len="med"/>
+                    </a:lnR>
+                    <a:lnT w="6350" cap="flat" cmpd="sng" algn="ctr">
+                      <a:solidFill>
+                        <a:srgbClr val="CCCCCC"/>
+                      </a:solidFill>
+                      <a:prstDash val="solid"/>
+                      <a:round/>
+                      <a:headEnd type="none" w="med" len="med"/>
+                      <a:tailEnd type="none" w="med" len="med"/>
+                    </a:lnT>
+                    <a:lnB w="6350" cap="flat" cmpd="sng" algn="ctr">
+                      <a:solidFill>
+                        <a:srgbClr val="CCCCCC"/>
+                      </a:solidFill>
+                      <a:prstDash val="solid"/>
+                      <a:round/>
+                      <a:headEnd type="none" w="med" len="med"/>
+                      <a:tailEnd type="none" w="med" len="med"/>
+                    </a:lnB>
+                    <a:solidFill>
+                      <a:srgbClr val="FFFFFF"/>
+                    </a:solidFill>
+                  </a:tcPr>
+                </a:tc>
+                <a:tc>
+                  <a:txBody>
+                    <a:bodyPr/>
+                    <a:lstStyle/>
+                    <a:p>
+                      <a:pPr algn="ctr" indent="0" marL="0">
+                        <a:buNone/>
+                      </a:pPr>
+                      <a:r>
+                        <a:rPr lang="en-US" sz="800" dirty="0">
+                          <a:solidFill>
+                            <a:srgbClr val="000000"/>
+                          </a:solidFill>
+                          <a:latin typeface="Arial" pitchFamily="34" charset="0"/>
+                          <a:ea typeface="Arial" pitchFamily="34" charset="-122"/>
+                          <a:cs typeface="Arial" pitchFamily="34" charset="-120"/>
+                        </a:rPr>
+                        <a:t>良好</a:t>
+                      </a:r>
+                      <a:endParaRPr lang="en-US" sz="800" dirty="0">
+                        <a:latin typeface="Arial" charset="0"/>
+                        <a:ea typeface="Arial" charset="0"/>
+                        <a:cs typeface="Arial" charset="0"/>
+                      </a:endParaRPr>
+                    </a:p>
+                  </a:txBody>
+                  <a:tcPr marL="91440" marR="91440" marT="45720" marB="45720">
+                    <a:lnL w="6350" cap="flat" cmpd="sng" algn="ctr">
+                      <a:solidFill>
+                        <a:srgbClr val="CCCCCC"/>
+                      </a:solidFill>
+                      <a:prstDash val="solid"/>
+                      <a:round/>
+                      <a:headEnd type="none" w="med" len="med"/>
+                      <a:tailEnd type="none" w="med" len="med"/>
+                    </a:lnL>
+                    <a:lnR w="6350" cap="flat" cmpd="sng" algn="ctr">
+                      <a:solidFill>
+                        <a:srgbClr val="CCCCCC"/>
+                      </a:solidFill>
+                      <a:prstDash val="solid"/>
+                      <a:round/>
+                      <a:headEnd type="none" w="med" len="med"/>
+                      <a:tailEnd type="none" w="med" len="med"/>
+                    </a:lnR>
+                    <a:lnT w="6350" cap="flat" cmpd="sng" algn="ctr">
+                      <a:solidFill>
+                        <a:srgbClr val="CCCCCC"/>
+                      </a:solidFill>
+                      <a:prstDash val="solid"/>
+                      <a:round/>
+                      <a:headEnd type="none" w="med" len="med"/>
+                      <a:tailEnd type="none" w="med" len="med"/>
+                    </a:lnT>
+                    <a:lnB w="6350" cap="flat" cmpd="sng" algn="ctr">
+                      <a:solidFill>
+                        <a:srgbClr val="CCCCCC"/>
+                      </a:solidFill>
+                      <a:prstDash val="solid"/>
+                      <a:round/>
+                      <a:headEnd type="none" w="med" len="med"/>
+                      <a:tailEnd type="none" w="med" len="med"/>
+                    </a:lnB>
+                    <a:solidFill>
+                      <a:srgbClr val="FFFFFF"/>
+                    </a:solidFill>
+                  </a:tcPr>
+                </a:tc>
+              </a:tr>
+              <a:tr h="0">
+                <a:tc>
+                  <a:txBody>
+                    <a:bodyPr/>
+                    <a:lstStyle/>
+                    <a:p>
+                      <a:pPr algn="ctr" indent="0" marL="0">
+                        <a:buNone/>
+                      </a:pPr>
+                      <a:r>
+                        <a:rPr lang="en-US" sz="800" dirty="0">
+                          <a:solidFill>
+                            <a:srgbClr val="000000"/>
+                          </a:solidFill>
+                          <a:latin typeface="Arial" pitchFamily="34" charset="0"/>
+                          <a:ea typeface="Arial" pitchFamily="34" charset="-122"/>
+                          <a:cs typeface="Arial" pitchFamily="34" charset="-120"/>
+                        </a:rPr>
+                        <a:t>Google</a:t>
+                      </a:r>
+                      <a:endParaRPr lang="en-US" sz="800" dirty="0">
+                        <a:latin typeface="Arial" charset="0"/>
+                        <a:ea typeface="Arial" charset="0"/>
+                        <a:cs typeface="Arial" charset="0"/>
+                      </a:endParaRPr>
+                    </a:p>
+                  </a:txBody>
+                  <a:tcPr marL="91440" marR="91440" marT="45720" marB="45720">
+                    <a:lnL w="6350" cap="flat" cmpd="sng" algn="ctr">
+                      <a:solidFill>
+                        <a:srgbClr val="CCCCCC"/>
+                      </a:solidFill>
+                      <a:prstDash val="solid"/>
+                      <a:round/>
+                      <a:headEnd type="none" w="med" len="med"/>
+                      <a:tailEnd type="none" w="med" len="med"/>
+                    </a:lnL>
+                    <a:lnR w="6350" cap="flat" cmpd="sng" algn="ctr">
+                      <a:solidFill>
+                        <a:srgbClr val="CCCCCC"/>
+                      </a:solidFill>
+                      <a:prstDash val="solid"/>
+                      <a:round/>
+                      <a:headEnd type="none" w="med" len="med"/>
+                      <a:tailEnd type="none" w="med" len="med"/>
+                    </a:lnR>
+                    <a:lnT w="6350" cap="flat" cmpd="sng" algn="ctr">
+                      <a:solidFill>
+                        <a:srgbClr val="CCCCCC"/>
+                      </a:solidFill>
+                      <a:prstDash val="solid"/>
+                      <a:round/>
+                      <a:headEnd type="none" w="med" len="med"/>
+                      <a:tailEnd type="none" w="med" len="med"/>
+                    </a:lnT>
+                    <a:lnB w="6350" cap="flat" cmpd="sng" algn="ctr">
+                      <a:solidFill>
+                        <a:srgbClr val="CCCCCC"/>
+                      </a:solidFill>
+                      <a:prstDash val="solid"/>
+                      <a:round/>
+                      <a:headEnd type="none" w="med" len="med"/>
+                      <a:tailEnd type="none" w="med" len="med"/>
+                    </a:lnB>
+                    <a:solidFill>
+                      <a:srgbClr val="FFFFFF"/>
+                    </a:solidFill>
+                  </a:tcPr>
+                </a:tc>
+                <a:tc>
+                  <a:txBody>
+                    <a:bodyPr/>
+                    <a:lstStyle/>
+                    <a:p>
+                      <a:pPr algn="ctr" indent="0" marL="0">
+                        <a:buNone/>
+                      </a:pPr>
+                      <a:r>
+                        <a:rPr lang="en-US" sz="800" dirty="0">
+                          <a:solidFill>
+                            <a:srgbClr val="000000"/>
+                          </a:solidFill>
+                          <a:latin typeface="Arial" pitchFamily="34" charset="0"/>
+                          <a:ea typeface="Arial" pitchFamily="34" charset="-122"/>
+                          <a:cs typeface="Arial" pitchFamily="34" charset="-120"/>
+                        </a:rPr>
+                        <a:t>66</a:t>
+                      </a:r>
+                      <a:endParaRPr lang="en-US" sz="800" dirty="0">
+                        <a:latin typeface="Arial" charset="0"/>
+                        <a:ea typeface="Arial" charset="0"/>
+                        <a:cs typeface="Arial" charset="0"/>
+                      </a:endParaRPr>
+                    </a:p>
+                  </a:txBody>
+                  <a:tcPr marL="91440" marR="91440" marT="45720" marB="45720">
+                    <a:lnL w="6350" cap="flat" cmpd="sng" algn="ctr">
+                      <a:solidFill>
+                        <a:srgbClr val="CCCCCC"/>
+                      </a:solidFill>
+                      <a:prstDash val="solid"/>
+                      <a:round/>
+                      <a:headEnd type="none" w="med" len="med"/>
+                      <a:tailEnd type="none" w="med" len="med"/>
+                    </a:lnL>
+                    <a:lnR w="6350" cap="flat" cmpd="sng" algn="ctr">
+                      <a:solidFill>
+                        <a:srgbClr val="CCCCCC"/>
+                      </a:solidFill>
+                      <a:prstDash val="solid"/>
+                      <a:round/>
+                      <a:headEnd type="none" w="med" len="med"/>
+                      <a:tailEnd type="none" w="med" len="med"/>
+                    </a:lnR>
+                    <a:lnT w="6350" cap="flat" cmpd="sng" algn="ctr">
+                      <a:solidFill>
+                        <a:srgbClr val="CCCCCC"/>
+                      </a:solidFill>
+                      <a:prstDash val="solid"/>
+                      <a:round/>
+                      <a:headEnd type="none" w="med" len="med"/>
+                      <a:tailEnd type="none" w="med" len="med"/>
+                    </a:lnT>
+                    <a:lnB w="6350" cap="flat" cmpd="sng" algn="ctr">
+                      <a:solidFill>
+                        <a:srgbClr val="CCCCCC"/>
+                      </a:solidFill>
+                      <a:prstDash val="solid"/>
+                      <a:round/>
+                      <a:headEnd type="none" w="med" len="med"/>
+                      <a:tailEnd type="none" w="med" len="med"/>
+                    </a:lnB>
+                    <a:solidFill>
+                      <a:srgbClr val="FFFFFF"/>
+                    </a:solidFill>
+                  </a:tcPr>
+                </a:tc>
+                <a:tc>
+                  <a:txBody>
+                    <a:bodyPr/>
+                    <a:lstStyle/>
+                    <a:p>
+                      <a:pPr algn="ctr" indent="0" marL="0">
+                        <a:buNone/>
+                      </a:pPr>
+                      <a:r>
+                        <a:rPr lang="en-US" sz="800" dirty="0">
+                          <a:solidFill>
+                            <a:srgbClr val="000000"/>
+                          </a:solidFill>
+                          <a:latin typeface="Arial" pitchFamily="34" charset="0"/>
+                          <a:ea typeface="Arial" pitchFamily="34" charset="-122"/>
+                          <a:cs typeface="Arial" pitchFamily="34" charset="-120"/>
+                        </a:rPr>
+                        <a:t>4.08/5</a:t>
+                      </a:r>
+                      <a:endParaRPr lang="en-US" sz="800" dirty="0">
+                        <a:latin typeface="Arial" charset="0"/>
+                        <a:ea typeface="Arial" charset="0"/>
+                        <a:cs typeface="Arial" charset="0"/>
+                      </a:endParaRPr>
+                    </a:p>
+                  </a:txBody>
+                  <a:tcPr marL="91440" marR="91440" marT="45720" marB="45720">
+                    <a:lnL w="6350" cap="flat" cmpd="sng" algn="ctr">
+                      <a:solidFill>
+                        <a:srgbClr val="CCCCCC"/>
+                      </a:solidFill>
+                      <a:prstDash val="solid"/>
+                      <a:round/>
+                      <a:headEnd type="none" w="med" len="med"/>
+                      <a:tailEnd type="none" w="med" len="med"/>
+                    </a:lnL>
+                    <a:lnR w="6350" cap="flat" cmpd="sng" algn="ctr">
+                      <a:solidFill>
+                        <a:srgbClr val="CCCCCC"/>
+                      </a:solidFill>
+                      <a:prstDash val="solid"/>
+                      <a:round/>
+                      <a:headEnd type="none" w="med" len="med"/>
+                      <a:tailEnd type="none" w="med" len="med"/>
+                    </a:lnR>
+                    <a:lnT w="6350" cap="flat" cmpd="sng" algn="ctr">
+                      <a:solidFill>
+                        <a:srgbClr val="CCCCCC"/>
+                      </a:solidFill>
+                      <a:prstDash val="solid"/>
+                      <a:round/>
+                      <a:headEnd type="none" w="med" len="med"/>
+                      <a:tailEnd type="none" w="med" len="med"/>
+                    </a:lnT>
+                    <a:lnB w="6350" cap="flat" cmpd="sng" algn="ctr">
+                      <a:solidFill>
+                        <a:srgbClr val="CCCCCC"/>
+                      </a:solidFill>
+                      <a:prstDash val="solid"/>
+                      <a:round/>
+                      <a:headEnd type="none" w="med" len="med"/>
+                      <a:tailEnd type="none" w="med" len="med"/>
+                    </a:lnB>
+                    <a:solidFill>
+                      <a:srgbClr val="FFFFFF"/>
+                    </a:solidFill>
+                  </a:tcPr>
+                </a:tc>
+                <a:tc>
+                  <a:txBody>
+                    <a:bodyPr/>
+                    <a:lstStyle/>
+                    <a:p>
+                      <a:pPr algn="ctr" indent="0" marL="0">
+                        <a:buNone/>
+                      </a:pPr>
+                      <a:r>
+                        <a:rPr lang="en-US" sz="800" dirty="0">
+                          <a:solidFill>
+                            <a:srgbClr val="000000"/>
+                          </a:solidFill>
+                          <a:latin typeface="Arial" pitchFamily="34" charset="0"/>
+                          <a:ea typeface="Arial" pitchFamily="34" charset="-122"/>
+                          <a:cs typeface="Arial" pitchFamily="34" charset="-120"/>
+                        </a:rPr>
+                        <a:t>8.15</a:t>
                       </a:r>
                       <a:endParaRPr lang="en-US" sz="800" dirty="0">
                         <a:latin typeface="Arial" charset="0"/>
@@ -6663,7 +6663,7 @@
                 <a:ea typeface="Arial" pitchFamily="34" charset="-122"/>
                 <a:cs typeface="Arial" pitchFamily="34" charset="-120"/>
               </a:rPr>
-              <a:t>262件（76.4%）</a:t>
+              <a:t>268件（76.6%）</a:t>
             </a:r>
             <a:endParaRPr lang="en-US" sz="1600" dirty="0"/>
           </a:p>
@@ -6761,7 +6761,7 @@
                 <a:ea typeface="Arial" pitchFamily="34" charset="-122"/>
                 <a:cs typeface="Arial" pitchFamily="34" charset="-120"/>
               </a:rPr>
-              <a:t>70件（20.4%）</a:t>
+              <a:t>71件（20.3%）</a:t>
             </a:r>
             <a:endParaRPr lang="en-US" sz="1600" dirty="0"/>
           </a:p>
@@ -6859,7 +6859,7 @@
                 <a:ea typeface="Arial" pitchFamily="34" charset="-122"/>
                 <a:cs typeface="Arial" pitchFamily="34" charset="-120"/>
               </a:rPr>
-              <a:t>11件（3.2%）</a:t>
+              <a:t>11件（3.1%）</a:t>
             </a:r>
             <a:endParaRPr lang="en-US" sz="1600" dirty="0"/>
           </a:p>
@@ -7021,7 +7021,7 @@
                 <a:ea typeface="Arial" pitchFamily="34" charset="-122"/>
                 <a:cs typeface="Arial" pitchFamily="34" charset="-120"/>
               </a:rPr>
-              <a:t>高評価レビュー（8-10点: 262件）の分析から、主要な強みテーマを抽出しています。立地・アクセス、客室清潔感、スタッフ対応が高評価の中心的テーマです。</a:t>
+              <a:t>高評価レビュー（8-10点: 268件）の分析から、主要な強みテーマを抽出しています。立地・アクセス、客室清潔感、スタッフ対応が高評価の中心的テーマです。</a:t>
             </a:r>
             <a:endParaRPr lang="en-US" sz="1200" dirty="0"/>
           </a:p>
@@ -7281,7 +7281,7 @@
                 <a:ea typeface="Arial" pitchFamily="34" charset="-122"/>
                 <a:cs typeface="Arial" pitchFamily="34" charset="-120"/>
               </a:rPr>
-              <a:t>低評価・中評価レビュー（81件）から改善課題を優先度別に整理しています。S/A/B/Cの4段階で優先度を設定し、計画的な改善を推進します。</a:t>
+              <a:t>低評価・中評価レビュー（82件）から改善課題を優先度別に整理しています。S/A/B/Cの4段階で優先度を設定し、計画的な改善を推進します。</a:t>
             </a:r>
             <a:endParaRPr lang="en-US" sz="1200" dirty="0"/>
           </a:p>
@@ -8078,7 +8078,7 @@
                 <a:ea typeface="Arial" pitchFamily="34" charset="-122"/>
                 <a:cs typeface="Arial" pitchFamily="34" charset="-120"/>
               </a:rPr>
-              <a:t>高評価率 76.4% → 目標 81.4%</a:t>
+              <a:t>高評価率 76.6% → 目標 81.6%</a:t>
             </a:r>
             <a:endParaRPr lang="en-US" sz="1200" dirty="0"/>
           </a:p>
@@ -8095,7 +8095,7 @@
                 <a:ea typeface="Arial" pitchFamily="34" charset="-122"/>
                 <a:cs typeface="Arial" pitchFamily="34" charset="-120"/>
               </a:rPr>
-              <a:t>低評価率 3.2% → 目標 1.2%</a:t>
+              <a:t>低評価率 3.1% → 目標 1.1%</a:t>
             </a:r>
             <a:endParaRPr lang="en-US" sz="1200" dirty="0"/>
           </a:p>

--- a/納品レポート/ホテル別レポート/henn_na_haneda_口コミ分析レポート.pptx
+++ b/納品レポート/ホテル別レポート/henn_na_haneda_口コミ分析レポート.pptx
@@ -2818,7 +2818,7 @@
                 <a:ea typeface="Arial" pitchFamily="34" charset="-122"/>
                 <a:cs typeface="Arial" pitchFamily="34" charset="-120"/>
               </a:rPr>
-              <a:t>作成日：2026年4月2日</a:t>
+              <a:t>作成日：2026年4月5日</a:t>
             </a:r>
             <a:endParaRPr lang="en-US" sz="1000" dirty="0"/>
           </a:p>

--- a/納品レポート/ホテル別レポート/henn_na_haneda_口コミ分析レポート.pptx
+++ b/納品レポート/ホテル別レポート/henn_na_haneda_口コミ分析レポート.pptx
@@ -183,10 +183,10 @@
                     <c:v>Trip.com</c:v>
                   </c:pt>
                   <c:pt idx="1">
-                    <c:v>楽天トラベル</c:v>
+                    <c:v>じゃらん</c:v>
                   </c:pt>
                   <c:pt idx="2">
-                    <c:v>じゃらん</c:v>
+                    <c:v>楽天トラベル</c:v>
                   </c:pt>
                   <c:pt idx="3">
                     <c:v>Agoda</c:v>
@@ -208,22 +208,22 @@
                 <c:formatCode>General</c:formatCode>
                 <c:ptCount val="6"/>
                 <c:pt idx="0">
-                  <c:v>9.4</c:v>
+                  <c:v>9.56</c:v>
                 </c:pt>
                 <c:pt idx="1">
-                  <c:v>8.57</c:v>
+                  <c:v>8.75</c:v>
                 </c:pt>
                 <c:pt idx="2">
-                  <c:v>8.38</c:v>
+                  <c:v>8.63</c:v>
                 </c:pt>
                 <c:pt idx="3">
-                  <c:v>8.2</c:v>
+                  <c:v>8.4</c:v>
                 </c:pt>
                 <c:pt idx="4">
-                  <c:v>8.15</c:v>
+                  <c:v>8.23</c:v>
                 </c:pt>
                 <c:pt idx="5">
-                  <c:v>8.15</c:v>
+                  <c:v>8</c:v>
                 </c:pt>
               </c:numCache>
             </c:numRef>
@@ -566,13 +566,13 @@
               <c:numCache>
                 <c:ptCount val="3"/>
                 <c:pt idx="0">
-                  <c:v>268</c:v>
+                  <c:v>126</c:v>
                 </c:pt>
                 <c:pt idx="1">
-                  <c:v>71</c:v>
+                  <c:v>31</c:v>
                 </c:pt>
                 <c:pt idx="2">
-                  <c:v>11</c:v>
+                  <c:v>7</c:v>
                 </c:pt>
               </c:numCache>
             </c:numRef>
@@ -823,31 +823,31 @@
                 <c:formatCode>General</c:formatCode>
                 <c:ptCount val="9"/>
                 <c:pt idx="0">
-                  <c:v>121</c:v>
+                  <c:v>61</c:v>
                 </c:pt>
                 <c:pt idx="1">
-                  <c:v>45</c:v>
+                  <c:v>23</c:v>
                 </c:pt>
                 <c:pt idx="2">
-                  <c:v>102</c:v>
+                  <c:v>42</c:v>
                 </c:pt>
                 <c:pt idx="3">
-                  <c:v>33</c:v>
+                  <c:v>16</c:v>
                 </c:pt>
                 <c:pt idx="4">
-                  <c:v>29</c:v>
+                  <c:v>11</c:v>
                 </c:pt>
                 <c:pt idx="5">
-                  <c:v>9</c:v>
+                  <c:v>4</c:v>
                 </c:pt>
                 <c:pt idx="6">
                   <c:v>2</c:v>
                 </c:pt>
                 <c:pt idx="7">
-                  <c:v>2</c:v>
+                  <c:v>1</c:v>
                 </c:pt>
                 <c:pt idx="8">
-                  <c:v>7</c:v>
+                  <c:v>4</c:v>
                 </c:pt>
               </c:numCache>
             </c:numRef>
@@ -2778,7 +2778,7 @@
                 <a:ea typeface="Arial" pitchFamily="34" charset="-122"/>
                 <a:cs typeface="Arial" pitchFamily="34" charset="-120"/>
               </a:rPr>
-              <a:t>分析対象期間：2026年2月〜3月</a:t>
+              <a:t>分析対象期間：2026年3月</a:t>
             </a:r>
             <a:endParaRPr lang="en-US" sz="1000" dirty="0"/>
           </a:p>
@@ -2798,7 +2798,7 @@
                 <a:ea typeface="Arial" pitchFamily="34" charset="-122"/>
                 <a:cs typeface="Arial" pitchFamily="34" charset="-120"/>
               </a:rPr>
-              <a:t>レビュー総数：350件（6サイト）</a:t>
+              <a:t>レビュー総数：164件（6サイト）</a:t>
             </a:r>
             <a:endParaRPr lang="en-US" sz="1000" dirty="0"/>
           </a:p>
@@ -3364,7 +3364,7 @@
                           <a:ea typeface="Arial" pitchFamily="34" charset="-122"/>
                           <a:cs typeface="Arial" pitchFamily="34" charset="-120"/>
                         </a:rPr>
-                        <a:t>8.31点</a:t>
+                        <a:t>8.35点</a:t>
                       </a:r>
                       <a:endParaRPr lang="en-US" sz="1000" dirty="0">
                         <a:latin typeface="Arial" charset="0"/>
@@ -3432,7 +3432,7 @@
                           <a:ea typeface="Arial" pitchFamily="34" charset="-122"/>
                           <a:cs typeface="Arial" pitchFamily="34" charset="-120"/>
                         </a:rPr>
-                        <a:t>8.6点以上</a:t>
+                        <a:t>8.7点以上</a:t>
                       </a:r>
                       <a:endParaRPr lang="en-US" sz="1000" dirty="0">
                         <a:latin typeface="Arial" charset="0"/>
@@ -3638,7 +3638,7 @@
                           <a:ea typeface="Arial" pitchFamily="34" charset="-122"/>
                           <a:cs typeface="Arial" pitchFamily="34" charset="-120"/>
                         </a:rPr>
-                        <a:t>76.6%</a:t>
+                        <a:t>76.8%</a:t>
                       </a:r>
                       <a:endParaRPr lang="en-US" sz="1000" dirty="0">
                         <a:latin typeface="Arial" charset="0"/>
@@ -3912,7 +3912,7 @@
                           <a:ea typeface="Arial" pitchFamily="34" charset="-122"/>
                           <a:cs typeface="Arial" pitchFamily="34" charset="-120"/>
                         </a:rPr>
-                        <a:t>3.1%</a:t>
+                        <a:t>4.3%</a:t>
                       </a:r>
                       <a:endParaRPr lang="en-US" sz="1000" dirty="0">
                         <a:latin typeface="Arial" charset="0"/>
@@ -3980,7 +3980,7 @@
                           <a:ea typeface="Arial" pitchFamily="34" charset="-122"/>
                           <a:cs typeface="Arial" pitchFamily="34" charset="-120"/>
                         </a:rPr>
-                        <a:t>0%以下</a:t>
+                        <a:t>1%以下</a:t>
                       </a:r>
                       <a:endParaRPr lang="en-US" sz="1000" dirty="0">
                         <a:latin typeface="Arial" charset="0"/>
@@ -4460,7 +4460,7 @@
                           <a:ea typeface="Arial" pitchFamily="34" charset="-122"/>
                           <a:cs typeface="Arial" pitchFamily="34" charset="-120"/>
                         </a:rPr>
-                        <a:t>約105件/期間</a:t>
+                        <a:t>約51件/期間</a:t>
                       </a:r>
                       <a:endParaRPr lang="en-US" sz="1000" dirty="0">
                         <a:latin typeface="Arial" charset="0"/>
@@ -4528,7 +4528,7 @@
                           <a:ea typeface="Arial" pitchFamily="34" charset="-122"/>
                           <a:cs typeface="Arial" pitchFamily="34" charset="-120"/>
                         </a:rPr>
-                        <a:t>52件以下</a:t>
+                        <a:t>25件以下</a:t>
                       </a:r>
                       <a:endParaRPr lang="en-US" sz="1000" dirty="0">
                         <a:latin typeface="Arial" charset="0"/>
@@ -5099,7 +5099,7 @@
                 <a:ea typeface="Arial" pitchFamily="34" charset="-122"/>
                 <a:cs typeface="Arial" pitchFamily="34" charset="-120"/>
               </a:rPr>
-              <a:t>8.31</a:t>
+              <a:t>8.35</a:t>
             </a:r>
             <a:endParaRPr lang="en-US" sz="3200" dirty="0"/>
           </a:p>
@@ -5224,7 +5224,7 @@
                 <a:ea typeface="Arial" pitchFamily="34" charset="-122"/>
                 <a:cs typeface="Arial" pitchFamily="34" charset="-120"/>
               </a:rPr>
-              <a:t>76.6%</a:t>
+              <a:t>76.8%</a:t>
             </a:r>
             <a:endParaRPr lang="en-US" sz="3200" dirty="0"/>
           </a:p>
@@ -5349,7 +5349,7 @@
                 <a:ea typeface="Arial" pitchFamily="34" charset="-122"/>
                 <a:cs typeface="Arial" pitchFamily="34" charset="-120"/>
               </a:rPr>
-              <a:t>3.1%</a:t>
+              <a:t>4.3%</a:t>
             </a:r>
             <a:endParaRPr lang="en-US" sz="3200" dirty="0"/>
           </a:p>
@@ -5474,7 +5474,7 @@
                 <a:ea typeface="Arial" pitchFamily="34" charset="-122"/>
                 <a:cs typeface="Arial" pitchFamily="34" charset="-120"/>
               </a:rPr>
-              <a:t>350件</a:t>
+              <a:t>164件</a:t>
             </a:r>
             <a:endParaRPr lang="en-US" sz="3200" dirty="0"/>
           </a:p>
@@ -6283,7 +6283,7 @@
                 <a:ea typeface="Arial" pitchFamily="34" charset="-122"/>
                 <a:cs typeface="Arial" pitchFamily="34" charset="-120"/>
               </a:rPr>
-              <a:t>8.31</a:t>
+              <a:t>8.35</a:t>
             </a:r>
             <a:endParaRPr lang="en-US" sz="3200" dirty="0"/>
           </a:p>
@@ -6408,7 +6408,7 @@
                 <a:ea typeface="Arial" pitchFamily="34" charset="-122"/>
                 <a:cs typeface="Arial" pitchFamily="34" charset="-120"/>
               </a:rPr>
-              <a:t>76.6%</a:t>
+              <a:t>76.8%</a:t>
             </a:r>
             <a:endParaRPr lang="en-US" sz="3200" dirty="0"/>
           </a:p>
@@ -6533,7 +6533,7 @@
                 <a:ea typeface="Arial" pitchFamily="34" charset="-122"/>
                 <a:cs typeface="Arial" pitchFamily="34" charset="-120"/>
               </a:rPr>
-              <a:t>3.1%</a:t>
+              <a:t>4.3%</a:t>
             </a:r>
             <a:endParaRPr lang="en-US" sz="3200" dirty="0"/>
           </a:p>
@@ -6658,7 +6658,7 @@
                 <a:ea typeface="Arial" pitchFamily="34" charset="-122"/>
                 <a:cs typeface="Arial" pitchFamily="34" charset="-120"/>
               </a:rPr>
-              <a:t>350件</a:t>
+              <a:t>164件</a:t>
             </a:r>
             <a:endParaRPr lang="en-US" sz="3200" dirty="0"/>
           </a:p>
@@ -7079,7 +7079,7 @@
                 <a:ea typeface="Arial" pitchFamily="34" charset="-122"/>
                 <a:cs typeface="Arial" pitchFamily="34" charset="-120"/>
               </a:rPr>
-              <a:t>Trip.com(9.40)が最高スコア。</a:t>
+              <a:t>Trip.com(9.56)が最高スコア。</a:t>
             </a:r>
             <a:endParaRPr lang="en-US" sz="1100" dirty="0"/>
           </a:p>
@@ -7588,7 +7588,7 @@
                           <a:ea typeface="Arial" pitchFamily="34" charset="-122"/>
                           <a:cs typeface="Arial" pitchFamily="34" charset="-120"/>
                         </a:rPr>
-                        <a:t>25</a:t>
+                        <a:t>9</a:t>
                       </a:r>
                       <a:endParaRPr lang="en-US" sz="900" dirty="0">
                         <a:latin typeface="Arial" charset="0"/>
@@ -7656,7 +7656,7 @@
                           <a:ea typeface="Arial" pitchFamily="34" charset="-122"/>
                           <a:cs typeface="Arial" pitchFamily="34" charset="-120"/>
                         </a:rPr>
-                        <a:t>9.4</a:t>
+                        <a:t>9.56</a:t>
                       </a:r>
                       <a:endParaRPr lang="en-US" sz="900" dirty="0">
                         <a:latin typeface="Arial" charset="0"/>
@@ -7792,7 +7792,7 @@
                           <a:ea typeface="Arial" pitchFamily="34" charset="-122"/>
                           <a:cs typeface="Arial" pitchFamily="34" charset="-120"/>
                         </a:rPr>
-                        <a:t>9.4</a:t>
+                        <a:t>9.56</a:t>
                       </a:r>
                       <a:endParaRPr lang="en-US" sz="900" dirty="0">
                         <a:latin typeface="Arial" charset="0"/>
@@ -7862,7 +7862,7 @@
                           <a:ea typeface="Arial" pitchFamily="34" charset="-122"/>
                           <a:cs typeface="Arial" pitchFamily="34" charset="-120"/>
                         </a:rPr>
-                        <a:t>楽天トラベル</a:t>
+                        <a:t>じゃらん</a:t>
                       </a:r>
                       <a:endParaRPr lang="en-US" sz="900" dirty="0">
                         <a:latin typeface="Arial" charset="0"/>
@@ -7930,7 +7930,7 @@
                           <a:ea typeface="Arial" pitchFamily="34" charset="-122"/>
                           <a:cs typeface="Arial" pitchFamily="34" charset="-120"/>
                         </a:rPr>
-                        <a:t>42</a:t>
+                        <a:t>8</a:t>
                       </a:r>
                       <a:endParaRPr lang="en-US" sz="900" dirty="0">
                         <a:latin typeface="Arial" charset="0"/>
@@ -7998,7 +7998,7 @@
                           <a:ea typeface="Arial" pitchFamily="34" charset="-122"/>
                           <a:cs typeface="Arial" pitchFamily="34" charset="-120"/>
                         </a:rPr>
-                        <a:t>4.29</a:t>
+                        <a:t>4.38</a:t>
                       </a:r>
                       <a:endParaRPr lang="en-US" sz="900" dirty="0">
                         <a:latin typeface="Arial" charset="0"/>
@@ -8134,7 +8134,7 @@
                           <a:ea typeface="Arial" pitchFamily="34" charset="-122"/>
                           <a:cs typeface="Arial" pitchFamily="34" charset="-120"/>
                         </a:rPr>
-                        <a:t>8.57</a:t>
+                        <a:t>8.75</a:t>
                       </a:r>
                       <a:endParaRPr lang="en-US" sz="900" dirty="0">
                         <a:latin typeface="Arial" charset="0"/>
@@ -8204,7 +8204,7 @@
                           <a:ea typeface="Arial" pitchFamily="34" charset="-122"/>
                           <a:cs typeface="Arial" pitchFamily="34" charset="-120"/>
                         </a:rPr>
-                        <a:t>じゃらん</a:t>
+                        <a:t>楽天トラベル</a:t>
                       </a:r>
                       <a:endParaRPr lang="en-US" sz="900" dirty="0">
                         <a:latin typeface="Arial" charset="0"/>
@@ -8272,7 +8272,7 @@
                           <a:ea typeface="Arial" pitchFamily="34" charset="-122"/>
                           <a:cs typeface="Arial" pitchFamily="34" charset="-120"/>
                         </a:rPr>
-                        <a:t>26</a:t>
+                        <a:t>19</a:t>
                       </a:r>
                       <a:endParaRPr lang="en-US" sz="900" dirty="0">
                         <a:latin typeface="Arial" charset="0"/>
@@ -8340,7 +8340,7 @@
                           <a:ea typeface="Arial" pitchFamily="34" charset="-122"/>
                           <a:cs typeface="Arial" pitchFamily="34" charset="-120"/>
                         </a:rPr>
-                        <a:t>4.19</a:t>
+                        <a:t>4.32</a:t>
                       </a:r>
                       <a:endParaRPr lang="en-US" sz="900" dirty="0">
                         <a:latin typeface="Arial" charset="0"/>
@@ -8476,7 +8476,7 @@
                           <a:ea typeface="Arial" pitchFamily="34" charset="-122"/>
                           <a:cs typeface="Arial" pitchFamily="34" charset="-120"/>
                         </a:rPr>
-                        <a:t>8.38</a:t>
+                        <a:t>8.63</a:t>
                       </a:r>
                       <a:endParaRPr lang="en-US" sz="900" dirty="0">
                         <a:latin typeface="Arial" charset="0"/>
@@ -8614,7 +8614,7 @@
                           <a:ea typeface="Arial" pitchFamily="34" charset="-122"/>
                           <a:cs typeface="Arial" pitchFamily="34" charset="-120"/>
                         </a:rPr>
-                        <a:t>40</a:t>
+                        <a:t>20</a:t>
                       </a:r>
                       <a:endParaRPr lang="en-US" sz="900" dirty="0">
                         <a:latin typeface="Arial" charset="0"/>
@@ -8682,7 +8682,7 @@
                           <a:ea typeface="Arial" pitchFamily="34" charset="-122"/>
                           <a:cs typeface="Arial" pitchFamily="34" charset="-120"/>
                         </a:rPr>
-                        <a:t>8.2</a:t>
+                        <a:t>8.4</a:t>
                       </a:r>
                       <a:endParaRPr lang="en-US" sz="900" dirty="0">
                         <a:latin typeface="Arial" charset="0"/>
@@ -8818,7 +8818,7 @@
                           <a:ea typeface="Arial" pitchFamily="34" charset="-122"/>
                           <a:cs typeface="Arial" pitchFamily="34" charset="-120"/>
                         </a:rPr>
-                        <a:t>8.2</a:t>
+                        <a:t>8.4</a:t>
                       </a:r>
                       <a:endParaRPr lang="en-US" sz="900" dirty="0">
                         <a:latin typeface="Arial" charset="0"/>
@@ -8956,7 +8956,7 @@
                           <a:ea typeface="Arial" pitchFamily="34" charset="-122"/>
                           <a:cs typeface="Arial" pitchFamily="34" charset="-120"/>
                         </a:rPr>
-                        <a:t>151</a:t>
+                        <a:t>78</a:t>
                       </a:r>
                       <a:endParaRPr lang="en-US" sz="900" dirty="0">
                         <a:latin typeface="Arial" charset="0"/>
@@ -9024,7 +9024,7 @@
                           <a:ea typeface="Arial" pitchFamily="34" charset="-122"/>
                           <a:cs typeface="Arial" pitchFamily="34" charset="-120"/>
                         </a:rPr>
-                        <a:t>8.15</a:t>
+                        <a:t>8.23</a:t>
                       </a:r>
                       <a:endParaRPr lang="en-US" sz="900" dirty="0">
                         <a:latin typeface="Arial" charset="0"/>
@@ -9160,7 +9160,7 @@
                           <a:ea typeface="Arial" pitchFamily="34" charset="-122"/>
                           <a:cs typeface="Arial" pitchFamily="34" charset="-120"/>
                         </a:rPr>
-                        <a:t>8.15</a:t>
+                        <a:t>8.23</a:t>
                       </a:r>
                       <a:endParaRPr lang="en-US" sz="900" dirty="0">
                         <a:latin typeface="Arial" charset="0"/>
@@ -9298,7 +9298,7 @@
                           <a:ea typeface="Arial" pitchFamily="34" charset="-122"/>
                           <a:cs typeface="Arial" pitchFamily="34" charset="-120"/>
                         </a:rPr>
-                        <a:t>66</a:t>
+                        <a:t>30</a:t>
                       </a:r>
                       <a:endParaRPr lang="en-US" sz="900" dirty="0">
                         <a:latin typeface="Arial" charset="0"/>
@@ -9366,7 +9366,7 @@
                           <a:ea typeface="Arial" pitchFamily="34" charset="-122"/>
                           <a:cs typeface="Arial" pitchFamily="34" charset="-120"/>
                         </a:rPr>
-                        <a:t>4.08</a:t>
+                        <a:t>4</a:t>
                       </a:r>
                       <a:endParaRPr lang="en-US" sz="900" dirty="0">
                         <a:latin typeface="Arial" charset="0"/>
@@ -9502,7 +9502,7 @@
                           <a:ea typeface="Arial" pitchFamily="34" charset="-122"/>
                           <a:cs typeface="Arial" pitchFamily="34" charset="-120"/>
                         </a:rPr>
-                        <a:t>8.15</a:t>
+                        <a:t>8</a:t>
                       </a:r>
                       <a:endParaRPr lang="en-US" sz="900" dirty="0">
                         <a:latin typeface="Arial" charset="0"/>
@@ -9910,7 +9910,7 @@
                 <a:ea typeface="Arial" pitchFamily="34" charset="-122"/>
                 <a:cs typeface="Arial" pitchFamily="34" charset="-120"/>
               </a:rPr>
-              <a:t>268件（76.6%）</a:t>
+              <a:t>126件（76.8%）</a:t>
             </a:r>
             <a:endParaRPr lang="en-US" sz="1100" dirty="0"/>
           </a:p>
@@ -10008,7 +10008,7 @@
                 <a:ea typeface="Arial" pitchFamily="34" charset="-122"/>
                 <a:cs typeface="Arial" pitchFamily="34" charset="-120"/>
               </a:rPr>
-              <a:t>71件（20.3%）</a:t>
+              <a:t>31件（18.9%）</a:t>
             </a:r>
             <a:endParaRPr lang="en-US" sz="1100" dirty="0"/>
           </a:p>
@@ -10106,7 +10106,7 @@
                 <a:ea typeface="Arial" pitchFamily="34" charset="-122"/>
                 <a:cs typeface="Arial" pitchFamily="34" charset="-120"/>
               </a:rPr>
-              <a:t>11件（3.1%）</a:t>
+              <a:t>7件（4.3%）</a:t>
             </a:r>
             <a:endParaRPr lang="en-US" sz="1100" dirty="0"/>
           </a:p>
@@ -10440,7 +10440,7 @@
                 <a:ea typeface="Arial" pitchFamily="34" charset="-122"/>
                 <a:cs typeface="Arial" pitchFamily="34" charset="-120"/>
               </a:rPr>
-              <a:t>50件+</a:t>
+              <a:t>20件+</a:t>
             </a:r>
             <a:endParaRPr lang="en-US" sz="900" dirty="0"/>
           </a:p>
@@ -10663,7 +10663,7 @@
                 <a:ea typeface="Arial" pitchFamily="34" charset="-122"/>
                 <a:cs typeface="Arial" pitchFamily="34" charset="-120"/>
               </a:rPr>
-              <a:t>50件+</a:t>
+              <a:t>20件+</a:t>
             </a:r>
             <a:endParaRPr lang="en-US" sz="900" dirty="0"/>
           </a:p>
@@ -10886,7 +10886,7 @@
                 <a:ea typeface="Arial" pitchFamily="34" charset="-122"/>
                 <a:cs typeface="Arial" pitchFamily="34" charset="-120"/>
               </a:rPr>
-              <a:t>50件+</a:t>
+              <a:t>20件+</a:t>
             </a:r>
             <a:endParaRPr lang="en-US" sz="900" dirty="0"/>
           </a:p>
@@ -11109,7 +11109,7 @@
                 <a:ea typeface="Arial" pitchFamily="34" charset="-122"/>
                 <a:cs typeface="Arial" pitchFamily="34" charset="-120"/>
               </a:rPr>
-              <a:t>50件+</a:t>
+              <a:t>20件+</a:t>
             </a:r>
             <a:endParaRPr lang="en-US" sz="900" dirty="0"/>
           </a:p>
@@ -11332,7 +11332,7 @@
                 <a:ea typeface="Arial" pitchFamily="34" charset="-122"/>
                 <a:cs typeface="Arial" pitchFamily="34" charset="-120"/>
               </a:rPr>
-              <a:t>20件+</a:t>
+              <a:t>10件+</a:t>
             </a:r>
             <a:endParaRPr lang="en-US" sz="900" dirty="0"/>
           </a:p>
@@ -11347,6 +11347,229 @@
         <p:spPr>
           <a:xfrm>
             <a:off x="3429000" y="2953512"/>
+            <a:ext cx="1645920" cy="274320"/>
+          </a:xfrm>
+          <a:prstGeom prst="rect">
+            <a:avLst/>
+          </a:prstGeom>
+          <a:noFill/>
+          <a:ln/>
+        </p:spPr>
+        <p:txBody>
+          <a:bodyPr wrap="square" lIns="0" tIns="0" rIns="0" bIns="0" rtlCol="0" anchor="ctr"/>
+          <a:lstStyle/>
+          <a:p>
+            <a:pPr indent="0" marL="0">
+              <a:buNone/>
+            </a:pPr>
+            <a:r>
+              <a:rPr lang="en-US" sz="1300" b="1" dirty="0">
+                <a:solidFill>
+                  <a:srgbClr val="1A2744"/>
+                </a:solidFill>
+                <a:latin typeface="Arial" pitchFamily="34" charset="0"/>
+                <a:ea typeface="Arial" pitchFamily="34" charset="-122"/>
+                <a:cs typeface="Arial" pitchFamily="34" charset="-120"/>
+              </a:rPr>
+              <a:t>朝食</a:t>
+            </a:r>
+            <a:endParaRPr lang="en-US" sz="1300" dirty="0"/>
+          </a:p>
+        </p:txBody>
+      </p:sp>
+      <p:sp>
+        <p:nvSpPr>
+          <p:cNvPr id="38" name="Text 36"/>
+          <p:cNvSpPr/>
+          <p:nvPr/>
+        </p:nvSpPr>
+        <p:spPr>
+          <a:xfrm>
+            <a:off x="3429000" y="3246120"/>
+            <a:ext cx="2377440" cy="365760"/>
+          </a:xfrm>
+          <a:prstGeom prst="rect">
+            <a:avLst/>
+          </a:prstGeom>
+          <a:noFill/>
+          <a:ln/>
+        </p:spPr>
+        <p:txBody>
+          <a:bodyPr wrap="square" lIns="0" tIns="0" rIns="0" bIns="0" rtlCol="0" anchor="ctr"/>
+          <a:lstStyle/>
+          <a:p>
+            <a:pPr indent="0" marL="0">
+              <a:buNone/>
+            </a:pPr>
+            <a:r>
+              <a:rPr lang="en-US" sz="900" dirty="0">
+                <a:solidFill>
+                  <a:srgbClr val="64748B"/>
+                </a:solidFill>
+                <a:latin typeface="Arial" pitchFamily="34" charset="0"/>
+                <a:ea typeface="Arial" pitchFamily="34" charset="-122"/>
+                <a:cs typeface="Arial" pitchFamily="34" charset="-120"/>
+              </a:rPr>
+              <a:t>Good breakfast, room was as advertised, everything was clean</a:t>
+            </a:r>
+            <a:endParaRPr lang="en-US" sz="900" dirty="0"/>
+          </a:p>
+        </p:txBody>
+      </p:sp>
+      <p:sp>
+        <p:nvSpPr>
+          <p:cNvPr id="39" name="Text 37"/>
+          <p:cNvSpPr/>
+          <p:nvPr/>
+        </p:nvSpPr>
+        <p:spPr>
+          <a:xfrm>
+            <a:off x="3429000" y="3657600"/>
+            <a:ext cx="2377440" cy="640080"/>
+          </a:xfrm>
+          <a:prstGeom prst="rect">
+            <a:avLst/>
+          </a:prstGeom>
+          <a:noFill/>
+          <a:ln/>
+        </p:spPr>
+        <p:txBody>
+          <a:bodyPr wrap="square" lIns="0" tIns="0" rIns="0" bIns="0" rtlCol="0" anchor="ctr"/>
+          <a:lstStyle/>
+          <a:p>
+            <a:pPr indent="0" marL="0">
+              <a:buNone/>
+            </a:pPr>
+            <a:r>
+              <a:rPr lang="en-US" sz="900" i="1" dirty="0">
+                <a:solidFill>
+                  <a:srgbClr val="3B7DD8"/>
+                </a:solidFill>
+                <a:latin typeface="Arial" pitchFamily="34" charset="0"/>
+                <a:ea typeface="Arial" pitchFamily="34" charset="-122"/>
+                <a:cs typeface="Arial" pitchFamily="34" charset="-120"/>
+              </a:rPr>
+              <a:t>「すぐ近くにスーパーやコンビニがあるので、夕飯や朝ごはんには困りませんでした」</a:t>
+            </a:r>
+            <a:endParaRPr lang="en-US" sz="900" dirty="0"/>
+          </a:p>
+        </p:txBody>
+      </p:sp>
+      <p:sp>
+        <p:nvSpPr>
+          <p:cNvPr id="40" name="Shape 38"/>
+          <p:cNvSpPr/>
+          <p:nvPr/>
+        </p:nvSpPr>
+        <p:spPr>
+          <a:xfrm>
+            <a:off x="6126480" y="2880360"/>
+            <a:ext cx="2651760" cy="1600200"/>
+          </a:xfrm>
+          <a:prstGeom prst="rect">
+            <a:avLst/>
+          </a:prstGeom>
+          <a:solidFill>
+            <a:srgbClr val="FFFFFF"/>
+          </a:solidFill>
+          <a:ln/>
+          <a:effectLst>
+            <a:outerShdw sx="100000" sy="100000" kx="0" ky="0" algn="bl" rotWithShape="0" blurRad="50800" dist="25400" dir="8100000">
+              <a:srgbClr val="000000">
+                <a:alpha val="10000"/>
+              </a:srgbClr>
+            </a:outerShdw>
+          </a:effectLst>
+        </p:spPr>
+      </p:sp>
+      <p:sp>
+        <p:nvSpPr>
+          <p:cNvPr id="41" name="Shape 39"/>
+          <p:cNvSpPr/>
+          <p:nvPr/>
+        </p:nvSpPr>
+        <p:spPr>
+          <a:xfrm>
+            <a:off x="6126480" y="2880360"/>
+            <a:ext cx="54864" cy="1600200"/>
+          </a:xfrm>
+          <a:prstGeom prst="rect">
+            <a:avLst/>
+          </a:prstGeom>
+          <a:solidFill>
+            <a:srgbClr val="16A34A"/>
+          </a:solidFill>
+          <a:ln/>
+        </p:spPr>
+      </p:sp>
+      <p:sp>
+        <p:nvSpPr>
+          <p:cNvPr id="42" name="Shape 40"/>
+          <p:cNvSpPr/>
+          <p:nvPr/>
+        </p:nvSpPr>
+        <p:spPr>
+          <a:xfrm>
+            <a:off x="7955280" y="2953512"/>
+            <a:ext cx="658368" cy="228600"/>
+          </a:xfrm>
+          <a:prstGeom prst="rect">
+            <a:avLst/>
+          </a:prstGeom>
+          <a:solidFill>
+            <a:srgbClr val="DCFCE7"/>
+          </a:solidFill>
+          <a:ln/>
+        </p:spPr>
+      </p:sp>
+      <p:sp>
+        <p:nvSpPr>
+          <p:cNvPr id="43" name="Text 41"/>
+          <p:cNvSpPr/>
+          <p:nvPr/>
+        </p:nvSpPr>
+        <p:spPr>
+          <a:xfrm>
+            <a:off x="7955280" y="2953512"/>
+            <a:ext cx="658368" cy="228600"/>
+          </a:xfrm>
+          <a:prstGeom prst="rect">
+            <a:avLst/>
+          </a:prstGeom>
+          <a:noFill/>
+          <a:ln/>
+        </p:spPr>
+        <p:txBody>
+          <a:bodyPr wrap="square" lIns="0" tIns="0" rIns="0" bIns="0" rtlCol="0" anchor="ctr"/>
+          <a:lstStyle/>
+          <a:p>
+            <a:pPr algn="ctr" indent="0" marL="0">
+              <a:buNone/>
+            </a:pPr>
+            <a:r>
+              <a:rPr lang="en-US" sz="900" b="1" dirty="0">
+                <a:solidFill>
+                  <a:srgbClr val="16A34A"/>
+                </a:solidFill>
+                <a:latin typeface="Arial" pitchFamily="34" charset="0"/>
+                <a:ea typeface="Arial" pitchFamily="34" charset="-122"/>
+                <a:cs typeface="Arial" pitchFamily="34" charset="-120"/>
+              </a:rPr>
+              <a:t>9件</a:t>
+            </a:r>
+            <a:endParaRPr lang="en-US" sz="900" dirty="0"/>
+          </a:p>
+        </p:txBody>
+      </p:sp>
+      <p:sp>
+        <p:nvSpPr>
+          <p:cNvPr id="44" name="Text 42"/>
+          <p:cNvSpPr/>
+          <p:nvPr/>
+        </p:nvSpPr>
+        <p:spPr>
+          <a:xfrm>
+            <a:off x="6263640" y="2953512"/>
             <a:ext cx="1645920" cy="274320"/>
           </a:xfrm>
           <a:prstGeom prst="rect">
@@ -11379,13 +11602,13 @@
       </p:sp>
       <p:sp>
         <p:nvSpPr>
-          <p:cNvPr id="38" name="Text 36"/>
-          <p:cNvSpPr/>
-          <p:nvPr/>
-        </p:nvSpPr>
-        <p:spPr>
-          <a:xfrm>
-            <a:off x="3429000" y="3246120"/>
+          <p:cNvPr id="45" name="Text 43"/>
+          <p:cNvSpPr/>
+          <p:nvPr/>
+        </p:nvSpPr>
+        <p:spPr>
+          <a:xfrm>
+            <a:off x="6263640" y="3246120"/>
             <a:ext cx="2377440" cy="365760"/>
           </a:xfrm>
           <a:prstGeom prst="rect">
@@ -11418,13 +11641,13 @@
       </p:sp>
       <p:sp>
         <p:nvSpPr>
-          <p:cNvPr id="39" name="Text 37"/>
-          <p:cNvSpPr/>
-          <p:nvPr/>
-        </p:nvSpPr>
-        <p:spPr>
-          <a:xfrm>
-            <a:off x="3429000" y="3657600"/>
+          <p:cNvPr id="46" name="Text 44"/>
+          <p:cNvSpPr/>
+          <p:nvPr/>
+        </p:nvSpPr>
+        <p:spPr>
+          <a:xfrm>
+            <a:off x="6263640" y="3657600"/>
             <a:ext cx="2377440" cy="640080"/>
           </a:xfrm>
           <a:prstGeom prst="rect">
@@ -11450,229 +11673,6 @@
                 <a:cs typeface="Arial" pitchFamily="34" charset="-120"/>
               </a:rPr>
               <a:t>「場所も大鳥居駅から近く、周りにもコンビニやテイクアウトできるレストランがあったので便利でした」</a:t>
-            </a:r>
-            <a:endParaRPr lang="en-US" sz="900" dirty="0"/>
-          </a:p>
-        </p:txBody>
-      </p:sp>
-      <p:sp>
-        <p:nvSpPr>
-          <p:cNvPr id="40" name="Shape 38"/>
-          <p:cNvSpPr/>
-          <p:nvPr/>
-        </p:nvSpPr>
-        <p:spPr>
-          <a:xfrm>
-            <a:off x="6126480" y="2880360"/>
-            <a:ext cx="2651760" cy="1600200"/>
-          </a:xfrm>
-          <a:prstGeom prst="rect">
-            <a:avLst/>
-          </a:prstGeom>
-          <a:solidFill>
-            <a:srgbClr val="FFFFFF"/>
-          </a:solidFill>
-          <a:ln/>
-          <a:effectLst>
-            <a:outerShdw sx="100000" sy="100000" kx="0" ky="0" algn="bl" rotWithShape="0" blurRad="50800" dist="25400" dir="8100000">
-              <a:srgbClr val="000000">
-                <a:alpha val="10000"/>
-              </a:srgbClr>
-            </a:outerShdw>
-          </a:effectLst>
-        </p:spPr>
-      </p:sp>
-      <p:sp>
-        <p:nvSpPr>
-          <p:cNvPr id="41" name="Shape 39"/>
-          <p:cNvSpPr/>
-          <p:nvPr/>
-        </p:nvSpPr>
-        <p:spPr>
-          <a:xfrm>
-            <a:off x="6126480" y="2880360"/>
-            <a:ext cx="54864" cy="1600200"/>
-          </a:xfrm>
-          <a:prstGeom prst="rect">
-            <a:avLst/>
-          </a:prstGeom>
-          <a:solidFill>
-            <a:srgbClr val="16A34A"/>
-          </a:solidFill>
-          <a:ln/>
-        </p:spPr>
-      </p:sp>
-      <p:sp>
-        <p:nvSpPr>
-          <p:cNvPr id="42" name="Shape 40"/>
-          <p:cNvSpPr/>
-          <p:nvPr/>
-        </p:nvSpPr>
-        <p:spPr>
-          <a:xfrm>
-            <a:off x="7955280" y="2953512"/>
-            <a:ext cx="658368" cy="228600"/>
-          </a:xfrm>
-          <a:prstGeom prst="rect">
-            <a:avLst/>
-          </a:prstGeom>
-          <a:solidFill>
-            <a:srgbClr val="DCFCE7"/>
-          </a:solidFill>
-          <a:ln/>
-        </p:spPr>
-      </p:sp>
-      <p:sp>
-        <p:nvSpPr>
-          <p:cNvPr id="43" name="Text 41"/>
-          <p:cNvSpPr/>
-          <p:nvPr/>
-        </p:nvSpPr>
-        <p:spPr>
-          <a:xfrm>
-            <a:off x="7955280" y="2953512"/>
-            <a:ext cx="658368" cy="228600"/>
-          </a:xfrm>
-          <a:prstGeom prst="rect">
-            <a:avLst/>
-          </a:prstGeom>
-          <a:noFill/>
-          <a:ln/>
-        </p:spPr>
-        <p:txBody>
-          <a:bodyPr wrap="square" lIns="0" tIns="0" rIns="0" bIns="0" rtlCol="0" anchor="ctr"/>
-          <a:lstStyle/>
-          <a:p>
-            <a:pPr algn="ctr" indent="0" marL="0">
-              <a:buNone/>
-            </a:pPr>
-            <a:r>
-              <a:rPr lang="en-US" sz="900" b="1" dirty="0">
-                <a:solidFill>
-                  <a:srgbClr val="16A34A"/>
-                </a:solidFill>
-                <a:latin typeface="Arial" pitchFamily="34" charset="0"/>
-                <a:ea typeface="Arial" pitchFamily="34" charset="-122"/>
-                <a:cs typeface="Arial" pitchFamily="34" charset="-120"/>
-              </a:rPr>
-              <a:t>20件+</a:t>
-            </a:r>
-            <a:endParaRPr lang="en-US" sz="900" dirty="0"/>
-          </a:p>
-        </p:txBody>
-      </p:sp>
-      <p:sp>
-        <p:nvSpPr>
-          <p:cNvPr id="44" name="Text 42"/>
-          <p:cNvSpPr/>
-          <p:nvPr/>
-        </p:nvSpPr>
-        <p:spPr>
-          <a:xfrm>
-            <a:off x="6263640" y="2953512"/>
-            <a:ext cx="1645920" cy="274320"/>
-          </a:xfrm>
-          <a:prstGeom prst="rect">
-            <a:avLst/>
-          </a:prstGeom>
-          <a:noFill/>
-          <a:ln/>
-        </p:spPr>
-        <p:txBody>
-          <a:bodyPr wrap="square" lIns="0" tIns="0" rIns="0" bIns="0" rtlCol="0" anchor="ctr"/>
-          <a:lstStyle/>
-          <a:p>
-            <a:pPr indent="0" marL="0">
-              <a:buNone/>
-            </a:pPr>
-            <a:r>
-              <a:rPr lang="en-US" sz="1300" b="1" dirty="0">
-                <a:solidFill>
-                  <a:srgbClr val="1A2744"/>
-                </a:solidFill>
-                <a:latin typeface="Arial" pitchFamily="34" charset="0"/>
-                <a:ea typeface="Arial" pitchFamily="34" charset="-122"/>
-                <a:cs typeface="Arial" pitchFamily="34" charset="-120"/>
-              </a:rPr>
-              <a:t>朝食</a:t>
-            </a:r>
-            <a:endParaRPr lang="en-US" sz="1300" dirty="0"/>
-          </a:p>
-        </p:txBody>
-      </p:sp>
-      <p:sp>
-        <p:nvSpPr>
-          <p:cNvPr id="45" name="Text 43"/>
-          <p:cNvSpPr/>
-          <p:nvPr/>
-        </p:nvSpPr>
-        <p:spPr>
-          <a:xfrm>
-            <a:off x="6263640" y="3246120"/>
-            <a:ext cx="2377440" cy="365760"/>
-          </a:xfrm>
-          <a:prstGeom prst="rect">
-            <a:avLst/>
-          </a:prstGeom>
-          <a:noFill/>
-          <a:ln/>
-        </p:spPr>
-        <p:txBody>
-          <a:bodyPr wrap="square" lIns="0" tIns="0" rIns="0" bIns="0" rtlCol="0" anchor="ctr"/>
-          <a:lstStyle/>
-          <a:p>
-            <a:pPr indent="0" marL="0">
-              <a:buNone/>
-            </a:pPr>
-            <a:r>
-              <a:rPr lang="en-US" sz="900" dirty="0">
-                <a:solidFill>
-                  <a:srgbClr val="64748B"/>
-                </a:solidFill>
-                <a:latin typeface="Arial" pitchFamily="34" charset="0"/>
-                <a:ea typeface="Arial" pitchFamily="34" charset="-122"/>
-                <a:cs typeface="Arial" pitchFamily="34" charset="-120"/>
-              </a:rPr>
-              <a:t>Good breakfast, room was as advertised, everything was clean</a:t>
-            </a:r>
-            <a:endParaRPr lang="en-US" sz="900" dirty="0"/>
-          </a:p>
-        </p:txBody>
-      </p:sp>
-      <p:sp>
-        <p:nvSpPr>
-          <p:cNvPr id="46" name="Text 44"/>
-          <p:cNvSpPr/>
-          <p:nvPr/>
-        </p:nvSpPr>
-        <p:spPr>
-          <a:xfrm>
-            <a:off x="6263640" y="3657600"/>
-            <a:ext cx="2377440" cy="640080"/>
-          </a:xfrm>
-          <a:prstGeom prst="rect">
-            <a:avLst/>
-          </a:prstGeom>
-          <a:noFill/>
-          <a:ln/>
-        </p:spPr>
-        <p:txBody>
-          <a:bodyPr wrap="square" lIns="0" tIns="0" rIns="0" bIns="0" rtlCol="0" anchor="ctr"/>
-          <a:lstStyle/>
-          <a:p>
-            <a:pPr indent="0" marL="0">
-              <a:buNone/>
-            </a:pPr>
-            <a:r>
-              <a:rPr lang="en-US" sz="900" i="1" dirty="0">
-                <a:solidFill>
-                  <a:srgbClr val="3B7DD8"/>
-                </a:solidFill>
-                <a:latin typeface="Arial" pitchFamily="34" charset="0"/>
-                <a:ea typeface="Arial" pitchFamily="34" charset="-122"/>
-                <a:cs typeface="Arial" pitchFamily="34" charset="-120"/>
-              </a:rPr>
-              <a:t>「すぐ近くにスーパーやコンビニがあるので、夕飯や朝ごはんには困りませんでした」</a:t>
             </a:r>
             <a:endParaRPr lang="en-US" sz="900" dirty="0"/>
           </a:p>
@@ -12430,7 +12430,7 @@
                           <a:ea typeface="Arial" pitchFamily="34" charset="-122"/>
                           <a:cs typeface="Arial" pitchFamily="34" charset="-120"/>
                         </a:rPr>
-                        <a:t>105件</a:t>
+                        <a:t>51件</a:t>
                       </a:r>
                       <a:endParaRPr lang="en-US" sz="900" dirty="0">
                         <a:latin typeface="Arial" charset="0"/>
@@ -12704,7 +12704,7 @@
                           <a:ea typeface="Arial" pitchFamily="34" charset="-122"/>
                           <a:cs typeface="Arial" pitchFamily="34" charset="-120"/>
                         </a:rPr>
-                        <a:t>40件</a:t>
+                        <a:t>27件</a:t>
                       </a:r>
                       <a:endParaRPr lang="en-US" sz="900" dirty="0">
                         <a:latin typeface="Arial" charset="0"/>
@@ -12978,7 +12978,7 @@
                           <a:ea typeface="Arial" pitchFamily="34" charset="-122"/>
                           <a:cs typeface="Arial" pitchFamily="34" charset="-120"/>
                         </a:rPr>
-                        <a:t>27件</a:t>
+                        <a:t>13件</a:t>
                       </a:r>
                       <a:endParaRPr lang="en-US" sz="900" dirty="0">
                         <a:latin typeface="Arial" charset="0"/>
@@ -13116,7 +13116,7 @@
                           <a:ea typeface="Arial" pitchFamily="34" charset="-122"/>
                           <a:cs typeface="Arial" pitchFamily="34" charset="-120"/>
                         </a:rPr>
-                        <a:t>防音性能</a:t>
+                        <a:t>対応・サービスの不満</a:t>
                       </a:r>
                       <a:endParaRPr lang="en-US" sz="900" dirty="0">
                         <a:latin typeface="Arial" charset="0"/>
@@ -13184,7 +13184,7 @@
                           <a:ea typeface="Arial" pitchFamily="34" charset="-122"/>
                           <a:cs typeface="Arial" pitchFamily="34" charset="-120"/>
                         </a:rPr>
-                        <a:t>早朝出発の人などの音が気になるのと、お風呂の排水口の臭いが気になる〜後は快適に過ごせた</a:t>
+                        <a:t>どうして朝のシャトルバスがなくなったのか分かりませんが、結構残念でした</a:t>
                       </a:r>
                       <a:endParaRPr lang="en-US" sz="900" dirty="0">
                         <a:latin typeface="Arial" charset="0"/>
@@ -13252,7 +13252,7 @@
                           <a:ea typeface="Arial" pitchFamily="34" charset="-122"/>
                           <a:cs typeface="Arial" pitchFamily="34" charset="-120"/>
                         </a:rPr>
-                        <a:t>12件</a:t>
+                        <a:t>5件</a:t>
                       </a:r>
                       <a:endParaRPr lang="en-US" sz="900" dirty="0">
                         <a:latin typeface="Arial" charset="0"/>
@@ -13390,7 +13390,7 @@
                           <a:ea typeface="Arial" pitchFamily="34" charset="-122"/>
                           <a:cs typeface="Arial" pitchFamily="34" charset="-120"/>
                         </a:rPr>
-                        <a:t>対応・サービスの不満</a:t>
+                        <a:t>防音性能</a:t>
                       </a:r>
                       <a:endParaRPr lang="en-US" sz="900" dirty="0">
                         <a:latin typeface="Arial" charset="0"/>
@@ -13458,7 +13458,7 @@
                           <a:ea typeface="Arial" pitchFamily="34" charset="-122"/>
                           <a:cs typeface="Arial" pitchFamily="34" charset="-120"/>
                         </a:rPr>
-                        <a:t>どうして朝のシャトルバスがなくなったのか分かりませんが、結構残念でした</a:t>
+                        <a:t>早朝出発の人などの音が気になるのと、お風呂の排水口の臭いが気になる〜後は快適に過ごせた</a:t>
                       </a:r>
                       <a:endParaRPr lang="en-US" sz="900" dirty="0">
                         <a:latin typeface="Arial" charset="0"/>
@@ -13526,7 +13526,7 @@
                           <a:ea typeface="Arial" pitchFamily="34" charset="-122"/>
                           <a:cs typeface="Arial" pitchFamily="34" charset="-120"/>
                         </a:rPr>
-                        <a:t>12件</a:t>
+                        <a:t>4件</a:t>
                       </a:r>
                       <a:endParaRPr lang="en-US" sz="900" dirty="0">
                         <a:latin typeface="Arial" charset="0"/>
@@ -13800,7 +13800,7 @@
                           <a:ea typeface="Arial" pitchFamily="34" charset="-122"/>
                           <a:cs typeface="Arial" pitchFamily="34" charset="-120"/>
                         </a:rPr>
-                        <a:t>2件</a:t>
+                        <a:t>1件</a:t>
                       </a:r>
                       <a:endParaRPr lang="en-US" sz="900" dirty="0">
                         <a:latin typeface="Arial" charset="0"/>
@@ -14074,7 +14074,7 @@
                           <a:ea typeface="Arial" pitchFamily="34" charset="-122"/>
                           <a:cs typeface="Arial" pitchFamily="34" charset="-120"/>
                         </a:rPr>
-                        <a:t>2件</a:t>
+                        <a:t>1件</a:t>
                       </a:r>
                       <a:endParaRPr lang="en-US" sz="900" dirty="0">
                         <a:latin typeface="Arial" charset="0"/>
@@ -14348,280 +14348,6 @@
                           <a:ea typeface="Arial" pitchFamily="34" charset="-122"/>
                           <a:cs typeface="Arial" pitchFamily="34" charset="-120"/>
                         </a:rPr>
-                        <a:t>2件</a:t>
-                      </a:r>
-                      <a:endParaRPr lang="en-US" sz="900" dirty="0">
-                        <a:latin typeface="Arial" charset="0"/>
-                        <a:ea typeface="Arial" charset="0"/>
-                        <a:cs typeface="Arial" charset="0"/>
-                      </a:endParaRPr>
-                    </a:p>
-                  </a:txBody>
-                  <a:tcPr marL="91440" marR="91440" marT="45720" marB="45720">
-                    <a:lnL w="6350" cap="flat" cmpd="sng" algn="ctr">
-                      <a:solidFill>
-                        <a:srgbClr val="CBD5E1"/>
-                      </a:solidFill>
-                      <a:prstDash val="solid"/>
-                      <a:round/>
-                      <a:headEnd type="none" w="med" len="med"/>
-                      <a:tailEnd type="none" w="med" len="med"/>
-                    </a:lnL>
-                    <a:lnR w="6350" cap="flat" cmpd="sng" algn="ctr">
-                      <a:solidFill>
-                        <a:srgbClr val="CBD5E1"/>
-                      </a:solidFill>
-                      <a:prstDash val="solid"/>
-                      <a:round/>
-                      <a:headEnd type="none" w="med" len="med"/>
-                      <a:tailEnd type="none" w="med" len="med"/>
-                    </a:lnR>
-                    <a:lnT w="6350" cap="flat" cmpd="sng" algn="ctr">
-                      <a:solidFill>
-                        <a:srgbClr val="CBD5E1"/>
-                      </a:solidFill>
-                      <a:prstDash val="solid"/>
-                      <a:round/>
-                      <a:headEnd type="none" w="med" len="med"/>
-                      <a:tailEnd type="none" w="med" len="med"/>
-                    </a:lnT>
-                    <a:lnB w="6350" cap="flat" cmpd="sng" algn="ctr">
-                      <a:solidFill>
-                        <a:srgbClr val="CBD5E1"/>
-                      </a:solidFill>
-                      <a:prstDash val="solid"/>
-                      <a:round/>
-                      <a:headEnd type="none" w="med" len="med"/>
-                      <a:tailEnd type="none" w="med" len="med"/>
-                    </a:lnB>
-                    <a:solidFill>
-                      <a:srgbClr val="FFFFFF"/>
-                    </a:solidFill>
-                  </a:tcPr>
-                </a:tc>
-              </a:tr>
-              <a:tr h="320040">
-                <a:tc>
-                  <a:txBody>
-                    <a:bodyPr/>
-                    <a:lstStyle/>
-                    <a:p>
-                      <a:pPr algn="ctr" indent="0" marL="0">
-                        <a:buNone/>
-                      </a:pPr>
-                      <a:r>
-                        <a:rPr lang="en-US" sz="1200" b="1" dirty="0">
-                          <a:solidFill>
-                            <a:srgbClr val="94A3B8"/>
-                          </a:solidFill>
-                          <a:latin typeface="Arial" pitchFamily="34" charset="0"/>
-                          <a:ea typeface="Arial" pitchFamily="34" charset="-122"/>
-                          <a:cs typeface="Arial" pitchFamily="34" charset="-120"/>
-                        </a:rPr>
-                        <a:t>C</a:t>
-                      </a:r>
-                      <a:endParaRPr lang="en-US" sz="1200" dirty="0">
-                        <a:latin typeface="Arial" charset="0"/>
-                        <a:ea typeface="Arial" charset="0"/>
-                        <a:cs typeface="Arial" charset="0"/>
-                      </a:endParaRPr>
-                    </a:p>
-                  </a:txBody>
-                  <a:tcPr marL="91440" marR="91440" marT="45720" marB="45720">
-                    <a:lnL w="6350" cap="flat" cmpd="sng" algn="ctr">
-                      <a:solidFill>
-                        <a:srgbClr val="CBD5E1"/>
-                      </a:solidFill>
-                      <a:prstDash val="solid"/>
-                      <a:round/>
-                      <a:headEnd type="none" w="med" len="med"/>
-                      <a:tailEnd type="none" w="med" len="med"/>
-                    </a:lnL>
-                    <a:lnR w="6350" cap="flat" cmpd="sng" algn="ctr">
-                      <a:solidFill>
-                        <a:srgbClr val="CBD5E1"/>
-                      </a:solidFill>
-                      <a:prstDash val="solid"/>
-                      <a:round/>
-                      <a:headEnd type="none" w="med" len="med"/>
-                      <a:tailEnd type="none" w="med" len="med"/>
-                    </a:lnR>
-                    <a:lnT w="6350" cap="flat" cmpd="sng" algn="ctr">
-                      <a:solidFill>
-                        <a:srgbClr val="CBD5E1"/>
-                      </a:solidFill>
-                      <a:prstDash val="solid"/>
-                      <a:round/>
-                      <a:headEnd type="none" w="med" len="med"/>
-                      <a:tailEnd type="none" w="med" len="med"/>
-                    </a:lnT>
-                    <a:lnB w="6350" cap="flat" cmpd="sng" algn="ctr">
-                      <a:solidFill>
-                        <a:srgbClr val="CBD5E1"/>
-                      </a:solidFill>
-                      <a:prstDash val="solid"/>
-                      <a:round/>
-                      <a:headEnd type="none" w="med" len="med"/>
-                      <a:tailEnd type="none" w="med" len="med"/>
-                    </a:lnB>
-                    <a:solidFill>
-                      <a:srgbClr val="E8EFF8"/>
-                    </a:solidFill>
-                  </a:tcPr>
-                </a:tc>
-                <a:tc>
-                  <a:txBody>
-                    <a:bodyPr/>
-                    <a:lstStyle/>
-                    <a:p>
-                      <a:pPr indent="0" marL="0">
-                        <a:buNone/>
-                      </a:pPr>
-                      <a:r>
-                        <a:rPr lang="en-US" sz="900" b="1" dirty="0">
-                          <a:solidFill>
-                            <a:srgbClr val="334155"/>
-                          </a:solidFill>
-                          <a:latin typeface="Arial" pitchFamily="34" charset="0"/>
-                          <a:ea typeface="Arial" pitchFamily="34" charset="-122"/>
-                          <a:cs typeface="Arial" pitchFamily="34" charset="-120"/>
-                        </a:rPr>
-                        <a:t>清掃不備</a:t>
-                      </a:r>
-                      <a:endParaRPr lang="en-US" sz="900" dirty="0">
-                        <a:latin typeface="Arial" charset="0"/>
-                        <a:ea typeface="Arial" charset="0"/>
-                        <a:cs typeface="Arial" charset="0"/>
-                      </a:endParaRPr>
-                    </a:p>
-                  </a:txBody>
-                  <a:tcPr marL="91440" marR="91440" marT="45720" marB="45720">
-                    <a:lnL w="6350" cap="flat" cmpd="sng" algn="ctr">
-                      <a:solidFill>
-                        <a:srgbClr val="CBD5E1"/>
-                      </a:solidFill>
-                      <a:prstDash val="solid"/>
-                      <a:round/>
-                      <a:headEnd type="none" w="med" len="med"/>
-                      <a:tailEnd type="none" w="med" len="med"/>
-                    </a:lnL>
-                    <a:lnR w="6350" cap="flat" cmpd="sng" algn="ctr">
-                      <a:solidFill>
-                        <a:srgbClr val="CBD5E1"/>
-                      </a:solidFill>
-                      <a:prstDash val="solid"/>
-                      <a:round/>
-                      <a:headEnd type="none" w="med" len="med"/>
-                      <a:tailEnd type="none" w="med" len="med"/>
-                    </a:lnR>
-                    <a:lnT w="6350" cap="flat" cmpd="sng" algn="ctr">
-                      <a:solidFill>
-                        <a:srgbClr val="CBD5E1"/>
-                      </a:solidFill>
-                      <a:prstDash val="solid"/>
-                      <a:round/>
-                      <a:headEnd type="none" w="med" len="med"/>
-                      <a:tailEnd type="none" w="med" len="med"/>
-                    </a:lnT>
-                    <a:lnB w="6350" cap="flat" cmpd="sng" algn="ctr">
-                      <a:solidFill>
-                        <a:srgbClr val="CBD5E1"/>
-                      </a:solidFill>
-                      <a:prstDash val="solid"/>
-                      <a:round/>
-                      <a:headEnd type="none" w="med" len="med"/>
-                      <a:tailEnd type="none" w="med" len="med"/>
-                    </a:lnB>
-                    <a:solidFill>
-                      <a:srgbClr val="E8EFF8"/>
-                    </a:solidFill>
-                  </a:tcPr>
-                </a:tc>
-                <a:tc>
-                  <a:txBody>
-                    <a:bodyPr/>
-                    <a:lstStyle/>
-                    <a:p>
-                      <a:pPr indent="0" marL="0">
-                        <a:buNone/>
-                      </a:pPr>
-                      <a:r>
-                        <a:rPr lang="en-US" sz="900" dirty="0">
-                          <a:solidFill>
-                            <a:srgbClr val="64748B"/>
-                          </a:solidFill>
-                          <a:latin typeface="Arial" pitchFamily="34" charset="0"/>
-                          <a:ea typeface="Arial" pitchFamily="34" charset="-122"/>
-                          <a:cs typeface="Arial" pitchFamily="34" charset="-120"/>
-                        </a:rPr>
-                        <a:t>・ベッドのシーツには前の利用者が汚したものか…シミが付いていて気になりましたがチェックインが22時過ぎと遅く疲れて...</a:t>
-                      </a:r>
-                      <a:endParaRPr lang="en-US" sz="900" dirty="0">
-                        <a:latin typeface="Arial" charset="0"/>
-                        <a:ea typeface="Arial" charset="0"/>
-                        <a:cs typeface="Arial" charset="0"/>
-                      </a:endParaRPr>
-                    </a:p>
-                  </a:txBody>
-                  <a:tcPr marL="91440" marR="91440" marT="45720" marB="45720">
-                    <a:lnL w="6350" cap="flat" cmpd="sng" algn="ctr">
-                      <a:solidFill>
-                        <a:srgbClr val="CBD5E1"/>
-                      </a:solidFill>
-                      <a:prstDash val="solid"/>
-                      <a:round/>
-                      <a:headEnd type="none" w="med" len="med"/>
-                      <a:tailEnd type="none" w="med" len="med"/>
-                    </a:lnL>
-                    <a:lnR w="6350" cap="flat" cmpd="sng" algn="ctr">
-                      <a:solidFill>
-                        <a:srgbClr val="CBD5E1"/>
-                      </a:solidFill>
-                      <a:prstDash val="solid"/>
-                      <a:round/>
-                      <a:headEnd type="none" w="med" len="med"/>
-                      <a:tailEnd type="none" w="med" len="med"/>
-                    </a:lnR>
-                    <a:lnT w="6350" cap="flat" cmpd="sng" algn="ctr">
-                      <a:solidFill>
-                        <a:srgbClr val="CBD5E1"/>
-                      </a:solidFill>
-                      <a:prstDash val="solid"/>
-                      <a:round/>
-                      <a:headEnd type="none" w="med" len="med"/>
-                      <a:tailEnd type="none" w="med" len="med"/>
-                    </a:lnT>
-                    <a:lnB w="6350" cap="flat" cmpd="sng" algn="ctr">
-                      <a:solidFill>
-                        <a:srgbClr val="CBD5E1"/>
-                      </a:solidFill>
-                      <a:prstDash val="solid"/>
-                      <a:round/>
-                      <a:headEnd type="none" w="med" len="med"/>
-                      <a:tailEnd type="none" w="med" len="med"/>
-                    </a:lnB>
-                    <a:solidFill>
-                      <a:srgbClr val="E8EFF8"/>
-                    </a:solidFill>
-                  </a:tcPr>
-                </a:tc>
-                <a:tc>
-                  <a:txBody>
-                    <a:bodyPr/>
-                    <a:lstStyle/>
-                    <a:p>
-                      <a:pPr algn="ctr" indent="0" marL="0">
-                        <a:buNone/>
-                      </a:pPr>
-                      <a:r>
-                        <a:rPr lang="en-US" sz="900" dirty="0">
-                          <a:solidFill>
-                            <a:srgbClr val="334155"/>
-                          </a:solidFill>
-                          <a:latin typeface="Arial" pitchFamily="34" charset="0"/>
-                          <a:ea typeface="Arial" pitchFamily="34" charset="-122"/>
-                          <a:cs typeface="Arial" pitchFamily="34" charset="-120"/>
-                        </a:rPr>
                         <a:t>1件</a:t>
                       </a:r>
                       <a:endParaRPr lang="en-US" sz="900" dirty="0">
@@ -14669,7 +14395,7 @@
                       <a:tailEnd type="none" w="med" len="med"/>
                     </a:lnB>
                     <a:solidFill>
-                      <a:srgbClr val="E8EFF8"/>
+                      <a:srgbClr val="FFFFFF"/>
                     </a:solidFill>
                   </a:tcPr>
                 </a:tc>
@@ -15333,7 +15059,7 @@
                 <a:ea typeface="Arial" pitchFamily="34" charset="-122"/>
                 <a:cs typeface="Arial" pitchFamily="34" charset="-120"/>
               </a:rPr>
-              <a:t>清掃品質の向上</a:t>
+              <a:t>エアコン・空調の定期点検強化</a:t>
             </a:r>
             <a:endParaRPr lang="en-US" sz="1200" dirty="0"/>
           </a:p>
@@ -15348,177 +15074,6 @@
         <p:spPr>
           <a:xfrm>
             <a:off x="4800600" y="1600200"/>
-            <a:ext cx="3657600" cy="1188720"/>
-          </a:xfrm>
-          <a:prstGeom prst="rect">
-            <a:avLst/>
-          </a:prstGeom>
-          <a:noFill/>
-          <a:ln/>
-        </p:spPr>
-        <p:txBody>
-          <a:bodyPr wrap="square" lIns="0" tIns="0" rIns="0" bIns="0" rtlCol="0" anchor="ctr"/>
-          <a:lstStyle/>
-          <a:p>
-            <a:pPr marL="342900" indent="-342900">
-              <a:spcAft>
-                <a:spcPts val="300"/>
-              </a:spcAft>
-              <a:buSzPct val="100000"/>
-              <a:buChar char="•"/>
-            </a:pPr>
-            <a:r>
-              <a:rPr lang="en-US" sz="900" dirty="0">
-                <a:solidFill>
-                  <a:srgbClr val="334155"/>
-                </a:solidFill>
-                <a:latin typeface="Arial" pitchFamily="34" charset="0"/>
-                <a:ea typeface="Arial" pitchFamily="34" charset="-122"/>
-                <a:cs typeface="Arial" pitchFamily="34" charset="-120"/>
-              </a:rPr>
-              <a:t>清掃チェックリストの見直しと強化（ベッド下・隅の重点確認）</a:t>
-            </a:r>
-            <a:endParaRPr lang="en-US" sz="900" dirty="0"/>
-          </a:p>
-          <a:p>
-            <a:pPr marL="342900" indent="-342900">
-              <a:spcAft>
-                <a:spcPts val="300"/>
-              </a:spcAft>
-              <a:buSzPct val="100000"/>
-              <a:buChar char="•"/>
-            </a:pPr>
-            <a:r>
-              <a:rPr lang="en-US" sz="900" dirty="0">
-                <a:solidFill>
-                  <a:srgbClr val="334155"/>
-                </a:solidFill>
-                <a:latin typeface="Arial" pitchFamily="34" charset="0"/>
-                <a:ea typeface="Arial" pitchFamily="34" charset="-122"/>
-                <a:cs typeface="Arial" pitchFamily="34" charset="-120"/>
-              </a:rPr>
-              <a:t>清掃後のダブルチェック体制の導入</a:t>
-            </a:r>
-            <a:endParaRPr lang="en-US" sz="900" dirty="0"/>
-          </a:p>
-          <a:p>
-            <a:pPr marL="342900" indent="-342900">
-              <a:spcAft>
-                <a:spcPts val="300"/>
-              </a:spcAft>
-              <a:buSzPct val="100000"/>
-              <a:buChar char="•"/>
-            </a:pPr>
-            <a:r>
-              <a:rPr lang="en-US" sz="900" dirty="0">
-                <a:solidFill>
-                  <a:srgbClr val="334155"/>
-                </a:solidFill>
-                <a:latin typeface="Arial" pitchFamily="34" charset="0"/>
-                <a:ea typeface="Arial" pitchFamily="34" charset="-122"/>
-                <a:cs typeface="Arial" pitchFamily="34" charset="-120"/>
-              </a:rPr>
-              <a:t>清掃スタッフへの再研修実施</a:t>
-            </a:r>
-            <a:endParaRPr lang="en-US" sz="900" dirty="0"/>
-          </a:p>
-        </p:txBody>
-      </p:sp>
-      <p:sp>
-        <p:nvSpPr>
-          <p:cNvPr id="14" name="Shape 12"/>
-          <p:cNvSpPr/>
-          <p:nvPr/>
-        </p:nvSpPr>
-        <p:spPr>
-          <a:xfrm>
-            <a:off x="457200" y="3017520"/>
-            <a:ext cx="3977640" cy="1600200"/>
-          </a:xfrm>
-          <a:prstGeom prst="rect">
-            <a:avLst/>
-          </a:prstGeom>
-          <a:solidFill>
-            <a:srgbClr val="FFFFFF"/>
-          </a:solidFill>
-          <a:ln/>
-          <a:effectLst>
-            <a:outerShdw sx="100000" sy="100000" kx="0" ky="0" algn="bl" rotWithShape="0" blurRad="50800" dist="25400" dir="8100000">
-              <a:srgbClr val="000000">
-                <a:alpha val="10000"/>
-              </a:srgbClr>
-            </a:outerShdw>
-          </a:effectLst>
-        </p:spPr>
-      </p:sp>
-      <p:sp>
-        <p:nvSpPr>
-          <p:cNvPr id="15" name="Shape 13"/>
-          <p:cNvSpPr/>
-          <p:nvPr/>
-        </p:nvSpPr>
-        <p:spPr>
-          <a:xfrm>
-            <a:off x="457200" y="3017520"/>
-            <a:ext cx="54864" cy="1600200"/>
-          </a:xfrm>
-          <a:prstGeom prst="rect">
-            <a:avLst/>
-          </a:prstGeom>
-          <a:solidFill>
-            <a:srgbClr val="3B7DD8"/>
-          </a:solidFill>
-          <a:ln/>
-        </p:spPr>
-      </p:sp>
-      <p:sp>
-        <p:nvSpPr>
-          <p:cNvPr id="16" name="Text 14"/>
-          <p:cNvSpPr/>
-          <p:nvPr/>
-        </p:nvSpPr>
-        <p:spPr>
-          <a:xfrm>
-            <a:off x="594360" y="3063240"/>
-            <a:ext cx="3657600" cy="320040"/>
-          </a:xfrm>
-          <a:prstGeom prst="rect">
-            <a:avLst/>
-          </a:prstGeom>
-          <a:noFill/>
-          <a:ln/>
-        </p:spPr>
-        <p:txBody>
-          <a:bodyPr wrap="square" lIns="0" tIns="0" rIns="0" bIns="0" rtlCol="0" anchor="ctr"/>
-          <a:lstStyle/>
-          <a:p>
-            <a:pPr indent="0" marL="0">
-              <a:buNone/>
-            </a:pPr>
-            <a:r>
-              <a:rPr lang="en-US" sz="1200" b="1" dirty="0">
-                <a:solidFill>
-                  <a:srgbClr val="1A2744"/>
-                </a:solidFill>
-                <a:latin typeface="Arial" pitchFamily="34" charset="0"/>
-                <a:ea typeface="Arial" pitchFamily="34" charset="-122"/>
-                <a:cs typeface="Arial" pitchFamily="34" charset="-120"/>
-              </a:rPr>
-              <a:t>エアコン・空調の定期点検強化</a:t>
-            </a:r>
-            <a:endParaRPr lang="en-US" sz="1200" dirty="0"/>
-          </a:p>
-        </p:txBody>
-      </p:sp>
-      <p:sp>
-        <p:nvSpPr>
-          <p:cNvPr id="17" name="Text 15"/>
-          <p:cNvSpPr/>
-          <p:nvPr/>
-        </p:nvSpPr>
-        <p:spPr>
-          <a:xfrm>
-            <a:off x="594360" y="3383280"/>
             <a:ext cx="3657600" cy="1188720"/>
           </a:xfrm>
           <a:prstGeom prst="rect">
@@ -15597,13 +15152,13 @@
       </p:sp>
       <p:sp>
         <p:nvSpPr>
-          <p:cNvPr id="18" name="Shape 16"/>
-          <p:cNvSpPr/>
-          <p:nvPr/>
-        </p:nvSpPr>
-        <p:spPr>
-          <a:xfrm>
-            <a:off x="4663440" y="3017520"/>
+          <p:cNvPr id="14" name="Shape 12"/>
+          <p:cNvSpPr/>
+          <p:nvPr/>
+        </p:nvSpPr>
+        <p:spPr>
+          <a:xfrm>
+            <a:off x="457200" y="3017520"/>
             <a:ext cx="3977640" cy="1600200"/>
           </a:xfrm>
           <a:prstGeom prst="rect">
@@ -15624,13 +15179,13 @@
       </p:sp>
       <p:sp>
         <p:nvSpPr>
-          <p:cNvPr id="19" name="Shape 17"/>
-          <p:cNvSpPr/>
-          <p:nvPr/>
-        </p:nvSpPr>
-        <p:spPr>
-          <a:xfrm>
-            <a:off x="4663440" y="3017520"/>
+          <p:cNvPr id="15" name="Shape 13"/>
+          <p:cNvSpPr/>
+          <p:nvPr/>
+        </p:nvSpPr>
+        <p:spPr>
+          <a:xfrm>
+            <a:off x="457200" y="3017520"/>
             <a:ext cx="54864" cy="1600200"/>
           </a:xfrm>
           <a:prstGeom prst="rect">
@@ -15644,13 +15199,13 @@
       </p:sp>
       <p:sp>
         <p:nvSpPr>
-          <p:cNvPr id="20" name="Text 18"/>
-          <p:cNvSpPr/>
-          <p:nvPr/>
-        </p:nvSpPr>
-        <p:spPr>
-          <a:xfrm>
-            <a:off x="4800600" y="3063240"/>
+          <p:cNvPr id="16" name="Text 14"/>
+          <p:cNvSpPr/>
+          <p:nvPr/>
+        </p:nvSpPr>
+        <p:spPr>
+          <a:xfrm>
+            <a:off x="594360" y="3063240"/>
             <a:ext cx="3657600" cy="320040"/>
           </a:xfrm>
           <a:prstGeom prst="rect">
@@ -15683,13 +15238,13 @@
       </p:sp>
       <p:sp>
         <p:nvSpPr>
-          <p:cNvPr id="21" name="Text 19"/>
-          <p:cNvSpPr/>
-          <p:nvPr/>
-        </p:nvSpPr>
-        <p:spPr>
-          <a:xfrm>
-            <a:off x="4800600" y="3383280"/>
+          <p:cNvPr id="17" name="Text 15"/>
+          <p:cNvSpPr/>
+          <p:nvPr/>
+        </p:nvSpPr>
+        <p:spPr>
+          <a:xfrm>
+            <a:off x="594360" y="3383280"/>
             <a:ext cx="3657600" cy="1188720"/>
           </a:xfrm>
           <a:prstGeom prst="rect">
@@ -15768,7 +15323,7 @@
       </p:sp>
       <p:sp>
         <p:nvSpPr>
-          <p:cNvPr id="22" name="Shape 20"/>
+          <p:cNvPr id="18" name="Shape 16"/>
           <p:cNvSpPr/>
           <p:nvPr/>
         </p:nvSpPr>
@@ -15788,7 +15343,7 @@
       </p:sp>
       <p:sp>
         <p:nvSpPr>
-          <p:cNvPr id="23" name="Text 21"/>
+          <p:cNvPr id="19" name="Text 17"/>
           <p:cNvSpPr/>
           <p:nvPr/>
         </p:nvSpPr>
@@ -15827,7 +15382,7 @@
       </p:sp>
       <p:sp>
         <p:nvSpPr>
-          <p:cNvPr id="24" name="Text 22"/>
+          <p:cNvPr id="20" name="Text 18"/>
           <p:cNvSpPr/>
           <p:nvPr/>
         </p:nvSpPr>

--- a/納品レポート/ホテル別レポート/henn_na_haneda_口コミ分析レポート.pptx
+++ b/納品レポート/ホテル別レポート/henn_na_haneda_口コミ分析レポート.pptx
@@ -183,10 +183,10 @@
                     <c:v>Trip.com</c:v>
                   </c:pt>
                   <c:pt idx="1">
-                    <c:v>じゃらん</c:v>
+                    <c:v>楽天トラベル</c:v>
                   </c:pt>
                   <c:pt idx="2">
-                    <c:v>楽天トラベル</c:v>
+                    <c:v>じゃらん</c:v>
                   </c:pt>
                   <c:pt idx="3">
                     <c:v>Agoda</c:v>
@@ -208,22 +208,22 @@
                 <c:formatCode>General</c:formatCode>
                 <c:ptCount val="6"/>
                 <c:pt idx="0">
-                  <c:v>9.56</c:v>
+                  <c:v>9.17</c:v>
                 </c:pt>
                 <c:pt idx="1">
-                  <c:v>8.75</c:v>
+                  <c:v>8.73</c:v>
                 </c:pt>
                 <c:pt idx="2">
-                  <c:v>8.63</c:v>
+                  <c:v>8.67</c:v>
                 </c:pt>
                 <c:pt idx="3">
-                  <c:v>8.4</c:v>
+                  <c:v>8.36</c:v>
                 </c:pt>
                 <c:pt idx="4">
-                  <c:v>8.23</c:v>
+                  <c:v>8.17</c:v>
                 </c:pt>
                 <c:pt idx="5">
-                  <c:v>8</c:v>
+                  <c:v>7.94</c:v>
                 </c:pt>
               </c:numCache>
             </c:numRef>
@@ -566,13 +566,13 @@
               <c:numCache>
                 <c:ptCount val="3"/>
                 <c:pt idx="0">
-                  <c:v>126</c:v>
+                  <c:v>144</c:v>
                 </c:pt>
                 <c:pt idx="1">
-                  <c:v>31</c:v>
+                  <c:v>37</c:v>
                 </c:pt>
                 <c:pt idx="2">
-                  <c:v>7</c:v>
+                  <c:v>8</c:v>
                 </c:pt>
               </c:numCache>
             </c:numRef>
@@ -823,28 +823,28 @@
                 <c:formatCode>General</c:formatCode>
                 <c:ptCount val="9"/>
                 <c:pt idx="0">
-                  <c:v>61</c:v>
+                  <c:v>68</c:v>
                 </c:pt>
                 <c:pt idx="1">
-                  <c:v>23</c:v>
+                  <c:v>26</c:v>
                 </c:pt>
                 <c:pt idx="2">
-                  <c:v>42</c:v>
+                  <c:v>50</c:v>
                 </c:pt>
                 <c:pt idx="3">
-                  <c:v>16</c:v>
+                  <c:v>18</c:v>
                 </c:pt>
                 <c:pt idx="4">
-                  <c:v>11</c:v>
+                  <c:v>14</c:v>
                 </c:pt>
                 <c:pt idx="5">
-                  <c:v>4</c:v>
+                  <c:v>5</c:v>
                 </c:pt>
                 <c:pt idx="6">
                   <c:v>2</c:v>
                 </c:pt>
                 <c:pt idx="7">
-                  <c:v>1</c:v>
+                  <c:v>2</c:v>
                 </c:pt>
                 <c:pt idx="8">
                   <c:v>4</c:v>
@@ -2778,7 +2778,7 @@
                 <a:ea typeface="Arial" pitchFamily="34" charset="-122"/>
                 <a:cs typeface="Arial" pitchFamily="34" charset="-120"/>
               </a:rPr>
-              <a:t>分析対象期間：2026年3月</a:t>
+              <a:t>分析対象期間：2026年3月〜4月</a:t>
             </a:r>
             <a:endParaRPr lang="en-US" sz="1000" dirty="0"/>
           </a:p>
@@ -2798,7 +2798,7 @@
                 <a:ea typeface="Arial" pitchFamily="34" charset="-122"/>
                 <a:cs typeface="Arial" pitchFamily="34" charset="-120"/>
               </a:rPr>
-              <a:t>レビュー総数：164件（6サイト）</a:t>
+              <a:t>レビュー総数：189件（6サイト）</a:t>
             </a:r>
             <a:endParaRPr lang="en-US" sz="1000" dirty="0"/>
           </a:p>
@@ -3364,7 +3364,7 @@
                           <a:ea typeface="Arial" pitchFamily="34" charset="-122"/>
                           <a:cs typeface="Arial" pitchFamily="34" charset="-120"/>
                         </a:rPr>
-                        <a:t>8.35点</a:t>
+                        <a:t>8.31点</a:t>
                       </a:r>
                       <a:endParaRPr lang="en-US" sz="1000" dirty="0">
                         <a:latin typeface="Arial" charset="0"/>
@@ -3432,7 +3432,7 @@
                           <a:ea typeface="Arial" pitchFamily="34" charset="-122"/>
                           <a:cs typeface="Arial" pitchFamily="34" charset="-120"/>
                         </a:rPr>
-                        <a:t>8.7点以上</a:t>
+                        <a:t>8.6点以上</a:t>
                       </a:r>
                       <a:endParaRPr lang="en-US" sz="1000" dirty="0">
                         <a:latin typeface="Arial" charset="0"/>
@@ -3638,7 +3638,7 @@
                           <a:ea typeface="Arial" pitchFamily="34" charset="-122"/>
                           <a:cs typeface="Arial" pitchFamily="34" charset="-120"/>
                         </a:rPr>
-                        <a:t>76.8%</a:t>
+                        <a:t>76.2%</a:t>
                       </a:r>
                       <a:endParaRPr lang="en-US" sz="1000" dirty="0">
                         <a:latin typeface="Arial" charset="0"/>
@@ -3706,7 +3706,7 @@
                           <a:ea typeface="Arial" pitchFamily="34" charset="-122"/>
                           <a:cs typeface="Arial" pitchFamily="34" charset="-120"/>
                         </a:rPr>
-                        <a:t>82%以上</a:t>
+                        <a:t>81%以上</a:t>
                       </a:r>
                       <a:endParaRPr lang="en-US" sz="1000" dirty="0">
                         <a:latin typeface="Arial" charset="0"/>
@@ -3912,7 +3912,7 @@
                           <a:ea typeface="Arial" pitchFamily="34" charset="-122"/>
                           <a:cs typeface="Arial" pitchFamily="34" charset="-120"/>
                         </a:rPr>
-                        <a:t>4.3%</a:t>
+                        <a:t>4.2%</a:t>
                       </a:r>
                       <a:endParaRPr lang="en-US" sz="1000" dirty="0">
                         <a:latin typeface="Arial" charset="0"/>
@@ -4460,7 +4460,7 @@
                           <a:ea typeface="Arial" pitchFamily="34" charset="-122"/>
                           <a:cs typeface="Arial" pitchFamily="34" charset="-120"/>
                         </a:rPr>
-                        <a:t>約51件/期間</a:t>
+                        <a:t>約60件/期間</a:t>
                       </a:r>
                       <a:endParaRPr lang="en-US" sz="1000" dirty="0">
                         <a:latin typeface="Arial" charset="0"/>
@@ -4528,7 +4528,7 @@
                           <a:ea typeface="Arial" pitchFamily="34" charset="-122"/>
                           <a:cs typeface="Arial" pitchFamily="34" charset="-120"/>
                         </a:rPr>
-                        <a:t>25件以下</a:t>
+                        <a:t>30件以下</a:t>
                       </a:r>
                       <a:endParaRPr lang="en-US" sz="1000" dirty="0">
                         <a:latin typeface="Arial" charset="0"/>
@@ -5099,7 +5099,7 @@
                 <a:ea typeface="Arial" pitchFamily="34" charset="-122"/>
                 <a:cs typeface="Arial" pitchFamily="34" charset="-120"/>
               </a:rPr>
-              <a:t>8.35</a:t>
+              <a:t>8.31</a:t>
             </a:r>
             <a:endParaRPr lang="en-US" sz="3200" dirty="0"/>
           </a:p>
@@ -5224,7 +5224,7 @@
                 <a:ea typeface="Arial" pitchFamily="34" charset="-122"/>
                 <a:cs typeface="Arial" pitchFamily="34" charset="-120"/>
               </a:rPr>
-              <a:t>76.8%</a:t>
+              <a:t>76.2%</a:t>
             </a:r>
             <a:endParaRPr lang="en-US" sz="3200" dirty="0"/>
           </a:p>
@@ -5349,7 +5349,7 @@
                 <a:ea typeface="Arial" pitchFamily="34" charset="-122"/>
                 <a:cs typeface="Arial" pitchFamily="34" charset="-120"/>
               </a:rPr>
-              <a:t>4.3%</a:t>
+              <a:t>4.2%</a:t>
             </a:r>
             <a:endParaRPr lang="en-US" sz="3200" dirty="0"/>
           </a:p>
@@ -5474,7 +5474,7 @@
                 <a:ea typeface="Arial" pitchFamily="34" charset="-122"/>
                 <a:cs typeface="Arial" pitchFamily="34" charset="-120"/>
               </a:rPr>
-              <a:t>164件</a:t>
+              <a:t>189件</a:t>
             </a:r>
             <a:endParaRPr lang="en-US" sz="3200" dirty="0"/>
           </a:p>
@@ -5622,7 +5622,7 @@
                 <a:ea typeface="Arial" pitchFamily="34" charset="-122"/>
                 <a:cs typeface="Arial" pitchFamily="34" charset="-120"/>
               </a:rPr>
-              <a:t>  เดินทางสะดวก ใกล้สนามบิน 空港に近い便利な立地</a:t>
+              <a:t>  駅から近かった</a:t>
             </a:r>
             <a:endParaRPr lang="en-US" sz="1100" dirty="0"/>
           </a:p>
@@ -5662,7 +5662,7 @@
                 <a:ea typeface="Arial" pitchFamily="34" charset="-122"/>
                 <a:cs typeface="Arial" pitchFamily="34" charset="-120"/>
               </a:rPr>
-              <a:t>  空港シャトルサービスもあるので、旅行もとても便利です</a:t>
+              <a:t>  何か質問があれば、スタッフが対応してくれます</a:t>
             </a:r>
             <a:endParaRPr lang="en-US" sz="1100" dirty="0"/>
           </a:p>
@@ -5702,7 +5702,7 @@
                 <a:ea typeface="Arial" pitchFamily="34" charset="-122"/>
                 <a:cs typeface="Arial" pitchFamily="34" charset="-120"/>
               </a:rPr>
-              <a:t>  Good breakfast, room was as advertised, everything was clean</a:t>
+              <a:t>  部屋は清潔で整頓されており、アメニティは写真の通りです</a:t>
             </a:r>
             <a:endParaRPr lang="en-US" sz="1100" dirty="0"/>
           </a:p>
@@ -5850,7 +5850,7 @@
                 <a:ea typeface="Arial" pitchFamily="34" charset="-122"/>
                 <a:cs typeface="Arial" pitchFamily="34" charset="-120"/>
               </a:rPr>
-              <a:t>  無料シャトルバスもありますが、京急の駅が近いので空港へすぐ到着できて大変便利でした</a:t>
+              <a:t>  羽田空港に近いのは大きな利点で、無料シャトルバスサービスがあり、車で約15分です</a:t>
             </a:r>
             <a:endParaRPr lang="en-US" sz="1100" dirty="0"/>
           </a:p>
@@ -5890,7 +5890,7 @@
                 <a:ea typeface="Arial" pitchFamily="34" charset="-122"/>
                 <a:cs typeface="Arial" pitchFamily="34" charset="-120"/>
               </a:rPr>
-              <a:t>  Habitaciones minúsculas, con amenities que están de sobra...</a:t>
+              <a:t>  Although its not super close to the airport there's more ...</a:t>
             </a:r>
             <a:endParaRPr lang="en-US" sz="1100" dirty="0"/>
           </a:p>
@@ -5930,7 +5930,7 @@
                 <a:ea typeface="Arial" pitchFamily="34" charset="-122"/>
                 <a:cs typeface="Arial" pitchFamily="34" charset="-120"/>
               </a:rPr>
-              <a:t>  部屋は小さいですが、必要なものはすべて揃っています</a:t>
+              <a:t>  Restaurant small and appeared to cater for Indian guests ...</a:t>
             </a:r>
             <a:endParaRPr lang="en-US" sz="1100" dirty="0"/>
           </a:p>
@@ -6283,7 +6283,7 @@
                 <a:ea typeface="Arial" pitchFamily="34" charset="-122"/>
                 <a:cs typeface="Arial" pitchFamily="34" charset="-120"/>
               </a:rPr>
-              <a:t>8.35</a:t>
+              <a:t>8.31</a:t>
             </a:r>
             <a:endParaRPr lang="en-US" sz="3200" dirty="0"/>
           </a:p>
@@ -6408,7 +6408,7 @@
                 <a:ea typeface="Arial" pitchFamily="34" charset="-122"/>
                 <a:cs typeface="Arial" pitchFamily="34" charset="-120"/>
               </a:rPr>
-              <a:t>76.8%</a:t>
+              <a:t>76.2%</a:t>
             </a:r>
             <a:endParaRPr lang="en-US" sz="3200" dirty="0"/>
           </a:p>
@@ -6533,7 +6533,7 @@
                 <a:ea typeface="Arial" pitchFamily="34" charset="-122"/>
                 <a:cs typeface="Arial" pitchFamily="34" charset="-120"/>
               </a:rPr>
-              <a:t>4.3%</a:t>
+              <a:t>4.2%</a:t>
             </a:r>
             <a:endParaRPr lang="en-US" sz="3200" dirty="0"/>
           </a:p>
@@ -6658,7 +6658,7 @@
                 <a:ea typeface="Arial" pitchFamily="34" charset="-122"/>
                 <a:cs typeface="Arial" pitchFamily="34" charset="-120"/>
               </a:rPr>
-              <a:t>164件</a:t>
+              <a:t>189件</a:t>
             </a:r>
             <a:endParaRPr lang="en-US" sz="3200" dirty="0"/>
           </a:p>
@@ -7079,7 +7079,7 @@
                 <a:ea typeface="Arial" pitchFamily="34" charset="-122"/>
                 <a:cs typeface="Arial" pitchFamily="34" charset="-120"/>
               </a:rPr>
-              <a:t>Trip.com(9.56)が最高スコア。</a:t>
+              <a:t>Trip.com(9.17)が最高スコア。</a:t>
             </a:r>
             <a:endParaRPr lang="en-US" sz="1100" dirty="0"/>
           </a:p>
@@ -7588,7 +7588,7 @@
                           <a:ea typeface="Arial" pitchFamily="34" charset="-122"/>
                           <a:cs typeface="Arial" pitchFamily="34" charset="-120"/>
                         </a:rPr>
-                        <a:t>9</a:t>
+                        <a:t>12</a:t>
                       </a:r>
                       <a:endParaRPr lang="en-US" sz="900" dirty="0">
                         <a:latin typeface="Arial" charset="0"/>
@@ -7656,7 +7656,7 @@
                           <a:ea typeface="Arial" pitchFamily="34" charset="-122"/>
                           <a:cs typeface="Arial" pitchFamily="34" charset="-120"/>
                         </a:rPr>
-                        <a:t>9.56</a:t>
+                        <a:t>9.17</a:t>
                       </a:r>
                       <a:endParaRPr lang="en-US" sz="900" dirty="0">
                         <a:latin typeface="Arial" charset="0"/>
@@ -7792,7 +7792,7 @@
                           <a:ea typeface="Arial" pitchFamily="34" charset="-122"/>
                           <a:cs typeface="Arial" pitchFamily="34" charset="-120"/>
                         </a:rPr>
-                        <a:t>9.56</a:t>
+                        <a:t>9.17</a:t>
                       </a:r>
                       <a:endParaRPr lang="en-US" sz="900" dirty="0">
                         <a:latin typeface="Arial" charset="0"/>
@@ -7862,7 +7862,7 @@
                           <a:ea typeface="Arial" pitchFamily="34" charset="-122"/>
                           <a:cs typeface="Arial" pitchFamily="34" charset="-120"/>
                         </a:rPr>
-                        <a:t>じゃらん</a:t>
+                        <a:t>楽天トラベル</a:t>
                       </a:r>
                       <a:endParaRPr lang="en-US" sz="900" dirty="0">
                         <a:latin typeface="Arial" charset="0"/>
@@ -7930,7 +7930,7 @@
                           <a:ea typeface="Arial" pitchFamily="34" charset="-122"/>
                           <a:cs typeface="Arial" pitchFamily="34" charset="-120"/>
                         </a:rPr>
-                        <a:t>8</a:t>
+                        <a:t>22</a:t>
                       </a:r>
                       <a:endParaRPr lang="en-US" sz="900" dirty="0">
                         <a:latin typeface="Arial" charset="0"/>
@@ -7998,7 +7998,7 @@
                           <a:ea typeface="Arial" pitchFamily="34" charset="-122"/>
                           <a:cs typeface="Arial" pitchFamily="34" charset="-120"/>
                         </a:rPr>
-                        <a:t>4.38</a:t>
+                        <a:t>4.36</a:t>
                       </a:r>
                       <a:endParaRPr lang="en-US" sz="900" dirty="0">
                         <a:latin typeface="Arial" charset="0"/>
@@ -8134,7 +8134,7 @@
                           <a:ea typeface="Arial" pitchFamily="34" charset="-122"/>
                           <a:cs typeface="Arial" pitchFamily="34" charset="-120"/>
                         </a:rPr>
-                        <a:t>8.75</a:t>
+                        <a:t>8.73</a:t>
                       </a:r>
                       <a:endParaRPr lang="en-US" sz="900" dirty="0">
                         <a:latin typeface="Arial" charset="0"/>
@@ -8204,7 +8204,7 @@
                           <a:ea typeface="Arial" pitchFamily="34" charset="-122"/>
                           <a:cs typeface="Arial" pitchFamily="34" charset="-120"/>
                         </a:rPr>
-                        <a:t>楽天トラベル</a:t>
+                        <a:t>じゃらん</a:t>
                       </a:r>
                       <a:endParaRPr lang="en-US" sz="900" dirty="0">
                         <a:latin typeface="Arial" charset="0"/>
@@ -8272,7 +8272,7 @@
                           <a:ea typeface="Arial" pitchFamily="34" charset="-122"/>
                           <a:cs typeface="Arial" pitchFamily="34" charset="-120"/>
                         </a:rPr>
-                        <a:t>19</a:t>
+                        <a:t>12</a:t>
                       </a:r>
                       <a:endParaRPr lang="en-US" sz="900" dirty="0">
                         <a:latin typeface="Arial" charset="0"/>
@@ -8340,7 +8340,7 @@
                           <a:ea typeface="Arial" pitchFamily="34" charset="-122"/>
                           <a:cs typeface="Arial" pitchFamily="34" charset="-120"/>
                         </a:rPr>
-                        <a:t>4.32</a:t>
+                        <a:t>4.33</a:t>
                       </a:r>
                       <a:endParaRPr lang="en-US" sz="900" dirty="0">
                         <a:latin typeface="Arial" charset="0"/>
@@ -8476,7 +8476,7 @@
                           <a:ea typeface="Arial" pitchFamily="34" charset="-122"/>
                           <a:cs typeface="Arial" pitchFamily="34" charset="-120"/>
                         </a:rPr>
-                        <a:t>8.63</a:t>
+                        <a:t>8.67</a:t>
                       </a:r>
                       <a:endParaRPr lang="en-US" sz="900" dirty="0">
                         <a:latin typeface="Arial" charset="0"/>
@@ -8614,7 +8614,7 @@
                           <a:ea typeface="Arial" pitchFamily="34" charset="-122"/>
                           <a:cs typeface="Arial" pitchFamily="34" charset="-120"/>
                         </a:rPr>
-                        <a:t>20</a:t>
+                        <a:t>22</a:t>
                       </a:r>
                       <a:endParaRPr lang="en-US" sz="900" dirty="0">
                         <a:latin typeface="Arial" charset="0"/>
@@ -8682,7 +8682,7 @@
                           <a:ea typeface="Arial" pitchFamily="34" charset="-122"/>
                           <a:cs typeface="Arial" pitchFamily="34" charset="-120"/>
                         </a:rPr>
-                        <a:t>8.4</a:t>
+                        <a:t>8.36</a:t>
                       </a:r>
                       <a:endParaRPr lang="en-US" sz="900" dirty="0">
                         <a:latin typeface="Arial" charset="0"/>
@@ -8818,7 +8818,7 @@
                           <a:ea typeface="Arial" pitchFamily="34" charset="-122"/>
                           <a:cs typeface="Arial" pitchFamily="34" charset="-120"/>
                         </a:rPr>
-                        <a:t>8.4</a:t>
+                        <a:t>8.36</a:t>
                       </a:r>
                       <a:endParaRPr lang="en-US" sz="900" dirty="0">
                         <a:latin typeface="Arial" charset="0"/>
@@ -8956,7 +8956,7 @@
                           <a:ea typeface="Arial" pitchFamily="34" charset="-122"/>
                           <a:cs typeface="Arial" pitchFamily="34" charset="-120"/>
                         </a:rPr>
-                        <a:t>78</a:t>
+                        <a:t>88</a:t>
                       </a:r>
                       <a:endParaRPr lang="en-US" sz="900" dirty="0">
                         <a:latin typeface="Arial" charset="0"/>
@@ -9024,7 +9024,7 @@
                           <a:ea typeface="Arial" pitchFamily="34" charset="-122"/>
                           <a:cs typeface="Arial" pitchFamily="34" charset="-120"/>
                         </a:rPr>
-                        <a:t>8.23</a:t>
+                        <a:t>8.17</a:t>
                       </a:r>
                       <a:endParaRPr lang="en-US" sz="900" dirty="0">
                         <a:latin typeface="Arial" charset="0"/>
@@ -9160,7 +9160,7 @@
                           <a:ea typeface="Arial" pitchFamily="34" charset="-122"/>
                           <a:cs typeface="Arial" pitchFamily="34" charset="-120"/>
                         </a:rPr>
-                        <a:t>8.23</a:t>
+                        <a:t>8.17</a:t>
                       </a:r>
                       <a:endParaRPr lang="en-US" sz="900" dirty="0">
                         <a:latin typeface="Arial" charset="0"/>
@@ -9298,7 +9298,7 @@
                           <a:ea typeface="Arial" pitchFamily="34" charset="-122"/>
                           <a:cs typeface="Arial" pitchFamily="34" charset="-120"/>
                         </a:rPr>
-                        <a:t>30</a:t>
+                        <a:t>33</a:t>
                       </a:r>
                       <a:endParaRPr lang="en-US" sz="900" dirty="0">
                         <a:latin typeface="Arial" charset="0"/>
@@ -9366,7 +9366,7 @@
                           <a:ea typeface="Arial" pitchFamily="34" charset="-122"/>
                           <a:cs typeface="Arial" pitchFamily="34" charset="-120"/>
                         </a:rPr>
-                        <a:t>4</a:t>
+                        <a:t>3.97</a:t>
                       </a:r>
                       <a:endParaRPr lang="en-US" sz="900" dirty="0">
                         <a:latin typeface="Arial" charset="0"/>
@@ -9502,7 +9502,7 @@
                           <a:ea typeface="Arial" pitchFamily="34" charset="-122"/>
                           <a:cs typeface="Arial" pitchFamily="34" charset="-120"/>
                         </a:rPr>
-                        <a:t>8</a:t>
+                        <a:t>7.94</a:t>
                       </a:r>
                       <a:endParaRPr lang="en-US" sz="900" dirty="0">
                         <a:latin typeface="Arial" charset="0"/>
@@ -9910,7 +9910,7 @@
                 <a:ea typeface="Arial" pitchFamily="34" charset="-122"/>
                 <a:cs typeface="Arial" pitchFamily="34" charset="-120"/>
               </a:rPr>
-              <a:t>126件（76.8%）</a:t>
+              <a:t>144件（76.2%）</a:t>
             </a:r>
             <a:endParaRPr lang="en-US" sz="1100" dirty="0"/>
           </a:p>
@@ -10008,7 +10008,7 @@
                 <a:ea typeface="Arial" pitchFamily="34" charset="-122"/>
                 <a:cs typeface="Arial" pitchFamily="34" charset="-120"/>
               </a:rPr>
-              <a:t>31件（18.9%）</a:t>
+              <a:t>37件（19.6%）</a:t>
             </a:r>
             <a:endParaRPr lang="en-US" sz="1100" dirty="0"/>
           </a:p>
@@ -10106,7 +10106,7 @@
                 <a:ea typeface="Arial" pitchFamily="34" charset="-122"/>
                 <a:cs typeface="Arial" pitchFamily="34" charset="-120"/>
               </a:rPr>
-              <a:t>7件（4.3%）</a:t>
+              <a:t>8件（4.2%）</a:t>
             </a:r>
             <a:endParaRPr lang="en-US" sz="1100" dirty="0"/>
           </a:p>
@@ -10440,7 +10440,7 @@
                 <a:ea typeface="Arial" pitchFamily="34" charset="-122"/>
                 <a:cs typeface="Arial" pitchFamily="34" charset="-120"/>
               </a:rPr>
-              <a:t>20件+</a:t>
+              <a:t>50件+</a:t>
             </a:r>
             <a:endParaRPr lang="en-US" sz="900" dirty="0"/>
           </a:p>
@@ -10518,7 +10518,7 @@
                 <a:ea typeface="Arial" pitchFamily="34" charset="-122"/>
                 <a:cs typeface="Arial" pitchFamily="34" charset="-120"/>
               </a:rPr>
-              <a:t>เดินทางสะดวก ใกล้สนามบิน 空港に近い便利な立地</a:t>
+              <a:t>駅から近かった</a:t>
             </a:r>
             <a:endParaRPr lang="en-US" sz="900" dirty="0"/>
           </a:p>
@@ -10557,7 +10557,7 @@
                 <a:ea typeface="Arial" pitchFamily="34" charset="-122"/>
                 <a:cs typeface="Arial" pitchFamily="34" charset="-120"/>
               </a:rPr>
-              <a:t>「ロビーにも自販機のパスタなどが売っていて便利でした」</a:t>
+              <a:t>「最寄りの駅は大鳥居駅です」</a:t>
             </a:r>
             <a:endParaRPr lang="en-US" sz="900" dirty="0"/>
           </a:p>
@@ -10741,7 +10741,7 @@
                 <a:ea typeface="Arial" pitchFamily="34" charset="-122"/>
                 <a:cs typeface="Arial" pitchFamily="34" charset="-120"/>
               </a:rPr>
-              <a:t>空港シャトルサービスもあるので、旅行もとても便利です</a:t>
+              <a:t>何か質問があれば、スタッフが対応してくれます</a:t>
             </a:r>
             <a:endParaRPr lang="en-US" sz="900" dirty="0"/>
           </a:p>
@@ -10780,7 +10780,7 @@
                 <a:ea typeface="Arial" pitchFamily="34" charset="-122"/>
                 <a:cs typeface="Arial" pitchFamily="34" charset="-120"/>
               </a:rPr>
-              <a:t>「チェックインには、人間味のある対応が欠けている」</a:t>
+              <a:t>「フロントが無人で聞きたいことが聞けないのが残念でした」</a:t>
             </a:r>
             <a:endParaRPr lang="en-US" sz="900" dirty="0"/>
           </a:p>
@@ -10964,7 +10964,7 @@
                 <a:ea typeface="Arial" pitchFamily="34" charset="-122"/>
                 <a:cs typeface="Arial" pitchFamily="34" charset="-120"/>
               </a:rPr>
-              <a:t>Good breakfast, room was as advertised, everything was clean</a:t>
+              <a:t>部屋は清潔で整頓されており、アメニティは写真の通りです</a:t>
             </a:r>
             <a:endParaRPr lang="en-US" sz="900" dirty="0"/>
           </a:p>
@@ -11003,7 +11003,7 @@
                 <a:ea typeface="Arial" pitchFamily="34" charset="-122"/>
                 <a:cs typeface="Arial" pitchFamily="34" charset="-120"/>
               </a:rPr>
-              <a:t>「館内はきれいに清掃されていて気持ちよく過ごせました」</a:t>
+              <a:t>「設備も部屋も新しくきれいだったので、機会があればまた利用したいです」</a:t>
             </a:r>
             <a:endParaRPr lang="en-US" sz="900" dirty="0"/>
           </a:p>
@@ -11187,7 +11187,7 @@
                 <a:ea typeface="Arial" pitchFamily="34" charset="-122"/>
                 <a:cs typeface="Arial" pitchFamily="34" charset="-120"/>
               </a:rPr>
-              <a:t>部屋は狭く、余計なアメニティが置かれていて、さらに場所を取っている</a:t>
+              <a:t>部屋は清潔で整頓されており、アメニティは写真の通りです</a:t>
             </a:r>
             <a:endParaRPr lang="en-US" sz="900" dirty="0"/>
           </a:p>
@@ -11226,7 +11226,7 @@
                 <a:ea typeface="Arial" pitchFamily="34" charset="-122"/>
                 <a:cs typeface="Arial" pitchFamily="34" charset="-120"/>
               </a:rPr>
-              <a:t>「部屋は広々としていてとても快適です」</a:t>
+              <a:t>「設備も部屋も新しくきれいだったので、機会があればまた利用したいです」</a:t>
             </a:r>
             <a:endParaRPr lang="en-US" sz="900" dirty="0"/>
           </a:p>
@@ -11410,7 +11410,7 @@
                 <a:ea typeface="Arial" pitchFamily="34" charset="-122"/>
                 <a:cs typeface="Arial" pitchFamily="34" charset="-120"/>
               </a:rPr>
-              <a:t>Good breakfast, room was as advertised, everything was clean</a:t>
+              <a:t>空港からそれほど近くはないものの、日本のホテルの多くよりも広々としており、インド風の朝食ビュッフェを提供している</a:t>
             </a:r>
             <a:endParaRPr lang="en-US" sz="900" dirty="0"/>
           </a:p>
@@ -11449,7 +11449,7 @@
                 <a:ea typeface="Arial" pitchFamily="34" charset="-122"/>
                 <a:cs typeface="Arial" pitchFamily="34" charset="-120"/>
               </a:rPr>
-              <a:t>「すぐ近くにスーパーやコンビニがあるので、夕飯や朝ごはんには困りませんでした」</a:t>
+              <a:t>「Although its not super close to the airport there's more ...」</a:t>
             </a:r>
             <a:endParaRPr lang="en-US" sz="900" dirty="0"/>
           </a:p>
@@ -11555,7 +11555,7 @@
                 <a:ea typeface="Arial" pitchFamily="34" charset="-122"/>
                 <a:cs typeface="Arial" pitchFamily="34" charset="-120"/>
               </a:rPr>
-              <a:t>9件</a:t>
+              <a:t>10件+</a:t>
             </a:r>
             <a:endParaRPr lang="en-US" sz="900" dirty="0"/>
           </a:p>
@@ -11633,7 +11633,7 @@
                 <a:ea typeface="Arial" pitchFamily="34" charset="-122"/>
                 <a:cs typeface="Arial" pitchFamily="34" charset="-120"/>
               </a:rPr>
-              <a:t>すぐ近くにスーパーやコンビニがあるので、夕飯や朝ごはんには困りませんでした</a:t>
+              <a:t>ホテルは比較的静かな住宅街に位置しており、大通りを少し外れたところにコンビニ、牛丼屋、NOTORIレストランなどが...</a:t>
             </a:r>
             <a:endParaRPr lang="en-US" sz="900" dirty="0"/>
           </a:p>
@@ -11672,7 +11672,7 @@
                 <a:ea typeface="Arial" pitchFamily="34" charset="-122"/>
                 <a:cs typeface="Arial" pitchFamily="34" charset="-120"/>
               </a:rPr>
-              <a:t>「場所も大鳥居駅から近く、周りにもコンビニやテイクアウトできるレストランがあったので便利でした」</a:t>
+              <a:t>「最寄駅周りは飲食店も多く良いと思います」</a:t>
             </a:r>
             <a:endParaRPr lang="en-US" sz="900" dirty="0"/>
           </a:p>
@@ -12362,7 +12362,7 @@
                           <a:ea typeface="Arial" pitchFamily="34" charset="-122"/>
                           <a:cs typeface="Arial" pitchFamily="34" charset="-120"/>
                         </a:rPr>
-                        <a:t>無料シャトルバスもありますが、京急の駅が近いので空港へすぐ到着できて大変便利でした</a:t>
+                        <a:t>羽田空港に近いのは大きな利点で、無料シャトルバスサービスがあり、車で約15分です</a:t>
                       </a:r>
                       <a:endParaRPr lang="en-US" sz="900" dirty="0">
                         <a:latin typeface="Arial" charset="0"/>
@@ -12430,7 +12430,7 @@
                           <a:ea typeface="Arial" pitchFamily="34" charset="-122"/>
                           <a:cs typeface="Arial" pitchFamily="34" charset="-120"/>
                         </a:rPr>
-                        <a:t>51件</a:t>
+                        <a:t>60件</a:t>
                       </a:r>
                       <a:endParaRPr lang="en-US" sz="900" dirty="0">
                         <a:latin typeface="Arial" charset="0"/>
@@ -12636,7 +12636,7 @@
                           <a:ea typeface="Arial" pitchFamily="34" charset="-122"/>
                           <a:cs typeface="Arial" pitchFamily="34" charset="-120"/>
                         </a:rPr>
-                        <a:t>Habitaciones minúsculas, con amenities que están de sobra...</a:t>
+                        <a:t>Although its not super close to the airport there's more ...</a:t>
                       </a:r>
                       <a:endParaRPr lang="en-US" sz="900" dirty="0">
                         <a:latin typeface="Arial" charset="0"/>
@@ -12704,7 +12704,7 @@
                           <a:ea typeface="Arial" pitchFamily="34" charset="-122"/>
                           <a:cs typeface="Arial" pitchFamily="34" charset="-120"/>
                         </a:rPr>
-                        <a:t>27件</a:t>
+                        <a:t>31件</a:t>
                       </a:r>
                       <a:endParaRPr lang="en-US" sz="900" dirty="0">
                         <a:latin typeface="Arial" charset="0"/>
@@ -12910,7 +12910,7 @@
                           <a:ea typeface="Arial" pitchFamily="34" charset="-122"/>
                           <a:cs typeface="Arial" pitchFamily="34" charset="-120"/>
                         </a:rPr>
-                        <a:t>部屋は小さいですが、必要なものはすべて揃っています</a:t>
+                        <a:t>Restaurant small and appeared to cater for Indian guests ...</a:t>
                       </a:r>
                       <a:endParaRPr lang="en-US" sz="900" dirty="0">
                         <a:latin typeface="Arial" charset="0"/>
@@ -12978,7 +12978,7 @@
                           <a:ea typeface="Arial" pitchFamily="34" charset="-122"/>
                           <a:cs typeface="Arial" pitchFamily="34" charset="-120"/>
                         </a:rPr>
-                        <a:t>13件</a:t>
+                        <a:t>14件</a:t>
                       </a:r>
                       <a:endParaRPr lang="en-US" sz="900" dirty="0">
                         <a:latin typeface="Arial" charset="0"/>
@@ -13184,7 +13184,7 @@
                           <a:ea typeface="Arial" pitchFamily="34" charset="-122"/>
                           <a:cs typeface="Arial" pitchFamily="34" charset="-120"/>
                         </a:rPr>
-                        <a:t>どうして朝のシャトルバスがなくなったのか分かりませんが、結構残念でした</a:t>
+                        <a:t>フロントが無人で聞きたいことが聞けないのが残念でした</a:t>
                       </a:r>
                       <a:endParaRPr lang="en-US" sz="900" dirty="0">
                         <a:latin typeface="Arial" charset="0"/>
@@ -13252,7 +13252,7 @@
                           <a:ea typeface="Arial" pitchFamily="34" charset="-122"/>
                           <a:cs typeface="Arial" pitchFamily="34" charset="-120"/>
                         </a:rPr>
-                        <a:t>5件</a:t>
+                        <a:t>6件</a:t>
                       </a:r>
                       <a:endParaRPr lang="en-US" sz="900" dirty="0">
                         <a:latin typeface="Arial" charset="0"/>

--- a/納品レポート/ホテル別レポート/henn_na_haneda_口コミ分析レポート.pptx
+++ b/納品レポート/ホテル別レポート/henn_na_haneda_口コミ分析レポート.pptx
@@ -220,10 +220,10 @@
                   <c:v>8.43</c:v>
                 </c:pt>
                 <c:pt idx="4">
-                  <c:v>8.12</c:v>
+                  <c:v>8.09</c:v>
                 </c:pt>
                 <c:pt idx="5">
-                  <c:v>7.94</c:v>
+                  <c:v>7.76</c:v>
                 </c:pt>
               </c:numCache>
             </c:numRef>
@@ -566,13 +566,13 @@
               <c:numCache>
                 <c:ptCount val="3"/>
                 <c:pt idx="0">
-                  <c:v>146</c:v>
+                  <c:v>147</c:v>
                 </c:pt>
                 <c:pt idx="1">
-                  <c:v>39</c:v>
+                  <c:v>41</c:v>
                 </c:pt>
                 <c:pt idx="2">
-                  <c:v>8</c:v>
+                  <c:v>9</c:v>
                 </c:pt>
               </c:numCache>
             </c:numRef>
@@ -829,13 +829,13 @@
                   <c:v>26</c:v>
                 </c:pt>
                 <c:pt idx="2">
-                  <c:v>50</c:v>
+                  <c:v>51</c:v>
                 </c:pt>
                 <c:pt idx="3">
-                  <c:v>19</c:v>
+                  <c:v>20</c:v>
                 </c:pt>
                 <c:pt idx="4">
-                  <c:v>14</c:v>
+                  <c:v>15</c:v>
                 </c:pt>
                 <c:pt idx="5">
                   <c:v>6</c:v>
@@ -847,7 +847,7 @@
                   <c:v>2</c:v>
                 </c:pt>
                 <c:pt idx="8">
-                  <c:v>4</c:v>
+                  <c:v>5</c:v>
                 </c:pt>
               </c:numCache>
             </c:numRef>
@@ -2798,7 +2798,7 @@
                 <a:ea typeface="Arial" pitchFamily="34" charset="-122"/>
                 <a:cs typeface="Arial" pitchFamily="34" charset="-120"/>
               </a:rPr>
-              <a:t>レビュー総数：193件（6サイト）</a:t>
+              <a:t>レビュー総数：197件（6サイト）</a:t>
             </a:r>
             <a:endParaRPr lang="en-US" sz="1000" dirty="0"/>
           </a:p>
@@ -2818,7 +2818,7 @@
                 <a:ea typeface="Arial" pitchFamily="34" charset="-122"/>
                 <a:cs typeface="Arial" pitchFamily="34" charset="-120"/>
               </a:rPr>
-              <a:t>作成日：2026年4月6日</a:t>
+              <a:t>作成日：2026年4月7日</a:t>
             </a:r>
             <a:endParaRPr lang="en-US" sz="1000" dirty="0"/>
           </a:p>
@@ -3364,7 +3364,7 @@
                           <a:ea typeface="Arial" pitchFamily="34" charset="-122"/>
                           <a:cs typeface="Arial" pitchFamily="34" charset="-120"/>
                         </a:rPr>
-                        <a:t>8.31点</a:t>
+                        <a:t>8.25点</a:t>
                       </a:r>
                       <a:endParaRPr lang="en-US" sz="1000" dirty="0">
                         <a:latin typeface="Arial" charset="0"/>
@@ -3638,7 +3638,7 @@
                           <a:ea typeface="Arial" pitchFamily="34" charset="-122"/>
                           <a:cs typeface="Arial" pitchFamily="34" charset="-120"/>
                         </a:rPr>
-                        <a:t>75.6%</a:t>
+                        <a:t>74.6%</a:t>
                       </a:r>
                       <a:endParaRPr lang="en-US" sz="1000" dirty="0">
                         <a:latin typeface="Arial" charset="0"/>
@@ -3706,7 +3706,7 @@
                           <a:ea typeface="Arial" pitchFamily="34" charset="-122"/>
                           <a:cs typeface="Arial" pitchFamily="34" charset="-120"/>
                         </a:rPr>
-                        <a:t>81%以上</a:t>
+                        <a:t>80%以上</a:t>
                       </a:r>
                       <a:endParaRPr lang="en-US" sz="1000" dirty="0">
                         <a:latin typeface="Arial" charset="0"/>
@@ -3912,7 +3912,7 @@
                           <a:ea typeface="Arial" pitchFamily="34" charset="-122"/>
                           <a:cs typeface="Arial" pitchFamily="34" charset="-120"/>
                         </a:rPr>
-                        <a:t>4.1%</a:t>
+                        <a:t>4.6%</a:t>
                       </a:r>
                       <a:endParaRPr lang="en-US" sz="1000" dirty="0">
                         <a:latin typeface="Arial" charset="0"/>
@@ -3980,7 +3980,7 @@
                           <a:ea typeface="Arial" pitchFamily="34" charset="-122"/>
                           <a:cs typeface="Arial" pitchFamily="34" charset="-120"/>
                         </a:rPr>
-                        <a:t>1%以下</a:t>
+                        <a:t>2%以下</a:t>
                       </a:r>
                       <a:endParaRPr lang="en-US" sz="1000" dirty="0">
                         <a:latin typeface="Arial" charset="0"/>
@@ -4460,7 +4460,7 @@
                           <a:ea typeface="Arial" pitchFamily="34" charset="-122"/>
                           <a:cs typeface="Arial" pitchFamily="34" charset="-120"/>
                         </a:rPr>
-                        <a:t>約60件/期間</a:t>
+                        <a:t>約61件/期間</a:t>
                       </a:r>
                       <a:endParaRPr lang="en-US" sz="1000" dirty="0">
                         <a:latin typeface="Arial" charset="0"/>
@@ -5099,7 +5099,7 @@
                 <a:ea typeface="Arial" pitchFamily="34" charset="-122"/>
                 <a:cs typeface="Arial" pitchFamily="34" charset="-120"/>
               </a:rPr>
-              <a:t>8.31</a:t>
+              <a:t>8.25</a:t>
             </a:r>
             <a:endParaRPr lang="en-US" sz="3200" dirty="0"/>
           </a:p>
@@ -5224,7 +5224,7 @@
                 <a:ea typeface="Arial" pitchFamily="34" charset="-122"/>
                 <a:cs typeface="Arial" pitchFamily="34" charset="-120"/>
               </a:rPr>
-              <a:t>75.6%</a:t>
+              <a:t>74.6%</a:t>
             </a:r>
             <a:endParaRPr lang="en-US" sz="3200" dirty="0"/>
           </a:p>
@@ -5349,7 +5349,7 @@
                 <a:ea typeface="Arial" pitchFamily="34" charset="-122"/>
                 <a:cs typeface="Arial" pitchFamily="34" charset="-120"/>
               </a:rPr>
-              <a:t>4.1%</a:t>
+              <a:t>4.6%</a:t>
             </a:r>
             <a:endParaRPr lang="en-US" sz="3200" dirty="0"/>
           </a:p>
@@ -5474,7 +5474,7 @@
                 <a:ea typeface="Arial" pitchFamily="34" charset="-122"/>
                 <a:cs typeface="Arial" pitchFamily="34" charset="-120"/>
               </a:rPr>
-              <a:t>193件</a:t>
+              <a:t>197件</a:t>
             </a:r>
             <a:endParaRPr lang="en-US" sz="3200" dirty="0"/>
           </a:p>
@@ -5622,7 +5622,7 @@
                 <a:ea typeface="Arial" pitchFamily="34" charset="-122"/>
                 <a:cs typeface="Arial" pitchFamily="34" charset="-120"/>
               </a:rPr>
-              <a:t>  駅から近かった</a:t>
+              <a:t>  Good location</a:t>
             </a:r>
             <a:endParaRPr lang="en-US" sz="1100" dirty="0"/>
           </a:p>
@@ -5662,7 +5662,7 @@
                 <a:ea typeface="Arial" pitchFamily="34" charset="-122"/>
                 <a:cs typeface="Arial" pitchFamily="34" charset="-120"/>
               </a:rPr>
-              <a:t>  何か質問があれば、スタッフが対応してくれます</a:t>
+              <a:t>  スタッフが常時いるのではなく、電話でやりとりするスタイル</a:t>
             </a:r>
             <a:endParaRPr lang="en-US" sz="1100" dirty="0"/>
           </a:p>
@@ -5850,7 +5850,7 @@
                 <a:ea typeface="Arial" pitchFamily="34" charset="-122"/>
                 <a:cs typeface="Arial" pitchFamily="34" charset="-120"/>
               </a:rPr>
-              <a:t>  羽田空港に近いのは大きな利点で、無料シャトルバスサービスがあり、車で約15分です</a:t>
+              <a:t>  荷物が複数個ある場合や、大きな荷物をお持ちの場合は、シャトルバスの手配を拒否されるため、ここに宿泊しないでください</a:t>
             </a:r>
             <a:endParaRPr lang="en-US" sz="1100" dirty="0"/>
           </a:p>
@@ -6283,7 +6283,7 @@
                 <a:ea typeface="Arial" pitchFamily="34" charset="-122"/>
                 <a:cs typeface="Arial" pitchFamily="34" charset="-120"/>
               </a:rPr>
-              <a:t>8.31</a:t>
+              <a:t>8.25</a:t>
             </a:r>
             <a:endParaRPr lang="en-US" sz="3200" dirty="0"/>
           </a:p>
@@ -6408,7 +6408,7 @@
                 <a:ea typeface="Arial" pitchFamily="34" charset="-122"/>
                 <a:cs typeface="Arial" pitchFamily="34" charset="-120"/>
               </a:rPr>
-              <a:t>75.6%</a:t>
+              <a:t>74.6%</a:t>
             </a:r>
             <a:endParaRPr lang="en-US" sz="3200" dirty="0"/>
           </a:p>
@@ -6533,7 +6533,7 @@
                 <a:ea typeface="Arial" pitchFamily="34" charset="-122"/>
                 <a:cs typeface="Arial" pitchFamily="34" charset="-120"/>
               </a:rPr>
-              <a:t>4.1%</a:t>
+              <a:t>4.6%</a:t>
             </a:r>
             <a:endParaRPr lang="en-US" sz="3200" dirty="0"/>
           </a:p>
@@ -6658,7 +6658,7 @@
                 <a:ea typeface="Arial" pitchFamily="34" charset="-122"/>
                 <a:cs typeface="Arial" pitchFamily="34" charset="-120"/>
               </a:rPr>
-              <a:t>193件</a:t>
+              <a:t>197件</a:t>
             </a:r>
             <a:endParaRPr lang="en-US" sz="3200" dirty="0"/>
           </a:p>
@@ -8956,7 +8956,7 @@
                           <a:ea typeface="Arial" pitchFamily="34" charset="-122"/>
                           <a:cs typeface="Arial" pitchFamily="34" charset="-120"/>
                         </a:rPr>
-                        <a:t>90</a:t>
+                        <a:t>93</a:t>
                       </a:r>
                       <a:endParaRPr lang="en-US" sz="900" dirty="0">
                         <a:latin typeface="Arial" charset="0"/>
@@ -9024,7 +9024,7 @@
                           <a:ea typeface="Arial" pitchFamily="34" charset="-122"/>
                           <a:cs typeface="Arial" pitchFamily="34" charset="-120"/>
                         </a:rPr>
-                        <a:t>8.12</a:t>
+                        <a:t>8.09</a:t>
                       </a:r>
                       <a:endParaRPr lang="en-US" sz="900" dirty="0">
                         <a:latin typeface="Arial" charset="0"/>
@@ -9160,7 +9160,7 @@
                           <a:ea typeface="Arial" pitchFamily="34" charset="-122"/>
                           <a:cs typeface="Arial" pitchFamily="34" charset="-120"/>
                         </a:rPr>
-                        <a:t>8.12</a:t>
+                        <a:t>8.09</a:t>
                       </a:r>
                       <a:endParaRPr lang="en-US" sz="900" dirty="0">
                         <a:latin typeface="Arial" charset="0"/>
@@ -9298,7 +9298,7 @@
                           <a:ea typeface="Arial" pitchFamily="34" charset="-122"/>
                           <a:cs typeface="Arial" pitchFamily="34" charset="-120"/>
                         </a:rPr>
-                        <a:t>33</a:t>
+                        <a:t>34</a:t>
                       </a:r>
                       <a:endParaRPr lang="en-US" sz="900" dirty="0">
                         <a:latin typeface="Arial" charset="0"/>
@@ -9366,7 +9366,7 @@
                           <a:ea typeface="Arial" pitchFamily="34" charset="-122"/>
                           <a:cs typeface="Arial" pitchFamily="34" charset="-120"/>
                         </a:rPr>
-                        <a:t>3.97</a:t>
+                        <a:t>3.88</a:t>
                       </a:r>
                       <a:endParaRPr lang="en-US" sz="900" dirty="0">
                         <a:latin typeface="Arial" charset="0"/>
@@ -9502,7 +9502,7 @@
                           <a:ea typeface="Arial" pitchFamily="34" charset="-122"/>
                           <a:cs typeface="Arial" pitchFamily="34" charset="-120"/>
                         </a:rPr>
-                        <a:t>7.94</a:t>
+                        <a:t>7.76</a:t>
                       </a:r>
                       <a:endParaRPr lang="en-US" sz="900" dirty="0">
                         <a:latin typeface="Arial" charset="0"/>
@@ -9910,7 +9910,7 @@
                 <a:ea typeface="Arial" pitchFamily="34" charset="-122"/>
                 <a:cs typeface="Arial" pitchFamily="34" charset="-120"/>
               </a:rPr>
-              <a:t>146件（75.6%）</a:t>
+              <a:t>147件（74.6%）</a:t>
             </a:r>
             <a:endParaRPr lang="en-US" sz="1100" dirty="0"/>
           </a:p>
@@ -10008,7 +10008,7 @@
                 <a:ea typeface="Arial" pitchFamily="34" charset="-122"/>
                 <a:cs typeface="Arial" pitchFamily="34" charset="-120"/>
               </a:rPr>
-              <a:t>39件（20.2%）</a:t>
+              <a:t>41件（20.8%）</a:t>
             </a:r>
             <a:endParaRPr lang="en-US" sz="1100" dirty="0"/>
           </a:p>
@@ -10106,7 +10106,7 @@
                 <a:ea typeface="Arial" pitchFamily="34" charset="-122"/>
                 <a:cs typeface="Arial" pitchFamily="34" charset="-120"/>
               </a:rPr>
-              <a:t>8件（4.1%）</a:t>
+              <a:t>9件（4.6%）</a:t>
             </a:r>
             <a:endParaRPr lang="en-US" sz="1100" dirty="0"/>
           </a:p>
@@ -10518,7 +10518,7 @@
                 <a:ea typeface="Arial" pitchFamily="34" charset="-122"/>
                 <a:cs typeface="Arial" pitchFamily="34" charset="-120"/>
               </a:rPr>
-              <a:t>駅から近かった</a:t>
+              <a:t>Good location</a:t>
             </a:r>
             <a:endParaRPr lang="en-US" sz="900" dirty="0"/>
           </a:p>
@@ -10557,7 +10557,7 @@
                 <a:ea typeface="Arial" pitchFamily="34" charset="-122"/>
                 <a:cs typeface="Arial" pitchFamily="34" charset="-120"/>
               </a:rPr>
-              <a:t>「最寄りの駅は大鳥居駅です」</a:t>
+              <a:t>「Location n」</a:t>
             </a:r>
             <a:endParaRPr lang="en-US" sz="900" dirty="0"/>
           </a:p>
@@ -10741,7 +10741,7 @@
                 <a:ea typeface="Arial" pitchFamily="34" charset="-122"/>
                 <a:cs typeface="Arial" pitchFamily="34" charset="-120"/>
               </a:rPr>
-              <a:t>何か質問があれば、スタッフが対応してくれます</a:t>
+              <a:t>スタッフが常時いるのではなく、電話でやりとりするスタイル</a:t>
             </a:r>
             <a:endParaRPr lang="en-US" sz="900" dirty="0"/>
           </a:p>
@@ -10780,7 +10780,7 @@
                 <a:ea typeface="Arial" pitchFamily="34" charset="-122"/>
                 <a:cs typeface="Arial" pitchFamily="34" charset="-120"/>
               </a:rPr>
-              <a:t>「フロントが無人で聞きたいことが聞けないのが残念でした」</a:t>
+              <a:t>「何か質問があれば、スタッフが対応してくれます」</a:t>
             </a:r>
             <a:endParaRPr lang="en-US" sz="900" dirty="0"/>
           </a:p>
@@ -11187,7 +11187,7 @@
                 <a:ea typeface="Arial" pitchFamily="34" charset="-122"/>
                 <a:cs typeface="Arial" pitchFamily="34" charset="-120"/>
               </a:rPr>
-              <a:t>部屋は清潔で整頓されており、アメニティは写真の通りです</a:t>
+              <a:t>ベッドは快適ではなかった</a:t>
             </a:r>
             <a:endParaRPr lang="en-US" sz="900" dirty="0"/>
           </a:p>
@@ -11226,7 +11226,7 @@
                 <a:ea typeface="Arial" pitchFamily="34" charset="-122"/>
                 <a:cs typeface="Arial" pitchFamily="34" charset="-120"/>
               </a:rPr>
-              <a:t>「設備も部屋も新しくきれいだったので、機会があればまた利用したいです」</a:t>
+              <a:t>「部屋は清潔で整頓されており、アメニティは写真の通りです」</a:t>
             </a:r>
             <a:endParaRPr lang="en-US" sz="900" dirty="0"/>
           </a:p>
@@ -12362,7 +12362,7 @@
                           <a:ea typeface="Arial" pitchFamily="34" charset="-122"/>
                           <a:cs typeface="Arial" pitchFamily="34" charset="-120"/>
                         </a:rPr>
-                        <a:t>羽田空港に近いのは大きな利点で、無料シャトルバスサービスがあり、車で約15分です</a:t>
+                        <a:t>荷物が複数個ある場合や、大きな荷物をお持ちの場合は、シャトルバスの手配を拒否されるため、ここに宿泊しないでください</a:t>
                       </a:r>
                       <a:endParaRPr lang="en-US" sz="900" dirty="0">
                         <a:latin typeface="Arial" charset="0"/>
@@ -12430,7 +12430,7 @@
                           <a:ea typeface="Arial" pitchFamily="34" charset="-122"/>
                           <a:cs typeface="Arial" pitchFamily="34" charset="-120"/>
                         </a:rPr>
-                        <a:t>60件</a:t>
+                        <a:t>61件</a:t>
                       </a:r>
                       <a:endParaRPr lang="en-US" sz="900" dirty="0">
                         <a:latin typeface="Arial" charset="0"/>

--- a/納品レポート/ホテル別レポート/henn_na_haneda_口コミ分析レポート.pptx
+++ b/納品レポート/ホテル別レポート/henn_na_haneda_口コミ分析レポート.pptx
@@ -2818,7 +2818,7 @@
                 <a:ea typeface="Arial" pitchFamily="34" charset="-122"/>
                 <a:cs typeface="Arial" pitchFamily="34" charset="-120"/>
               </a:rPr>
-              <a:t>作成日：2026年4月7日</a:t>
+              <a:t>作成日：2026年4月8日</a:t>
             </a:r>
             <a:endParaRPr lang="en-US" sz="1000" dirty="0"/>
           </a:p>

--- a/納品レポート/ホテル別レポート/henn_na_haneda_口コミ分析レポート.pptx
+++ b/納品レポート/ホテル別レポート/henn_na_haneda_口コミ分析レポート.pptx
@@ -2818,7 +2818,7 @@
                 <a:ea typeface="Arial" pitchFamily="34" charset="-122"/>
                 <a:cs typeface="Arial" pitchFamily="34" charset="-120"/>
               </a:rPr>
-              <a:t>作成日：2026年4月10日</a:t>
+              <a:t>作成日：2026年4月11日</a:t>
             </a:r>
             <a:endParaRPr lang="en-US" sz="1000" dirty="0"/>
           </a:p>

--- a/納品レポート/ホテル別レポート/henn_na_haneda_口コミ分析レポート.pptx
+++ b/納品レポート/ホテル別レポート/henn_na_haneda_口コミ分析レポート.pptx
@@ -2818,7 +2818,7 @@
                 <a:ea typeface="Arial" pitchFamily="34" charset="-122"/>
                 <a:cs typeface="Arial" pitchFamily="34" charset="-120"/>
               </a:rPr>
-              <a:t>作成日：2026年4月11日</a:t>
+              <a:t>作成日：2026年4月13日</a:t>
             </a:r>
             <a:endParaRPr lang="en-US" sz="1000" dirty="0"/>
           </a:p>

--- a/納品レポート/ホテル別レポート/henn_na_haneda_口コミ分析レポート.pptx
+++ b/納品レポート/ホテル別レポート/henn_na_haneda_口コミ分析レポート.pptx
@@ -2818,7 +2818,7 @@
                 <a:ea typeface="Arial" pitchFamily="34" charset="-122"/>
                 <a:cs typeface="Arial" pitchFamily="34" charset="-120"/>
               </a:rPr>
-              <a:t>作成日：2026年4月13日</a:t>
+              <a:t>作成日：2026年4月15日</a:t>
             </a:r>
             <a:endParaRPr lang="en-US" sz="1000" dirty="0"/>
           </a:p>

--- a/納品レポート/ホテル別レポート/henn_na_haneda_口コミ分析レポート.pptx
+++ b/納品レポート/ホテル別レポート/henn_na_haneda_口コミ分析レポート.pptx
@@ -2818,7 +2818,7 @@
                 <a:ea typeface="Arial" pitchFamily="34" charset="-122"/>
                 <a:cs typeface="Arial" pitchFamily="34" charset="-120"/>
               </a:rPr>
-              <a:t>作成日：2026年4月16日</a:t>
+              <a:t>作成日：2026年4月20日</a:t>
             </a:r>
             <a:endParaRPr lang="en-US" sz="1000" dirty="0"/>
           </a:p>

--- a/納品レポート/ホテル別レポート/henn_na_haneda_口コミ分析レポート.pptx
+++ b/納品レポート/ホテル別レポート/henn_na_haneda_口コミ分析レポート.pptx
@@ -2736,7 +2736,7 @@
                 <a:ea typeface="Arial" pitchFamily="34" charset="-122"/>
                 <a:cs typeface="Arial" pitchFamily="34" charset="-120"/>
               </a:rPr>
-              <a:t>変なホテル東京羽田</a:t>
+              <a:t>変なホテル羽田空港</a:t>
             </a:r>
             <a:endParaRPr lang="en-US" sz="1600" dirty="0"/>
           </a:p>
@@ -2818,7 +2818,7 @@
                 <a:ea typeface="Arial" pitchFamily="34" charset="-122"/>
                 <a:cs typeface="Arial" pitchFamily="34" charset="-120"/>
               </a:rPr>
-              <a:t>作成日：2026年4月20日</a:t>
+              <a:t>作成日：2026年4月21日</a:t>
             </a:r>
             <a:endParaRPr lang="en-US" sz="1000" dirty="0"/>
           </a:p>

--- a/納品レポート/ホテル別レポート/henn_na_haneda_口コミ分析レポート.pptx
+++ b/納品レポート/ホテル別レポート/henn_na_haneda_口コミ分析レポート.pptx
@@ -2736,7 +2736,7 @@
                 <a:ea typeface="Arial" pitchFamily="34" charset="-122"/>
                 <a:cs typeface="Arial" pitchFamily="34" charset="-120"/>
               </a:rPr>
-              <a:t>変なホテル羽田空港</a:t>
+              <a:t>変なホテル東京羽田</a:t>
             </a:r>
             <a:endParaRPr lang="en-US" sz="1600" dirty="0"/>
           </a:p>
@@ -2818,7 +2818,7 @@
                 <a:ea typeface="Arial" pitchFamily="34" charset="-122"/>
                 <a:cs typeface="Arial" pitchFamily="34" charset="-120"/>
               </a:rPr>
-              <a:t>作成日：2026年4月21日</a:t>
+              <a:t>作成日：2026年4月22日</a:t>
             </a:r>
             <a:endParaRPr lang="en-US" sz="1000" dirty="0"/>
           </a:p>
